--- a/blocks/D_sensors/M14_imu_sensor/M14_IMU_Sensor.pptx
+++ b/blocks/D_sensors/M14_imu_sensor/M14_IMU_Sensor.pptx
@@ -46,6 +46,10 @@
     <p:sldId id="294" r:id="rId46"/>
     <p:sldId id="295" r:id="rId47"/>
     <p:sldId id="296" r:id="rId48"/>
+    <p:sldId id="297" r:id="rId49"/>
+    <p:sldId id="298" r:id="rId50"/>
+    <p:sldId id="299" r:id="rId51"/>
+    <p:sldId id="300" r:id="rId52"/>
   </p:sldIdLst>
   <p:sldSz cx="12191999" cy="6858000" type="screen4x3"/>
   <p:notesSz cx="6858000" cy="9144000"/>
@@ -632,7 +636,7 @@
           <a:lstStyle/>
           <a:p>
             <a:r>
-              <a:t>[설명] ~/agv_ws/src/agv_gazebo/models/agv/model.sdf의 전체 파일을 2/21 구간으로 작성한다.</a:t>
+              <a:t>[설명] ~/agv_ws/src/agv_gazebo/models/agv/model.sdf의 전체 파일을 2/24 구간으로 작성한다.</a:t>
             </a:r>
           </a:p>
           <a:p>
@@ -722,7 +726,7 @@
           <a:lstStyle/>
           <a:p>
             <a:r>
-              <a:t>[설명] ~/agv_ws/src/agv_gazebo/models/agv/model.sdf의 전체 파일을 3/21 구간으로 작성한다.</a:t>
+              <a:t>[설명] ~/agv_ws/src/agv_gazebo/models/agv/model.sdf의 전체 파일을 3/24 구간으로 작성한다.</a:t>
             </a:r>
           </a:p>
           <a:p>
@@ -812,7 +816,7 @@
           <a:lstStyle/>
           <a:p>
             <a:r>
-              <a:t>[설명] ~/agv_ws/src/agv_gazebo/models/agv/model.sdf의 전체 파일을 4/21 구간으로 작성한다.</a:t>
+              <a:t>[설명] ~/agv_ws/src/agv_gazebo/models/agv/model.sdf의 전체 파일을 4/24 구간으로 작성한다.</a:t>
             </a:r>
           </a:p>
           <a:p>
@@ -902,7 +906,7 @@
           <a:lstStyle/>
           <a:p>
             <a:r>
-              <a:t>[설명] ~/agv_ws/src/agv_gazebo/models/agv/model.sdf의 전체 파일을 5/21 구간으로 작성한다.</a:t>
+              <a:t>[설명] ~/agv_ws/src/agv_gazebo/models/agv/model.sdf의 전체 파일을 5/24 구간으로 작성한다.</a:t>
             </a:r>
           </a:p>
           <a:p>
@@ -992,7 +996,7 @@
           <a:lstStyle/>
           <a:p>
             <a:r>
-              <a:t>[설명] ~/agv_ws/src/agv_gazebo/models/agv/model.sdf의 전체 파일을 6/21 구간으로 작성한다.</a:t>
+              <a:t>[설명] ~/agv_ws/src/agv_gazebo/models/agv/model.sdf의 전체 파일을 6/24 구간으로 작성한다.</a:t>
             </a:r>
           </a:p>
           <a:p>
@@ -1082,7 +1086,7 @@
           <a:lstStyle/>
           <a:p>
             <a:r>
-              <a:t>[설명] ~/agv_ws/src/agv_gazebo/models/agv/model.sdf의 전체 파일을 7/21 구간으로 작성한다.</a:t>
+              <a:t>[설명] ~/agv_ws/src/agv_gazebo/models/agv/model.sdf의 전체 파일을 7/24 구간으로 작성한다.</a:t>
             </a:r>
           </a:p>
           <a:p>
@@ -1172,7 +1176,7 @@
           <a:lstStyle/>
           <a:p>
             <a:r>
-              <a:t>[설명] ~/agv_ws/src/agv_gazebo/models/agv/model.sdf의 전체 파일을 8/21 구간으로 작성한다.</a:t>
+              <a:t>[설명] ~/agv_ws/src/agv_gazebo/models/agv/model.sdf의 전체 파일을 8/24 구간으로 작성한다.</a:t>
             </a:r>
           </a:p>
           <a:p>
@@ -1262,7 +1266,7 @@
           <a:lstStyle/>
           <a:p>
             <a:r>
-              <a:t>[설명] ~/agv_ws/src/agv_gazebo/models/agv/model.sdf의 전체 파일을 9/21 구간으로 작성한다.</a:t>
+              <a:t>[설명] ~/agv_ws/src/agv_gazebo/models/agv/model.sdf의 전체 파일을 9/24 구간으로 작성한다.</a:t>
             </a:r>
           </a:p>
           <a:p>
@@ -1352,7 +1356,7 @@
           <a:lstStyle/>
           <a:p>
             <a:r>
-              <a:t>[설명] ~/agv_ws/src/agv_gazebo/models/agv/model.sdf의 전체 파일을 10/21 구간으로 작성한다.</a:t>
+              <a:t>[설명] ~/agv_ws/src/agv_gazebo/models/agv/model.sdf의 전체 파일을 10/24 구간으로 작성한다.</a:t>
             </a:r>
           </a:p>
           <a:p>
@@ -1442,7 +1446,7 @@
           <a:lstStyle/>
           <a:p>
             <a:r>
-              <a:t>[설명] ~/agv_ws/src/agv_gazebo/models/agv/model.sdf의 전체 파일을 11/21 구간으로 작성한다.</a:t>
+              <a:t>[설명] ~/agv_ws/src/agv_gazebo/models/agv/model.sdf의 전체 파일을 11/24 구간으로 작성한다.</a:t>
             </a:r>
           </a:p>
           <a:p>
@@ -1622,7 +1626,7 @@
           <a:lstStyle/>
           <a:p>
             <a:r>
-              <a:t>[설명] ~/agv_ws/src/agv_gazebo/models/agv/model.sdf의 전체 파일을 12/21 구간으로 작성한다.</a:t>
+              <a:t>[설명] ~/agv_ws/src/agv_gazebo/models/agv/model.sdf의 전체 파일을 12/24 구간으로 작성한다.</a:t>
             </a:r>
           </a:p>
           <a:p>
@@ -1712,7 +1716,7 @@
           <a:lstStyle/>
           <a:p>
             <a:r>
-              <a:t>[설명] ~/agv_ws/src/agv_gazebo/models/agv/model.sdf의 전체 파일을 13/21 구간으로 작성한다.</a:t>
+              <a:t>[설명] ~/agv_ws/src/agv_gazebo/models/agv/model.sdf의 전체 파일을 13/24 구간으로 작성한다.</a:t>
             </a:r>
           </a:p>
           <a:p>
@@ -1802,7 +1806,7 @@
           <a:lstStyle/>
           <a:p>
             <a:r>
-              <a:t>[설명] ~/agv_ws/src/agv_gazebo/models/agv/model.sdf의 전체 파일을 14/21 구간으로 작성한다.</a:t>
+              <a:t>[설명] ~/agv_ws/src/agv_gazebo/models/agv/model.sdf의 전체 파일을 14/24 구간으로 작성한다.</a:t>
             </a:r>
           </a:p>
           <a:p>
@@ -1892,7 +1896,7 @@
           <a:lstStyle/>
           <a:p>
             <a:r>
-              <a:t>[설명] ~/agv_ws/src/agv_gazebo/models/agv/model.sdf의 전체 파일을 15/21 구간으로 작성한다.</a:t>
+              <a:t>[설명] ~/agv_ws/src/agv_gazebo/models/agv/model.sdf의 전체 파일을 15/24 구간으로 작성한다.</a:t>
             </a:r>
           </a:p>
           <a:p>
@@ -1982,7 +1986,7 @@
           <a:lstStyle/>
           <a:p>
             <a:r>
-              <a:t>[설명] ~/agv_ws/src/agv_gazebo/models/agv/model.sdf의 전체 파일을 16/21 구간으로 작성한다.</a:t>
+              <a:t>[설명] ~/agv_ws/src/agv_gazebo/models/agv/model.sdf의 전체 파일을 16/24 구간으로 작성한다.</a:t>
             </a:r>
           </a:p>
           <a:p>
@@ -2072,7 +2076,7 @@
           <a:lstStyle/>
           <a:p>
             <a:r>
-              <a:t>[설명] ~/agv_ws/src/agv_gazebo/models/agv/model.sdf의 전체 파일을 17/21 구간으로 작성한다.</a:t>
+              <a:t>[설명] ~/agv_ws/src/agv_gazebo/models/agv/model.sdf의 전체 파일을 17/24 구간으로 작성한다.</a:t>
             </a:r>
           </a:p>
           <a:p>
@@ -2162,7 +2166,7 @@
           <a:lstStyle/>
           <a:p>
             <a:r>
-              <a:t>[설명] ~/agv_ws/src/agv_gazebo/models/agv/model.sdf의 전체 파일을 18/21 구간으로 작성한다.</a:t>
+              <a:t>[설명] ~/agv_ws/src/agv_gazebo/models/agv/model.sdf의 전체 파일을 18/24 구간으로 작성한다.</a:t>
             </a:r>
           </a:p>
           <a:p>
@@ -2252,7 +2256,7 @@
           <a:lstStyle/>
           <a:p>
             <a:r>
-              <a:t>[설명] ~/agv_ws/src/agv_gazebo/models/agv/model.sdf의 전체 파일을 19/21 구간으로 작성한다.</a:t>
+              <a:t>[설명] ~/agv_ws/src/agv_gazebo/models/agv/model.sdf의 전체 파일을 19/24 구간으로 작성한다.</a:t>
             </a:r>
           </a:p>
           <a:p>
@@ -2342,7 +2346,7 @@
           <a:lstStyle/>
           <a:p>
             <a:r>
-              <a:t>[설명] ~/agv_ws/src/agv_gazebo/models/agv/model.sdf의 전체 파일을 20/21 구간으로 작성한다.</a:t>
+              <a:t>[설명] ~/agv_ws/src/agv_gazebo/models/agv/model.sdf의 전체 파일을 20/24 구간으로 작성한다.</a:t>
             </a:r>
           </a:p>
           <a:p>
@@ -2432,7 +2436,7 @@
           <a:lstStyle/>
           <a:p>
             <a:r>
-              <a:t>[설명] ~/agv_ws/src/agv_gazebo/models/agv/model.sdf의 전체 파일을 21/21 구간으로 작성한다.</a:t>
+              <a:t>[설명] ~/agv_ws/src/agv_gazebo/models/agv/model.sdf의 전체 파일을 21/24 구간으로 작성한다.</a:t>
             </a:r>
           </a:p>
           <a:p>
@@ -2612,12 +2616,12 @@
           <a:lstStyle/>
           <a:p>
             <a:r>
-              <a:t>[설명] ~/agv_ws/src/agv_gazebo/config/bridge.yaml의 전체 파일을 1/3 구간으로 작성한다.</a:t>
-            </a:r>
-          </a:p>
-          <a:p>
-            <a:r>
-              <a:t>[실행] nano ~/agv_ws/src/agv_gazebo/config/bridge.yaml</a:t>
+              <a:t>[설명] ~/agv_ws/src/agv_gazebo/models/agv/model.sdf의 전체 파일을 22/24 구간으로 작성한다.</a:t>
+            </a:r>
+          </a:p>
+          <a:p>
+            <a:r>
+              <a:t>[실행] nano ~/agv_ws/src/agv_gazebo/models/agv/model.sdf</a:t>
             </a:r>
           </a:p>
           <a:p>
@@ -2702,12 +2706,12 @@
           <a:lstStyle/>
           <a:p>
             <a:r>
-              <a:t>[설명] ~/agv_ws/src/agv_gazebo/config/bridge.yaml의 전체 파일을 2/3 구간으로 작성한다.</a:t>
-            </a:r>
-          </a:p>
-          <a:p>
-            <a:r>
-              <a:t>[실행] nano ~/agv_ws/src/agv_gazebo/config/bridge.yaml</a:t>
+              <a:t>[설명] ~/agv_ws/src/agv_gazebo/models/agv/model.sdf의 전체 파일을 23/24 구간으로 작성한다.</a:t>
+            </a:r>
+          </a:p>
+          <a:p>
+            <a:r>
+              <a:t>[실행] nano ~/agv_ws/src/agv_gazebo/models/agv/model.sdf</a:t>
             </a:r>
           </a:p>
           <a:p>
@@ -2792,12 +2796,12 @@
           <a:lstStyle/>
           <a:p>
             <a:r>
-              <a:t>[설명] ~/agv_ws/src/agv_gazebo/config/bridge.yaml의 전체 파일을 3/3 구간으로 작성한다.</a:t>
-            </a:r>
-          </a:p>
-          <a:p>
-            <a:r>
-              <a:t>[실행] nano ~/agv_ws/src/agv_gazebo/config/bridge.yaml</a:t>
+              <a:t>[설명] ~/agv_ws/src/agv_gazebo/models/agv/model.sdf의 전체 파일을 24/24 구간으로 작성한다.</a:t>
+            </a:r>
+          </a:p>
+          <a:p>
+            <a:r>
+              <a:t>[실행] nano ~/agv_ws/src/agv_gazebo/models/agv/model.sdf</a:t>
             </a:r>
           </a:p>
           <a:p>
@@ -2882,12 +2886,12 @@
           <a:lstStyle/>
           <a:p>
             <a:r>
-              <a:t>[설명] ~/agv_ws/src/agv_sensors/agv_sensors/imu_monitor.py의 전체 파일을 1/2 구간으로 작성한다.</a:t>
-            </a:r>
-          </a:p>
-          <a:p>
-            <a:r>
-              <a:t>[실행] nano ~/agv_ws/src/agv_sensors/agv_sensors/imu_monitor.py</a:t>
+              <a:t>[설명] ~/agv_ws/src/agv_gazebo/config/bridge.yaml의 전체 파일을 1/3 구간으로 작성한다.</a:t>
+            </a:r>
+          </a:p>
+          <a:p>
+            <a:r>
+              <a:t>[실행] nano ~/agv_ws/src/agv_gazebo/config/bridge.yaml</a:t>
             </a:r>
           </a:p>
           <a:p>
@@ -2972,12 +2976,12 @@
           <a:lstStyle/>
           <a:p>
             <a:r>
-              <a:t>[설명] ~/agv_ws/src/agv_sensors/agv_sensors/imu_monitor.py의 전체 파일을 2/2 구간으로 작성한다.</a:t>
-            </a:r>
-          </a:p>
-          <a:p>
-            <a:r>
-              <a:t>[실행] nano ~/agv_ws/src/agv_sensors/agv_sensors/imu_monitor.py</a:t>
+              <a:t>[설명] ~/agv_ws/src/agv_gazebo/config/bridge.yaml의 전체 파일을 2/3 구간으로 작성한다.</a:t>
+            </a:r>
+          </a:p>
+          <a:p>
+            <a:r>
+              <a:t>[실행] nano ~/agv_ws/src/agv_gazebo/config/bridge.yaml</a:t>
             </a:r>
           </a:p>
           <a:p>
@@ -3062,22 +3066,17 @@
           <a:lstStyle/>
           <a:p>
             <a:r>
-              <a:t>[설명] build/source/run을 생략 없이 실행한다.</a:t>
-            </a:r>
-          </a:p>
-          <a:p>
-            <a:r>
-              <a:t>[실행] ros2 launch agv_bringup agv_sim.launch.py rviz:=false</a:t>
-            </a:r>
-          </a:p>
-          <a:p>
-            <a:r>
-              <a:t># 새 터미널: ros2 run agv_sensors imu_monitor</a:t>
-            </a:r>
-          </a:p>
-          <a:p>
-            <a:r>
-              <a:t>[확인] /imu/data의 z축 gyro 값과 noise 설정을 terminal에서 확인한다.</a:t>
+              <a:t>[설명] ~/agv_ws/src/agv_gazebo/config/bridge.yaml의 전체 파일을 3/3 구간으로 작성한다.</a:t>
+            </a:r>
+          </a:p>
+          <a:p>
+            <a:r>
+              <a:t>[실행] nano ~/agv_ws/src/agv_gazebo/config/bridge.yaml</a:t>
+            </a:r>
+          </a:p>
+          <a:p>
+            <a:r>
+              <a:t>[확인] 코드를 저장하고 다음 코드 슬라이드 또는 build 단계로 이동한다.</a:t>
             </a:r>
           </a:p>
           <a:p>
@@ -3087,7 +3086,7 @@
           </a:p>
           <a:p>
             <a:r>
-              <a:t>[오류] 오류가 나면 현재 폴더, source, 파일 경로를 먼저 확인한다.</a:t>
+              <a:t>[오류] 들여쓰기·XML 태그·따옴표가 슬라이드와 정확히 같은지 확인한다.</a:t>
             </a:r>
           </a:p>
         </p:txBody>
@@ -3157,17 +3156,17 @@
           <a:lstStyle/>
           <a:p>
             <a:r>
-              <a:t>[설명] 실제 Ubuntu/ROS 2 환경에서 생성한 검증 화면이다.</a:t>
-            </a:r>
-          </a:p>
-          <a:p>
-            <a:r>
-              <a:t>[실행] 슬라이드의 명령 또는 파일 작성 단계를 진행한다.</a:t>
-            </a:r>
-          </a:p>
-          <a:p>
-            <a:r>
-              <a:t>[확인] 캡처의 명령과 다음 슬라이드의 검증 명령을 비교한다.</a:t>
+              <a:t>[설명] ~/agv_ws/src/agv_sensors/agv_sensors/imu_monitor.py의 전체 파일을 1/3 구간으로 작성한다.</a:t>
+            </a:r>
+          </a:p>
+          <a:p>
+            <a:r>
+              <a:t>[실행] nano ~/agv_ws/src/agv_sensors/agv_sensors/imu_monitor.py</a:t>
+            </a:r>
+          </a:p>
+          <a:p>
+            <a:r>
+              <a:t>[확인] 코드를 저장하고 다음 코드 슬라이드 또는 build 단계로 이동한다.</a:t>
             </a:r>
           </a:p>
           <a:p>
@@ -3177,7 +3176,7 @@
           </a:p>
           <a:p>
             <a:r>
-              <a:t>[오류] 오류가 나면 현재 폴더, source, 파일 경로를 먼저 확인한다.</a:t>
+              <a:t>[오류] 들여쓰기·XML 태그·따옴표가 슬라이드와 정확히 같은지 확인한다.</a:t>
             </a:r>
           </a:p>
         </p:txBody>
@@ -3247,27 +3246,17 @@
           <a:lstStyle/>
           <a:p>
             <a:r>
-              <a:t>[설명] 검증 명령은 GUI 결과와 별도로 실행해 재현 가능한 완료 기준을 만든다.</a:t>
-            </a:r>
-          </a:p>
-          <a:p>
-            <a:r>
-              <a:t>[실행] ros2 topic info /imu/data</a:t>
-            </a:r>
-          </a:p>
-          <a:p>
-            <a:r>
-              <a:t>ros2 topic hz /imu/data</a:t>
-            </a:r>
-          </a:p>
-          <a:p>
-            <a:r>
-              <a:t>ros2 topic echo /imu/data --once</a:t>
-            </a:r>
-          </a:p>
-          <a:p>
-            <a:r>
-              <a:t>[확인] /imu/data의 z축 gyro 값과 noise 설정을 terminal에서 확인한다.</a:t>
+              <a:t>[설명] ~/agv_ws/src/agv_sensors/agv_sensors/imu_monitor.py의 전체 파일을 2/3 구간으로 작성한다.</a:t>
+            </a:r>
+          </a:p>
+          <a:p>
+            <a:r>
+              <a:t>[실행] nano ~/agv_ws/src/agv_sensors/agv_sensors/imu_monitor.py</a:t>
+            </a:r>
+          </a:p>
+          <a:p>
+            <a:r>
+              <a:t>[확인] 코드를 저장하고 다음 코드 슬라이드 또는 build 단계로 이동한다.</a:t>
             </a:r>
           </a:p>
           <a:p>
@@ -3277,7 +3266,7 @@
           </a:p>
           <a:p>
             <a:r>
-              <a:t>[오류] 오류가 나면 현재 폴더, source, 파일 경로를 먼저 확인한다.</a:t>
+              <a:t>[오류] 들여쓰기·XML 태그·따옴표가 슬라이드와 정확히 같은지 확인한다.</a:t>
             </a:r>
           </a:p>
         </p:txBody>
@@ -3347,17 +3336,17 @@
           <a:lstStyle/>
           <a:p>
             <a:r>
-              <a:t>[설명] 오류를 대신 해결하지 말고 증상부터 우선 확인 순서대로 교육생이 실행하게 한다.</a:t>
-            </a:r>
-          </a:p>
-          <a:p>
-            <a:r>
-              <a:t>[실행] 슬라이드의 명령 또는 파일 작성 단계를 진행한다.</a:t>
-            </a:r>
-          </a:p>
-          <a:p>
-            <a:r>
-              <a:t>[확인] 수정 뒤 첫 검증 명령을 다시 실행한다.</a:t>
+              <a:t>[설명] ~/agv_ws/src/agv_sensors/agv_sensors/imu_monitor.py의 전체 파일을 3/3 구간으로 작성한다.</a:t>
+            </a:r>
+          </a:p>
+          <a:p>
+            <a:r>
+              <a:t>[실행] nano ~/agv_ws/src/agv_sensors/agv_sensors/imu_monitor.py</a:t>
+            </a:r>
+          </a:p>
+          <a:p>
+            <a:r>
+              <a:t>[확인] 코드를 저장하고 다음 코드 슬라이드 또는 build 단계로 이동한다.</a:t>
             </a:r>
           </a:p>
           <a:p>
@@ -3367,7 +3356,7 @@
           </a:p>
           <a:p>
             <a:r>
-              <a:t>[오류] 슬라이드의 두 대표 오류를 먼저 사용한다.</a:t>
+              <a:t>[오류] 들여쓰기·XML 태그·따옴표가 슬라이드와 정확히 같은지 확인한다.</a:t>
             </a:r>
           </a:p>
         </p:txBody>
@@ -3437,17 +3426,22 @@
           <a:lstStyle/>
           <a:p>
             <a:r>
-              <a:t>[설명] 교육생이 직접 한 값만 바꿔 원인과 결과를 연결하게 한다.</a:t>
-            </a:r>
-          </a:p>
-          <a:p>
-            <a:r>
-              <a:t>[실행] 슬라이드의 명령 또는 파일 작성 단계를 진행한다.</a:t>
-            </a:r>
-          </a:p>
-          <a:p>
-            <a:r>
-              <a:t>[확인] 원래 값과 변경 값을 모두 기록한다.</a:t>
+              <a:t>[설명] build/source/run을 생략 없이 실행한다.</a:t>
+            </a:r>
+          </a:p>
+          <a:p>
+            <a:r>
+              <a:t>[실행] ros2 launch agv_bringup agv_sim.launch.py rviz:=false</a:t>
+            </a:r>
+          </a:p>
+          <a:p>
+            <a:r>
+              <a:t># 새 터미널: ros2 run agv_sensors imu_monitor</a:t>
+            </a:r>
+          </a:p>
+          <a:p>
+            <a:r>
+              <a:t>[확인] /imu/data의 z축 gyro 값과 noise 설정을 terminal에서 확인한다.</a:t>
             </a:r>
           </a:p>
           <a:p>
@@ -3617,7 +3611,7 @@
           <a:lstStyle/>
           <a:p>
             <a:r>
-              <a:t>[설명] 교육생이 Complete·캡처·로그를 저장했는지 확인하고 다음 모듈의 시작 상태를 읽는다.</a:t>
+              <a:t>[설명] 실제 Ubuntu/ROS 2 환경에서 생성한 검증 화면이다.</a:t>
             </a:r>
           </a:p>
           <a:p>
@@ -3627,7 +3621,7 @@
           </a:p>
           <a:p>
             <a:r>
-              <a:t>[확인] M15 운영/QoS 시작 조건을 말할 수 있다.</a:t>
+              <a:t>[확인] 캡처의 명령과 다음 슬라이드의 검증 명령을 비교한다.</a:t>
             </a:r>
           </a:p>
           <a:p>
@@ -3707,6 +3701,376 @@
           <a:lstStyle/>
           <a:p>
             <a:r>
+              <a:t>[설명] 검증 명령은 GUI 결과와 별도로 실행해 재현 가능한 완료 기준을 만든다.</a:t>
+            </a:r>
+          </a:p>
+          <a:p>
+            <a:r>
+              <a:t>[실행] ros2 topic info /imu/data</a:t>
+            </a:r>
+          </a:p>
+          <a:p>
+            <a:r>
+              <a:t>ros2 topic hz /imu/data</a:t>
+            </a:r>
+          </a:p>
+          <a:p>
+            <a:r>
+              <a:t>ros2 topic echo /imu/data --once</a:t>
+            </a:r>
+          </a:p>
+          <a:p>
+            <a:r>
+              <a:t>[확인] /imu/data의 z축 gyro 값과 noise 설정을 terminal에서 확인한다.</a:t>
+            </a:r>
+          </a:p>
+          <a:p>
+            <a:r>
+              <a:t>[멈춤] 교육생이 현재 체크포인트를 통과할 때까지 기다린다.</a:t>
+            </a:r>
+          </a:p>
+          <a:p>
+            <a:r>
+              <a:t>[오류] 오류가 나면 현재 폴더, source, 파일 경로를 먼저 확인한다.</a:t>
+            </a:r>
+          </a:p>
+        </p:txBody>
+      </p:sp>
+      <p:sp>
+        <p:nvSpPr>
+          <p:cNvPr id="4" name="Slide Number Placeholder 3"/>
+          <p:cNvSpPr>
+            <a:spLocks noGrp="1"/>
+          </p:cNvSpPr>
+          <p:nvPr>
+            <p:ph type="sldNum" idx="5" sz="quarter"/>
+          </p:nvPr>
+        </p:nvSpPr>
+        <p:spPr/>
+      </p:sp>
+    </p:spTree>
+  </p:cSld>
+  <p:clrMapOvr>
+    <a:masterClrMapping/>
+  </p:clrMapOvr>
+</p:notes>
+</file>
+
+<file path=ppt/notesSlides/notesSlide42.xml><?xml version="1.0" encoding="utf-8"?>
+<p:notes xmlns:a="http://schemas.openxmlformats.org/drawingml/2006/main" xmlns:p="http://schemas.openxmlformats.org/presentationml/2006/main" xmlns:r="http://schemas.openxmlformats.org/officeDocument/2006/relationships">
+  <p:cSld>
+    <p:spTree>
+      <p:nvGrpSpPr>
+        <p:cNvPr id="1" name=""/>
+        <p:cNvGrpSpPr/>
+        <p:nvPr/>
+      </p:nvGrpSpPr>
+      <p:grpSpPr>
+        <a:xfrm>
+          <a:off x="0" y="0"/>
+          <a:ext cx="0" cy="0"/>
+          <a:chOff x="0" y="0"/>
+          <a:chExt cx="0" cy="0"/>
+        </a:xfrm>
+      </p:grpSpPr>
+      <p:sp>
+        <p:nvSpPr>
+          <p:cNvPr id="2" name="Slide Image Placeholder 1"/>
+          <p:cNvSpPr>
+            <a:spLocks noGrp="1"/>
+          </p:cNvSpPr>
+          <p:nvPr>
+            <p:ph type="sldImg" idx="2"/>
+          </p:nvPr>
+        </p:nvSpPr>
+        <p:spPr/>
+      </p:sp>
+      <p:sp>
+        <p:nvSpPr>
+          <p:cNvPr id="3" name="Notes Placeholder 2"/>
+          <p:cNvSpPr>
+            <a:spLocks noGrp="1"/>
+          </p:cNvSpPr>
+          <p:nvPr>
+            <p:ph type="body" idx="3" sz="quarter"/>
+          </p:nvPr>
+        </p:nvSpPr>
+        <p:spPr/>
+        <p:txBody>
+          <a:bodyPr/>
+          <a:lstStyle/>
+          <a:p>
+            <a:r>
+              <a:t>[설명] 오류를 대신 해결하지 말고 증상부터 우선 확인 순서대로 교육생이 실행하게 한다.</a:t>
+            </a:r>
+          </a:p>
+          <a:p>
+            <a:r>
+              <a:t>[실행] 슬라이드의 명령 또는 파일 작성 단계를 진행한다.</a:t>
+            </a:r>
+          </a:p>
+          <a:p>
+            <a:r>
+              <a:t>[확인] 수정 뒤 첫 검증 명령을 다시 실행한다.</a:t>
+            </a:r>
+          </a:p>
+          <a:p>
+            <a:r>
+              <a:t>[멈춤] 교육생이 현재 체크포인트를 통과할 때까지 기다린다.</a:t>
+            </a:r>
+          </a:p>
+          <a:p>
+            <a:r>
+              <a:t>[오류] 슬라이드의 두 대표 오류를 먼저 사용한다.</a:t>
+            </a:r>
+          </a:p>
+        </p:txBody>
+      </p:sp>
+      <p:sp>
+        <p:nvSpPr>
+          <p:cNvPr id="4" name="Slide Number Placeholder 3"/>
+          <p:cNvSpPr>
+            <a:spLocks noGrp="1"/>
+          </p:cNvSpPr>
+          <p:nvPr>
+            <p:ph type="sldNum" idx="5" sz="quarter"/>
+          </p:nvPr>
+        </p:nvSpPr>
+        <p:spPr/>
+      </p:sp>
+    </p:spTree>
+  </p:cSld>
+  <p:clrMapOvr>
+    <a:masterClrMapping/>
+  </p:clrMapOvr>
+</p:notes>
+</file>
+
+<file path=ppt/notesSlides/notesSlide43.xml><?xml version="1.0" encoding="utf-8"?>
+<p:notes xmlns:a="http://schemas.openxmlformats.org/drawingml/2006/main" xmlns:p="http://schemas.openxmlformats.org/presentationml/2006/main" xmlns:r="http://schemas.openxmlformats.org/officeDocument/2006/relationships">
+  <p:cSld>
+    <p:spTree>
+      <p:nvGrpSpPr>
+        <p:cNvPr id="1" name=""/>
+        <p:cNvGrpSpPr/>
+        <p:nvPr/>
+      </p:nvGrpSpPr>
+      <p:grpSpPr>
+        <a:xfrm>
+          <a:off x="0" y="0"/>
+          <a:ext cx="0" cy="0"/>
+          <a:chOff x="0" y="0"/>
+          <a:chExt cx="0" cy="0"/>
+        </a:xfrm>
+      </p:grpSpPr>
+      <p:sp>
+        <p:nvSpPr>
+          <p:cNvPr id="2" name="Slide Image Placeholder 1"/>
+          <p:cNvSpPr>
+            <a:spLocks noGrp="1"/>
+          </p:cNvSpPr>
+          <p:nvPr>
+            <p:ph type="sldImg" idx="2"/>
+          </p:nvPr>
+        </p:nvSpPr>
+        <p:spPr/>
+      </p:sp>
+      <p:sp>
+        <p:nvSpPr>
+          <p:cNvPr id="3" name="Notes Placeholder 2"/>
+          <p:cNvSpPr>
+            <a:spLocks noGrp="1"/>
+          </p:cNvSpPr>
+          <p:nvPr>
+            <p:ph type="body" idx="3" sz="quarter"/>
+          </p:nvPr>
+        </p:nvSpPr>
+        <p:spPr/>
+        <p:txBody>
+          <a:bodyPr/>
+          <a:lstStyle/>
+          <a:p>
+            <a:r>
+              <a:t>[설명] 교육생이 직접 한 값만 바꿔 원인과 결과를 연결하게 한다.</a:t>
+            </a:r>
+          </a:p>
+          <a:p>
+            <a:r>
+              <a:t>[실행] 슬라이드의 명령 또는 파일 작성 단계를 진행한다.</a:t>
+            </a:r>
+          </a:p>
+          <a:p>
+            <a:r>
+              <a:t>[확인] 원래 값과 변경 값을 모두 기록한다.</a:t>
+            </a:r>
+          </a:p>
+          <a:p>
+            <a:r>
+              <a:t>[멈춤] 교육생이 현재 체크포인트를 통과할 때까지 기다린다.</a:t>
+            </a:r>
+          </a:p>
+          <a:p>
+            <a:r>
+              <a:t>[오류] 오류가 나면 현재 폴더, source, 파일 경로를 먼저 확인한다.</a:t>
+            </a:r>
+          </a:p>
+        </p:txBody>
+      </p:sp>
+      <p:sp>
+        <p:nvSpPr>
+          <p:cNvPr id="4" name="Slide Number Placeholder 3"/>
+          <p:cNvSpPr>
+            <a:spLocks noGrp="1"/>
+          </p:cNvSpPr>
+          <p:nvPr>
+            <p:ph type="sldNum" idx="5" sz="quarter"/>
+          </p:nvPr>
+        </p:nvSpPr>
+        <p:spPr/>
+      </p:sp>
+    </p:spTree>
+  </p:cSld>
+  <p:clrMapOvr>
+    <a:masterClrMapping/>
+  </p:clrMapOvr>
+</p:notes>
+</file>
+
+<file path=ppt/notesSlides/notesSlide44.xml><?xml version="1.0" encoding="utf-8"?>
+<p:notes xmlns:a="http://schemas.openxmlformats.org/drawingml/2006/main" xmlns:p="http://schemas.openxmlformats.org/presentationml/2006/main" xmlns:r="http://schemas.openxmlformats.org/officeDocument/2006/relationships">
+  <p:cSld>
+    <p:spTree>
+      <p:nvGrpSpPr>
+        <p:cNvPr id="1" name=""/>
+        <p:cNvGrpSpPr/>
+        <p:nvPr/>
+      </p:nvGrpSpPr>
+      <p:grpSpPr>
+        <a:xfrm>
+          <a:off x="0" y="0"/>
+          <a:ext cx="0" cy="0"/>
+          <a:chOff x="0" y="0"/>
+          <a:chExt cx="0" cy="0"/>
+        </a:xfrm>
+      </p:grpSpPr>
+      <p:sp>
+        <p:nvSpPr>
+          <p:cNvPr id="2" name="Slide Image Placeholder 1"/>
+          <p:cNvSpPr>
+            <a:spLocks noGrp="1"/>
+          </p:cNvSpPr>
+          <p:nvPr>
+            <p:ph type="sldImg" idx="2"/>
+          </p:nvPr>
+        </p:nvSpPr>
+        <p:spPr/>
+      </p:sp>
+      <p:sp>
+        <p:nvSpPr>
+          <p:cNvPr id="3" name="Notes Placeholder 2"/>
+          <p:cNvSpPr>
+            <a:spLocks noGrp="1"/>
+          </p:cNvSpPr>
+          <p:nvPr>
+            <p:ph type="body" idx="3" sz="quarter"/>
+          </p:nvPr>
+        </p:nvSpPr>
+        <p:spPr/>
+        <p:txBody>
+          <a:bodyPr/>
+          <a:lstStyle/>
+          <a:p>
+            <a:r>
+              <a:t>[설명] 교육생이 Complete·캡처·로그를 저장했는지 확인하고 다음 모듈의 시작 상태를 읽는다.</a:t>
+            </a:r>
+          </a:p>
+          <a:p>
+            <a:r>
+              <a:t>[실행] 슬라이드의 명령 또는 파일 작성 단계를 진행한다.</a:t>
+            </a:r>
+          </a:p>
+          <a:p>
+            <a:r>
+              <a:t>[확인] M15 운영/QoS 시작 조건을 말할 수 있다.</a:t>
+            </a:r>
+          </a:p>
+          <a:p>
+            <a:r>
+              <a:t>[멈춤] 교육생이 현재 체크포인트를 통과할 때까지 기다린다.</a:t>
+            </a:r>
+          </a:p>
+          <a:p>
+            <a:r>
+              <a:t>[오류] 오류가 나면 현재 폴더, source, 파일 경로를 먼저 확인한다.</a:t>
+            </a:r>
+          </a:p>
+        </p:txBody>
+      </p:sp>
+      <p:sp>
+        <p:nvSpPr>
+          <p:cNvPr id="4" name="Slide Number Placeholder 3"/>
+          <p:cNvSpPr>
+            <a:spLocks noGrp="1"/>
+          </p:cNvSpPr>
+          <p:nvPr>
+            <p:ph type="sldNum" idx="5" sz="quarter"/>
+          </p:nvPr>
+        </p:nvSpPr>
+        <p:spPr/>
+      </p:sp>
+    </p:spTree>
+  </p:cSld>
+  <p:clrMapOvr>
+    <a:masterClrMapping/>
+  </p:clrMapOvr>
+</p:notes>
+</file>
+
+<file path=ppt/notesSlides/notesSlide45.xml><?xml version="1.0" encoding="utf-8"?>
+<p:notes xmlns:a="http://schemas.openxmlformats.org/drawingml/2006/main" xmlns:p="http://schemas.openxmlformats.org/presentationml/2006/main" xmlns:r="http://schemas.openxmlformats.org/officeDocument/2006/relationships">
+  <p:cSld>
+    <p:spTree>
+      <p:nvGrpSpPr>
+        <p:cNvPr id="1" name=""/>
+        <p:cNvGrpSpPr/>
+        <p:nvPr/>
+      </p:nvGrpSpPr>
+      <p:grpSpPr>
+        <a:xfrm>
+          <a:off x="0" y="0"/>
+          <a:ext cx="0" cy="0"/>
+          <a:chOff x="0" y="0"/>
+          <a:chExt cx="0" cy="0"/>
+        </a:xfrm>
+      </p:grpSpPr>
+      <p:sp>
+        <p:nvSpPr>
+          <p:cNvPr id="2" name="Slide Image Placeholder 1"/>
+          <p:cNvSpPr>
+            <a:spLocks noGrp="1"/>
+          </p:cNvSpPr>
+          <p:nvPr>
+            <p:ph type="sldImg" idx="2"/>
+          </p:nvPr>
+        </p:nvSpPr>
+        <p:spPr/>
+      </p:sp>
+      <p:sp>
+        <p:nvSpPr>
+          <p:cNvPr id="3" name="Notes Placeholder 2"/>
+          <p:cNvSpPr>
+            <a:spLocks noGrp="1"/>
+          </p:cNvSpPr>
+          <p:nvPr>
+            <p:ph type="body" idx="3" sz="quarter"/>
+          </p:nvPr>
+        </p:nvSpPr>
+        <p:spPr/>
+        <p:txBody>
+          <a:bodyPr/>
+          <a:lstStyle/>
+          <a:p>
+            <a:r>
               <a:t>[설명] 공식 문서는 버전 차이와 확장 학습을 확인할 때 사용한다.</a:t>
             </a:r>
           </a:p>
@@ -4167,7 +4531,7 @@
           <a:lstStyle/>
           <a:p>
             <a:r>
-              <a:t>[설명] ~/agv_ws/src/agv_gazebo/models/agv/model.sdf의 전체 파일을 1/21 구간으로 작성한다.</a:t>
+              <a:t>[설명] ~/agv_ws/src/agv_gazebo/models/agv/model.sdf의 전체 파일을 1/24 구간으로 작성한다.</a:t>
             </a:r>
           </a:p>
           <a:p>
@@ -7560,7 +7924,7 @@
               </a:defRPr>
             </a:pPr>
             <a:r>
-              <a:t>파일을 계속 작성하고 저장한다 (2/21)</a:t>
+              <a:t>파일을 계속 작성하고 저장한다 (2/24)</a:t>
             </a:r>
           </a:p>
         </p:txBody>
@@ -7735,7 +8099,7 @@
               </a:defRPr>
             </a:pPr>
             <a:r>
-              <a:t>현재 단계 4/24    |    현재 폴더 ~/agv_ws    |    현재 터미널</a:t>
+              <a:t>현재 단계 4/27    |    현재 폴더 ~/agv_ws    |    현재 터미널</a:t>
             </a:r>
           </a:p>
         </p:txBody>
@@ -7748,8 +8112,8 @@
         </p:nvSpPr>
         <p:spPr>
           <a:xfrm>
-            <a:off x="658368" y="1682496"/>
-            <a:ext cx="10972800" cy="347472"/>
+            <a:off x="658368" y="1627632"/>
+            <a:ext cx="10972800" cy="256032"/>
           </a:xfrm>
           <a:prstGeom prst="rect">
             <a:avLst/>
@@ -7766,7 +8130,7 @@
               <a:spcAft>
                 <a:spcPts val="0"/>
               </a:spcAft>
-              <a:defRPr sz="1700" b="1">
+              <a:defRPr sz="1500" b="1">
                 <a:solidFill>
                   <a:srgbClr val="122C4E"/>
                 </a:solidFill>
@@ -7787,8 +8151,8 @@
         </p:nvSpPr>
         <p:spPr>
           <a:xfrm>
-            <a:off x="658368" y="2103120"/>
-            <a:ext cx="10972800" cy="493776"/>
+            <a:off x="658368" y="1956816"/>
+            <a:ext cx="10972800" cy="603504"/>
           </a:xfrm>
           <a:prstGeom prst="rect">
             <a:avLst/>
@@ -7832,7 +8196,11 @@
               </a:defRPr>
             </a:pPr>
             <a:r>
-              <a:t>파일 생성/열기: mkdir -p ~/agv_ws/src/agv_gazebo/models/agv    &amp;&amp;    nano ~/agv_ws/src/agv_gazebo/models/agv/model.sdf</a:t>
+              <a:t>파일 생성: mkdir -p ~/agv_ws/src/agv_gazebo/models/agv</a:t>
+            </a:r>
+            <a:br/>
+            <a:r>
+              <a:t>파일 열기: nano ~/agv_ws/src/agv_gazebo/models/agv/model.sdf</a:t>
             </a:r>
           </a:p>
         </p:txBody>
@@ -7845,8 +8213,8 @@
         </p:nvSpPr>
         <p:spPr>
           <a:xfrm>
-            <a:off x="658368" y="2761488"/>
-            <a:ext cx="10972800" cy="3383280"/>
+            <a:off x="658368" y="2706624"/>
+            <a:ext cx="10972800" cy="3364992"/>
           </a:xfrm>
           <a:prstGeom prst="rect">
             <a:avLst/>
@@ -7890,6 +8258,14 @@
               </a:defRPr>
             </a:pPr>
             <a:r>
+              <a:t>      </a:t>
+            </a:r>
+            <a:br/>
+            <a:r>
+              <a:t>      &lt;inertial&gt;</a:t>
+            </a:r>
+            <a:br/>
+            <a:r>
               <a:t>        &lt;mass&gt;12.0&lt;/mass&gt;</a:t>
             </a:r>
             <a:br/>
@@ -7927,22 +8303,6 @@
             <a:br/>
             <a:r>
               <a:t>      &lt;visual name="body"&gt;</a:t>
-            </a:r>
-            <a:br/>
-            <a:r>
-              <a:t>        &lt;geometry&gt;</a:t>
-            </a:r>
-            <a:br/>
-            <a:r>
-              <a:t>          &lt;box&gt;</a:t>
-            </a:r>
-            <a:br/>
-            <a:r>
-              <a:t>            &lt;size&gt;0.60 0.42 0.16&lt;/size&gt;</a:t>
-            </a:r>
-            <a:br/>
-            <a:r>
-              <a:t>          &lt;/box&gt;</a:t>
             </a:r>
           </a:p>
         </p:txBody>
@@ -7955,7 +8315,7 @@
         </p:nvSpPr>
         <p:spPr>
           <a:xfrm>
-            <a:off x="749808" y="6199632"/>
+            <a:off x="749808" y="6181344"/>
             <a:ext cx="10789920" cy="201168"/>
           </a:xfrm>
           <a:prstGeom prst="rect">
@@ -7981,7 +8341,7 @@
               </a:defRPr>
             </a:pPr>
             <a:r>
-              <a:t>파일 전체 2/21 · 이 슬라이드 다음에 같은 파일의 나머지 줄이 이어집니다.</a:t>
+              <a:t>파일 전체 2/24 · 이 슬라이드 다음에 같은 파일의 나머지 줄이 이어집니다.</a:t>
             </a:r>
           </a:p>
         </p:txBody>
@@ -8038,7 +8398,7 @@
               </a:defRPr>
             </a:pPr>
             <a:r>
-              <a:t>파일을 계속 작성하고 저장한다 (3/21)</a:t>
+              <a:t>파일을 계속 작성하고 저장한다 (3/24)</a:t>
             </a:r>
           </a:p>
         </p:txBody>
@@ -8213,7 +8573,7 @@
               </a:defRPr>
             </a:pPr>
             <a:r>
-              <a:t>현재 단계 5/24    |    현재 폴더 ~/agv_ws    |    현재 터미널</a:t>
+              <a:t>현재 단계 5/27    |    현재 폴더 ~/agv_ws    |    현재 터미널</a:t>
             </a:r>
           </a:p>
         </p:txBody>
@@ -8226,8 +8586,8 @@
         </p:nvSpPr>
         <p:spPr>
           <a:xfrm>
-            <a:off x="658368" y="1682496"/>
-            <a:ext cx="10972800" cy="347472"/>
+            <a:off x="658368" y="1627632"/>
+            <a:ext cx="10972800" cy="256032"/>
           </a:xfrm>
           <a:prstGeom prst="rect">
             <a:avLst/>
@@ -8244,7 +8604,7 @@
               <a:spcAft>
                 <a:spcPts val="0"/>
               </a:spcAft>
-              <a:defRPr sz="1700" b="1">
+              <a:defRPr sz="1500" b="1">
                 <a:solidFill>
                   <a:srgbClr val="122C4E"/>
                 </a:solidFill>
@@ -8265,8 +8625,8 @@
         </p:nvSpPr>
         <p:spPr>
           <a:xfrm>
-            <a:off x="658368" y="2103120"/>
-            <a:ext cx="10972800" cy="493776"/>
+            <a:off x="658368" y="1956816"/>
+            <a:ext cx="10972800" cy="603504"/>
           </a:xfrm>
           <a:prstGeom prst="rect">
             <a:avLst/>
@@ -8310,7 +8670,11 @@
               </a:defRPr>
             </a:pPr>
             <a:r>
-              <a:t>파일 생성/열기: mkdir -p ~/agv_ws/src/agv_gazebo/models/agv    &amp;&amp;    nano ~/agv_ws/src/agv_gazebo/models/agv/model.sdf</a:t>
+              <a:t>파일 생성: mkdir -p ~/agv_ws/src/agv_gazebo/models/agv</a:t>
+            </a:r>
+            <a:br/>
+            <a:r>
+              <a:t>파일 열기: nano ~/agv_ws/src/agv_gazebo/models/agv/model.sdf</a:t>
             </a:r>
           </a:p>
         </p:txBody>
@@ -8323,8 +8687,8 @@
         </p:nvSpPr>
         <p:spPr>
           <a:xfrm>
-            <a:off x="658368" y="2761488"/>
-            <a:ext cx="10972800" cy="3383280"/>
+            <a:off x="658368" y="2706624"/>
+            <a:ext cx="10972800" cy="3364992"/>
           </a:xfrm>
           <a:prstGeom prst="rect">
             <a:avLst/>
@@ -8368,6 +8732,22 @@
               </a:defRPr>
             </a:pPr>
             <a:r>
+              <a:t>        &lt;geometry&gt;</a:t>
+            </a:r>
+            <a:br/>
+            <a:r>
+              <a:t>          &lt;box&gt;</a:t>
+            </a:r>
+            <a:br/>
+            <a:r>
+              <a:t>            &lt;size&gt;0.60 0.42 0.16&lt;/size&gt;</a:t>
+            </a:r>
+            <a:br/>
+            <a:r>
+              <a:t>          &lt;/box&gt;</a:t>
+            </a:r>
+            <a:br/>
+            <a:r>
               <a:t>        &lt;/geometry&gt;</a:t>
             </a:r>
             <a:br/>
@@ -8397,30 +8777,6 @@
             <a:br/>
             <a:r>
               <a:t>      &lt;collision name="body_collision"&gt;</a:t>
-            </a:r>
-            <a:br/>
-            <a:r>
-              <a:t>        &lt;geometry&gt;</a:t>
-            </a:r>
-            <a:br/>
-            <a:r>
-              <a:t>          &lt;box&gt;</a:t>
-            </a:r>
-            <a:br/>
-            <a:r>
-              <a:t>            &lt;size&gt;0.60 0.42 0.16&lt;/size&gt;</a:t>
-            </a:r>
-            <a:br/>
-            <a:r>
-              <a:t>          &lt;/box&gt;</a:t>
-            </a:r>
-            <a:br/>
-            <a:r>
-              <a:t>        &lt;/geometry&gt;</a:t>
-            </a:r>
-            <a:br/>
-            <a:r>
-              <a:t>      &lt;/collision&gt;</a:t>
             </a:r>
           </a:p>
         </p:txBody>
@@ -8433,7 +8789,7 @@
         </p:nvSpPr>
         <p:spPr>
           <a:xfrm>
-            <a:off x="749808" y="6199632"/>
+            <a:off x="749808" y="6181344"/>
             <a:ext cx="10789920" cy="201168"/>
           </a:xfrm>
           <a:prstGeom prst="rect">
@@ -8459,7 +8815,7 @@
               </a:defRPr>
             </a:pPr>
             <a:r>
-              <a:t>파일 전체 3/21 · 이 슬라이드 다음에 같은 파일의 나머지 줄이 이어집니다.</a:t>
+              <a:t>파일 전체 3/24 · 이 슬라이드 다음에 같은 파일의 나머지 줄이 이어집니다.</a:t>
             </a:r>
           </a:p>
         </p:txBody>
@@ -8516,7 +8872,7 @@
               </a:defRPr>
             </a:pPr>
             <a:r>
-              <a:t>파일을 계속 작성하고 저장한다 (4/21)</a:t>
+              <a:t>파일을 계속 작성하고 저장한다 (4/24)</a:t>
             </a:r>
           </a:p>
         </p:txBody>
@@ -8691,7 +9047,7 @@
               </a:defRPr>
             </a:pPr>
             <a:r>
-              <a:t>현재 단계 6/24    |    현재 폴더 ~/agv_ws    |    현재 터미널</a:t>
+              <a:t>현재 단계 6/27    |    현재 폴더 ~/agv_ws    |    현재 터미널</a:t>
             </a:r>
           </a:p>
         </p:txBody>
@@ -8704,8 +9060,8 @@
         </p:nvSpPr>
         <p:spPr>
           <a:xfrm>
-            <a:off x="658368" y="1682496"/>
-            <a:ext cx="10972800" cy="347472"/>
+            <a:off x="658368" y="1627632"/>
+            <a:ext cx="10972800" cy="256032"/>
           </a:xfrm>
           <a:prstGeom prst="rect">
             <a:avLst/>
@@ -8722,7 +9078,7 @@
               <a:spcAft>
                 <a:spcPts val="0"/>
               </a:spcAft>
-              <a:defRPr sz="1700" b="1">
+              <a:defRPr sz="1500" b="1">
                 <a:solidFill>
                   <a:srgbClr val="122C4E"/>
                 </a:solidFill>
@@ -8743,8 +9099,8 @@
         </p:nvSpPr>
         <p:spPr>
           <a:xfrm>
-            <a:off x="658368" y="2103120"/>
-            <a:ext cx="10972800" cy="493776"/>
+            <a:off x="658368" y="1956816"/>
+            <a:ext cx="10972800" cy="603504"/>
           </a:xfrm>
           <a:prstGeom prst="rect">
             <a:avLst/>
@@ -8788,7 +9144,11 @@
               </a:defRPr>
             </a:pPr>
             <a:r>
-              <a:t>파일 생성/열기: mkdir -p ~/agv_ws/src/agv_gazebo/models/agv    &amp;&amp;    nano ~/agv_ws/src/agv_gazebo/models/agv/model.sdf</a:t>
+              <a:t>파일 생성: mkdir -p ~/agv_ws/src/agv_gazebo/models/agv</a:t>
+            </a:r>
+            <a:br/>
+            <a:r>
+              <a:t>파일 열기: nano ~/agv_ws/src/agv_gazebo/models/agv/model.sdf</a:t>
             </a:r>
           </a:p>
         </p:txBody>
@@ -8801,8 +9161,8 @@
         </p:nvSpPr>
         <p:spPr>
           <a:xfrm>
-            <a:off x="658368" y="2761488"/>
-            <a:ext cx="10972800" cy="3383280"/>
+            <a:off x="658368" y="2706624"/>
+            <a:ext cx="10972800" cy="3364992"/>
           </a:xfrm>
           <a:prstGeom prst="rect">
             <a:avLst/>
@@ -8846,6 +9206,30 @@
               </a:defRPr>
             </a:pPr>
             <a:r>
+              <a:t>        &lt;geometry&gt;</a:t>
+            </a:r>
+            <a:br/>
+            <a:r>
+              <a:t>          &lt;box&gt;</a:t>
+            </a:r>
+            <a:br/>
+            <a:r>
+              <a:t>            &lt;size&gt;0.60 0.42 0.16&lt;/size&gt;</a:t>
+            </a:r>
+            <a:br/>
+            <a:r>
+              <a:t>          &lt;/box&gt;</a:t>
+            </a:r>
+            <a:br/>
+            <a:r>
+              <a:t>        &lt;/geometry&gt;</a:t>
+            </a:r>
+            <a:br/>
+            <a:r>
+              <a:t>      &lt;/collision&gt;</a:t>
+            </a:r>
+            <a:br/>
+            <a:r>
               <a:t>      </a:t>
             </a:r>
             <a:br/>
@@ -8867,38 +9251,6 @@
             <a:br/>
             <a:r>
               <a:t>        &lt;update_rate&gt;100&lt;/update_rate&gt;</a:t>
-            </a:r>
-            <a:br/>
-            <a:r>
-              <a:t>        &lt;imu&gt;</a:t>
-            </a:r>
-            <a:br/>
-            <a:r>
-              <a:t>          &lt;angular_velocity&gt;</a:t>
-            </a:r>
-            <a:br/>
-            <a:r>
-              <a:t>            &lt;x&gt;</a:t>
-            </a:r>
-            <a:br/>
-            <a:r>
-              <a:t>              &lt;noise type="gaussian"&gt;</a:t>
-            </a:r>
-            <a:br/>
-            <a:r>
-              <a:t>                &lt;mean&gt;0&lt;/mean&gt;</a:t>
-            </a:r>
-            <a:br/>
-            <a:r>
-              <a:t>                &lt;stddev&gt;0.001&lt;/stddev&gt;</a:t>
-            </a:r>
-            <a:br/>
-            <a:r>
-              <a:t>              &lt;/noise&gt;</a:t>
-            </a:r>
-            <a:br/>
-            <a:r>
-              <a:t>            &lt;/x&gt;</a:t>
             </a:r>
           </a:p>
         </p:txBody>
@@ -8911,7 +9263,7 @@
         </p:nvSpPr>
         <p:spPr>
           <a:xfrm>
-            <a:off x="749808" y="6199632"/>
+            <a:off x="749808" y="6181344"/>
             <a:ext cx="10789920" cy="201168"/>
           </a:xfrm>
           <a:prstGeom prst="rect">
@@ -8937,7 +9289,7 @@
               </a:defRPr>
             </a:pPr>
             <a:r>
-              <a:t>파일 전체 4/21 · 이 슬라이드 다음에 같은 파일의 나머지 줄이 이어집니다.</a:t>
+              <a:t>파일 전체 4/24 · 이 슬라이드 다음에 같은 파일의 나머지 줄이 이어집니다.</a:t>
             </a:r>
           </a:p>
         </p:txBody>
@@ -8994,7 +9346,7 @@
               </a:defRPr>
             </a:pPr>
             <a:r>
-              <a:t>파일을 계속 작성하고 저장한다 (5/21)</a:t>
+              <a:t>파일을 계속 작성하고 저장한다 (5/24)</a:t>
             </a:r>
           </a:p>
         </p:txBody>
@@ -9169,7 +9521,7 @@
               </a:defRPr>
             </a:pPr>
             <a:r>
-              <a:t>현재 단계 7/24    |    현재 폴더 ~/agv_ws    |    현재 터미널</a:t>
+              <a:t>현재 단계 7/27    |    현재 폴더 ~/agv_ws    |    현재 터미널</a:t>
             </a:r>
           </a:p>
         </p:txBody>
@@ -9182,8 +9534,8 @@
         </p:nvSpPr>
         <p:spPr>
           <a:xfrm>
-            <a:off x="658368" y="1682496"/>
-            <a:ext cx="10972800" cy="347472"/>
+            <a:off x="658368" y="1627632"/>
+            <a:ext cx="10972800" cy="256032"/>
           </a:xfrm>
           <a:prstGeom prst="rect">
             <a:avLst/>
@@ -9200,7 +9552,7 @@
               <a:spcAft>
                 <a:spcPts val="0"/>
               </a:spcAft>
-              <a:defRPr sz="1700" b="1">
+              <a:defRPr sz="1500" b="1">
                 <a:solidFill>
                   <a:srgbClr val="122C4E"/>
                 </a:solidFill>
@@ -9221,8 +9573,8 @@
         </p:nvSpPr>
         <p:spPr>
           <a:xfrm>
-            <a:off x="658368" y="2103120"/>
-            <a:ext cx="10972800" cy="493776"/>
+            <a:off x="658368" y="1956816"/>
+            <a:ext cx="10972800" cy="603504"/>
           </a:xfrm>
           <a:prstGeom prst="rect">
             <a:avLst/>
@@ -9266,7 +9618,11 @@
               </a:defRPr>
             </a:pPr>
             <a:r>
-              <a:t>파일 생성/열기: mkdir -p ~/agv_ws/src/agv_gazebo/models/agv    &amp;&amp;    nano ~/agv_ws/src/agv_gazebo/models/agv/model.sdf</a:t>
+              <a:t>파일 생성: mkdir -p ~/agv_ws/src/agv_gazebo/models/agv</a:t>
+            </a:r>
+            <a:br/>
+            <a:r>
+              <a:t>파일 열기: nano ~/agv_ws/src/agv_gazebo/models/agv/model.sdf</a:t>
             </a:r>
           </a:p>
         </p:txBody>
@@ -9279,8 +9635,8 @@
         </p:nvSpPr>
         <p:spPr>
           <a:xfrm>
-            <a:off x="658368" y="2761488"/>
-            <a:ext cx="10972800" cy="3383280"/>
+            <a:off x="658368" y="2706624"/>
+            <a:ext cx="10972800" cy="3364992"/>
           </a:xfrm>
           <a:prstGeom prst="rect">
             <a:avLst/>
@@ -9324,6 +9680,38 @@
               </a:defRPr>
             </a:pPr>
             <a:r>
+              <a:t>        &lt;imu&gt;</a:t>
+            </a:r>
+            <a:br/>
+            <a:r>
+              <a:t>          &lt;angular_velocity&gt;</a:t>
+            </a:r>
+            <a:br/>
+            <a:r>
+              <a:t>            &lt;x&gt;</a:t>
+            </a:r>
+            <a:br/>
+            <a:r>
+              <a:t>              &lt;noise type="gaussian"&gt;</a:t>
+            </a:r>
+            <a:br/>
+            <a:r>
+              <a:t>                &lt;mean&gt;0&lt;/mean&gt;</a:t>
+            </a:r>
+            <a:br/>
+            <a:r>
+              <a:t>                &lt;stddev&gt;0.001&lt;/stddev&gt;</a:t>
+            </a:r>
+            <a:br/>
+            <a:r>
+              <a:t>              &lt;/noise&gt;</a:t>
+            </a:r>
+            <a:br/>
+            <a:r>
+              <a:t>            &lt;/x&gt;</a:t>
+            </a:r>
+            <a:br/>
+            <a:r>
               <a:t>          &lt;/angular_velocity&gt;</a:t>
             </a:r>
             <a:br/>
@@ -9337,46 +9725,6 @@
             <a:br/>
             <a:r>
               <a:t>      </a:t>
-            </a:r>
-            <a:br/>
-            <a:r>
-              <a:t>    </a:t>
-            </a:r>
-            <a:br/>
-            <a:r>
-              <a:t>    &lt;/link&gt;</a:t>
-            </a:r>
-            <a:br/>
-            <a:r>
-              <a:t>    </a:t>
-            </a:r>
-            <a:br/>
-            <a:r>
-              <a:t>    </a:t>
-            </a:r>
-            <a:br/>
-            <a:r>
-              <a:t>    &lt;link name="left_wheel_link"&gt;</a:t>
-            </a:r>
-            <a:br/>
-            <a:r>
-              <a:t>      &lt;pose relative_to="base_link"&gt;0 0.19 -0.08 1.5708 0 0&lt;/pose&gt;</a:t>
-            </a:r>
-            <a:br/>
-            <a:r>
-              <a:t>      &lt;inertial&gt;</a:t>
-            </a:r>
-            <a:br/>
-            <a:r>
-              <a:t>        &lt;mass&gt;0.6&lt;/mass&gt;</a:t>
-            </a:r>
-            <a:br/>
-            <a:r>
-              <a:t>        &lt;inertia&gt;</a:t>
-            </a:r>
-            <a:br/>
-            <a:r>
-              <a:t>          &lt;ixx&gt;0.002&lt;/ixx&gt;</a:t>
             </a:r>
           </a:p>
         </p:txBody>
@@ -9389,7 +9737,7 @@
         </p:nvSpPr>
         <p:spPr>
           <a:xfrm>
-            <a:off x="749808" y="6199632"/>
+            <a:off x="749808" y="6181344"/>
             <a:ext cx="10789920" cy="201168"/>
           </a:xfrm>
           <a:prstGeom prst="rect">
@@ -9415,7 +9763,7 @@
               </a:defRPr>
             </a:pPr>
             <a:r>
-              <a:t>파일 전체 5/21 · 이 슬라이드 다음에 같은 파일의 나머지 줄이 이어집니다.</a:t>
+              <a:t>파일 전체 5/24 · 이 슬라이드 다음에 같은 파일의 나머지 줄이 이어집니다.</a:t>
             </a:r>
           </a:p>
         </p:txBody>
@@ -9472,7 +9820,7 @@
               </a:defRPr>
             </a:pPr>
             <a:r>
-              <a:t>파일을 계속 작성하고 저장한다 (6/21)</a:t>
+              <a:t>파일을 계속 작성하고 저장한다 (6/24)</a:t>
             </a:r>
           </a:p>
         </p:txBody>
@@ -9647,7 +9995,7 @@
               </a:defRPr>
             </a:pPr>
             <a:r>
-              <a:t>현재 단계 8/24    |    현재 폴더 ~/agv_ws    |    현재 터미널</a:t>
+              <a:t>현재 단계 8/27    |    현재 폴더 ~/agv_ws    |    현재 터미널</a:t>
             </a:r>
           </a:p>
         </p:txBody>
@@ -9660,8 +10008,8 @@
         </p:nvSpPr>
         <p:spPr>
           <a:xfrm>
-            <a:off x="658368" y="1682496"/>
-            <a:ext cx="10972800" cy="347472"/>
+            <a:off x="658368" y="1627632"/>
+            <a:ext cx="10972800" cy="256032"/>
           </a:xfrm>
           <a:prstGeom prst="rect">
             <a:avLst/>
@@ -9678,7 +10026,7 @@
               <a:spcAft>
                 <a:spcPts val="0"/>
               </a:spcAft>
-              <a:defRPr sz="1700" b="1">
+              <a:defRPr sz="1500" b="1">
                 <a:solidFill>
                   <a:srgbClr val="122C4E"/>
                 </a:solidFill>
@@ -9699,8 +10047,8 @@
         </p:nvSpPr>
         <p:spPr>
           <a:xfrm>
-            <a:off x="658368" y="2103120"/>
-            <a:ext cx="10972800" cy="493776"/>
+            <a:off x="658368" y="1956816"/>
+            <a:ext cx="10972800" cy="603504"/>
           </a:xfrm>
           <a:prstGeom prst="rect">
             <a:avLst/>
@@ -9744,7 +10092,11 @@
               </a:defRPr>
             </a:pPr>
             <a:r>
-              <a:t>파일 생성/열기: mkdir -p ~/agv_ws/src/agv_gazebo/models/agv    &amp;&amp;    nano ~/agv_ws/src/agv_gazebo/models/agv/model.sdf</a:t>
+              <a:t>파일 생성: mkdir -p ~/agv_ws/src/agv_gazebo/models/agv</a:t>
+            </a:r>
+            <a:br/>
+            <a:r>
+              <a:t>파일 열기: nano ~/agv_ws/src/agv_gazebo/models/agv/model.sdf</a:t>
             </a:r>
           </a:p>
         </p:txBody>
@@ -9757,8 +10109,8 @@
         </p:nvSpPr>
         <p:spPr>
           <a:xfrm>
-            <a:off x="658368" y="2761488"/>
-            <a:ext cx="10972800" cy="3383280"/>
+            <a:off x="658368" y="2706624"/>
+            <a:ext cx="10972800" cy="3364992"/>
           </a:xfrm>
           <a:prstGeom prst="rect">
             <a:avLst/>
@@ -9802,59 +10154,51 @@
               </a:defRPr>
             </a:pPr>
             <a:r>
+              <a:t>    </a:t>
+            </a:r>
+            <a:br/>
+            <a:r>
+              <a:t>    &lt;/link&gt;</a:t>
+            </a:r>
+            <a:br/>
+            <a:r>
+              <a:t>    </a:t>
+            </a:r>
+            <a:br/>
+            <a:r>
+              <a:t>    </a:t>
+            </a:r>
+            <a:br/>
+            <a:r>
+              <a:t>    &lt;link name="left_wheel_link"&gt;</a:t>
+            </a:r>
+            <a:br/>
+            <a:r>
+              <a:t>      &lt;pose relative_to="base_link"&gt;0 0.19 -0.08 1.5708 0 0&lt;/pose&gt;</a:t>
+            </a:r>
+            <a:br/>
+            <a:r>
+              <a:t>      &lt;inertial&gt;</a:t>
+            </a:r>
+            <a:br/>
+            <a:r>
+              <a:t>        &lt;mass&gt;0.6&lt;/mass&gt;</a:t>
+            </a:r>
+            <a:br/>
+            <a:r>
+              <a:t>        &lt;inertia&gt;</a:t>
+            </a:r>
+            <a:br/>
+            <a:r>
+              <a:t>          &lt;ixx&gt;0.002&lt;/ixx&gt;</a:t>
+            </a:r>
+            <a:br/>
+            <a:r>
               <a:t>          &lt;iyy&gt;0.002&lt;/iyy&gt;</a:t>
             </a:r>
             <a:br/>
             <a:r>
               <a:t>          &lt;izz&gt;0.001&lt;/izz&gt;</a:t>
-            </a:r>
-            <a:br/>
-            <a:r>
-              <a:t>        &lt;/inertia&gt;</a:t>
-            </a:r>
-            <a:br/>
-            <a:r>
-              <a:t>      &lt;/inertial&gt;</a:t>
-            </a:r>
-            <a:br/>
-            <a:r>
-              <a:t>      &lt;visual name="wheel"&gt;</a:t>
-            </a:r>
-            <a:br/>
-            <a:r>
-              <a:t>        &lt;geometry&gt;</a:t>
-            </a:r>
-            <a:br/>
-            <a:r>
-              <a:t>          &lt;cylinder&gt;</a:t>
-            </a:r>
-            <a:br/>
-            <a:r>
-              <a:t>            &lt;radius&gt;0.08&lt;/radius&gt;</a:t>
-            </a:r>
-            <a:br/>
-            <a:r>
-              <a:t>            &lt;length&gt;0.05&lt;/length&gt;</a:t>
-            </a:r>
-            <a:br/>
-            <a:r>
-              <a:t>          &lt;/cylinder&gt;</a:t>
-            </a:r>
-            <a:br/>
-            <a:r>
-              <a:t>        &lt;/geometry&gt;</a:t>
-            </a:r>
-            <a:br/>
-            <a:r>
-              <a:t>      &lt;/visual&gt;</a:t>
-            </a:r>
-            <a:br/>
-            <a:r>
-              <a:t>      &lt;collision name="wheel_collision"&gt;</a:t>
-            </a:r>
-            <a:br/>
-            <a:r>
-              <a:t>        &lt;geometry&gt;</a:t>
             </a:r>
           </a:p>
         </p:txBody>
@@ -9867,7 +10211,7 @@
         </p:nvSpPr>
         <p:spPr>
           <a:xfrm>
-            <a:off x="749808" y="6199632"/>
+            <a:off x="749808" y="6181344"/>
             <a:ext cx="10789920" cy="201168"/>
           </a:xfrm>
           <a:prstGeom prst="rect">
@@ -9893,7 +10237,7 @@
               </a:defRPr>
             </a:pPr>
             <a:r>
-              <a:t>파일 전체 6/21 · 이 슬라이드 다음에 같은 파일의 나머지 줄이 이어집니다.</a:t>
+              <a:t>파일 전체 6/24 · 이 슬라이드 다음에 같은 파일의 나머지 줄이 이어집니다.</a:t>
             </a:r>
           </a:p>
         </p:txBody>
@@ -9950,7 +10294,7 @@
               </a:defRPr>
             </a:pPr>
             <a:r>
-              <a:t>파일을 계속 작성하고 저장한다 (7/21)</a:t>
+              <a:t>파일을 계속 작성하고 저장한다 (7/24)</a:t>
             </a:r>
           </a:p>
         </p:txBody>
@@ -10125,7 +10469,7 @@
               </a:defRPr>
             </a:pPr>
             <a:r>
-              <a:t>현재 단계 9/24    |    현재 폴더 ~/agv_ws    |    현재 터미널</a:t>
+              <a:t>현재 단계 9/27    |    현재 폴더 ~/agv_ws    |    현재 터미널</a:t>
             </a:r>
           </a:p>
         </p:txBody>
@@ -10138,8 +10482,8 @@
         </p:nvSpPr>
         <p:spPr>
           <a:xfrm>
-            <a:off x="658368" y="1682496"/>
-            <a:ext cx="10972800" cy="347472"/>
+            <a:off x="658368" y="1627632"/>
+            <a:ext cx="10972800" cy="256032"/>
           </a:xfrm>
           <a:prstGeom prst="rect">
             <a:avLst/>
@@ -10156,7 +10500,7 @@
               <a:spcAft>
                 <a:spcPts val="0"/>
               </a:spcAft>
-              <a:defRPr sz="1700" b="1">
+              <a:defRPr sz="1500" b="1">
                 <a:solidFill>
                   <a:srgbClr val="122C4E"/>
                 </a:solidFill>
@@ -10177,8 +10521,8 @@
         </p:nvSpPr>
         <p:spPr>
           <a:xfrm>
-            <a:off x="658368" y="2103120"/>
-            <a:ext cx="10972800" cy="493776"/>
+            <a:off x="658368" y="1956816"/>
+            <a:ext cx="10972800" cy="603504"/>
           </a:xfrm>
           <a:prstGeom prst="rect">
             <a:avLst/>
@@ -10222,7 +10566,11 @@
               </a:defRPr>
             </a:pPr>
             <a:r>
-              <a:t>파일 생성/열기: mkdir -p ~/agv_ws/src/agv_gazebo/models/agv    &amp;&amp;    nano ~/agv_ws/src/agv_gazebo/models/agv/model.sdf</a:t>
+              <a:t>파일 생성: mkdir -p ~/agv_ws/src/agv_gazebo/models/agv</a:t>
+            </a:r>
+            <a:br/>
+            <a:r>
+              <a:t>파일 열기: nano ~/agv_ws/src/agv_gazebo/models/agv/model.sdf</a:t>
             </a:r>
           </a:p>
         </p:txBody>
@@ -10235,8 +10583,8 @@
         </p:nvSpPr>
         <p:spPr>
           <a:xfrm>
-            <a:off x="658368" y="2761488"/>
-            <a:ext cx="10972800" cy="3383280"/>
+            <a:off x="658368" y="2706624"/>
+            <a:ext cx="10972800" cy="3364992"/>
           </a:xfrm>
           <a:prstGeom prst="rect">
             <a:avLst/>
@@ -10280,6 +10628,22 @@
               </a:defRPr>
             </a:pPr>
             <a:r>
+              <a:t>        &lt;/inertia&gt;</a:t>
+            </a:r>
+            <a:br/>
+            <a:r>
+              <a:t>      &lt;/inertial&gt;</a:t>
+            </a:r>
+            <a:br/>
+            <a:r>
+              <a:t>      &lt;visual name="wheel"&gt;</a:t>
+            </a:r>
+            <a:br/>
+            <a:r>
+              <a:t>        &lt;geometry&gt;</a:t>
+            </a:r>
+            <a:br/>
+            <a:r>
               <a:t>          &lt;cylinder&gt;</a:t>
             </a:r>
             <a:br/>
@@ -10300,39 +10664,15 @@
             </a:r>
             <a:br/>
             <a:r>
-              <a:t>        &lt;surface&gt;</a:t>
-            </a:r>
-            <a:br/>
-            <a:r>
-              <a:t>          &lt;friction&gt;</a:t>
-            </a:r>
-            <a:br/>
-            <a:r>
-              <a:t>            &lt;ode&gt;</a:t>
-            </a:r>
-            <a:br/>
-            <a:r>
-              <a:t>              &lt;mu&gt;1.0&lt;/mu&gt;</a:t>
-            </a:r>
-            <a:br/>
-            <a:r>
-              <a:t>              &lt;mu2&gt;1.0&lt;/mu2&gt;</a:t>
-            </a:r>
-            <a:br/>
-            <a:r>
-              <a:t>            &lt;/ode&gt;</a:t>
-            </a:r>
-            <a:br/>
-            <a:r>
-              <a:t>          &lt;/friction&gt;</a:t>
-            </a:r>
-            <a:br/>
-            <a:r>
-              <a:t>        &lt;/surface&gt;</a:t>
-            </a:r>
-            <a:br/>
-            <a:r>
-              <a:t>      &lt;/collision&gt;</a:t>
+              <a:t>      &lt;/visual&gt;</a:t>
+            </a:r>
+            <a:br/>
+            <a:r>
+              <a:t>      &lt;collision name="wheel_collision"&gt;</a:t>
+            </a:r>
+            <a:br/>
+            <a:r>
+              <a:t>        &lt;geometry&gt;</a:t>
             </a:r>
           </a:p>
         </p:txBody>
@@ -10345,7 +10685,7 @@
         </p:nvSpPr>
         <p:spPr>
           <a:xfrm>
-            <a:off x="749808" y="6199632"/>
+            <a:off x="749808" y="6181344"/>
             <a:ext cx="10789920" cy="201168"/>
           </a:xfrm>
           <a:prstGeom prst="rect">
@@ -10371,7 +10711,7 @@
               </a:defRPr>
             </a:pPr>
             <a:r>
-              <a:t>파일 전체 7/21 · 이 슬라이드 다음에 같은 파일의 나머지 줄이 이어집니다.</a:t>
+              <a:t>파일 전체 7/24 · 이 슬라이드 다음에 같은 파일의 나머지 줄이 이어집니다.</a:t>
             </a:r>
           </a:p>
         </p:txBody>
@@ -10428,7 +10768,7 @@
               </a:defRPr>
             </a:pPr>
             <a:r>
-              <a:t>파일을 계속 작성하고 저장한다 (8/21)</a:t>
+              <a:t>파일을 계속 작성하고 저장한다 (8/24)</a:t>
             </a:r>
           </a:p>
         </p:txBody>
@@ -10603,7 +10943,7 @@
               </a:defRPr>
             </a:pPr>
             <a:r>
-              <a:t>현재 단계 10/24    |    현재 폴더 ~/agv_ws    |    현재 터미널</a:t>
+              <a:t>현재 단계 10/27    |    현재 폴더 ~/agv_ws    |    현재 터미널</a:t>
             </a:r>
           </a:p>
         </p:txBody>
@@ -10616,8 +10956,8 @@
         </p:nvSpPr>
         <p:spPr>
           <a:xfrm>
-            <a:off x="658368" y="1682496"/>
-            <a:ext cx="10972800" cy="347472"/>
+            <a:off x="658368" y="1627632"/>
+            <a:ext cx="10972800" cy="256032"/>
           </a:xfrm>
           <a:prstGeom prst="rect">
             <a:avLst/>
@@ -10634,7 +10974,7 @@
               <a:spcAft>
                 <a:spcPts val="0"/>
               </a:spcAft>
-              <a:defRPr sz="1700" b="1">
+              <a:defRPr sz="1500" b="1">
                 <a:solidFill>
                   <a:srgbClr val="122C4E"/>
                 </a:solidFill>
@@ -10655,8 +10995,8 @@
         </p:nvSpPr>
         <p:spPr>
           <a:xfrm>
-            <a:off x="658368" y="2103120"/>
-            <a:ext cx="10972800" cy="493776"/>
+            <a:off x="658368" y="1956816"/>
+            <a:ext cx="10972800" cy="603504"/>
           </a:xfrm>
           <a:prstGeom prst="rect">
             <a:avLst/>
@@ -10700,7 +11040,11 @@
               </a:defRPr>
             </a:pPr>
             <a:r>
-              <a:t>파일 생성/열기: mkdir -p ~/agv_ws/src/agv_gazebo/models/agv    &amp;&amp;    nano ~/agv_ws/src/agv_gazebo/models/agv/model.sdf</a:t>
+              <a:t>파일 생성: mkdir -p ~/agv_ws/src/agv_gazebo/models/agv</a:t>
+            </a:r>
+            <a:br/>
+            <a:r>
+              <a:t>파일 열기: nano ~/agv_ws/src/agv_gazebo/models/agv/model.sdf</a:t>
             </a:r>
           </a:p>
         </p:txBody>
@@ -10713,8 +11057,8 @@
         </p:nvSpPr>
         <p:spPr>
           <a:xfrm>
-            <a:off x="658368" y="2761488"/>
-            <a:ext cx="10972800" cy="3383280"/>
+            <a:off x="658368" y="2706624"/>
+            <a:ext cx="10972800" cy="3364992"/>
           </a:xfrm>
           <a:prstGeom prst="rect">
             <a:avLst/>
@@ -10758,59 +11102,51 @@
               </a:defRPr>
             </a:pPr>
             <a:r>
-              <a:t>    &lt;/link&gt;</a:t>
-            </a:r>
-            <a:br/>
-            <a:r>
-              <a:t>    </a:t>
-            </a:r>
-            <a:br/>
-            <a:r>
-              <a:t>    </a:t>
-            </a:r>
-            <a:br/>
-            <a:r>
-              <a:t>    &lt;link name="right_wheel_link"&gt;</a:t>
-            </a:r>
-            <a:br/>
-            <a:r>
-              <a:t>      &lt;pose relative_to="base_link"&gt;0 -0.19 -0.08 1.5708 0 0&lt;/pose&gt;</a:t>
-            </a:r>
-            <a:br/>
-            <a:r>
-              <a:t>      &lt;inertial&gt;</a:t>
-            </a:r>
-            <a:br/>
-            <a:r>
-              <a:t>        &lt;mass&gt;0.6&lt;/mass&gt;</a:t>
-            </a:r>
-            <a:br/>
-            <a:r>
-              <a:t>        &lt;inertia&gt;</a:t>
-            </a:r>
-            <a:br/>
-            <a:r>
-              <a:t>          &lt;ixx&gt;0.002&lt;/ixx&gt;</a:t>
-            </a:r>
-            <a:br/>
-            <a:r>
-              <a:t>          &lt;iyy&gt;0.002&lt;/iyy&gt;</a:t>
-            </a:r>
-            <a:br/>
-            <a:r>
-              <a:t>          &lt;izz&gt;0.001&lt;/izz&gt;</a:t>
-            </a:r>
-            <a:br/>
-            <a:r>
-              <a:t>        &lt;/inertia&gt;</a:t>
-            </a:r>
-            <a:br/>
-            <a:r>
-              <a:t>      &lt;/inertial&gt;</a:t>
-            </a:r>
-            <a:br/>
-            <a:r>
-              <a:t>      &lt;visual name="wheel"&gt;</a:t>
+              <a:t>          &lt;cylinder&gt;</a:t>
+            </a:r>
+            <a:br/>
+            <a:r>
+              <a:t>            &lt;radius&gt;0.08&lt;/radius&gt;</a:t>
+            </a:r>
+            <a:br/>
+            <a:r>
+              <a:t>            &lt;length&gt;0.05&lt;/length&gt;</a:t>
+            </a:r>
+            <a:br/>
+            <a:r>
+              <a:t>          &lt;/cylinder&gt;</a:t>
+            </a:r>
+            <a:br/>
+            <a:r>
+              <a:t>        &lt;/geometry&gt;</a:t>
+            </a:r>
+            <a:br/>
+            <a:r>
+              <a:t>        &lt;surface&gt;</a:t>
+            </a:r>
+            <a:br/>
+            <a:r>
+              <a:t>          &lt;friction&gt;</a:t>
+            </a:r>
+            <a:br/>
+            <a:r>
+              <a:t>            &lt;ode&gt;</a:t>
+            </a:r>
+            <a:br/>
+            <a:r>
+              <a:t>              &lt;mu&gt;1.0&lt;/mu&gt;</a:t>
+            </a:r>
+            <a:br/>
+            <a:r>
+              <a:t>              &lt;mu2&gt;1.0&lt;/mu2&gt;</a:t>
+            </a:r>
+            <a:br/>
+            <a:r>
+              <a:t>            &lt;/ode&gt;</a:t>
+            </a:r>
+            <a:br/>
+            <a:r>
+              <a:t>          &lt;/friction&gt;</a:t>
             </a:r>
           </a:p>
         </p:txBody>
@@ -10823,7 +11159,7 @@
         </p:nvSpPr>
         <p:spPr>
           <a:xfrm>
-            <a:off x="749808" y="6199632"/>
+            <a:off x="749808" y="6181344"/>
             <a:ext cx="10789920" cy="201168"/>
           </a:xfrm>
           <a:prstGeom prst="rect">
@@ -10849,7 +11185,7 @@
               </a:defRPr>
             </a:pPr>
             <a:r>
-              <a:t>파일 전체 8/21 · 이 슬라이드 다음에 같은 파일의 나머지 줄이 이어집니다.</a:t>
+              <a:t>파일 전체 8/24 · 이 슬라이드 다음에 같은 파일의 나머지 줄이 이어집니다.</a:t>
             </a:r>
           </a:p>
         </p:txBody>
@@ -10906,7 +11242,7 @@
               </a:defRPr>
             </a:pPr>
             <a:r>
-              <a:t>파일을 계속 작성하고 저장한다 (9/21)</a:t>
+              <a:t>파일을 계속 작성하고 저장한다 (9/24)</a:t>
             </a:r>
           </a:p>
         </p:txBody>
@@ -11081,7 +11417,7 @@
               </a:defRPr>
             </a:pPr>
             <a:r>
-              <a:t>현재 단계 11/24    |    현재 폴더 ~/agv_ws    |    현재 터미널</a:t>
+              <a:t>현재 단계 11/27    |    현재 폴더 ~/agv_ws    |    현재 터미널</a:t>
             </a:r>
           </a:p>
         </p:txBody>
@@ -11094,8 +11430,8 @@
         </p:nvSpPr>
         <p:spPr>
           <a:xfrm>
-            <a:off x="658368" y="1682496"/>
-            <a:ext cx="10972800" cy="347472"/>
+            <a:off x="658368" y="1627632"/>
+            <a:ext cx="10972800" cy="256032"/>
           </a:xfrm>
           <a:prstGeom prst="rect">
             <a:avLst/>
@@ -11112,7 +11448,7 @@
               <a:spcAft>
                 <a:spcPts val="0"/>
               </a:spcAft>
-              <a:defRPr sz="1700" b="1">
+              <a:defRPr sz="1500" b="1">
                 <a:solidFill>
                   <a:srgbClr val="122C4E"/>
                 </a:solidFill>
@@ -11133,8 +11469,8 @@
         </p:nvSpPr>
         <p:spPr>
           <a:xfrm>
-            <a:off x="658368" y="2103120"/>
-            <a:ext cx="10972800" cy="493776"/>
+            <a:off x="658368" y="1956816"/>
+            <a:ext cx="10972800" cy="603504"/>
           </a:xfrm>
           <a:prstGeom prst="rect">
             <a:avLst/>
@@ -11178,7 +11514,11 @@
               </a:defRPr>
             </a:pPr>
             <a:r>
-              <a:t>파일 생성/열기: mkdir -p ~/agv_ws/src/agv_gazebo/models/agv    &amp;&amp;    nano ~/agv_ws/src/agv_gazebo/models/agv/model.sdf</a:t>
+              <a:t>파일 생성: mkdir -p ~/agv_ws/src/agv_gazebo/models/agv</a:t>
+            </a:r>
+            <a:br/>
+            <a:r>
+              <a:t>파일 열기: nano ~/agv_ws/src/agv_gazebo/models/agv/model.sdf</a:t>
             </a:r>
           </a:p>
         </p:txBody>
@@ -11191,8 +11531,8 @@
         </p:nvSpPr>
         <p:spPr>
           <a:xfrm>
-            <a:off x="658368" y="2761488"/>
-            <a:ext cx="10972800" cy="3383280"/>
+            <a:off x="658368" y="2706624"/>
+            <a:ext cx="10972800" cy="3364992"/>
           </a:xfrm>
           <a:prstGeom prst="rect">
             <a:avLst/>
@@ -11236,59 +11576,51 @@
               </a:defRPr>
             </a:pPr>
             <a:r>
-              <a:t>        &lt;geometry&gt;</a:t>
-            </a:r>
-            <a:br/>
-            <a:r>
-              <a:t>          &lt;cylinder&gt;</a:t>
-            </a:r>
-            <a:br/>
-            <a:r>
-              <a:t>            &lt;radius&gt;0.08&lt;/radius&gt;</a:t>
-            </a:r>
-            <a:br/>
-            <a:r>
-              <a:t>            &lt;length&gt;0.05&lt;/length&gt;</a:t>
-            </a:r>
-            <a:br/>
-            <a:r>
-              <a:t>          &lt;/cylinder&gt;</a:t>
-            </a:r>
-            <a:br/>
-            <a:r>
-              <a:t>        &lt;/geometry&gt;</a:t>
-            </a:r>
-            <a:br/>
-            <a:r>
-              <a:t>      &lt;/visual&gt;</a:t>
-            </a:r>
-            <a:br/>
-            <a:r>
-              <a:t>      &lt;collision name="wheel_collision"&gt;</a:t>
-            </a:r>
-            <a:br/>
-            <a:r>
-              <a:t>        &lt;geometry&gt;</a:t>
-            </a:r>
-            <a:br/>
-            <a:r>
-              <a:t>          &lt;cylinder&gt;</a:t>
-            </a:r>
-            <a:br/>
-            <a:r>
-              <a:t>            &lt;radius&gt;0.08&lt;/radius&gt;</a:t>
-            </a:r>
-            <a:br/>
-            <a:r>
-              <a:t>            &lt;length&gt;0.05&lt;/length&gt;</a:t>
-            </a:r>
-            <a:br/>
-            <a:r>
-              <a:t>          &lt;/cylinder&gt;</a:t>
-            </a:r>
-            <a:br/>
-            <a:r>
-              <a:t>        &lt;/geometry&gt;</a:t>
+              <a:t>        &lt;/surface&gt;</a:t>
+            </a:r>
+            <a:br/>
+            <a:r>
+              <a:t>      &lt;/collision&gt;</a:t>
+            </a:r>
+            <a:br/>
+            <a:r>
+              <a:t>    &lt;/link&gt;</a:t>
+            </a:r>
+            <a:br/>
+            <a:r>
+              <a:t>    </a:t>
+            </a:r>
+            <a:br/>
+            <a:r>
+              <a:t>    </a:t>
+            </a:r>
+            <a:br/>
+            <a:r>
+              <a:t>    &lt;link name="right_wheel_link"&gt;</a:t>
+            </a:r>
+            <a:br/>
+            <a:r>
+              <a:t>      &lt;pose relative_to="base_link"&gt;0 -0.19 -0.08 1.5708 0 0&lt;/pose&gt;</a:t>
+            </a:r>
+            <a:br/>
+            <a:r>
+              <a:t>      &lt;inertial&gt;</a:t>
+            </a:r>
+            <a:br/>
+            <a:r>
+              <a:t>        &lt;mass&gt;0.6&lt;/mass&gt;</a:t>
+            </a:r>
+            <a:br/>
+            <a:r>
+              <a:t>        &lt;inertia&gt;</a:t>
+            </a:r>
+            <a:br/>
+            <a:r>
+              <a:t>          &lt;ixx&gt;0.002&lt;/ixx&gt;</a:t>
+            </a:r>
+            <a:br/>
+            <a:r>
+              <a:t>          &lt;iyy&gt;0.002&lt;/iyy&gt;</a:t>
             </a:r>
           </a:p>
         </p:txBody>
@@ -11301,7 +11633,7 @@
         </p:nvSpPr>
         <p:spPr>
           <a:xfrm>
-            <a:off x="749808" y="6199632"/>
+            <a:off x="749808" y="6181344"/>
             <a:ext cx="10789920" cy="201168"/>
           </a:xfrm>
           <a:prstGeom prst="rect">
@@ -11327,7 +11659,7 @@
               </a:defRPr>
             </a:pPr>
             <a:r>
-              <a:t>파일 전체 9/21 · 이 슬라이드 다음에 같은 파일의 나머지 줄이 이어집니다.</a:t>
+              <a:t>파일 전체 9/24 · 이 슬라이드 다음에 같은 파일의 나머지 줄이 이어집니다.</a:t>
             </a:r>
           </a:p>
         </p:txBody>
@@ -11384,7 +11716,7 @@
               </a:defRPr>
             </a:pPr>
             <a:r>
-              <a:t>파일을 계속 작성하고 저장한다 (10/21)</a:t>
+              <a:t>파일을 계속 작성하고 저장한다 (10/24)</a:t>
             </a:r>
           </a:p>
         </p:txBody>
@@ -11559,7 +11891,7 @@
               </a:defRPr>
             </a:pPr>
             <a:r>
-              <a:t>현재 단계 12/24    |    현재 폴더 ~/agv_ws    |    현재 터미널</a:t>
+              <a:t>현재 단계 12/27    |    현재 폴더 ~/agv_ws    |    현재 터미널</a:t>
             </a:r>
           </a:p>
         </p:txBody>
@@ -11572,8 +11904,8 @@
         </p:nvSpPr>
         <p:spPr>
           <a:xfrm>
-            <a:off x="658368" y="1682496"/>
-            <a:ext cx="10972800" cy="347472"/>
+            <a:off x="658368" y="1627632"/>
+            <a:ext cx="10972800" cy="256032"/>
           </a:xfrm>
           <a:prstGeom prst="rect">
             <a:avLst/>
@@ -11590,7 +11922,7 @@
               <a:spcAft>
                 <a:spcPts val="0"/>
               </a:spcAft>
-              <a:defRPr sz="1700" b="1">
+              <a:defRPr sz="1500" b="1">
                 <a:solidFill>
                   <a:srgbClr val="122C4E"/>
                 </a:solidFill>
@@ -11611,8 +11943,8 @@
         </p:nvSpPr>
         <p:spPr>
           <a:xfrm>
-            <a:off x="658368" y="2103120"/>
-            <a:ext cx="10972800" cy="493776"/>
+            <a:off x="658368" y="1956816"/>
+            <a:ext cx="10972800" cy="603504"/>
           </a:xfrm>
           <a:prstGeom prst="rect">
             <a:avLst/>
@@ -11656,7 +11988,11 @@
               </a:defRPr>
             </a:pPr>
             <a:r>
-              <a:t>파일 생성/열기: mkdir -p ~/agv_ws/src/agv_gazebo/models/agv    &amp;&amp;    nano ~/agv_ws/src/agv_gazebo/models/agv/model.sdf</a:t>
+              <a:t>파일 생성: mkdir -p ~/agv_ws/src/agv_gazebo/models/agv</a:t>
+            </a:r>
+            <a:br/>
+            <a:r>
+              <a:t>파일 열기: nano ~/agv_ws/src/agv_gazebo/models/agv/model.sdf</a:t>
             </a:r>
           </a:p>
         </p:txBody>
@@ -11669,8 +12005,8 @@
         </p:nvSpPr>
         <p:spPr>
           <a:xfrm>
-            <a:off x="658368" y="2761488"/>
-            <a:ext cx="10972800" cy="3383280"/>
+            <a:off x="658368" y="2706624"/>
+            <a:ext cx="10972800" cy="3364992"/>
           </a:xfrm>
           <a:prstGeom prst="rect">
             <a:avLst/>
@@ -11714,59 +12050,51 @@
               </a:defRPr>
             </a:pPr>
             <a:r>
-              <a:t>        &lt;surface&gt;</a:t>
-            </a:r>
-            <a:br/>
-            <a:r>
-              <a:t>          &lt;friction&gt;</a:t>
-            </a:r>
-            <a:br/>
-            <a:r>
-              <a:t>            &lt;ode&gt;</a:t>
-            </a:r>
-            <a:br/>
-            <a:r>
-              <a:t>              &lt;mu&gt;1.0&lt;/mu&gt;</a:t>
-            </a:r>
-            <a:br/>
-            <a:r>
-              <a:t>              &lt;mu2&gt;1.0&lt;/mu2&gt;</a:t>
-            </a:r>
-            <a:br/>
-            <a:r>
-              <a:t>            &lt;/ode&gt;</a:t>
-            </a:r>
-            <a:br/>
-            <a:r>
-              <a:t>          &lt;/friction&gt;</a:t>
-            </a:r>
-            <a:br/>
-            <a:r>
-              <a:t>        &lt;/surface&gt;</a:t>
-            </a:r>
-            <a:br/>
-            <a:r>
-              <a:t>      &lt;/collision&gt;</a:t>
-            </a:r>
-            <a:br/>
-            <a:r>
-              <a:t>    &lt;/link&gt;</a:t>
-            </a:r>
-            <a:br/>
-            <a:r>
-              <a:t>    </a:t>
-            </a:r>
-            <a:br/>
-            <a:r>
-              <a:t>    </a:t>
-            </a:r>
-            <a:br/>
-            <a:r>
-              <a:t>    &lt;joint name="left_wheel_joint" type="revolute"&gt;</a:t>
-            </a:r>
-            <a:br/>
-            <a:r>
-              <a:t>      &lt;parent&gt;base_link&lt;/parent&gt;</a:t>
+              <a:t>          &lt;izz&gt;0.001&lt;/izz&gt;</a:t>
+            </a:r>
+            <a:br/>
+            <a:r>
+              <a:t>        &lt;/inertia&gt;</a:t>
+            </a:r>
+            <a:br/>
+            <a:r>
+              <a:t>      &lt;/inertial&gt;</a:t>
+            </a:r>
+            <a:br/>
+            <a:r>
+              <a:t>      &lt;visual name="wheel"&gt;</a:t>
+            </a:r>
+            <a:br/>
+            <a:r>
+              <a:t>        &lt;geometry&gt;</a:t>
+            </a:r>
+            <a:br/>
+            <a:r>
+              <a:t>          &lt;cylinder&gt;</a:t>
+            </a:r>
+            <a:br/>
+            <a:r>
+              <a:t>            &lt;radius&gt;0.08&lt;/radius&gt;</a:t>
+            </a:r>
+            <a:br/>
+            <a:r>
+              <a:t>            &lt;length&gt;0.05&lt;/length&gt;</a:t>
+            </a:r>
+            <a:br/>
+            <a:r>
+              <a:t>          &lt;/cylinder&gt;</a:t>
+            </a:r>
+            <a:br/>
+            <a:r>
+              <a:t>        &lt;/geometry&gt;</a:t>
+            </a:r>
+            <a:br/>
+            <a:r>
+              <a:t>      &lt;/visual&gt;</a:t>
+            </a:r>
+            <a:br/>
+            <a:r>
+              <a:t>      &lt;collision name="wheel_collision"&gt;</a:t>
             </a:r>
           </a:p>
         </p:txBody>
@@ -11779,7 +12107,7 @@
         </p:nvSpPr>
         <p:spPr>
           <a:xfrm>
-            <a:off x="749808" y="6199632"/>
+            <a:off x="749808" y="6181344"/>
             <a:ext cx="10789920" cy="201168"/>
           </a:xfrm>
           <a:prstGeom prst="rect">
@@ -11805,7 +12133,7 @@
               </a:defRPr>
             </a:pPr>
             <a:r>
-              <a:t>파일 전체 10/21 · 이 슬라이드 다음에 같은 파일의 나머지 줄이 이어집니다.</a:t>
+              <a:t>파일 전체 10/24 · 이 슬라이드 다음에 같은 파일의 나머지 줄이 이어집니다.</a:t>
             </a:r>
           </a:p>
         </p:txBody>
@@ -11862,7 +12190,7 @@
               </a:defRPr>
             </a:pPr>
             <a:r>
-              <a:t>파일을 계속 작성하고 저장한다 (11/21)</a:t>
+              <a:t>파일을 계속 작성하고 저장한다 (11/24)</a:t>
             </a:r>
           </a:p>
         </p:txBody>
@@ -12037,7 +12365,7 @@
               </a:defRPr>
             </a:pPr>
             <a:r>
-              <a:t>현재 단계 13/24    |    현재 폴더 ~/agv_ws    |    현재 터미널</a:t>
+              <a:t>현재 단계 13/27    |    현재 폴더 ~/agv_ws    |    현재 터미널</a:t>
             </a:r>
           </a:p>
         </p:txBody>
@@ -12050,8 +12378,8 @@
         </p:nvSpPr>
         <p:spPr>
           <a:xfrm>
-            <a:off x="658368" y="1682496"/>
-            <a:ext cx="10972800" cy="347472"/>
+            <a:off x="658368" y="1627632"/>
+            <a:ext cx="10972800" cy="256032"/>
           </a:xfrm>
           <a:prstGeom prst="rect">
             <a:avLst/>
@@ -12068,7 +12396,7 @@
               <a:spcAft>
                 <a:spcPts val="0"/>
               </a:spcAft>
-              <a:defRPr sz="1700" b="1">
+              <a:defRPr sz="1500" b="1">
                 <a:solidFill>
                   <a:srgbClr val="122C4E"/>
                 </a:solidFill>
@@ -12089,8 +12417,8 @@
         </p:nvSpPr>
         <p:spPr>
           <a:xfrm>
-            <a:off x="658368" y="2103120"/>
-            <a:ext cx="10972800" cy="493776"/>
+            <a:off x="658368" y="1956816"/>
+            <a:ext cx="10972800" cy="603504"/>
           </a:xfrm>
           <a:prstGeom prst="rect">
             <a:avLst/>
@@ -12134,7 +12462,11 @@
               </a:defRPr>
             </a:pPr>
             <a:r>
-              <a:t>파일 생성/열기: mkdir -p ~/agv_ws/src/agv_gazebo/models/agv    &amp;&amp;    nano ~/agv_ws/src/agv_gazebo/models/agv/model.sdf</a:t>
+              <a:t>파일 생성: mkdir -p ~/agv_ws/src/agv_gazebo/models/agv</a:t>
+            </a:r>
+            <a:br/>
+            <a:r>
+              <a:t>파일 열기: nano ~/agv_ws/src/agv_gazebo/models/agv/model.sdf</a:t>
             </a:r>
           </a:p>
         </p:txBody>
@@ -12147,8 +12479,8 @@
         </p:nvSpPr>
         <p:spPr>
           <a:xfrm>
-            <a:off x="658368" y="2761488"/>
-            <a:ext cx="10972800" cy="3383280"/>
+            <a:off x="658368" y="2706624"/>
+            <a:ext cx="10972800" cy="3364992"/>
           </a:xfrm>
           <a:prstGeom prst="rect">
             <a:avLst/>
@@ -12192,59 +12524,51 @@
               </a:defRPr>
             </a:pPr>
             <a:r>
-              <a:t>      &lt;child&gt;left_wheel_link&lt;/child&gt;</a:t>
-            </a:r>
-            <a:br/>
-            <a:r>
-              <a:t>      &lt;axis&gt;</a:t>
-            </a:r>
-            <a:br/>
-            <a:r>
-              <a:t>        &lt;xyz&gt;0 1 0&lt;/xyz&gt;</a:t>
-            </a:r>
-            <a:br/>
-            <a:r>
-              <a:t>        &lt;limit&gt;</a:t>
-            </a:r>
-            <a:br/>
-            <a:r>
-              <a:t>          &lt;lower&gt;-1e16&lt;/lower&gt;</a:t>
-            </a:r>
-            <a:br/>
-            <a:r>
-              <a:t>          &lt;upper&gt;1e16&lt;/upper&gt;</a:t>
-            </a:r>
-            <a:br/>
-            <a:r>
-              <a:t>        &lt;/limit&gt;</a:t>
-            </a:r>
-            <a:br/>
-            <a:r>
-              <a:t>      &lt;/axis&gt;</a:t>
-            </a:r>
-            <a:br/>
-            <a:r>
-              <a:t>    &lt;/joint&gt;</a:t>
-            </a:r>
-            <a:br/>
-            <a:r>
-              <a:t>    </a:t>
-            </a:r>
-            <a:br/>
-            <a:r>
-              <a:t>    </a:t>
-            </a:r>
-            <a:br/>
-            <a:r>
-              <a:t>    &lt;joint name="right_wheel_joint" type="revolute"&gt;</a:t>
-            </a:r>
-            <a:br/>
-            <a:r>
-              <a:t>      &lt;parent&gt;base_link&lt;/parent&gt;</a:t>
-            </a:r>
-            <a:br/>
-            <a:r>
-              <a:t>      &lt;child&gt;right_wheel_link&lt;/child&gt;</a:t>
+              <a:t>        &lt;geometry&gt;</a:t>
+            </a:r>
+            <a:br/>
+            <a:r>
+              <a:t>          &lt;cylinder&gt;</a:t>
+            </a:r>
+            <a:br/>
+            <a:r>
+              <a:t>            &lt;radius&gt;0.08&lt;/radius&gt;</a:t>
+            </a:r>
+            <a:br/>
+            <a:r>
+              <a:t>            &lt;length&gt;0.05&lt;/length&gt;</a:t>
+            </a:r>
+            <a:br/>
+            <a:r>
+              <a:t>          &lt;/cylinder&gt;</a:t>
+            </a:r>
+            <a:br/>
+            <a:r>
+              <a:t>        &lt;/geometry&gt;</a:t>
+            </a:r>
+            <a:br/>
+            <a:r>
+              <a:t>        &lt;surface&gt;</a:t>
+            </a:r>
+            <a:br/>
+            <a:r>
+              <a:t>          &lt;friction&gt;</a:t>
+            </a:r>
+            <a:br/>
+            <a:r>
+              <a:t>            &lt;ode&gt;</a:t>
+            </a:r>
+            <a:br/>
+            <a:r>
+              <a:t>              &lt;mu&gt;1.0&lt;/mu&gt;</a:t>
+            </a:r>
+            <a:br/>
+            <a:r>
+              <a:t>              &lt;mu2&gt;1.0&lt;/mu2&gt;</a:t>
+            </a:r>
+            <a:br/>
+            <a:r>
+              <a:t>            &lt;/ode&gt;</a:t>
             </a:r>
           </a:p>
         </p:txBody>
@@ -12257,7 +12581,7 @@
         </p:nvSpPr>
         <p:spPr>
           <a:xfrm>
-            <a:off x="749808" y="6199632"/>
+            <a:off x="749808" y="6181344"/>
             <a:ext cx="10789920" cy="201168"/>
           </a:xfrm>
           <a:prstGeom prst="rect">
@@ -12283,7 +12607,7 @@
               </a:defRPr>
             </a:pPr>
             <a:r>
-              <a:t>파일 전체 11/21 · 이 슬라이드 다음에 같은 파일의 나머지 줄이 이어집니다.</a:t>
+              <a:t>파일 전체 11/24 · 이 슬라이드 다음에 같은 파일의 나머지 줄이 이어집니다.</a:t>
             </a:r>
           </a:p>
         </p:txBody>
@@ -12801,7 +13125,7 @@
               </a:defRPr>
             </a:pPr>
             <a:r>
-              <a:t>파일을 계속 작성하고 저장한다 (12/21)</a:t>
+              <a:t>파일을 계속 작성하고 저장한다 (12/24)</a:t>
             </a:r>
           </a:p>
         </p:txBody>
@@ -12976,7 +13300,7 @@
               </a:defRPr>
             </a:pPr>
             <a:r>
-              <a:t>현재 단계 14/24    |    현재 폴더 ~/agv_ws    |    현재 터미널</a:t>
+              <a:t>현재 단계 14/27    |    현재 폴더 ~/agv_ws    |    현재 터미널</a:t>
             </a:r>
           </a:p>
         </p:txBody>
@@ -12989,8 +13313,8 @@
         </p:nvSpPr>
         <p:spPr>
           <a:xfrm>
-            <a:off x="658368" y="1682496"/>
-            <a:ext cx="10972800" cy="347472"/>
+            <a:off x="658368" y="1627632"/>
+            <a:ext cx="10972800" cy="256032"/>
           </a:xfrm>
           <a:prstGeom prst="rect">
             <a:avLst/>
@@ -13007,7 +13331,7 @@
               <a:spcAft>
                 <a:spcPts val="0"/>
               </a:spcAft>
-              <a:defRPr sz="1700" b="1">
+              <a:defRPr sz="1500" b="1">
                 <a:solidFill>
                   <a:srgbClr val="122C4E"/>
                 </a:solidFill>
@@ -13028,8 +13352,8 @@
         </p:nvSpPr>
         <p:spPr>
           <a:xfrm>
-            <a:off x="658368" y="2103120"/>
-            <a:ext cx="10972800" cy="493776"/>
+            <a:off x="658368" y="1956816"/>
+            <a:ext cx="10972800" cy="603504"/>
           </a:xfrm>
           <a:prstGeom prst="rect">
             <a:avLst/>
@@ -13073,7 +13397,11 @@
               </a:defRPr>
             </a:pPr>
             <a:r>
-              <a:t>파일 생성/열기: mkdir -p ~/agv_ws/src/agv_gazebo/models/agv    &amp;&amp;    nano ~/agv_ws/src/agv_gazebo/models/agv/model.sdf</a:t>
+              <a:t>파일 생성: mkdir -p ~/agv_ws/src/agv_gazebo/models/agv</a:t>
+            </a:r>
+            <a:br/>
+            <a:r>
+              <a:t>파일 열기: nano ~/agv_ws/src/agv_gazebo/models/agv/model.sdf</a:t>
             </a:r>
           </a:p>
         </p:txBody>
@@ -13086,8 +13414,8 @@
         </p:nvSpPr>
         <p:spPr>
           <a:xfrm>
-            <a:off x="658368" y="2761488"/>
-            <a:ext cx="10972800" cy="3383280"/>
+            <a:off x="658368" y="2706624"/>
+            <a:ext cx="10972800" cy="3364992"/>
           </a:xfrm>
           <a:prstGeom prst="rect">
             <a:avLst/>
@@ -13131,6 +13459,42 @@
               </a:defRPr>
             </a:pPr>
             <a:r>
+              <a:t>          &lt;/friction&gt;</a:t>
+            </a:r>
+            <a:br/>
+            <a:r>
+              <a:t>        &lt;/surface&gt;</a:t>
+            </a:r>
+            <a:br/>
+            <a:r>
+              <a:t>      &lt;/collision&gt;</a:t>
+            </a:r>
+            <a:br/>
+            <a:r>
+              <a:t>    &lt;/link&gt;</a:t>
+            </a:r>
+            <a:br/>
+            <a:r>
+              <a:t>    </a:t>
+            </a:r>
+            <a:br/>
+            <a:r>
+              <a:t>    </a:t>
+            </a:r>
+            <a:br/>
+            <a:r>
+              <a:t>    &lt;joint name="left_wheel_joint" type="revolute"&gt;</a:t>
+            </a:r>
+            <a:br/>
+            <a:r>
+              <a:t>      &lt;parent&gt;base_link&lt;/parent&gt;</a:t>
+            </a:r>
+            <a:br/>
+            <a:r>
+              <a:t>      &lt;child&gt;left_wheel_link&lt;/child&gt;</a:t>
+            </a:r>
+            <a:br/>
+            <a:r>
               <a:t>      &lt;axis&gt;</a:t>
             </a:r>
             <a:br/>
@@ -13140,50 +13504,6 @@
             <a:br/>
             <a:r>
               <a:t>        &lt;limit&gt;</a:t>
-            </a:r>
-            <a:br/>
-            <a:r>
-              <a:t>          &lt;lower&gt;-1e16&lt;/lower&gt;</a:t>
-            </a:r>
-            <a:br/>
-            <a:r>
-              <a:t>          &lt;upper&gt;1e16&lt;/upper&gt;</a:t>
-            </a:r>
-            <a:br/>
-            <a:r>
-              <a:t>        &lt;/limit&gt;</a:t>
-            </a:r>
-            <a:br/>
-            <a:r>
-              <a:t>      &lt;/axis&gt;</a:t>
-            </a:r>
-            <a:br/>
-            <a:r>
-              <a:t>    &lt;/joint&gt;</a:t>
-            </a:r>
-            <a:br/>
-            <a:r>
-              <a:t>    </a:t>
-            </a:r>
-            <a:br/>
-            <a:r>
-              <a:t>    </a:t>
-            </a:r>
-            <a:br/>
-            <a:r>
-              <a:t>    &lt;link name="caster_link"&gt;</a:t>
-            </a:r>
-            <a:br/>
-            <a:r>
-              <a:t>      &lt;pose relative_to="base_link"&gt;-0.24 0 -0.12 0 0 0&lt;/pose&gt;</a:t>
-            </a:r>
-            <a:br/>
-            <a:r>
-              <a:t>      &lt;inertial&gt;</a:t>
-            </a:r>
-            <a:br/>
-            <a:r>
-              <a:t>        &lt;mass&gt;0.15&lt;/mass&gt;</a:t>
             </a:r>
           </a:p>
         </p:txBody>
@@ -13196,7 +13516,7 @@
         </p:nvSpPr>
         <p:spPr>
           <a:xfrm>
-            <a:off x="749808" y="6199632"/>
+            <a:off x="749808" y="6181344"/>
             <a:ext cx="10789920" cy="201168"/>
           </a:xfrm>
           <a:prstGeom prst="rect">
@@ -13222,7 +13542,7 @@
               </a:defRPr>
             </a:pPr>
             <a:r>
-              <a:t>파일 전체 12/21 · 이 슬라이드 다음에 같은 파일의 나머지 줄이 이어집니다.</a:t>
+              <a:t>파일 전체 12/24 · 이 슬라이드 다음에 같은 파일의 나머지 줄이 이어집니다.</a:t>
             </a:r>
           </a:p>
         </p:txBody>
@@ -13279,7 +13599,7 @@
               </a:defRPr>
             </a:pPr>
             <a:r>
-              <a:t>파일을 계속 작성하고 저장한다 (13/21)</a:t>
+              <a:t>파일을 계속 작성하고 저장한다 (13/24)</a:t>
             </a:r>
           </a:p>
         </p:txBody>
@@ -13454,7 +13774,7 @@
               </a:defRPr>
             </a:pPr>
             <a:r>
-              <a:t>현재 단계 15/24    |    현재 폴더 ~/agv_ws    |    현재 터미널</a:t>
+              <a:t>현재 단계 15/27    |    현재 폴더 ~/agv_ws    |    현재 터미널</a:t>
             </a:r>
           </a:p>
         </p:txBody>
@@ -13467,8 +13787,8 @@
         </p:nvSpPr>
         <p:spPr>
           <a:xfrm>
-            <a:off x="658368" y="1682496"/>
-            <a:ext cx="10972800" cy="347472"/>
+            <a:off x="658368" y="1627632"/>
+            <a:ext cx="10972800" cy="256032"/>
           </a:xfrm>
           <a:prstGeom prst="rect">
             <a:avLst/>
@@ -13485,7 +13805,7 @@
               <a:spcAft>
                 <a:spcPts val="0"/>
               </a:spcAft>
-              <a:defRPr sz="1700" b="1">
+              <a:defRPr sz="1500" b="1">
                 <a:solidFill>
                   <a:srgbClr val="122C4E"/>
                 </a:solidFill>
@@ -13506,8 +13826,8 @@
         </p:nvSpPr>
         <p:spPr>
           <a:xfrm>
-            <a:off x="658368" y="2103120"/>
-            <a:ext cx="10972800" cy="493776"/>
+            <a:off x="658368" y="1956816"/>
+            <a:ext cx="10972800" cy="603504"/>
           </a:xfrm>
           <a:prstGeom prst="rect">
             <a:avLst/>
@@ -13551,7 +13871,11 @@
               </a:defRPr>
             </a:pPr>
             <a:r>
-              <a:t>파일 생성/열기: mkdir -p ~/agv_ws/src/agv_gazebo/models/agv    &amp;&amp;    nano ~/agv_ws/src/agv_gazebo/models/agv/model.sdf</a:t>
+              <a:t>파일 생성: mkdir -p ~/agv_ws/src/agv_gazebo/models/agv</a:t>
+            </a:r>
+            <a:br/>
+            <a:r>
+              <a:t>파일 열기: nano ~/agv_ws/src/agv_gazebo/models/agv/model.sdf</a:t>
             </a:r>
           </a:p>
         </p:txBody>
@@ -13564,8 +13888,8 @@
         </p:nvSpPr>
         <p:spPr>
           <a:xfrm>
-            <a:off x="658368" y="2761488"/>
-            <a:ext cx="10972800" cy="3383280"/>
+            <a:off x="658368" y="2706624"/>
+            <a:ext cx="10972800" cy="3364992"/>
           </a:xfrm>
           <a:prstGeom prst="rect">
             <a:avLst/>
@@ -13609,59 +13933,51 @@
               </a:defRPr>
             </a:pPr>
             <a:r>
-              <a:t>        &lt;inertia&gt;</a:t>
-            </a:r>
-            <a:br/>
-            <a:r>
-              <a:t>          &lt;ixx&gt;0.0001&lt;/ixx&gt;</a:t>
-            </a:r>
-            <a:br/>
-            <a:r>
-              <a:t>          &lt;iyy&gt;0.0001&lt;/iyy&gt;</a:t>
-            </a:r>
-            <a:br/>
-            <a:r>
-              <a:t>          &lt;izz&gt;0.0001&lt;/izz&gt;</a:t>
-            </a:r>
-            <a:br/>
-            <a:r>
-              <a:t>        &lt;/inertia&gt;</a:t>
-            </a:r>
-            <a:br/>
-            <a:r>
-              <a:t>      &lt;/inertial&gt;</a:t>
-            </a:r>
-            <a:br/>
-            <a:r>
-              <a:t>      &lt;visual name="caster"&gt;</a:t>
-            </a:r>
-            <a:br/>
-            <a:r>
-              <a:t>        &lt;geometry&gt;</a:t>
-            </a:r>
-            <a:br/>
-            <a:r>
-              <a:t>          &lt;sphere&gt;</a:t>
-            </a:r>
-            <a:br/>
-            <a:r>
-              <a:t>            &lt;radius&gt;0.04&lt;/radius&gt;</a:t>
-            </a:r>
-            <a:br/>
-            <a:r>
-              <a:t>          &lt;/sphere&gt;</a:t>
-            </a:r>
-            <a:br/>
-            <a:r>
-              <a:t>        &lt;/geometry&gt;</a:t>
-            </a:r>
-            <a:br/>
-            <a:r>
-              <a:t>      &lt;/visual&gt;</a:t>
-            </a:r>
-            <a:br/>
-            <a:r>
-              <a:t>      &lt;collision name="caster_collision"&gt;</a:t>
+              <a:t>          &lt;lower&gt;-1e16&lt;/lower&gt;</a:t>
+            </a:r>
+            <a:br/>
+            <a:r>
+              <a:t>          &lt;upper&gt;1e16&lt;/upper&gt;</a:t>
+            </a:r>
+            <a:br/>
+            <a:r>
+              <a:t>        &lt;/limit&gt;</a:t>
+            </a:r>
+            <a:br/>
+            <a:r>
+              <a:t>      &lt;/axis&gt;</a:t>
+            </a:r>
+            <a:br/>
+            <a:r>
+              <a:t>    &lt;/joint&gt;</a:t>
+            </a:r>
+            <a:br/>
+            <a:r>
+              <a:t>    </a:t>
+            </a:r>
+            <a:br/>
+            <a:r>
+              <a:t>    </a:t>
+            </a:r>
+            <a:br/>
+            <a:r>
+              <a:t>    &lt;joint name="right_wheel_joint" type="revolute"&gt;</a:t>
+            </a:r>
+            <a:br/>
+            <a:r>
+              <a:t>      &lt;parent&gt;base_link&lt;/parent&gt;</a:t>
+            </a:r>
+            <a:br/>
+            <a:r>
+              <a:t>      &lt;child&gt;right_wheel_link&lt;/child&gt;</a:t>
+            </a:r>
+            <a:br/>
+            <a:r>
+              <a:t>      &lt;axis&gt;</a:t>
+            </a:r>
+            <a:br/>
+            <a:r>
+              <a:t>        &lt;xyz&gt;0 1 0&lt;/xyz&gt;</a:t>
             </a:r>
           </a:p>
         </p:txBody>
@@ -13674,7 +13990,7 @@
         </p:nvSpPr>
         <p:spPr>
           <a:xfrm>
-            <a:off x="749808" y="6199632"/>
+            <a:off x="749808" y="6181344"/>
             <a:ext cx="10789920" cy="201168"/>
           </a:xfrm>
           <a:prstGeom prst="rect">
@@ -13700,7 +14016,7 @@
               </a:defRPr>
             </a:pPr>
             <a:r>
-              <a:t>파일 전체 13/21 · 이 슬라이드 다음에 같은 파일의 나머지 줄이 이어집니다.</a:t>
+              <a:t>파일 전체 13/24 · 이 슬라이드 다음에 같은 파일의 나머지 줄이 이어집니다.</a:t>
             </a:r>
           </a:p>
         </p:txBody>
@@ -13757,7 +14073,7 @@
               </a:defRPr>
             </a:pPr>
             <a:r>
-              <a:t>파일을 계속 작성하고 저장한다 (14/21)</a:t>
+              <a:t>파일을 계속 작성하고 저장한다 (14/24)</a:t>
             </a:r>
           </a:p>
         </p:txBody>
@@ -13932,7 +14248,7 @@
               </a:defRPr>
             </a:pPr>
             <a:r>
-              <a:t>현재 단계 16/24    |    현재 폴더 ~/agv_ws    |    현재 터미널</a:t>
+              <a:t>현재 단계 16/27    |    현재 폴더 ~/agv_ws    |    현재 터미널</a:t>
             </a:r>
           </a:p>
         </p:txBody>
@@ -13945,8 +14261,8 @@
         </p:nvSpPr>
         <p:spPr>
           <a:xfrm>
-            <a:off x="658368" y="1682496"/>
-            <a:ext cx="10972800" cy="347472"/>
+            <a:off x="658368" y="1627632"/>
+            <a:ext cx="10972800" cy="256032"/>
           </a:xfrm>
           <a:prstGeom prst="rect">
             <a:avLst/>
@@ -13963,7 +14279,7 @@
               <a:spcAft>
                 <a:spcPts val="0"/>
               </a:spcAft>
-              <a:defRPr sz="1700" b="1">
+              <a:defRPr sz="1500" b="1">
                 <a:solidFill>
                   <a:srgbClr val="122C4E"/>
                 </a:solidFill>
@@ -13984,8 +14300,8 @@
         </p:nvSpPr>
         <p:spPr>
           <a:xfrm>
-            <a:off x="658368" y="2103120"/>
-            <a:ext cx="10972800" cy="493776"/>
+            <a:off x="658368" y="1956816"/>
+            <a:ext cx="10972800" cy="603504"/>
           </a:xfrm>
           <a:prstGeom prst="rect">
             <a:avLst/>
@@ -14029,7 +14345,11 @@
               </a:defRPr>
             </a:pPr>
             <a:r>
-              <a:t>파일 생성/열기: mkdir -p ~/agv_ws/src/agv_gazebo/models/agv    &amp;&amp;    nano ~/agv_ws/src/agv_gazebo/models/agv/model.sdf</a:t>
+              <a:t>파일 생성: mkdir -p ~/agv_ws/src/agv_gazebo/models/agv</a:t>
+            </a:r>
+            <a:br/>
+            <a:r>
+              <a:t>파일 열기: nano ~/agv_ws/src/agv_gazebo/models/agv/model.sdf</a:t>
             </a:r>
           </a:p>
         </p:txBody>
@@ -14042,8 +14362,8 @@
         </p:nvSpPr>
         <p:spPr>
           <a:xfrm>
-            <a:off x="658368" y="2761488"/>
-            <a:ext cx="10972800" cy="3383280"/>
+            <a:off x="658368" y="2706624"/>
+            <a:ext cx="10972800" cy="3364992"/>
           </a:xfrm>
           <a:prstGeom prst="rect">
             <a:avLst/>
@@ -14087,31 +14407,27 @@
               </a:defRPr>
             </a:pPr>
             <a:r>
-              <a:t>        &lt;geometry&gt;</a:t>
-            </a:r>
-            <a:br/>
-            <a:r>
-              <a:t>          &lt;sphere&gt;</a:t>
-            </a:r>
-            <a:br/>
-            <a:r>
-              <a:t>            &lt;radius&gt;0.04&lt;/radius&gt;</a:t>
-            </a:r>
-            <a:br/>
-            <a:r>
-              <a:t>          &lt;/sphere&gt;</a:t>
-            </a:r>
-            <a:br/>
-            <a:r>
-              <a:t>        &lt;/geometry&gt;</a:t>
-            </a:r>
-            <a:br/>
-            <a:r>
-              <a:t>      &lt;/collision&gt;</a:t>
-            </a:r>
-            <a:br/>
-            <a:r>
-              <a:t>    &lt;/link&gt;</a:t>
+              <a:t>        &lt;limit&gt;</a:t>
+            </a:r>
+            <a:br/>
+            <a:r>
+              <a:t>          &lt;lower&gt;-1e16&lt;/lower&gt;</a:t>
+            </a:r>
+            <a:br/>
+            <a:r>
+              <a:t>          &lt;upper&gt;1e16&lt;/upper&gt;</a:t>
+            </a:r>
+            <a:br/>
+            <a:r>
+              <a:t>        &lt;/limit&gt;</a:t>
+            </a:r>
+            <a:br/>
+            <a:r>
+              <a:t>      &lt;/axis&gt;</a:t>
+            </a:r>
+            <a:br/>
+            <a:r>
+              <a:t>    &lt;/joint&gt;</a:t>
             </a:r>
             <a:br/>
             <a:r>
@@ -14123,23 +14439,19 @@
             </a:r>
             <a:br/>
             <a:r>
-              <a:t>    &lt;joint name="caster_joint" type="fixed"&gt;</a:t>
-            </a:r>
-            <a:br/>
-            <a:r>
-              <a:t>      &lt;parent&gt;base_link&lt;/parent&gt;</a:t>
-            </a:r>
-            <a:br/>
-            <a:r>
-              <a:t>      &lt;child&gt;caster_link&lt;/child&gt;</a:t>
-            </a:r>
-            <a:br/>
-            <a:r>
-              <a:t>    &lt;/joint&gt;</a:t>
-            </a:r>
-            <a:br/>
-            <a:r>
-              <a:t>    </a:t>
+              <a:t>    &lt;link name="caster_link"&gt;</a:t>
+            </a:r>
+            <a:br/>
+            <a:r>
+              <a:t>      &lt;pose relative_to="base_link"&gt;-0.24 0 -0.12 0 0 0&lt;/pose&gt;</a:t>
+            </a:r>
+            <a:br/>
+            <a:r>
+              <a:t>      &lt;inertial&gt;</a:t>
+            </a:r>
+            <a:br/>
+            <a:r>
+              <a:t>        &lt;mass&gt;0.15&lt;/mass&gt;</a:t>
             </a:r>
           </a:p>
         </p:txBody>
@@ -14152,7 +14464,7 @@
         </p:nvSpPr>
         <p:spPr>
           <a:xfrm>
-            <a:off x="749808" y="6199632"/>
+            <a:off x="749808" y="6181344"/>
             <a:ext cx="10789920" cy="201168"/>
           </a:xfrm>
           <a:prstGeom prst="rect">
@@ -14178,7 +14490,7 @@
               </a:defRPr>
             </a:pPr>
             <a:r>
-              <a:t>파일 전체 14/21 · 이 슬라이드 다음에 같은 파일의 나머지 줄이 이어집니다.</a:t>
+              <a:t>파일 전체 14/24 · 이 슬라이드 다음에 같은 파일의 나머지 줄이 이어집니다.</a:t>
             </a:r>
           </a:p>
         </p:txBody>
@@ -14235,7 +14547,7 @@
               </a:defRPr>
             </a:pPr>
             <a:r>
-              <a:t>파일을 계속 작성하고 저장한다 (15/21)</a:t>
+              <a:t>파일을 계속 작성하고 저장한다 (15/24)</a:t>
             </a:r>
           </a:p>
         </p:txBody>
@@ -14410,7 +14722,7 @@
               </a:defRPr>
             </a:pPr>
             <a:r>
-              <a:t>현재 단계 17/24    |    현재 폴더 ~/agv_ws    |    현재 터미널</a:t>
+              <a:t>현재 단계 17/27    |    현재 폴더 ~/agv_ws    |    현재 터미널</a:t>
             </a:r>
           </a:p>
         </p:txBody>
@@ -14423,8 +14735,8 @@
         </p:nvSpPr>
         <p:spPr>
           <a:xfrm>
-            <a:off x="658368" y="1682496"/>
-            <a:ext cx="10972800" cy="347472"/>
+            <a:off x="658368" y="1627632"/>
+            <a:ext cx="10972800" cy="256032"/>
           </a:xfrm>
           <a:prstGeom prst="rect">
             <a:avLst/>
@@ -14441,7 +14753,7 @@
               <a:spcAft>
                 <a:spcPts val="0"/>
               </a:spcAft>
-              <a:defRPr sz="1700" b="1">
+              <a:defRPr sz="1500" b="1">
                 <a:solidFill>
                   <a:srgbClr val="122C4E"/>
                 </a:solidFill>
@@ -14462,8 +14774,8 @@
         </p:nvSpPr>
         <p:spPr>
           <a:xfrm>
-            <a:off x="658368" y="2103120"/>
-            <a:ext cx="10972800" cy="493776"/>
+            <a:off x="658368" y="1956816"/>
+            <a:ext cx="10972800" cy="603504"/>
           </a:xfrm>
           <a:prstGeom prst="rect">
             <a:avLst/>
@@ -14507,7 +14819,11 @@
               </a:defRPr>
             </a:pPr>
             <a:r>
-              <a:t>파일 생성/열기: mkdir -p ~/agv_ws/src/agv_gazebo/models/agv    &amp;&amp;    nano ~/agv_ws/src/agv_gazebo/models/agv/model.sdf</a:t>
+              <a:t>파일 생성: mkdir -p ~/agv_ws/src/agv_gazebo/models/agv</a:t>
+            </a:r>
+            <a:br/>
+            <a:r>
+              <a:t>파일 열기: nano ~/agv_ws/src/agv_gazebo/models/agv/model.sdf</a:t>
             </a:r>
           </a:p>
         </p:txBody>
@@ -14520,8 +14836,8 @@
         </p:nvSpPr>
         <p:spPr>
           <a:xfrm>
-            <a:off x="658368" y="2761488"/>
-            <a:ext cx="10972800" cy="3383280"/>
+            <a:off x="658368" y="2706624"/>
+            <a:ext cx="10972800" cy="3364992"/>
           </a:xfrm>
           <a:prstGeom prst="rect">
             <a:avLst/>
@@ -14565,19 +14881,31 @@
               </a:defRPr>
             </a:pPr>
             <a:r>
-              <a:t>    </a:t>
-            </a:r>
-            <a:br/>
-            <a:r>
-              <a:t>    &lt;link name="lidar_link"&gt;</a:t>
-            </a:r>
-            <a:br/>
-            <a:r>
-              <a:t>      &lt;pose relative_to="base_link"&gt;0.12 0 0.13 0 0 0&lt;/pose&gt;</a:t>
-            </a:r>
-            <a:br/>
-            <a:r>
-              <a:t>      &lt;visual name="housing"&gt;</a:t>
+              <a:t>        &lt;inertia&gt;</a:t>
+            </a:r>
+            <a:br/>
+            <a:r>
+              <a:t>          &lt;ixx&gt;0.0001&lt;/ixx&gt;</a:t>
+            </a:r>
+            <a:br/>
+            <a:r>
+              <a:t>          &lt;iyy&gt;0.0001&lt;/iyy&gt;</a:t>
+            </a:r>
+            <a:br/>
+            <a:r>
+              <a:t>          &lt;izz&gt;0.0001&lt;/izz&gt;</a:t>
+            </a:r>
+            <a:br/>
+            <a:r>
+              <a:t>        &lt;/inertia&gt;</a:t>
+            </a:r>
+            <a:br/>
+            <a:r>
+              <a:t>      &lt;/inertial&gt;</a:t>
+            </a:r>
+            <a:br/>
+            <a:r>
+              <a:t>      &lt;visual name="caster"&gt;</a:t>
             </a:r>
             <a:br/>
             <a:r>
@@ -14585,39 +14913,19 @@
             </a:r>
             <a:br/>
             <a:r>
-              <a:t>          &lt;cylinder&gt;</a:t>
-            </a:r>
-            <a:br/>
-            <a:r>
-              <a:t>            &lt;radius&gt;0.045&lt;/radius&gt;</a:t>
-            </a:r>
-            <a:br/>
-            <a:r>
-              <a:t>            &lt;length&gt;0.05&lt;/length&gt;</a:t>
-            </a:r>
-            <a:br/>
-            <a:r>
-              <a:t>          &lt;/cylinder&gt;</a:t>
+              <a:t>          &lt;sphere&gt;</a:t>
+            </a:r>
+            <a:br/>
+            <a:r>
+              <a:t>            &lt;radius&gt;0.04&lt;/radius&gt;</a:t>
+            </a:r>
+            <a:br/>
+            <a:r>
+              <a:t>          &lt;/sphere&gt;</a:t>
             </a:r>
             <a:br/>
             <a:r>
               <a:t>        &lt;/geometry&gt;</a:t>
-            </a:r>
-            <a:br/>
-            <a:r>
-              <a:t>      &lt;/visual&gt;</a:t>
-            </a:r>
-            <a:br/>
-            <a:r>
-              <a:t>      &lt;sensor name="lidar" type="gpu_lidar"&gt;</a:t>
-            </a:r>
-            <a:br/>
-            <a:r>
-              <a:t>        &lt;topic&gt;/scan&lt;/topic&gt;</a:t>
-            </a:r>
-            <a:br/>
-            <a:r>
-              <a:t>        &lt;always_on&gt;true&lt;/always_on&gt;</a:t>
             </a:r>
           </a:p>
         </p:txBody>
@@ -14630,7 +14938,7 @@
         </p:nvSpPr>
         <p:spPr>
           <a:xfrm>
-            <a:off x="749808" y="6199632"/>
+            <a:off x="749808" y="6181344"/>
             <a:ext cx="10789920" cy="201168"/>
           </a:xfrm>
           <a:prstGeom prst="rect">
@@ -14656,7 +14964,7 @@
               </a:defRPr>
             </a:pPr>
             <a:r>
-              <a:t>파일 전체 15/21 · 이 슬라이드 다음에 같은 파일의 나머지 줄이 이어집니다.</a:t>
+              <a:t>파일 전체 15/24 · 이 슬라이드 다음에 같은 파일의 나머지 줄이 이어집니다.</a:t>
             </a:r>
           </a:p>
         </p:txBody>
@@ -14713,7 +15021,7 @@
               </a:defRPr>
             </a:pPr>
             <a:r>
-              <a:t>파일을 계속 작성하고 저장한다 (16/21)</a:t>
+              <a:t>파일을 계속 작성하고 저장한다 (16/24)</a:t>
             </a:r>
           </a:p>
         </p:txBody>
@@ -14888,7 +15196,7 @@
               </a:defRPr>
             </a:pPr>
             <a:r>
-              <a:t>현재 단계 18/24    |    현재 폴더 ~/agv_ws    |    현재 터미널</a:t>
+              <a:t>현재 단계 18/27    |    현재 폴더 ~/agv_ws    |    현재 터미널</a:t>
             </a:r>
           </a:p>
         </p:txBody>
@@ -14901,8 +15209,8 @@
         </p:nvSpPr>
         <p:spPr>
           <a:xfrm>
-            <a:off x="658368" y="1682496"/>
-            <a:ext cx="10972800" cy="347472"/>
+            <a:off x="658368" y="1627632"/>
+            <a:ext cx="10972800" cy="256032"/>
           </a:xfrm>
           <a:prstGeom prst="rect">
             <a:avLst/>
@@ -14919,7 +15227,7 @@
               <a:spcAft>
                 <a:spcPts val="0"/>
               </a:spcAft>
-              <a:defRPr sz="1700" b="1">
+              <a:defRPr sz="1500" b="1">
                 <a:solidFill>
                   <a:srgbClr val="122C4E"/>
                 </a:solidFill>
@@ -14940,8 +15248,8 @@
         </p:nvSpPr>
         <p:spPr>
           <a:xfrm>
-            <a:off x="658368" y="2103120"/>
-            <a:ext cx="10972800" cy="493776"/>
+            <a:off x="658368" y="1956816"/>
+            <a:ext cx="10972800" cy="603504"/>
           </a:xfrm>
           <a:prstGeom prst="rect">
             <a:avLst/>
@@ -14985,7 +15293,11 @@
               </a:defRPr>
             </a:pPr>
             <a:r>
-              <a:t>파일 생성/열기: mkdir -p ~/agv_ws/src/agv_gazebo/models/agv    &amp;&amp;    nano ~/agv_ws/src/agv_gazebo/models/agv/model.sdf</a:t>
+              <a:t>파일 생성: mkdir -p ~/agv_ws/src/agv_gazebo/models/agv</a:t>
+            </a:r>
+            <a:br/>
+            <a:r>
+              <a:t>파일 열기: nano ~/agv_ws/src/agv_gazebo/models/agv/model.sdf</a:t>
             </a:r>
           </a:p>
         </p:txBody>
@@ -14998,8 +15310,8 @@
         </p:nvSpPr>
         <p:spPr>
           <a:xfrm>
-            <a:off x="658368" y="2761488"/>
-            <a:ext cx="10972800" cy="3383280"/>
+            <a:off x="658368" y="2706624"/>
+            <a:ext cx="10972800" cy="3364992"/>
           </a:xfrm>
           <a:prstGeom prst="rect">
             <a:avLst/>
@@ -15043,59 +15355,51 @@
               </a:defRPr>
             </a:pPr>
             <a:r>
-              <a:t>        &lt;update_rate&gt;10&lt;/update_rate&gt;</a:t>
-            </a:r>
-            <a:br/>
-            <a:r>
-              <a:t>        &lt;visualize&gt;false&lt;/visualize&gt;</a:t>
-            </a:r>
-            <a:br/>
-            <a:r>
-              <a:t>        &lt;lidar&gt;</a:t>
-            </a:r>
-            <a:br/>
-            <a:r>
-              <a:t>          &lt;scan&gt;</a:t>
-            </a:r>
-            <a:br/>
-            <a:r>
-              <a:t>            &lt;horizontal&gt;</a:t>
-            </a:r>
-            <a:br/>
-            <a:r>
-              <a:t>              &lt;samples&gt;720&lt;/samples&gt;</a:t>
-            </a:r>
-            <a:br/>
-            <a:r>
-              <a:t>              &lt;resolution&gt;1&lt;/resolution&gt;</a:t>
-            </a:r>
-            <a:br/>
-            <a:r>
-              <a:t>              &lt;min_angle&gt;-3.14159&lt;/min_angle&gt;</a:t>
-            </a:r>
-            <a:br/>
-            <a:r>
-              <a:t>              &lt;max_angle&gt;3.14159&lt;/max_angle&gt;</a:t>
-            </a:r>
-            <a:br/>
-            <a:r>
-              <a:t>            &lt;/horizontal&gt;</a:t>
-            </a:r>
-            <a:br/>
-            <a:r>
-              <a:t>          &lt;/scan&gt;</a:t>
-            </a:r>
-            <a:br/>
-            <a:r>
-              <a:t>          &lt;range&gt;</a:t>
-            </a:r>
-            <a:br/>
-            <a:r>
-              <a:t>            &lt;min&gt;0.12&lt;/min&gt;</a:t>
-            </a:r>
-            <a:br/>
-            <a:r>
-              <a:t>            &lt;max&gt;12.0&lt;/max&gt;</a:t>
+              <a:t>      &lt;/visual&gt;</a:t>
+            </a:r>
+            <a:br/>
+            <a:r>
+              <a:t>      &lt;collision name="caster_collision"&gt;</a:t>
+            </a:r>
+            <a:br/>
+            <a:r>
+              <a:t>        &lt;geometry&gt;</a:t>
+            </a:r>
+            <a:br/>
+            <a:r>
+              <a:t>          &lt;sphere&gt;</a:t>
+            </a:r>
+            <a:br/>
+            <a:r>
+              <a:t>            &lt;radius&gt;0.04&lt;/radius&gt;</a:t>
+            </a:r>
+            <a:br/>
+            <a:r>
+              <a:t>          &lt;/sphere&gt;</a:t>
+            </a:r>
+            <a:br/>
+            <a:r>
+              <a:t>        &lt;/geometry&gt;</a:t>
+            </a:r>
+            <a:br/>
+            <a:r>
+              <a:t>      &lt;/collision&gt;</a:t>
+            </a:r>
+            <a:br/>
+            <a:r>
+              <a:t>    &lt;/link&gt;</a:t>
+            </a:r>
+            <a:br/>
+            <a:r>
+              <a:t>    </a:t>
+            </a:r>
+            <a:br/>
+            <a:r>
+              <a:t>    </a:t>
+            </a:r>
+            <a:br/>
+            <a:r>
+              <a:t>    &lt;joint name="caster_joint" type="fixed"&gt;</a:t>
             </a:r>
           </a:p>
         </p:txBody>
@@ -15108,7 +15412,7 @@
         </p:nvSpPr>
         <p:spPr>
           <a:xfrm>
-            <a:off x="749808" y="6199632"/>
+            <a:off x="749808" y="6181344"/>
             <a:ext cx="10789920" cy="201168"/>
           </a:xfrm>
           <a:prstGeom prst="rect">
@@ -15134,7 +15438,7 @@
               </a:defRPr>
             </a:pPr>
             <a:r>
-              <a:t>파일 전체 16/21 · 이 슬라이드 다음에 같은 파일의 나머지 줄이 이어집니다.</a:t>
+              <a:t>파일 전체 16/24 · 이 슬라이드 다음에 같은 파일의 나머지 줄이 이어집니다.</a:t>
             </a:r>
           </a:p>
         </p:txBody>
@@ -15191,7 +15495,7 @@
               </a:defRPr>
             </a:pPr>
             <a:r>
-              <a:t>파일을 계속 작성하고 저장한다 (17/21)</a:t>
+              <a:t>파일을 계속 작성하고 저장한다 (17/24)</a:t>
             </a:r>
           </a:p>
         </p:txBody>
@@ -15366,7 +15670,7 @@
               </a:defRPr>
             </a:pPr>
             <a:r>
-              <a:t>현재 단계 19/24    |    현재 폴더 ~/agv_ws    |    현재 터미널</a:t>
+              <a:t>현재 단계 19/27    |    현재 폴더 ~/agv_ws    |    현재 터미널</a:t>
             </a:r>
           </a:p>
         </p:txBody>
@@ -15379,8 +15683,8 @@
         </p:nvSpPr>
         <p:spPr>
           <a:xfrm>
-            <a:off x="658368" y="1682496"/>
-            <a:ext cx="10972800" cy="347472"/>
+            <a:off x="658368" y="1627632"/>
+            <a:ext cx="10972800" cy="256032"/>
           </a:xfrm>
           <a:prstGeom prst="rect">
             <a:avLst/>
@@ -15397,7 +15701,7 @@
               <a:spcAft>
                 <a:spcPts val="0"/>
               </a:spcAft>
-              <a:defRPr sz="1700" b="1">
+              <a:defRPr sz="1500" b="1">
                 <a:solidFill>
                   <a:srgbClr val="122C4E"/>
                 </a:solidFill>
@@ -15418,8 +15722,8 @@
         </p:nvSpPr>
         <p:spPr>
           <a:xfrm>
-            <a:off x="658368" y="2103120"/>
-            <a:ext cx="10972800" cy="493776"/>
+            <a:off x="658368" y="1956816"/>
+            <a:ext cx="10972800" cy="603504"/>
           </a:xfrm>
           <a:prstGeom prst="rect">
             <a:avLst/>
@@ -15463,7 +15767,11 @@
               </a:defRPr>
             </a:pPr>
             <a:r>
-              <a:t>파일 생성/열기: mkdir -p ~/agv_ws/src/agv_gazebo/models/agv    &amp;&amp;    nano ~/agv_ws/src/agv_gazebo/models/agv/model.sdf</a:t>
+              <a:t>파일 생성: mkdir -p ~/agv_ws/src/agv_gazebo/models/agv</a:t>
+            </a:r>
+            <a:br/>
+            <a:r>
+              <a:t>파일 열기: nano ~/agv_ws/src/agv_gazebo/models/agv/model.sdf</a:t>
             </a:r>
           </a:p>
         </p:txBody>
@@ -15476,8 +15784,8 @@
         </p:nvSpPr>
         <p:spPr>
           <a:xfrm>
-            <a:off x="658368" y="2761488"/>
-            <a:ext cx="10972800" cy="3383280"/>
+            <a:off x="658368" y="2706624"/>
+            <a:ext cx="10972800" cy="3364992"/>
           </a:xfrm>
           <a:prstGeom prst="rect">
             <a:avLst/>
@@ -15521,23 +15829,15 @@
               </a:defRPr>
             </a:pPr>
             <a:r>
-              <a:t>            &lt;resolution&gt;0.01&lt;/resolution&gt;</a:t>
-            </a:r>
-            <a:br/>
-            <a:r>
-              <a:t>          &lt;/range&gt;</a:t>
-            </a:r>
-            <a:br/>
-            <a:r>
-              <a:t>        &lt;/lidar&gt;</a:t>
-            </a:r>
-            <a:br/>
-            <a:r>
-              <a:t>      &lt;/sensor&gt;</a:t>
-            </a:r>
-            <a:br/>
-            <a:r>
-              <a:t>    &lt;/link&gt;</a:t>
+              <a:t>      &lt;parent&gt;base_link&lt;/parent&gt;</a:t>
+            </a:r>
+            <a:br/>
+            <a:r>
+              <a:t>      &lt;child&gt;caster_link&lt;/child&gt;</a:t>
+            </a:r>
+            <a:br/>
+            <a:r>
+              <a:t>    &lt;/joint&gt;</a:t>
             </a:r>
             <a:br/>
             <a:r>
@@ -15549,31 +15849,31 @@
             </a:r>
             <a:br/>
             <a:r>
-              <a:t>    &lt;joint name="lidar_joint" type="fixed"&gt;</a:t>
-            </a:r>
-            <a:br/>
-            <a:r>
-              <a:t>      &lt;parent&gt;base_link&lt;/parent&gt;</a:t>
-            </a:r>
-            <a:br/>
-            <a:r>
-              <a:t>      &lt;child&gt;lidar_link&lt;/child&gt;</a:t>
-            </a:r>
-            <a:br/>
-            <a:r>
-              <a:t>    &lt;/joint&gt;</a:t>
-            </a:r>
-            <a:br/>
-            <a:r>
-              <a:t>    </a:t>
-            </a:r>
-            <a:br/>
-            <a:r>
-              <a:t>    </a:t>
-            </a:r>
-            <a:br/>
-            <a:r>
-              <a:t>    &lt;link name="camera_link"&gt;</a:t>
+              <a:t>    &lt;link name="lidar_link"&gt;</a:t>
+            </a:r>
+            <a:br/>
+            <a:r>
+              <a:t>      &lt;pose relative_to="base_link"&gt;0.12 0 0.13 0 0 0&lt;/pose&gt;</a:t>
+            </a:r>
+            <a:br/>
+            <a:r>
+              <a:t>      &lt;visual name="housing"&gt;</a:t>
+            </a:r>
+            <a:br/>
+            <a:r>
+              <a:t>        &lt;geometry&gt;</a:t>
+            </a:r>
+            <a:br/>
+            <a:r>
+              <a:t>          &lt;cylinder&gt;</a:t>
+            </a:r>
+            <a:br/>
+            <a:r>
+              <a:t>            &lt;radius&gt;0.045&lt;/radius&gt;</a:t>
+            </a:r>
+            <a:br/>
+            <a:r>
+              <a:t>            &lt;length&gt;0.05&lt;/length&gt;</a:t>
             </a:r>
           </a:p>
         </p:txBody>
@@ -15586,7 +15886,7 @@
         </p:nvSpPr>
         <p:spPr>
           <a:xfrm>
-            <a:off x="749808" y="6199632"/>
+            <a:off x="749808" y="6181344"/>
             <a:ext cx="10789920" cy="201168"/>
           </a:xfrm>
           <a:prstGeom prst="rect">
@@ -15612,7 +15912,7 @@
               </a:defRPr>
             </a:pPr>
             <a:r>
-              <a:t>파일 전체 17/21 · 이 슬라이드 다음에 같은 파일의 나머지 줄이 이어집니다.</a:t>
+              <a:t>파일 전체 17/24 · 이 슬라이드 다음에 같은 파일의 나머지 줄이 이어집니다.</a:t>
             </a:r>
           </a:p>
         </p:txBody>
@@ -15669,7 +15969,7 @@
               </a:defRPr>
             </a:pPr>
             <a:r>
-              <a:t>파일을 계속 작성하고 저장한다 (18/21)</a:t>
+              <a:t>파일을 계속 작성하고 저장한다 (18/24)</a:t>
             </a:r>
           </a:p>
         </p:txBody>
@@ -15844,7 +16144,7 @@
               </a:defRPr>
             </a:pPr>
             <a:r>
-              <a:t>현재 단계 20/24    |    현재 폴더 ~/agv_ws    |    현재 터미널</a:t>
+              <a:t>현재 단계 20/27    |    현재 폴더 ~/agv_ws    |    현재 터미널</a:t>
             </a:r>
           </a:p>
         </p:txBody>
@@ -15857,8 +16157,8 @@
         </p:nvSpPr>
         <p:spPr>
           <a:xfrm>
-            <a:off x="658368" y="1682496"/>
-            <a:ext cx="10972800" cy="347472"/>
+            <a:off x="658368" y="1627632"/>
+            <a:ext cx="10972800" cy="256032"/>
           </a:xfrm>
           <a:prstGeom prst="rect">
             <a:avLst/>
@@ -15875,7 +16175,7 @@
               <a:spcAft>
                 <a:spcPts val="0"/>
               </a:spcAft>
-              <a:defRPr sz="1700" b="1">
+              <a:defRPr sz="1500" b="1">
                 <a:solidFill>
                   <a:srgbClr val="122C4E"/>
                 </a:solidFill>
@@ -15896,8 +16196,8 @@
         </p:nvSpPr>
         <p:spPr>
           <a:xfrm>
-            <a:off x="658368" y="2103120"/>
-            <a:ext cx="10972800" cy="493776"/>
+            <a:off x="658368" y="1956816"/>
+            <a:ext cx="10972800" cy="603504"/>
           </a:xfrm>
           <a:prstGeom prst="rect">
             <a:avLst/>
@@ -15941,7 +16241,11 @@
               </a:defRPr>
             </a:pPr>
             <a:r>
-              <a:t>파일 생성/열기: mkdir -p ~/agv_ws/src/agv_gazebo/models/agv    &amp;&amp;    nano ~/agv_ws/src/agv_gazebo/models/agv/model.sdf</a:t>
+              <a:t>파일 생성: mkdir -p ~/agv_ws/src/agv_gazebo/models/agv</a:t>
+            </a:r>
+            <a:br/>
+            <a:r>
+              <a:t>파일 열기: nano ~/agv_ws/src/agv_gazebo/models/agv/model.sdf</a:t>
             </a:r>
           </a:p>
         </p:txBody>
@@ -15954,8 +16258,8 @@
         </p:nvSpPr>
         <p:spPr>
           <a:xfrm>
-            <a:off x="658368" y="2761488"/>
-            <a:ext cx="10972800" cy="3383280"/>
+            <a:off x="658368" y="2706624"/>
+            <a:ext cx="10972800" cy="3364992"/>
           </a:xfrm>
           <a:prstGeom prst="rect">
             <a:avLst/>
@@ -15999,27 +16303,7 @@
               </a:defRPr>
             </a:pPr>
             <a:r>
-              <a:t>      &lt;pose relative_to="base_link"&gt;0.30 0 0.10 0 0 0&lt;/pose&gt;</a:t>
-            </a:r>
-            <a:br/>
-            <a:r>
-              <a:t>      &lt;visual name="housing"&gt;</a:t>
-            </a:r>
-            <a:br/>
-            <a:r>
-              <a:t>        &lt;geometry&gt;</a:t>
-            </a:r>
-            <a:br/>
-            <a:r>
-              <a:t>          &lt;box&gt;</a:t>
-            </a:r>
-            <a:br/>
-            <a:r>
-              <a:t>            &lt;size&gt;0.05 0.08 0.05&lt;/size&gt;</a:t>
-            </a:r>
-            <a:br/>
-            <a:r>
-              <a:t>          &lt;/box&gt;</a:t>
+              <a:t>          &lt;/cylinder&gt;</a:t>
             </a:r>
             <a:br/>
             <a:r>
@@ -16031,11 +16315,11 @@
             </a:r>
             <a:br/>
             <a:r>
-              <a:t>      &lt;sensor name="camera" type="camera"&gt;</a:t>
-            </a:r>
-            <a:br/>
-            <a:r>
-              <a:t>        &lt;topic&gt;/camera/image_raw&lt;/topic&gt;</a:t>
+              <a:t>      &lt;sensor name="lidar" type="gpu_lidar"&gt;</a:t>
+            </a:r>
+            <a:br/>
+            <a:r>
+              <a:t>        &lt;topic&gt;/scan&lt;/topic&gt;</a:t>
             </a:r>
             <a:br/>
             <a:r>
@@ -16043,15 +16327,27 @@
             </a:r>
             <a:br/>
             <a:r>
-              <a:t>        &lt;update_rate&gt;15&lt;/update_rate&gt;</a:t>
-            </a:r>
-            <a:br/>
-            <a:r>
-              <a:t>        &lt;camera&gt;</a:t>
-            </a:r>
-            <a:br/>
-            <a:r>
-              <a:t>          &lt;horizontal_fov&gt;1.047&lt;/horizontal_fov&gt;</a:t>
+              <a:t>        &lt;update_rate&gt;10&lt;/update_rate&gt;</a:t>
+            </a:r>
+            <a:br/>
+            <a:r>
+              <a:t>        &lt;visualize&gt;false&lt;/visualize&gt;</a:t>
+            </a:r>
+            <a:br/>
+            <a:r>
+              <a:t>        &lt;lidar&gt;</a:t>
+            </a:r>
+            <a:br/>
+            <a:r>
+              <a:t>          &lt;scan&gt;</a:t>
+            </a:r>
+            <a:br/>
+            <a:r>
+              <a:t>            &lt;horizontal&gt;</a:t>
+            </a:r>
+            <a:br/>
+            <a:r>
+              <a:t>              &lt;samples&gt;720&lt;/samples&gt;</a:t>
             </a:r>
           </a:p>
         </p:txBody>
@@ -16064,7 +16360,7 @@
         </p:nvSpPr>
         <p:spPr>
           <a:xfrm>
-            <a:off x="749808" y="6199632"/>
+            <a:off x="749808" y="6181344"/>
             <a:ext cx="10789920" cy="201168"/>
           </a:xfrm>
           <a:prstGeom prst="rect">
@@ -16090,7 +16386,7 @@
               </a:defRPr>
             </a:pPr>
             <a:r>
-              <a:t>파일 전체 18/21 · 이 슬라이드 다음에 같은 파일의 나머지 줄이 이어집니다.</a:t>
+              <a:t>파일 전체 18/24 · 이 슬라이드 다음에 같은 파일의 나머지 줄이 이어집니다.</a:t>
             </a:r>
           </a:p>
         </p:txBody>
@@ -16147,7 +16443,7 @@
               </a:defRPr>
             </a:pPr>
             <a:r>
-              <a:t>파일을 계속 작성하고 저장한다 (19/21)</a:t>
+              <a:t>파일을 계속 작성하고 저장한다 (19/24)</a:t>
             </a:r>
           </a:p>
         </p:txBody>
@@ -16322,7 +16618,7 @@
               </a:defRPr>
             </a:pPr>
             <a:r>
-              <a:t>현재 단계 21/24    |    현재 폴더 ~/agv_ws    |    현재 터미널</a:t>
+              <a:t>현재 단계 21/27    |    현재 폴더 ~/agv_ws    |    현재 터미널</a:t>
             </a:r>
           </a:p>
         </p:txBody>
@@ -16335,8 +16631,8 @@
         </p:nvSpPr>
         <p:spPr>
           <a:xfrm>
-            <a:off x="658368" y="1682496"/>
-            <a:ext cx="10972800" cy="347472"/>
+            <a:off x="658368" y="1627632"/>
+            <a:ext cx="10972800" cy="256032"/>
           </a:xfrm>
           <a:prstGeom prst="rect">
             <a:avLst/>
@@ -16353,7 +16649,7 @@
               <a:spcAft>
                 <a:spcPts val="0"/>
               </a:spcAft>
-              <a:defRPr sz="1700" b="1">
+              <a:defRPr sz="1500" b="1">
                 <a:solidFill>
                   <a:srgbClr val="122C4E"/>
                 </a:solidFill>
@@ -16374,8 +16670,8 @@
         </p:nvSpPr>
         <p:spPr>
           <a:xfrm>
-            <a:off x="658368" y="2103120"/>
-            <a:ext cx="10972800" cy="493776"/>
+            <a:off x="658368" y="1956816"/>
+            <a:ext cx="10972800" cy="603504"/>
           </a:xfrm>
           <a:prstGeom prst="rect">
             <a:avLst/>
@@ -16419,7 +16715,11 @@
               </a:defRPr>
             </a:pPr>
             <a:r>
-              <a:t>파일 생성/열기: mkdir -p ~/agv_ws/src/agv_gazebo/models/agv    &amp;&amp;    nano ~/agv_ws/src/agv_gazebo/models/agv/model.sdf</a:t>
+              <a:t>파일 생성: mkdir -p ~/agv_ws/src/agv_gazebo/models/agv</a:t>
+            </a:r>
+            <a:br/>
+            <a:r>
+              <a:t>파일 열기: nano ~/agv_ws/src/agv_gazebo/models/agv/model.sdf</a:t>
             </a:r>
           </a:p>
         </p:txBody>
@@ -16432,8 +16732,8 @@
         </p:nvSpPr>
         <p:spPr>
           <a:xfrm>
-            <a:off x="658368" y="2761488"/>
-            <a:ext cx="10972800" cy="3383280"/>
+            <a:off x="658368" y="2706624"/>
+            <a:ext cx="10972800" cy="3364992"/>
           </a:xfrm>
           <a:prstGeom prst="rect">
             <a:avLst/>
@@ -16477,59 +16777,51 @@
               </a:defRPr>
             </a:pPr>
             <a:r>
-              <a:t>          &lt;image&gt;</a:t>
-            </a:r>
-            <a:br/>
-            <a:r>
-              <a:t>            &lt;width&gt;640&lt;/width&gt;</a:t>
-            </a:r>
-            <a:br/>
-            <a:r>
-              <a:t>            &lt;height&gt;480&lt;/height&gt;</a:t>
-            </a:r>
-            <a:br/>
-            <a:r>
-              <a:t>            &lt;format&gt;R8G8B8&lt;/format&gt;</a:t>
-            </a:r>
-            <a:br/>
-            <a:r>
-              <a:t>          &lt;/image&gt;</a:t>
-            </a:r>
-            <a:br/>
-            <a:r>
-              <a:t>          &lt;clip&gt;</a:t>
-            </a:r>
-            <a:br/>
-            <a:r>
-              <a:t>            &lt;near&gt;0.1&lt;/near&gt;</a:t>
-            </a:r>
-            <a:br/>
-            <a:r>
-              <a:t>            &lt;far&gt;20&lt;/far&gt;</a:t>
-            </a:r>
-            <a:br/>
-            <a:r>
-              <a:t>          &lt;/clip&gt;</a:t>
-            </a:r>
-            <a:br/>
-            <a:r>
-              <a:t>        &lt;/camera&gt;</a:t>
+              <a:t>              &lt;resolution&gt;1&lt;/resolution&gt;</a:t>
+            </a:r>
+            <a:br/>
+            <a:r>
+              <a:t>              &lt;min_angle&gt;-3.14159&lt;/min_angle&gt;</a:t>
+            </a:r>
+            <a:br/>
+            <a:r>
+              <a:t>              &lt;max_angle&gt;3.14159&lt;/max_angle&gt;</a:t>
+            </a:r>
+            <a:br/>
+            <a:r>
+              <a:t>            &lt;/horizontal&gt;</a:t>
+            </a:r>
+            <a:br/>
+            <a:r>
+              <a:t>          &lt;/scan&gt;</a:t>
+            </a:r>
+            <a:br/>
+            <a:r>
+              <a:t>          &lt;range&gt;</a:t>
+            </a:r>
+            <a:br/>
+            <a:r>
+              <a:t>            &lt;min&gt;0.12&lt;/min&gt;</a:t>
+            </a:r>
+            <a:br/>
+            <a:r>
+              <a:t>            &lt;max&gt;12.0&lt;/max&gt;</a:t>
+            </a:r>
+            <a:br/>
+            <a:r>
+              <a:t>            &lt;resolution&gt;0.01&lt;/resolution&gt;</a:t>
+            </a:r>
+            <a:br/>
+            <a:r>
+              <a:t>          &lt;/range&gt;</a:t>
+            </a:r>
+            <a:br/>
+            <a:r>
+              <a:t>        &lt;/lidar&gt;</a:t>
             </a:r>
             <a:br/>
             <a:r>
               <a:t>      &lt;/sensor&gt;</a:t>
-            </a:r>
-            <a:br/>
-            <a:r>
-              <a:t>    &lt;/link&gt;</a:t>
-            </a:r>
-            <a:br/>
-            <a:r>
-              <a:t>    </a:t>
-            </a:r>
-            <a:br/>
-            <a:r>
-              <a:t>    </a:t>
             </a:r>
           </a:p>
         </p:txBody>
@@ -16542,7 +16834,7 @@
         </p:nvSpPr>
         <p:spPr>
           <a:xfrm>
-            <a:off x="749808" y="6199632"/>
+            <a:off x="749808" y="6181344"/>
             <a:ext cx="10789920" cy="201168"/>
           </a:xfrm>
           <a:prstGeom prst="rect">
@@ -16568,7 +16860,7 @@
               </a:defRPr>
             </a:pPr>
             <a:r>
-              <a:t>파일 전체 19/21 · 이 슬라이드 다음에 같은 파일의 나머지 줄이 이어집니다.</a:t>
+              <a:t>파일 전체 19/24 · 이 슬라이드 다음에 같은 파일의 나머지 줄이 이어집니다.</a:t>
             </a:r>
           </a:p>
         </p:txBody>
@@ -16625,7 +16917,7 @@
               </a:defRPr>
             </a:pPr>
             <a:r>
-              <a:t>파일을 계속 작성하고 저장한다 (20/21)</a:t>
+              <a:t>파일을 계속 작성하고 저장한다 (20/24)</a:t>
             </a:r>
           </a:p>
         </p:txBody>
@@ -16800,7 +17092,7 @@
               </a:defRPr>
             </a:pPr>
             <a:r>
-              <a:t>현재 단계 22/24    |    현재 폴더 ~/agv_ws    |    현재 터미널</a:t>
+              <a:t>현재 단계 22/27    |    현재 폴더 ~/agv_ws    |    현재 터미널</a:t>
             </a:r>
           </a:p>
         </p:txBody>
@@ -16813,8 +17105,8 @@
         </p:nvSpPr>
         <p:spPr>
           <a:xfrm>
-            <a:off x="658368" y="1682496"/>
-            <a:ext cx="10972800" cy="347472"/>
+            <a:off x="658368" y="1627632"/>
+            <a:ext cx="10972800" cy="256032"/>
           </a:xfrm>
           <a:prstGeom prst="rect">
             <a:avLst/>
@@ -16831,7 +17123,7 @@
               <a:spcAft>
                 <a:spcPts val="0"/>
               </a:spcAft>
-              <a:defRPr sz="1700" b="1">
+              <a:defRPr sz="1500" b="1">
                 <a:solidFill>
                   <a:srgbClr val="122C4E"/>
                 </a:solidFill>
@@ -16852,8 +17144,8 @@
         </p:nvSpPr>
         <p:spPr>
           <a:xfrm>
-            <a:off x="658368" y="2103120"/>
-            <a:ext cx="10972800" cy="493776"/>
+            <a:off x="658368" y="1956816"/>
+            <a:ext cx="10972800" cy="603504"/>
           </a:xfrm>
           <a:prstGeom prst="rect">
             <a:avLst/>
@@ -16897,7 +17189,11 @@
               </a:defRPr>
             </a:pPr>
             <a:r>
-              <a:t>파일 생성/열기: mkdir -p ~/agv_ws/src/agv_gazebo/models/agv    &amp;&amp;    nano ~/agv_ws/src/agv_gazebo/models/agv/model.sdf</a:t>
+              <a:t>파일 생성: mkdir -p ~/agv_ws/src/agv_gazebo/models/agv</a:t>
+            </a:r>
+            <a:br/>
+            <a:r>
+              <a:t>파일 열기: nano ~/agv_ws/src/agv_gazebo/models/agv/model.sdf</a:t>
             </a:r>
           </a:p>
         </p:txBody>
@@ -16910,8 +17206,8 @@
         </p:nvSpPr>
         <p:spPr>
           <a:xfrm>
-            <a:off x="658368" y="2761488"/>
-            <a:ext cx="10972800" cy="3383280"/>
+            <a:off x="658368" y="2706624"/>
+            <a:ext cx="10972800" cy="3364992"/>
           </a:xfrm>
           <a:prstGeom prst="rect">
             <a:avLst/>
@@ -16955,7 +17251,19 @@
               </a:defRPr>
             </a:pPr>
             <a:r>
-              <a:t>    &lt;joint name="camera_joint" type="fixed"&gt;</a:t>
+              <a:t>    &lt;/link&gt;</a:t>
+            </a:r>
+            <a:br/>
+            <a:r>
+              <a:t>    </a:t>
+            </a:r>
+            <a:br/>
+            <a:r>
+              <a:t>    </a:t>
+            </a:r>
+            <a:br/>
+            <a:r>
+              <a:t>    &lt;joint name="lidar_joint" type="fixed"&gt;</a:t>
             </a:r>
             <a:br/>
             <a:r>
@@ -16963,7 +17271,7 @@
             </a:r>
             <a:br/>
             <a:r>
-              <a:t>      &lt;child&gt;camera_link&lt;/child&gt;</a:t>
+              <a:t>      &lt;child&gt;lidar_link&lt;/child&gt;</a:t>
             </a:r>
             <a:br/>
             <a:r>
@@ -16979,35 +17287,15 @@
             </a:r>
             <a:br/>
             <a:r>
-              <a:t>    &lt;plugin filename="gz-sim-diff-drive-system" name="gz::sim::systems::DiffDrive"&gt;</a:t>
-            </a:r>
-            <a:br/>
-            <a:r>
-              <a:t>      &lt;left_joint&gt;left_wheel_joint&lt;/left_joint&gt;</a:t>
-            </a:r>
-            <a:br/>
-            <a:r>
-              <a:t>      &lt;right_joint&gt;right_wheel_joint&lt;/right_joint&gt;</a:t>
-            </a:r>
-            <a:br/>
-            <a:r>
-              <a:t>      &lt;wheel_separation&gt;0.38&lt;/wheel_separation&gt;</a:t>
-            </a:r>
-            <a:br/>
-            <a:r>
-              <a:t>      &lt;wheel_radius&gt;0.08&lt;/wheel_radius&gt;</a:t>
-            </a:r>
-            <a:br/>
-            <a:r>
-              <a:t>      &lt;topic&gt;/cmd_vel&lt;/topic&gt;</a:t>
-            </a:r>
-            <a:br/>
-            <a:r>
-              <a:t>      &lt;odom_topic&gt;/odom&lt;/odom_topic&gt;</a:t>
-            </a:r>
-            <a:br/>
-            <a:r>
-              <a:t>      &lt;frame_id&gt;odom&lt;/frame_id&gt;</a:t>
+              <a:t>    &lt;link name="camera_link"&gt;</a:t>
+            </a:r>
+            <a:br/>
+            <a:r>
+              <a:t>      &lt;pose relative_to="base_link"&gt;0.30 0 0.10 0 0 0&lt;/pose&gt;</a:t>
+            </a:r>
+            <a:br/>
+            <a:r>
+              <a:t>      &lt;visual name="housing"&gt;</a:t>
             </a:r>
           </a:p>
         </p:txBody>
@@ -17020,7 +17308,7 @@
         </p:nvSpPr>
         <p:spPr>
           <a:xfrm>
-            <a:off x="749808" y="6199632"/>
+            <a:off x="749808" y="6181344"/>
             <a:ext cx="10789920" cy="201168"/>
           </a:xfrm>
           <a:prstGeom prst="rect">
@@ -17046,7 +17334,7 @@
               </a:defRPr>
             </a:pPr>
             <a:r>
-              <a:t>파일 전체 20/21 · 이 슬라이드 다음에 같은 파일의 나머지 줄이 이어집니다.</a:t>
+              <a:t>파일 전체 20/24 · 이 슬라이드 다음에 같은 파일의 나머지 줄이 이어집니다.</a:t>
             </a:r>
           </a:p>
         </p:txBody>
@@ -17103,7 +17391,7 @@
               </a:defRPr>
             </a:pPr>
             <a:r>
-              <a:t>파일을 계속 작성하고 저장한다 (21/21)</a:t>
+              <a:t>파일을 계속 작성하고 저장한다 (21/24)</a:t>
             </a:r>
           </a:p>
         </p:txBody>
@@ -17278,7 +17566,7 @@
               </a:defRPr>
             </a:pPr>
             <a:r>
-              <a:t>현재 단계 23/24    |    현재 폴더 ~/agv_ws    |    현재 터미널</a:t>
+              <a:t>현재 단계 23/27    |    현재 폴더 ~/agv_ws    |    현재 터미널</a:t>
             </a:r>
           </a:p>
         </p:txBody>
@@ -17291,8 +17579,8 @@
         </p:nvSpPr>
         <p:spPr>
           <a:xfrm>
-            <a:off x="658368" y="1682496"/>
-            <a:ext cx="10972800" cy="347472"/>
+            <a:off x="658368" y="1627632"/>
+            <a:ext cx="10972800" cy="256032"/>
           </a:xfrm>
           <a:prstGeom prst="rect">
             <a:avLst/>
@@ -17309,7 +17597,7 @@
               <a:spcAft>
                 <a:spcPts val="0"/>
               </a:spcAft>
-              <a:defRPr sz="1700" b="1">
+              <a:defRPr sz="1500" b="1">
                 <a:solidFill>
                   <a:srgbClr val="122C4E"/>
                 </a:solidFill>
@@ -17330,8 +17618,8 @@
         </p:nvSpPr>
         <p:spPr>
           <a:xfrm>
-            <a:off x="658368" y="2103120"/>
-            <a:ext cx="10972800" cy="493776"/>
+            <a:off x="658368" y="1956816"/>
+            <a:ext cx="10972800" cy="603504"/>
           </a:xfrm>
           <a:prstGeom prst="rect">
             <a:avLst/>
@@ -17375,7 +17663,11 @@
               </a:defRPr>
             </a:pPr>
             <a:r>
-              <a:t>파일 생성/열기: mkdir -p ~/agv_ws/src/agv_gazebo/models/agv    &amp;&amp;    nano ~/agv_ws/src/agv_gazebo/models/agv/model.sdf</a:t>
+              <a:t>파일 생성: mkdir -p ~/agv_ws/src/agv_gazebo/models/agv</a:t>
+            </a:r>
+            <a:br/>
+            <a:r>
+              <a:t>파일 열기: nano ~/agv_ws/src/agv_gazebo/models/agv/model.sdf</a:t>
             </a:r>
           </a:p>
         </p:txBody>
@@ -17388,8 +17680,8 @@
         </p:nvSpPr>
         <p:spPr>
           <a:xfrm>
-            <a:off x="658368" y="2761488"/>
-            <a:ext cx="10972800" cy="3383280"/>
+            <a:off x="658368" y="2706624"/>
+            <a:ext cx="10972800" cy="3364992"/>
           </a:xfrm>
           <a:prstGeom prst="rect">
             <a:avLst/>
@@ -17433,32 +17725,51 @@
               </a:defRPr>
             </a:pPr>
             <a:r>
-              <a:t>      &lt;child_frame_id&gt;base_link&lt;/child_frame_id&gt;</a:t>
-            </a:r>
-            <a:br/>
-            <a:r>
-              <a:t>    &lt;/plugin&gt;</a:t>
-            </a:r>
-            <a:br/>
-            <a:r>
-              <a:t>    </a:t>
-            </a:r>
-            <a:br/>
-            <a:r>
-              <a:t>  </a:t>
-            </a:r>
-            <a:br/>
-            <a:r>
-              <a:t>  &lt;/model&gt;</a:t>
-            </a:r>
-            <a:br/>
-            <a:r>
-              <a:t>  </a:t>
-            </a:r>
-            <a:br/>
-            <a:br/>
-            <a:r>
-              <a:t>&lt;/sdf&gt;</a:t>
+              <a:t>        &lt;geometry&gt;</a:t>
+            </a:r>
+            <a:br/>
+            <a:r>
+              <a:t>          &lt;box&gt;</a:t>
+            </a:r>
+            <a:br/>
+            <a:r>
+              <a:t>            &lt;size&gt;0.05 0.08 0.05&lt;/size&gt;</a:t>
+            </a:r>
+            <a:br/>
+            <a:r>
+              <a:t>          &lt;/box&gt;</a:t>
+            </a:r>
+            <a:br/>
+            <a:r>
+              <a:t>        &lt;/geometry&gt;</a:t>
+            </a:r>
+            <a:br/>
+            <a:r>
+              <a:t>      &lt;/visual&gt;</a:t>
+            </a:r>
+            <a:br/>
+            <a:r>
+              <a:t>      &lt;sensor name="camera" type="camera"&gt;</a:t>
+            </a:r>
+            <a:br/>
+            <a:r>
+              <a:t>        &lt;topic&gt;/camera/image_raw&lt;/topic&gt;</a:t>
+            </a:r>
+            <a:br/>
+            <a:r>
+              <a:t>        &lt;always_on&gt;true&lt;/always_on&gt;</a:t>
+            </a:r>
+            <a:br/>
+            <a:r>
+              <a:t>        &lt;update_rate&gt;15&lt;/update_rate&gt;</a:t>
+            </a:r>
+            <a:br/>
+            <a:r>
+              <a:t>        &lt;camera&gt;</a:t>
+            </a:r>
+            <a:br/>
+            <a:r>
+              <a:t>          &lt;horizontal_fov&gt;1.047&lt;/horizontal_fov&gt;</a:t>
             </a:r>
           </a:p>
         </p:txBody>
@@ -17471,7 +17782,7 @@
         </p:nvSpPr>
         <p:spPr>
           <a:xfrm>
-            <a:off x="749808" y="6199632"/>
+            <a:off x="749808" y="6181344"/>
             <a:ext cx="10789920" cy="201168"/>
           </a:xfrm>
           <a:prstGeom prst="rect">
@@ -17497,7 +17808,7 @@
               </a:defRPr>
             </a:pPr>
             <a:r>
-              <a:t>파일 전체 21/21 · 이 슬라이드 다음에 같은 파일의 나머지 줄이 이어집니다.</a:t>
+              <a:t>파일 전체 21/24 · 이 슬라이드 다음에 같은 파일의 나머지 줄이 이어집니다.</a:t>
             </a:r>
           </a:p>
         </p:txBody>
@@ -17973,7 +18284,7 @@
               </a:defRPr>
             </a:pPr>
             <a:r>
-              <a:t>파일을 새로 만들고 저장한다 (1/3)</a:t>
+              <a:t>파일을 계속 작성하고 저장한다 (22/24)</a:t>
             </a:r>
           </a:p>
         </p:txBody>
@@ -18012,7 +18323,7 @@
               </a:defRPr>
             </a:pPr>
             <a:r>
-              <a:t>~/agv_ws/src/agv_gazebo/config/bridge.yaml</a:t>
+              <a:t>~/agv_ws/src/agv_gazebo/models/agv/model.sdf</a:t>
             </a:r>
           </a:p>
         </p:txBody>
@@ -18161,8 +18472,8 @@
         </p:nvSpPr>
         <p:spPr>
           <a:xfrm>
-            <a:off x="658368" y="1682496"/>
-            <a:ext cx="10972800" cy="347472"/>
+            <a:off x="658368" y="1627632"/>
+            <a:ext cx="10972800" cy="256032"/>
           </a:xfrm>
           <a:prstGeom prst="rect">
             <a:avLst/>
@@ -18179,7 +18490,7 @@
               <a:spcAft>
                 <a:spcPts val="0"/>
               </a:spcAft>
-              <a:defRPr sz="1700" b="1">
+              <a:defRPr sz="1500" b="1">
                 <a:solidFill>
                   <a:srgbClr val="122C4E"/>
                 </a:solidFill>
@@ -18200,8 +18511,8 @@
         </p:nvSpPr>
         <p:spPr>
           <a:xfrm>
-            <a:off x="658368" y="2103120"/>
-            <a:ext cx="10972800" cy="493776"/>
+            <a:off x="658368" y="1956816"/>
+            <a:ext cx="10972800" cy="603504"/>
           </a:xfrm>
           <a:prstGeom prst="rect">
             <a:avLst/>
@@ -18245,7 +18556,11 @@
               </a:defRPr>
             </a:pPr>
             <a:r>
-              <a:t>파일 생성/열기: mkdir -p ~/agv_ws/src/agv_gazebo/config    &amp;&amp;    nano ~/agv_ws/src/agv_gazebo/config/bridge.yaml</a:t>
+              <a:t>파일 생성: mkdir -p ~/agv_ws/src/agv_gazebo/models/agv</a:t>
+            </a:r>
+            <a:br/>
+            <a:r>
+              <a:t>파일 열기: nano ~/agv_ws/src/agv_gazebo/models/agv/model.sdf</a:t>
             </a:r>
           </a:p>
         </p:txBody>
@@ -18258,8 +18573,8 @@
         </p:nvSpPr>
         <p:spPr>
           <a:xfrm>
-            <a:off x="658368" y="2761488"/>
-            <a:ext cx="10972800" cy="3383280"/>
+            <a:off x="658368" y="2706624"/>
+            <a:ext cx="10972800" cy="3364992"/>
           </a:xfrm>
           <a:prstGeom prst="rect">
             <a:avLst/>
@@ -18303,59 +18618,51 @@
               </a:defRPr>
             </a:pPr>
             <a:r>
-              <a:t>- ros_topic_name: "/cmd_vel"</a:t>
-            </a:r>
-            <a:br/>
-            <a:r>
-              <a:t>  gz_topic_name: "/cmd_vel"</a:t>
-            </a:r>
-            <a:br/>
-            <a:r>
-              <a:t>  ros_type_name: "geometry_msgs/msg/Twist"</a:t>
-            </a:r>
-            <a:br/>
-            <a:r>
-              <a:t>  gz_type_name: "gz.msgs.Twist"</a:t>
-            </a:r>
-            <a:br/>
-            <a:r>
-              <a:t>  direction: ROS_TO_GZ</a:t>
-            </a:r>
-            <a:br/>
-            <a:r>
-              <a:t>- ros_topic_name: "/odom"</a:t>
-            </a:r>
-            <a:br/>
-            <a:r>
-              <a:t>  gz_topic_name: "/odom"</a:t>
-            </a:r>
-            <a:br/>
-            <a:r>
-              <a:t>  ros_type_name: "nav_msgs/msg/Odometry"</a:t>
-            </a:r>
-            <a:br/>
-            <a:r>
-              <a:t>  gz_type_name: "gz.msgs.Odometry"</a:t>
-            </a:r>
-            <a:br/>
-            <a:r>
-              <a:t>  direction: GZ_TO_ROS</a:t>
-            </a:r>
-            <a:br/>
-            <a:r>
-              <a:t>- ros_topic_name: "/scan"</a:t>
-            </a:r>
-            <a:br/>
-            <a:r>
-              <a:t>  gz_topic_name: "/scan"</a:t>
-            </a:r>
-            <a:br/>
-            <a:r>
-              <a:t>  ros_type_name: "sensor_msgs/msg/LaserScan"</a:t>
-            </a:r>
-            <a:br/>
-            <a:r>
-              <a:t>  gz_type_name: "gz.msgs.LaserScan"</a:t>
+              <a:t>          &lt;image&gt;</a:t>
+            </a:r>
+            <a:br/>
+            <a:r>
+              <a:t>            &lt;width&gt;640&lt;/width&gt;</a:t>
+            </a:r>
+            <a:br/>
+            <a:r>
+              <a:t>            &lt;height&gt;480&lt;/height&gt;</a:t>
+            </a:r>
+            <a:br/>
+            <a:r>
+              <a:t>            &lt;format&gt;R8G8B8&lt;/format&gt;</a:t>
+            </a:r>
+            <a:br/>
+            <a:r>
+              <a:t>          &lt;/image&gt;</a:t>
+            </a:r>
+            <a:br/>
+            <a:r>
+              <a:t>          &lt;clip&gt;</a:t>
+            </a:r>
+            <a:br/>
+            <a:r>
+              <a:t>            &lt;near&gt;0.1&lt;/near&gt;</a:t>
+            </a:r>
+            <a:br/>
+            <a:r>
+              <a:t>            &lt;far&gt;20&lt;/far&gt;</a:t>
+            </a:r>
+            <a:br/>
+            <a:r>
+              <a:t>          &lt;/clip&gt;</a:t>
+            </a:r>
+            <a:br/>
+            <a:r>
+              <a:t>        &lt;/camera&gt;</a:t>
+            </a:r>
+            <a:br/>
+            <a:r>
+              <a:t>      &lt;/sensor&gt;</a:t>
+            </a:r>
+            <a:br/>
+            <a:r>
+              <a:t>    &lt;/link&gt;</a:t>
             </a:r>
           </a:p>
         </p:txBody>
@@ -18368,7 +18675,7 @@
         </p:nvSpPr>
         <p:spPr>
           <a:xfrm>
-            <a:off x="749808" y="6199632"/>
+            <a:off x="749808" y="6181344"/>
             <a:ext cx="10789920" cy="201168"/>
           </a:xfrm>
           <a:prstGeom prst="rect">
@@ -18394,7 +18701,7 @@
               </a:defRPr>
             </a:pPr>
             <a:r>
-              <a:t>파일 전체 1/3 · 이 슬라이드 다음에 같은 파일의 나머지 줄이 이어집니다.</a:t>
+              <a:t>파일 전체 22/24 · 이 슬라이드 다음에 같은 파일의 나머지 줄이 이어집니다.</a:t>
             </a:r>
           </a:p>
         </p:txBody>
@@ -18451,7 +18758,7 @@
               </a:defRPr>
             </a:pPr>
             <a:r>
-              <a:t>파일을 계속 작성하고 저장한다 (2/3)</a:t>
+              <a:t>파일을 계속 작성하고 저장한다 (23/24)</a:t>
             </a:r>
           </a:p>
         </p:txBody>
@@ -18490,7 +18797,7 @@
               </a:defRPr>
             </a:pPr>
             <a:r>
-              <a:t>~/agv_ws/src/agv_gazebo/config/bridge.yaml</a:t>
+              <a:t>~/agv_ws/src/agv_gazebo/models/agv/model.sdf</a:t>
             </a:r>
           </a:p>
         </p:txBody>
@@ -18639,8 +18946,8 @@
         </p:nvSpPr>
         <p:spPr>
           <a:xfrm>
-            <a:off x="658368" y="1682496"/>
-            <a:ext cx="10972800" cy="347472"/>
+            <a:off x="658368" y="1627632"/>
+            <a:ext cx="10972800" cy="256032"/>
           </a:xfrm>
           <a:prstGeom prst="rect">
             <a:avLst/>
@@ -18657,7 +18964,7 @@
               <a:spcAft>
                 <a:spcPts val="0"/>
               </a:spcAft>
-              <a:defRPr sz="1700" b="1">
+              <a:defRPr sz="1500" b="1">
                 <a:solidFill>
                   <a:srgbClr val="122C4E"/>
                 </a:solidFill>
@@ -18678,8 +18985,8 @@
         </p:nvSpPr>
         <p:spPr>
           <a:xfrm>
-            <a:off x="658368" y="2103120"/>
-            <a:ext cx="10972800" cy="493776"/>
+            <a:off x="658368" y="1956816"/>
+            <a:ext cx="10972800" cy="603504"/>
           </a:xfrm>
           <a:prstGeom prst="rect">
             <a:avLst/>
@@ -18723,7 +19030,11 @@
               </a:defRPr>
             </a:pPr>
             <a:r>
-              <a:t>파일 생성/열기: mkdir -p ~/agv_ws/src/agv_gazebo/config    &amp;&amp;    nano ~/agv_ws/src/agv_gazebo/config/bridge.yaml</a:t>
+              <a:t>파일 생성: mkdir -p ~/agv_ws/src/agv_gazebo/models/agv</a:t>
+            </a:r>
+            <a:br/>
+            <a:r>
+              <a:t>파일 열기: nano ~/agv_ws/src/agv_gazebo/models/agv/model.sdf</a:t>
             </a:r>
           </a:p>
         </p:txBody>
@@ -18736,8 +19047,8 @@
         </p:nvSpPr>
         <p:spPr>
           <a:xfrm>
-            <a:off x="658368" y="2761488"/>
-            <a:ext cx="10972800" cy="3383280"/>
+            <a:off x="658368" y="2706624"/>
+            <a:ext cx="10972800" cy="3364992"/>
           </a:xfrm>
           <a:prstGeom prst="rect">
             <a:avLst/>
@@ -18781,59 +19092,51 @@
               </a:defRPr>
             </a:pPr>
             <a:r>
-              <a:t>  direction: GZ_TO_ROS</a:t>
-            </a:r>
-            <a:br/>
-            <a:r>
-              <a:t>- ros_topic_name: "/imu/data"</a:t>
-            </a:r>
-            <a:br/>
-            <a:r>
-              <a:t>  gz_topic_name: "/imu/data"</a:t>
-            </a:r>
-            <a:br/>
-            <a:r>
-              <a:t>  ros_type_name: "sensor_msgs/msg/Imu"</a:t>
-            </a:r>
-            <a:br/>
-            <a:r>
-              <a:t>  gz_type_name: "gz.msgs.IMU"</a:t>
-            </a:r>
-            <a:br/>
-            <a:r>
-              <a:t>  direction: GZ_TO_ROS</a:t>
-            </a:r>
-            <a:br/>
-            <a:r>
-              <a:t>- ros_topic_name: "/camera/image_raw"</a:t>
-            </a:r>
-            <a:br/>
-            <a:r>
-              <a:t>  gz_topic_name: "/camera/image_raw"</a:t>
-            </a:r>
-            <a:br/>
-            <a:r>
-              <a:t>  ros_type_name: "sensor_msgs/msg/Image"</a:t>
-            </a:r>
-            <a:br/>
-            <a:r>
-              <a:t>  gz_type_name: "gz.msgs.Image"</a:t>
-            </a:r>
-            <a:br/>
-            <a:r>
-              <a:t>  direction: GZ_TO_ROS</a:t>
-            </a:r>
-            <a:br/>
-            <a:r>
-              <a:t>- ros_topic_name: "/clock"</a:t>
-            </a:r>
-            <a:br/>
-            <a:r>
-              <a:t>  gz_topic_name: "/clock"</a:t>
-            </a:r>
-            <a:br/>
-            <a:r>
-              <a:t>  ros_type_name: "rosgraph_msgs/msg/Clock"</a:t>
+              <a:t>    </a:t>
+            </a:r>
+            <a:br/>
+            <a:r>
+              <a:t>    </a:t>
+            </a:r>
+            <a:br/>
+            <a:r>
+              <a:t>    &lt;joint name="camera_joint" type="fixed"&gt;</a:t>
+            </a:r>
+            <a:br/>
+            <a:r>
+              <a:t>      &lt;parent&gt;base_link&lt;/parent&gt;</a:t>
+            </a:r>
+            <a:br/>
+            <a:r>
+              <a:t>      &lt;child&gt;camera_link&lt;/child&gt;</a:t>
+            </a:r>
+            <a:br/>
+            <a:r>
+              <a:t>    &lt;/joint&gt;</a:t>
+            </a:r>
+            <a:br/>
+            <a:r>
+              <a:t>    </a:t>
+            </a:r>
+            <a:br/>
+            <a:r>
+              <a:t>    </a:t>
+            </a:r>
+            <a:br/>
+            <a:r>
+              <a:t>    &lt;plugin filename="gz-sim-diff-drive-system" name="gz::sim::systems::DiffDrive"&gt;</a:t>
+            </a:r>
+            <a:br/>
+            <a:r>
+              <a:t>      &lt;left_joint&gt;left_wheel_joint&lt;/left_joint&gt;</a:t>
+            </a:r>
+            <a:br/>
+            <a:r>
+              <a:t>      &lt;right_joint&gt;right_wheel_joint&lt;/right_joint&gt;</a:t>
+            </a:r>
+            <a:br/>
+            <a:r>
+              <a:t>      &lt;wheel_separation&gt;0.38&lt;/wheel_separation&gt;</a:t>
             </a:r>
           </a:p>
         </p:txBody>
@@ -18846,7 +19149,7 @@
         </p:nvSpPr>
         <p:spPr>
           <a:xfrm>
-            <a:off x="749808" y="6199632"/>
+            <a:off x="749808" y="6181344"/>
             <a:ext cx="10789920" cy="201168"/>
           </a:xfrm>
           <a:prstGeom prst="rect">
@@ -18872,7 +19175,7 @@
               </a:defRPr>
             </a:pPr>
             <a:r>
-              <a:t>파일 전체 2/3 · 이 슬라이드 다음에 같은 파일의 나머지 줄이 이어집니다.</a:t>
+              <a:t>파일 전체 23/24 · 이 슬라이드 다음에 같은 파일의 나머지 줄이 이어집니다.</a:t>
             </a:r>
           </a:p>
         </p:txBody>
@@ -18929,7 +19232,7 @@
               </a:defRPr>
             </a:pPr>
             <a:r>
-              <a:t>파일을 계속 작성하고 저장한다 (3/3)</a:t>
+              <a:t>파일을 계속 작성하고 저장한다 (24/24)</a:t>
             </a:r>
           </a:p>
         </p:txBody>
@@ -18968,7 +19271,7 @@
               </a:defRPr>
             </a:pPr>
             <a:r>
-              <a:t>~/agv_ws/src/agv_gazebo/config/bridge.yaml</a:t>
+              <a:t>~/agv_ws/src/agv_gazebo/models/agv/model.sdf</a:t>
             </a:r>
           </a:p>
         </p:txBody>
@@ -19117,8 +19420,8 @@
         </p:nvSpPr>
         <p:spPr>
           <a:xfrm>
-            <a:off x="658368" y="1682496"/>
-            <a:ext cx="10972800" cy="347472"/>
+            <a:off x="658368" y="1627632"/>
+            <a:ext cx="10972800" cy="256032"/>
           </a:xfrm>
           <a:prstGeom prst="rect">
             <a:avLst/>
@@ -19135,7 +19438,7 @@
               <a:spcAft>
                 <a:spcPts val="0"/>
               </a:spcAft>
-              <a:defRPr sz="1700" b="1">
+              <a:defRPr sz="1500" b="1">
                 <a:solidFill>
                   <a:srgbClr val="122C4E"/>
                 </a:solidFill>
@@ -19156,8 +19459,8 @@
         </p:nvSpPr>
         <p:spPr>
           <a:xfrm>
-            <a:off x="658368" y="2103120"/>
-            <a:ext cx="10972800" cy="493776"/>
+            <a:off x="658368" y="1956816"/>
+            <a:ext cx="10972800" cy="603504"/>
           </a:xfrm>
           <a:prstGeom prst="rect">
             <a:avLst/>
@@ -19201,7 +19504,11 @@
               </a:defRPr>
             </a:pPr>
             <a:r>
-              <a:t>파일 생성/열기: mkdir -p ~/agv_ws/src/agv_gazebo/config    &amp;&amp;    nano ~/agv_ws/src/agv_gazebo/config/bridge.yaml</a:t>
+              <a:t>파일 생성: mkdir -p ~/agv_ws/src/agv_gazebo/models/agv</a:t>
+            </a:r>
+            <a:br/>
+            <a:r>
+              <a:t>파일 열기: nano ~/agv_ws/src/agv_gazebo/models/agv/model.sdf</a:t>
             </a:r>
           </a:p>
         </p:txBody>
@@ -19214,8 +19521,8 @@
         </p:nvSpPr>
         <p:spPr>
           <a:xfrm>
-            <a:off x="658368" y="2761488"/>
-            <a:ext cx="10972800" cy="3383280"/>
+            <a:off x="658368" y="2706624"/>
+            <a:ext cx="10972800" cy="3364992"/>
           </a:xfrm>
           <a:prstGeom prst="rect">
             <a:avLst/>
@@ -19259,11 +19566,48 @@
               </a:defRPr>
             </a:pPr>
             <a:r>
-              <a:t>  gz_type_name: "gz.msgs.Clock"</a:t>
-            </a:r>
-            <a:br/>
-            <a:r>
-              <a:t>  direction: GZ_TO_ROS</a:t>
+              <a:t>      &lt;wheel_radius&gt;0.08&lt;/wheel_radius&gt;</a:t>
+            </a:r>
+            <a:br/>
+            <a:r>
+              <a:t>      &lt;topic&gt;/cmd_vel&lt;/topic&gt;</a:t>
+            </a:r>
+            <a:br/>
+            <a:r>
+              <a:t>      &lt;odom_topic&gt;/odom&lt;/odom_topic&gt;</a:t>
+            </a:r>
+            <a:br/>
+            <a:r>
+              <a:t>      &lt;frame_id&gt;odom&lt;/frame_id&gt;</a:t>
+            </a:r>
+            <a:br/>
+            <a:r>
+              <a:t>      &lt;child_frame_id&gt;base_link&lt;/child_frame_id&gt;</a:t>
+            </a:r>
+            <a:br/>
+            <a:r>
+              <a:t>    &lt;/plugin&gt;</a:t>
+            </a:r>
+            <a:br/>
+            <a:r>
+              <a:t>    </a:t>
+            </a:r>
+            <a:br/>
+            <a:r>
+              <a:t>  </a:t>
+            </a:r>
+            <a:br/>
+            <a:r>
+              <a:t>  &lt;/model&gt;</a:t>
+            </a:r>
+            <a:br/>
+            <a:r>
+              <a:t>  </a:t>
+            </a:r>
+            <a:br/>
+            <a:br/>
+            <a:r>
+              <a:t>&lt;/sdf&gt;</a:t>
             </a:r>
           </a:p>
         </p:txBody>
@@ -19276,7 +19620,7 @@
         </p:nvSpPr>
         <p:spPr>
           <a:xfrm>
-            <a:off x="749808" y="6199632"/>
+            <a:off x="749808" y="6181344"/>
             <a:ext cx="10789920" cy="201168"/>
           </a:xfrm>
           <a:prstGeom prst="rect">
@@ -19302,7 +19646,7 @@
               </a:defRPr>
             </a:pPr>
             <a:r>
-              <a:t>파일 전체 3/3 · 이 슬라이드 다음에 같은 파일의 나머지 줄이 이어집니다.</a:t>
+              <a:t>파일 전체 24/24 · 이 슬라이드 다음에 같은 파일의 나머지 줄이 이어집니다.</a:t>
             </a:r>
           </a:p>
         </p:txBody>
@@ -19359,7 +19703,7 @@
               </a:defRPr>
             </a:pPr>
             <a:r>
-              <a:t>파일을 새로 만들고 저장한다 (1/2)</a:t>
+              <a:t>파일을 새로 만들고 저장한다 (1/3)</a:t>
             </a:r>
           </a:p>
         </p:txBody>
@@ -19398,7 +19742,7 @@
               </a:defRPr>
             </a:pPr>
             <a:r>
-              <a:t>~/agv_ws/src/agv_sensors/agv_sensors/imu_monitor.py</a:t>
+              <a:t>~/agv_ws/src/agv_gazebo/config/bridge.yaml</a:t>
             </a:r>
           </a:p>
         </p:txBody>
@@ -19534,7 +19878,7 @@
               </a:defRPr>
             </a:pPr>
             <a:r>
-              <a:t>현재 단계 27/29    |    현재 폴더 ~/agv_ws    |    현재 터미널</a:t>
+              <a:t>현재 단계 27/30    |    현재 폴더 ~/agv_ws    |    현재 터미널</a:t>
             </a:r>
           </a:p>
         </p:txBody>
@@ -19547,8 +19891,8 @@
         </p:nvSpPr>
         <p:spPr>
           <a:xfrm>
-            <a:off x="658368" y="1682496"/>
-            <a:ext cx="10972800" cy="347472"/>
+            <a:off x="658368" y="1627632"/>
+            <a:ext cx="10972800" cy="256032"/>
           </a:xfrm>
           <a:prstGeom prst="rect">
             <a:avLst/>
@@ -19565,7 +19909,7 @@
               <a:spcAft>
                 <a:spcPts val="0"/>
               </a:spcAft>
-              <a:defRPr sz="1700" b="1">
+              <a:defRPr sz="1500" b="1">
                 <a:solidFill>
                   <a:srgbClr val="122C4E"/>
                 </a:solidFill>
@@ -19586,8 +19930,8 @@
         </p:nvSpPr>
         <p:spPr>
           <a:xfrm>
-            <a:off x="658368" y="2103120"/>
-            <a:ext cx="10972800" cy="493776"/>
+            <a:off x="658368" y="1956816"/>
+            <a:ext cx="10972800" cy="603504"/>
           </a:xfrm>
           <a:prstGeom prst="rect">
             <a:avLst/>
@@ -19631,7 +19975,11 @@
               </a:defRPr>
             </a:pPr>
             <a:r>
-              <a:t>파일 생성/열기: mkdir -p ~/agv_ws/src/agv_sensors/agv_sensors    &amp;&amp;    nano ~/agv_ws/src/agv_sensors/agv_sensors/imu_monitor.py</a:t>
+              <a:t>파일 생성: mkdir -p ~/agv_ws/src/agv_gazebo/config</a:t>
+            </a:r>
+            <a:br/>
+            <a:r>
+              <a:t>파일 열기: nano ~/agv_ws/src/agv_gazebo/config/bridge.yaml</a:t>
             </a:r>
           </a:p>
         </p:txBody>
@@ -19644,8 +19992,8 @@
         </p:nvSpPr>
         <p:spPr>
           <a:xfrm>
-            <a:off x="658368" y="2761488"/>
-            <a:ext cx="10972800" cy="3383280"/>
+            <a:off x="658368" y="2706624"/>
+            <a:ext cx="10972800" cy="3364992"/>
           </a:xfrm>
           <a:prstGeom prst="rect">
             <a:avLst/>
@@ -19689,50 +20037,51 @@
               </a:defRPr>
             </a:pPr>
             <a:r>
-              <a:t>import rclpy</a:t>
-            </a:r>
-            <a:br/>
-            <a:r>
-              <a:t>from rclpy.node import Node</a:t>
-            </a:r>
-            <a:br/>
-            <a:r>
-              <a:t>from rclpy.qos import qos_profile_sensor_data</a:t>
-            </a:r>
-            <a:br/>
-            <a:r>
-              <a:t>from sensor_msgs.msg import Imu</a:t>
-            </a:r>
-            <a:br/>
-            <a:br/>
-            <a:r>
-              <a:t>class ImuMonitor(Node):</a:t>
-            </a:r>
-            <a:br/>
-            <a:br/>
-            <a:r>
-              <a:t>    def __init__(self):</a:t>
-            </a:r>
-            <a:br/>
-            <a:r>
-              <a:t>        super().__init__('imu_monitor')</a:t>
-            </a:r>
-            <a:br/>
-            <a:r>
-              <a:t>        self.create_subscription(Imu, '/imu/data', self.callback,</a:t>
-            </a:r>
-            <a:br/>
-            <a:r>
-              <a:t>            qos_profile_sensor_data)</a:t>
-            </a:r>
-            <a:br/>
-            <a:br/>
-            <a:r>
-              <a:t>    def callback(self, message):</a:t>
-            </a:r>
-            <a:br/>
-            <a:r>
-              <a:t>        self.get_logger().info('gyro z=%.3f rad/s, acceleration z=%.3f m/s²,</a:t>
+              <a:t>- ros_topic_name: "/cmd_vel"</a:t>
+            </a:r>
+            <a:br/>
+            <a:r>
+              <a:t>  gz_topic_name: "/cmd_vel"</a:t>
+            </a:r>
+            <a:br/>
+            <a:r>
+              <a:t>  ros_type_name: "geometry_msgs/msg/Twist"</a:t>
+            </a:r>
+            <a:br/>
+            <a:r>
+              <a:t>  gz_type_name: "gz.msgs.Twist"</a:t>
+            </a:r>
+            <a:br/>
+            <a:r>
+              <a:t>  direction: ROS_TO_GZ</a:t>
+            </a:r>
+            <a:br/>
+            <a:r>
+              <a:t>- ros_topic_name: "/odom"</a:t>
+            </a:r>
+            <a:br/>
+            <a:r>
+              <a:t>  gz_topic_name: "/odom"</a:t>
+            </a:r>
+            <a:br/>
+            <a:r>
+              <a:t>  ros_type_name: "nav_msgs/msg/Odometry"</a:t>
+            </a:r>
+            <a:br/>
+            <a:r>
+              <a:t>  gz_type_name: "gz.msgs.Odometry"</a:t>
+            </a:r>
+            <a:br/>
+            <a:r>
+              <a:t>  direction: GZ_TO_ROS</a:t>
+            </a:r>
+            <a:br/>
+            <a:r>
+              <a:t>- ros_topic_name: "/scan"</a:t>
+            </a:r>
+            <a:br/>
+            <a:r>
+              <a:t>  gz_topic_name: "/scan"</a:t>
             </a:r>
           </a:p>
         </p:txBody>
@@ -19745,7 +20094,7 @@
         </p:nvSpPr>
         <p:spPr>
           <a:xfrm>
-            <a:off x="749808" y="6199632"/>
+            <a:off x="749808" y="6181344"/>
             <a:ext cx="10789920" cy="201168"/>
           </a:xfrm>
           <a:prstGeom prst="rect">
@@ -19771,7 +20120,7 @@
               </a:defRPr>
             </a:pPr>
             <a:r>
-              <a:t>파일 전체 1/2 · 이 슬라이드 다음에 같은 파일의 나머지 줄이 이어집니다.</a:t>
+              <a:t>파일 전체 1/3 · 이 슬라이드 다음에 같은 파일의 나머지 줄이 이어집니다.</a:t>
             </a:r>
           </a:p>
         </p:txBody>
@@ -19828,7 +20177,7 @@
               </a:defRPr>
             </a:pPr>
             <a:r>
-              <a:t>파일을 계속 작성하고 저장한다 (2/2)</a:t>
+              <a:t>파일을 계속 작성하고 저장한다 (2/3)</a:t>
             </a:r>
           </a:p>
         </p:txBody>
@@ -19867,7 +20216,7 @@
               </a:defRPr>
             </a:pPr>
             <a:r>
-              <a:t>~/agv_ws/src/agv_sensors/agv_sensors/imu_monitor.py</a:t>
+              <a:t>~/agv_ws/src/agv_gazebo/config/bridge.yaml</a:t>
             </a:r>
           </a:p>
         </p:txBody>
@@ -20003,7 +20352,7 @@
               </a:defRPr>
             </a:pPr>
             <a:r>
-              <a:t>현재 단계 28/29    |    현재 폴더 ~/agv_ws    |    현재 터미널</a:t>
+              <a:t>현재 단계 28/30    |    현재 폴더 ~/agv_ws    |    현재 터미널</a:t>
             </a:r>
           </a:p>
         </p:txBody>
@@ -20016,8 +20365,8 @@
         </p:nvSpPr>
         <p:spPr>
           <a:xfrm>
-            <a:off x="658368" y="1682496"/>
-            <a:ext cx="10972800" cy="347472"/>
+            <a:off x="658368" y="1627632"/>
+            <a:ext cx="10972800" cy="256032"/>
           </a:xfrm>
           <a:prstGeom prst="rect">
             <a:avLst/>
@@ -20034,7 +20383,7 @@
               <a:spcAft>
                 <a:spcPts val="0"/>
               </a:spcAft>
-              <a:defRPr sz="1700" b="1">
+              <a:defRPr sz="1500" b="1">
                 <a:solidFill>
                   <a:srgbClr val="122C4E"/>
                 </a:solidFill>
@@ -20055,8 +20404,8 @@
         </p:nvSpPr>
         <p:spPr>
           <a:xfrm>
-            <a:off x="658368" y="2103120"/>
-            <a:ext cx="10972800" cy="493776"/>
+            <a:off x="658368" y="1956816"/>
+            <a:ext cx="10972800" cy="603504"/>
           </a:xfrm>
           <a:prstGeom prst="rect">
             <a:avLst/>
@@ -20100,7 +20449,11 @@
               </a:defRPr>
             </a:pPr>
             <a:r>
-              <a:t>파일 생성/열기: mkdir -p ~/agv_ws/src/agv_sensors/agv_sensors    &amp;&amp;    nano ~/agv_ws/src/agv_sensors/agv_sensors/imu_monitor.py</a:t>
+              <a:t>파일 생성: mkdir -p ~/agv_ws/src/agv_gazebo/config</a:t>
+            </a:r>
+            <a:br/>
+            <a:r>
+              <a:t>파일 열기: nano ~/agv_ws/src/agv_gazebo/config/bridge.yaml</a:t>
             </a:r>
           </a:p>
         </p:txBody>
@@ -20113,8 +20466,8 @@
         </p:nvSpPr>
         <p:spPr>
           <a:xfrm>
-            <a:off x="658368" y="2761488"/>
-            <a:ext cx="10972800" cy="3383280"/>
+            <a:off x="658368" y="2706624"/>
+            <a:ext cx="10972800" cy="3364992"/>
           </a:xfrm>
           <a:prstGeom prst="rect">
             <a:avLst/>
@@ -20158,56 +20511,51 @@
               </a:defRPr>
             </a:pPr>
             <a:r>
-              <a:t>            frame=%s' % (message.angular_velocity.z, message.linear_acceleration.z,</a:t>
-            </a:r>
-            <a:br/>
-            <a:r>
-              <a:t>            message.header.frame_id), throttle_duration_sec=1.0)</a:t>
-            </a:r>
-            <a:br/>
-            <a:br/>
-            <a:r>
-              <a:t>def main():</a:t>
-            </a:r>
-            <a:br/>
-            <a:r>
-              <a:t>    rclpy.init()</a:t>
-            </a:r>
-            <a:br/>
-            <a:r>
-              <a:t>    node = ImuMonitor()</a:t>
-            </a:r>
-            <a:br/>
-            <a:r>
-              <a:t>    try:</a:t>
-            </a:r>
-            <a:br/>
-            <a:r>
-              <a:t>        rclpy.spin(node)</a:t>
-            </a:r>
-            <a:br/>
-            <a:r>
-              <a:t>    except KeyboardInterrupt:</a:t>
-            </a:r>
-            <a:br/>
-            <a:r>
-              <a:t>        pass</a:t>
-            </a:r>
-            <a:br/>
-            <a:r>
-              <a:t>    finally:</a:t>
-            </a:r>
-            <a:br/>
-            <a:r>
-              <a:t>        node.destroy_node()</a:t>
-            </a:r>
-            <a:br/>
-            <a:r>
-              <a:t>        if rclpy.ok():</a:t>
-            </a:r>
-            <a:br/>
-            <a:r>
-              <a:t>            rclpy.shutdown()</a:t>
+              <a:t>  ros_type_name: "sensor_msgs/msg/LaserScan"</a:t>
+            </a:r>
+            <a:br/>
+            <a:r>
+              <a:t>  gz_type_name: "gz.msgs.LaserScan"</a:t>
+            </a:r>
+            <a:br/>
+            <a:r>
+              <a:t>  direction: GZ_TO_ROS</a:t>
+            </a:r>
+            <a:br/>
+            <a:r>
+              <a:t>- ros_topic_name: "/imu/data"</a:t>
+            </a:r>
+            <a:br/>
+            <a:r>
+              <a:t>  gz_topic_name: "/imu/data"</a:t>
+            </a:r>
+            <a:br/>
+            <a:r>
+              <a:t>  ros_type_name: "sensor_msgs/msg/Imu"</a:t>
+            </a:r>
+            <a:br/>
+            <a:r>
+              <a:t>  gz_type_name: "gz.msgs.IMU"</a:t>
+            </a:r>
+            <a:br/>
+            <a:r>
+              <a:t>  direction: GZ_TO_ROS</a:t>
+            </a:r>
+            <a:br/>
+            <a:r>
+              <a:t>- ros_topic_name: "/camera/image_raw"</a:t>
+            </a:r>
+            <a:br/>
+            <a:r>
+              <a:t>  gz_topic_name: "/camera/image_raw"</a:t>
+            </a:r>
+            <a:br/>
+            <a:r>
+              <a:t>  ros_type_name: "sensor_msgs/msg/Image"</a:t>
+            </a:r>
+            <a:br/>
+            <a:r>
+              <a:t>  gz_type_name: "gz.msgs.Image"</a:t>
             </a:r>
           </a:p>
         </p:txBody>
@@ -20220,7 +20568,7 @@
         </p:nvSpPr>
         <p:spPr>
           <a:xfrm>
-            <a:off x="749808" y="6199632"/>
+            <a:off x="749808" y="6181344"/>
             <a:ext cx="10789920" cy="201168"/>
           </a:xfrm>
           <a:prstGeom prst="rect">
@@ -20246,7 +20594,7 @@
               </a:defRPr>
             </a:pPr>
             <a:r>
-              <a:t>파일 전체 2/2 · 이 슬라이드 다음에 같은 파일의 나머지 줄이 이어집니다.</a:t>
+              <a:t>파일 전체 2/3 · 이 슬라이드 다음에 같은 파일의 나머지 줄이 이어집니다.</a:t>
             </a:r>
           </a:p>
         </p:txBody>
@@ -20303,7 +20651,7 @@
               </a:defRPr>
             </a:pPr>
             <a:r>
-              <a:t>build → source → run 순서로 실행한다</a:t>
+              <a:t>파일을 계속 작성하고 저장한다 (3/3)</a:t>
             </a:r>
           </a:p>
         </p:txBody>
@@ -20342,7 +20690,7 @@
               </a:defRPr>
             </a:pPr>
             <a:r>
-              <a:t>새 파일 또는 수정 파일은 build와 source 뒤에만 실행 이름·설정에 반영됩니다.</a:t>
+              <a:t>~/agv_ws/src/agv_gazebo/config/bridge.yaml</a:t>
             </a:r>
           </a:p>
         </p:txBody>
@@ -20478,23 +20826,124 @@
               </a:defRPr>
             </a:pPr>
             <a:r>
-              <a:t>현재 단계 실행    |    현재 폴더 ~/agv_ws    |    현재 터미널</a:t>
-            </a:r>
-          </a:p>
-        </p:txBody>
-      </p:sp>
-      <p:sp>
-        <p:nvSpPr>
-          <p:cNvPr id="7" name="Rounded Rectangle 6"/>
+              <a:t>현재 단계 29/30    |    현재 폴더 ~/agv_ws    |    현재 터미널</a:t>
+            </a:r>
+          </a:p>
+        </p:txBody>
+      </p:sp>
+      <p:sp>
+        <p:nvSpPr>
+          <p:cNvPr id="7" name="TextBox 6"/>
+          <p:cNvSpPr txBox="1"/>
+          <p:nvPr/>
+        </p:nvSpPr>
+        <p:spPr>
+          <a:xfrm>
+            <a:off x="658368" y="1627632"/>
+            <a:ext cx="10972800" cy="256032"/>
+          </a:xfrm>
+          <a:prstGeom prst="rect">
+            <a:avLst/>
+          </a:prstGeom>
+          <a:noFill/>
+        </p:spPr>
+        <p:txBody>
+          <a:bodyPr wrap="square" lIns="73152" rIns="73152" tIns="36576" bIns="36576">
+            <a:spAutoFit/>
+          </a:bodyPr>
+          <a:lstStyle/>
+          <a:p>
+            <a:pPr algn="l">
+              <a:spcAft>
+                <a:spcPts val="0"/>
+              </a:spcAft>
+              <a:defRPr sz="1500" b="1">
+                <a:solidFill>
+                  <a:srgbClr val="122C4E"/>
+                </a:solidFill>
+                <a:latin typeface="Noto Sans CJK KR"/>
+              </a:defRPr>
+            </a:pPr>
+            <a:r>
+              <a:t>이번 단계: 파일의 전체 내용을 중간 생략 없이 작성합니다. 아래 줄 범위를 끝까지 입력하세요.</a:t>
+            </a:r>
+          </a:p>
+        </p:txBody>
+      </p:sp>
+      <p:sp>
+        <p:nvSpPr>
+          <p:cNvPr id="8" name="Rectangle 7"/>
           <p:cNvSpPr/>
           <p:nvPr/>
         </p:nvSpPr>
         <p:spPr>
           <a:xfrm>
-            <a:off x="658368" y="1700784"/>
-            <a:ext cx="10972800" cy="3182112"/>
-          </a:xfrm>
-          <a:prstGeom prst="roundRect">
+            <a:off x="658368" y="1956816"/>
+            <a:ext cx="10972800" cy="603504"/>
+          </a:xfrm>
+          <a:prstGeom prst="rect">
+            <a:avLst/>
+          </a:prstGeom>
+          <a:solidFill>
+            <a:srgbClr val="F4F7FB"/>
+          </a:solidFill>
+          <a:ln>
+            <a:solidFill>
+              <a:srgbClr val="F4F7FB"/>
+            </a:solidFill>
+          </a:ln>
+        </p:spPr>
+        <p:style>
+          <a:lnRef idx="1">
+            <a:schemeClr val="accent1"/>
+          </a:lnRef>
+          <a:fillRef idx="3">
+            <a:schemeClr val="accent1"/>
+          </a:fillRef>
+          <a:effectRef idx="2">
+            <a:schemeClr val="accent1"/>
+          </a:effectRef>
+          <a:fontRef idx="minor">
+            <a:schemeClr val="lt1"/>
+          </a:fontRef>
+        </p:style>
+        <p:txBody>
+          <a:bodyPr rtlCol="0" anchor="ctr" wrap="square" lIns="73152" rIns="73152" tIns="36576" bIns="36576"/>
+          <a:lstStyle/>
+          <a:p>
+            <a:pPr algn="l">
+              <a:spcAft>
+                <a:spcPts val="0"/>
+              </a:spcAft>
+              <a:defRPr sz="1400" b="0">
+                <a:solidFill>
+                  <a:srgbClr val="122C4E"/>
+                </a:solidFill>
+                <a:latin typeface="DejaVu Sans Mono"/>
+              </a:defRPr>
+            </a:pPr>
+            <a:r>
+              <a:t>파일 생성: mkdir -p ~/agv_ws/src/agv_gazebo/config</a:t>
+            </a:r>
+            <a:br/>
+            <a:r>
+              <a:t>파일 열기: nano ~/agv_ws/src/agv_gazebo/config/bridge.yaml</a:t>
+            </a:r>
+          </a:p>
+        </p:txBody>
+      </p:sp>
+      <p:sp>
+        <p:nvSpPr>
+          <p:cNvPr id="9" name="Rectangle 8"/>
+          <p:cNvSpPr/>
+          <p:nvPr/>
+        </p:nvSpPr>
+        <p:spPr>
+          <a:xfrm>
+            <a:off x="658368" y="2706624"/>
+            <a:ext cx="10972800" cy="3364992"/>
+          </a:xfrm>
+          <a:prstGeom prst="rect">
             <a:avLst/>
           </a:prstGeom>
           <a:solidFill>
@@ -20521,14 +20970,14 @@
           </a:fontRef>
         </p:style>
         <p:txBody>
-          <a:bodyPr rtlCol="0" anchor="ctr" wrap="square" lIns="73152" rIns="73152" tIns="36576" bIns="36576"/>
-          <a:lstStyle/>
-          <a:p>
-            <a:pPr algn="l">
-              <a:spcAft>
-                <a:spcPts val="0"/>
-              </a:spcAft>
-              <a:defRPr sz="1600" b="0">
+          <a:bodyPr rtlCol="0" anchor="ctr" wrap="square" lIns="164592" rIns="164592" tIns="109728" bIns="36576"/>
+          <a:lstStyle/>
+          <a:p>
+            <a:pPr algn="l">
+              <a:spcAft>
+                <a:spcPts val="0"/>
+              </a:spcAft>
+              <a:defRPr sz="1400" b="0">
                 <a:solidFill>
                   <a:srgbClr val="FFFFFF"/>
                 </a:solidFill>
@@ -20536,25 +20985,41 @@
               </a:defRPr>
             </a:pPr>
             <a:r>
-              <a:t>ros2 launch agv_bringup agv_sim.launch.py rviz:=false</a:t>
-            </a:r>
-            <a:br/>
-            <a:r>
-              <a:t># 새 터미널: ros2 run agv_sensors imu_monitor</a:t>
-            </a:r>
-          </a:p>
-        </p:txBody>
-      </p:sp>
-      <p:sp>
-        <p:nvSpPr>
-          <p:cNvPr id="8" name="TextBox 7"/>
+              <a:t>  direction: GZ_TO_ROS</a:t>
+            </a:r>
+            <a:br/>
+            <a:r>
+              <a:t>- ros_topic_name: "/clock"</a:t>
+            </a:r>
+            <a:br/>
+            <a:r>
+              <a:t>  gz_topic_name: "/clock"</a:t>
+            </a:r>
+            <a:br/>
+            <a:r>
+              <a:t>  ros_type_name: "rosgraph_msgs/msg/Clock"</a:t>
+            </a:r>
+            <a:br/>
+            <a:r>
+              <a:t>  gz_type_name: "gz.msgs.Clock"</a:t>
+            </a:r>
+            <a:br/>
+            <a:r>
+              <a:t>  direction: GZ_TO_ROS</a:t>
+            </a:r>
+          </a:p>
+        </p:txBody>
+      </p:sp>
+      <p:sp>
+        <p:nvSpPr>
+          <p:cNvPr id="10" name="TextBox 9"/>
           <p:cNvSpPr txBox="1"/>
           <p:nvPr/>
         </p:nvSpPr>
         <p:spPr>
           <a:xfrm>
-            <a:off x="786384" y="5239512"/>
-            <a:ext cx="1261872" cy="237744"/>
+            <a:off x="749808" y="6181344"/>
+            <a:ext cx="10789920" cy="201168"/>
           </a:xfrm>
           <a:prstGeom prst="rect">
             <a:avLst/>
@@ -20571,54 +21036,15 @@
               <a:spcAft>
                 <a:spcPts val="0"/>
               </a:spcAft>
-              <a:defRPr sz="1800" b="1">
-                <a:solidFill>
-                  <a:srgbClr val="2A8B5A"/>
-                </a:solidFill>
-                <a:latin typeface="Noto Sans CJK KR"/>
-              </a:defRPr>
-            </a:pPr>
-            <a:r>
-              <a:t>확인 기준</a:t>
-            </a:r>
-          </a:p>
-        </p:txBody>
-      </p:sp>
-      <p:sp>
-        <p:nvSpPr>
-          <p:cNvPr id="9" name="TextBox 8"/>
-          <p:cNvSpPr txBox="1"/>
-          <p:nvPr/>
-        </p:nvSpPr>
-        <p:spPr>
-          <a:xfrm>
-            <a:off x="786384" y="5532120"/>
-            <a:ext cx="10469880" cy="420624"/>
-          </a:xfrm>
-          <a:prstGeom prst="rect">
-            <a:avLst/>
-          </a:prstGeom>
-          <a:noFill/>
-        </p:spPr>
-        <p:txBody>
-          <a:bodyPr wrap="square" lIns="73152" rIns="73152" tIns="36576" bIns="36576">
-            <a:spAutoFit/>
-          </a:bodyPr>
-          <a:lstStyle/>
-          <a:p>
-            <a:pPr algn="l">
-              <a:spcAft>
-                <a:spcPts val="0"/>
-              </a:spcAft>
-              <a:defRPr sz="1800" b="0">
-                <a:solidFill>
-                  <a:srgbClr val="122C4E"/>
-                </a:solidFill>
-                <a:latin typeface="Noto Sans CJK KR"/>
-              </a:defRPr>
-            </a:pPr>
-            <a:r>
-              <a:t>/imu/data의 z축 gyro 값과 noise 설정을 terminal에서 확인한다.</a:t>
+              <a:defRPr sz="1000" b="0">
+                <a:solidFill>
+                  <a:srgbClr val="5C6672"/>
+                </a:solidFill>
+                <a:latin typeface="Noto Sans CJK KR"/>
+              </a:defRPr>
+            </a:pPr>
+            <a:r>
+              <a:t>파일 전체 3/3 · 이 슬라이드 다음에 같은 파일의 나머지 줄이 이어집니다.</a:t>
             </a:r>
           </a:p>
         </p:txBody>
@@ -20675,7 +21101,7 @@
               </a:defRPr>
             </a:pPr>
             <a:r>
-              <a:t>정상 결과: 실제 환경에서 확인한 출력</a:t>
+              <a:t>파일을 새로 만들고 저장한다 (1/3)</a:t>
             </a:r>
           </a:p>
         </p:txBody>
@@ -20714,7 +21140,7 @@
               </a:defRPr>
             </a:pPr>
             <a:r>
-              <a:t>실제 ROS 2 환경의 파일·패키지·구성 검증 로그</a:t>
+              <a:t>~/agv_ws/src/agv_sensors/agv_sensors/imu_monitor.py</a:t>
             </a:r>
           </a:p>
         </p:txBody>
@@ -20797,30 +21223,64 @@
           </a:p>
         </p:txBody>
       </p:sp>
-      <p:pic>
-        <p:nvPicPr>
-          <p:cNvPr id="6" name="Picture 5" descr="validation_terminal.png"/>
-          <p:cNvPicPr>
-            <a:picLocks noChangeAspect="1"/>
-          </p:cNvPicPr>
-          <p:nvPr/>
-        </p:nvPicPr>
-        <p:blipFill>
-          <a:blip r:embed="rId2"/>
-          <a:stretch>
-            <a:fillRect/>
-          </a:stretch>
-        </p:blipFill>
-        <p:spPr>
-          <a:xfrm>
-            <a:off x="1246187" y="1353312"/>
-            <a:ext cx="9696576" cy="4800600"/>
-          </a:xfrm>
-          <a:prstGeom prst="rect">
-            <a:avLst/>
-          </a:prstGeom>
-        </p:spPr>
-      </p:pic>
+      <p:sp>
+        <p:nvSpPr>
+          <p:cNvPr id="6" name="Rectangle 5"/>
+          <p:cNvSpPr/>
+          <p:nvPr/>
+        </p:nvSpPr>
+        <p:spPr>
+          <a:xfrm>
+            <a:off x="566928" y="1188720"/>
+            <a:ext cx="11064240" cy="347472"/>
+          </a:xfrm>
+          <a:prstGeom prst="rect">
+            <a:avLst/>
+          </a:prstGeom>
+          <a:solidFill>
+            <a:srgbClr val="F4F7FB"/>
+          </a:solidFill>
+          <a:ln>
+            <a:solidFill>
+              <a:srgbClr val="F4F7FB"/>
+            </a:solidFill>
+          </a:ln>
+        </p:spPr>
+        <p:style>
+          <a:lnRef idx="1">
+            <a:schemeClr val="accent1"/>
+          </a:lnRef>
+          <a:fillRef idx="3">
+            <a:schemeClr val="accent1"/>
+          </a:fillRef>
+          <a:effectRef idx="2">
+            <a:schemeClr val="accent1"/>
+          </a:effectRef>
+          <a:fontRef idx="minor">
+            <a:schemeClr val="lt1"/>
+          </a:fontRef>
+        </p:style>
+        <p:txBody>
+          <a:bodyPr rtlCol="0" anchor="ctr" wrap="square" lIns="73152" rIns="73152" tIns="36576" bIns="36576"/>
+          <a:lstStyle/>
+          <a:p>
+            <a:pPr algn="l">
+              <a:spcAft>
+                <a:spcPts val="0"/>
+              </a:spcAft>
+              <a:defRPr sz="1300" b="1">
+                <a:solidFill>
+                  <a:srgbClr val="122C4E"/>
+                </a:solidFill>
+                <a:latin typeface="Noto Sans CJK KR"/>
+              </a:defRPr>
+            </a:pPr>
+            <a:r>
+              <a:t>현재 단계 30/33    |    현재 폴더 ~/agv_ws    |    현재 터미널</a:t>
+            </a:r>
+          </a:p>
+        </p:txBody>
+      </p:sp>
       <p:sp>
         <p:nvSpPr>
           <p:cNvPr id="7" name="TextBox 6"/>
@@ -20829,8 +21289,8 @@
         </p:nvSpPr>
         <p:spPr>
           <a:xfrm>
-            <a:off x="777240" y="6217920"/>
-            <a:ext cx="10607040" cy="182880"/>
+            <a:off x="658368" y="1627632"/>
+            <a:ext cx="10972800" cy="256032"/>
           </a:xfrm>
           <a:prstGeom prst="rect">
             <a:avLst/>
@@ -20843,19 +21303,213 @@
           </a:bodyPr>
           <a:lstStyle/>
           <a:p>
-            <a:pPr algn="ctr">
-              <a:spcAft>
-                <a:spcPts val="0"/>
-              </a:spcAft>
-              <a:defRPr sz="1100" b="1">
-                <a:solidFill>
-                  <a:srgbClr val="2A8B5A"/>
-                </a:solidFill>
-                <a:latin typeface="Noto Sans CJK KR"/>
-              </a:defRPr>
-            </a:pPr>
-            <a:r>
-              <a:t>① 명령/설정  ② 정상 출력 또는 화면  ③ 다음 검증 명령으로 재확인</a:t>
+            <a:pPr algn="l">
+              <a:spcAft>
+                <a:spcPts val="0"/>
+              </a:spcAft>
+              <a:defRPr sz="1500" b="1">
+                <a:solidFill>
+                  <a:srgbClr val="122C4E"/>
+                </a:solidFill>
+                <a:latin typeface="Noto Sans CJK KR"/>
+              </a:defRPr>
+            </a:pPr>
+            <a:r>
+              <a:t>이번 단계: 파일의 전체 내용을 중간 생략 없이 작성합니다. 아래 줄 범위를 끝까지 입력하세요.</a:t>
+            </a:r>
+          </a:p>
+        </p:txBody>
+      </p:sp>
+      <p:sp>
+        <p:nvSpPr>
+          <p:cNvPr id="8" name="Rectangle 7"/>
+          <p:cNvSpPr/>
+          <p:nvPr/>
+        </p:nvSpPr>
+        <p:spPr>
+          <a:xfrm>
+            <a:off x="658368" y="1956816"/>
+            <a:ext cx="10972800" cy="603504"/>
+          </a:xfrm>
+          <a:prstGeom prst="rect">
+            <a:avLst/>
+          </a:prstGeom>
+          <a:solidFill>
+            <a:srgbClr val="F4F7FB"/>
+          </a:solidFill>
+          <a:ln>
+            <a:solidFill>
+              <a:srgbClr val="F4F7FB"/>
+            </a:solidFill>
+          </a:ln>
+        </p:spPr>
+        <p:style>
+          <a:lnRef idx="1">
+            <a:schemeClr val="accent1"/>
+          </a:lnRef>
+          <a:fillRef idx="3">
+            <a:schemeClr val="accent1"/>
+          </a:fillRef>
+          <a:effectRef idx="2">
+            <a:schemeClr val="accent1"/>
+          </a:effectRef>
+          <a:fontRef idx="minor">
+            <a:schemeClr val="lt1"/>
+          </a:fontRef>
+        </p:style>
+        <p:txBody>
+          <a:bodyPr rtlCol="0" anchor="ctr" wrap="square" lIns="73152" rIns="73152" tIns="36576" bIns="36576"/>
+          <a:lstStyle/>
+          <a:p>
+            <a:pPr algn="l">
+              <a:spcAft>
+                <a:spcPts val="0"/>
+              </a:spcAft>
+              <a:defRPr sz="1400" b="0">
+                <a:solidFill>
+                  <a:srgbClr val="122C4E"/>
+                </a:solidFill>
+                <a:latin typeface="DejaVu Sans Mono"/>
+              </a:defRPr>
+            </a:pPr>
+            <a:r>
+              <a:t>파일 생성: mkdir -p ~/agv_ws/src/agv_sensors/agv_sensors</a:t>
+            </a:r>
+            <a:br/>
+            <a:r>
+              <a:t>파일 열기: nano ~/agv_ws/src/agv_sensors/agv_sensors/imu_monitor.py</a:t>
+            </a:r>
+          </a:p>
+        </p:txBody>
+      </p:sp>
+      <p:sp>
+        <p:nvSpPr>
+          <p:cNvPr id="9" name="Rectangle 8"/>
+          <p:cNvSpPr/>
+          <p:nvPr/>
+        </p:nvSpPr>
+        <p:spPr>
+          <a:xfrm>
+            <a:off x="658368" y="2706624"/>
+            <a:ext cx="10972800" cy="3364992"/>
+          </a:xfrm>
+          <a:prstGeom prst="rect">
+            <a:avLst/>
+          </a:prstGeom>
+          <a:solidFill>
+            <a:srgbClr val="1D232D"/>
+          </a:solidFill>
+          <a:ln>
+            <a:solidFill>
+              <a:srgbClr val="1D232D"/>
+            </a:solidFill>
+          </a:ln>
+        </p:spPr>
+        <p:style>
+          <a:lnRef idx="1">
+            <a:schemeClr val="accent1"/>
+          </a:lnRef>
+          <a:fillRef idx="3">
+            <a:schemeClr val="accent1"/>
+          </a:fillRef>
+          <a:effectRef idx="2">
+            <a:schemeClr val="accent1"/>
+          </a:effectRef>
+          <a:fontRef idx="minor">
+            <a:schemeClr val="lt1"/>
+          </a:fontRef>
+        </p:style>
+        <p:txBody>
+          <a:bodyPr rtlCol="0" anchor="ctr" wrap="square" lIns="164592" rIns="164592" tIns="109728" bIns="36576"/>
+          <a:lstStyle/>
+          <a:p>
+            <a:pPr algn="l">
+              <a:spcAft>
+                <a:spcPts val="0"/>
+              </a:spcAft>
+              <a:defRPr sz="1400" b="0">
+                <a:solidFill>
+                  <a:srgbClr val="FFFFFF"/>
+                </a:solidFill>
+                <a:latin typeface="DejaVu Sans Mono"/>
+              </a:defRPr>
+            </a:pPr>
+            <a:r>
+              <a:t>import rclpy</a:t>
+            </a:r>
+            <a:br/>
+            <a:r>
+              <a:t>from rclpy.node import Node</a:t>
+            </a:r>
+            <a:br/>
+            <a:r>
+              <a:t>from rclpy.qos import qos_profile_sensor_data</a:t>
+            </a:r>
+            <a:br/>
+            <a:r>
+              <a:t>from sensor_msgs.msg import Imu</a:t>
+            </a:r>
+            <a:br/>
+            <a:br/>
+            <a:r>
+              <a:t>class ImuMonitor(Node):</a:t>
+            </a:r>
+            <a:br/>
+            <a:br/>
+            <a:r>
+              <a:t>    def __init__(self):</a:t>
+            </a:r>
+            <a:br/>
+            <a:r>
+              <a:t>        super().__init__('imu_monitor')</a:t>
+            </a:r>
+            <a:br/>
+            <a:r>
+              <a:t>        self.create_subscription(Imu, '/imu/data', self.callback,</a:t>
+            </a:r>
+            <a:br/>
+            <a:r>
+              <a:t>            qos_profile_sensor_data)</a:t>
+            </a:r>
+            <a:br/>
+          </a:p>
+        </p:txBody>
+      </p:sp>
+      <p:sp>
+        <p:nvSpPr>
+          <p:cNvPr id="10" name="TextBox 9"/>
+          <p:cNvSpPr txBox="1"/>
+          <p:nvPr/>
+        </p:nvSpPr>
+        <p:spPr>
+          <a:xfrm>
+            <a:off x="749808" y="6181344"/>
+            <a:ext cx="10789920" cy="201168"/>
+          </a:xfrm>
+          <a:prstGeom prst="rect">
+            <a:avLst/>
+          </a:prstGeom>
+          <a:noFill/>
+        </p:spPr>
+        <p:txBody>
+          <a:bodyPr wrap="square" lIns="73152" rIns="73152" tIns="36576" bIns="36576">
+            <a:spAutoFit/>
+          </a:bodyPr>
+          <a:lstStyle/>
+          <a:p>
+            <a:pPr algn="l">
+              <a:spcAft>
+                <a:spcPts val="0"/>
+              </a:spcAft>
+              <a:defRPr sz="1000" b="0">
+                <a:solidFill>
+                  <a:srgbClr val="5C6672"/>
+                </a:solidFill>
+                <a:latin typeface="Noto Sans CJK KR"/>
+              </a:defRPr>
+            </a:pPr>
+            <a:r>
+              <a:t>파일 전체 1/3 · 이 슬라이드 다음에 같은 파일의 나머지 줄이 이어집니다.</a:t>
             </a:r>
           </a:p>
         </p:txBody>
@@ -20912,7 +21566,7 @@
               </a:defRPr>
             </a:pPr>
             <a:r>
-              <a:t>객관적 검증 명령으로 완료를 확인한다</a:t>
+              <a:t>파일을 계속 작성하고 저장한다 (2/3)</a:t>
             </a:r>
           </a:p>
         </p:txBody>
@@ -20951,7 +21605,7 @@
               </a:defRPr>
             </a:pPr>
             <a:r>
-              <a:t>화면만 보지 말고 topic·frame·파일·parameter를 다시 확인합니다.</a:t>
+              <a:t>~/agv_ws/src/agv_sensors/agv_sensors/imu_monitor.py</a:t>
             </a:r>
           </a:p>
         </p:txBody>
@@ -21087,23 +21741,124 @@
               </a:defRPr>
             </a:pPr>
             <a:r>
-              <a:t>현재 단계 검증    |    현재 폴더 ~/agv_ws    |    현재 터미널</a:t>
-            </a:r>
-          </a:p>
-        </p:txBody>
-      </p:sp>
-      <p:sp>
-        <p:nvSpPr>
-          <p:cNvPr id="7" name="Rounded Rectangle 6"/>
+              <a:t>현재 단계 31/33    |    현재 폴더 ~/agv_ws    |    현재 터미널</a:t>
+            </a:r>
+          </a:p>
+        </p:txBody>
+      </p:sp>
+      <p:sp>
+        <p:nvSpPr>
+          <p:cNvPr id="7" name="TextBox 6"/>
+          <p:cNvSpPr txBox="1"/>
+          <p:nvPr/>
+        </p:nvSpPr>
+        <p:spPr>
+          <a:xfrm>
+            <a:off x="658368" y="1627632"/>
+            <a:ext cx="10972800" cy="256032"/>
+          </a:xfrm>
+          <a:prstGeom prst="rect">
+            <a:avLst/>
+          </a:prstGeom>
+          <a:noFill/>
+        </p:spPr>
+        <p:txBody>
+          <a:bodyPr wrap="square" lIns="73152" rIns="73152" tIns="36576" bIns="36576">
+            <a:spAutoFit/>
+          </a:bodyPr>
+          <a:lstStyle/>
+          <a:p>
+            <a:pPr algn="l">
+              <a:spcAft>
+                <a:spcPts val="0"/>
+              </a:spcAft>
+              <a:defRPr sz="1500" b="1">
+                <a:solidFill>
+                  <a:srgbClr val="122C4E"/>
+                </a:solidFill>
+                <a:latin typeface="Noto Sans CJK KR"/>
+              </a:defRPr>
+            </a:pPr>
+            <a:r>
+              <a:t>이번 단계: 파일의 전체 내용을 중간 생략 없이 작성합니다. 아래 줄 범위를 끝까지 입력하세요.</a:t>
+            </a:r>
+          </a:p>
+        </p:txBody>
+      </p:sp>
+      <p:sp>
+        <p:nvSpPr>
+          <p:cNvPr id="8" name="Rectangle 7"/>
           <p:cNvSpPr/>
           <p:nvPr/>
         </p:nvSpPr>
         <p:spPr>
           <a:xfrm>
-            <a:off x="658368" y="1755648"/>
-            <a:ext cx="10972800" cy="2148840"/>
-          </a:xfrm>
-          <a:prstGeom prst="roundRect">
+            <a:off x="658368" y="1956816"/>
+            <a:ext cx="10972800" cy="603504"/>
+          </a:xfrm>
+          <a:prstGeom prst="rect">
+            <a:avLst/>
+          </a:prstGeom>
+          <a:solidFill>
+            <a:srgbClr val="F4F7FB"/>
+          </a:solidFill>
+          <a:ln>
+            <a:solidFill>
+              <a:srgbClr val="F4F7FB"/>
+            </a:solidFill>
+          </a:ln>
+        </p:spPr>
+        <p:style>
+          <a:lnRef idx="1">
+            <a:schemeClr val="accent1"/>
+          </a:lnRef>
+          <a:fillRef idx="3">
+            <a:schemeClr val="accent1"/>
+          </a:fillRef>
+          <a:effectRef idx="2">
+            <a:schemeClr val="accent1"/>
+          </a:effectRef>
+          <a:fontRef idx="minor">
+            <a:schemeClr val="lt1"/>
+          </a:fontRef>
+        </p:style>
+        <p:txBody>
+          <a:bodyPr rtlCol="0" anchor="ctr" wrap="square" lIns="73152" rIns="73152" tIns="36576" bIns="36576"/>
+          <a:lstStyle/>
+          <a:p>
+            <a:pPr algn="l">
+              <a:spcAft>
+                <a:spcPts val="0"/>
+              </a:spcAft>
+              <a:defRPr sz="1400" b="0">
+                <a:solidFill>
+                  <a:srgbClr val="122C4E"/>
+                </a:solidFill>
+                <a:latin typeface="DejaVu Sans Mono"/>
+              </a:defRPr>
+            </a:pPr>
+            <a:r>
+              <a:t>파일 생성: mkdir -p ~/agv_ws/src/agv_sensors/agv_sensors</a:t>
+            </a:r>
+            <a:br/>
+            <a:r>
+              <a:t>파일 열기: nano ~/agv_ws/src/agv_sensors/agv_sensors/imu_monitor.py</a:t>
+            </a:r>
+          </a:p>
+        </p:txBody>
+      </p:sp>
+      <p:sp>
+        <p:nvSpPr>
+          <p:cNvPr id="9" name="Rectangle 8"/>
+          <p:cNvSpPr/>
+          <p:nvPr/>
+        </p:nvSpPr>
+        <p:spPr>
+          <a:xfrm>
+            <a:off x="658368" y="2706624"/>
+            <a:ext cx="10972800" cy="3364992"/>
+          </a:xfrm>
+          <a:prstGeom prst="rect">
             <a:avLst/>
           </a:prstGeom>
           <a:solidFill>
@@ -21130,14 +21885,14 @@
           </a:fontRef>
         </p:style>
         <p:txBody>
-          <a:bodyPr rtlCol="0" anchor="ctr" wrap="square" lIns="73152" rIns="73152" tIns="36576" bIns="36576"/>
-          <a:lstStyle/>
-          <a:p>
-            <a:pPr algn="l">
-              <a:spcAft>
-                <a:spcPts val="0"/>
-              </a:spcAft>
-              <a:defRPr sz="1600" b="0">
+          <a:bodyPr rtlCol="0" anchor="ctr" wrap="square" lIns="164592" rIns="164592" tIns="109728" bIns="36576"/>
+          <a:lstStyle/>
+          <a:p>
+            <a:pPr algn="l">
+              <a:spcAft>
+                <a:spcPts val="0"/>
+              </a:spcAft>
+              <a:defRPr sz="1400" b="0">
                 <a:solidFill>
                   <a:srgbClr val="FFFFFF"/>
                 </a:solidFill>
@@ -21145,99 +21900,62 @@
               </a:defRPr>
             </a:pPr>
             <a:r>
-              <a:t>ros2 topic info /imu/data</a:t>
-            </a:r>
-            <a:br/>
-            <a:r>
-              <a:t>ros2 topic hz /imu/data</a:t>
-            </a:r>
-            <a:br/>
-            <a:r>
-              <a:t>ros2 topic echo /imu/data --once</a:t>
-            </a:r>
-          </a:p>
-        </p:txBody>
-      </p:sp>
-      <p:sp>
-        <p:nvSpPr>
-          <p:cNvPr id="8" name="Rounded Rectangle 7"/>
-          <p:cNvSpPr/>
-          <p:nvPr/>
-        </p:nvSpPr>
-        <p:spPr>
-          <a:xfrm>
-            <a:off x="658368" y="4206240"/>
-            <a:ext cx="10972800" cy="1554480"/>
-          </a:xfrm>
-          <a:prstGeom prst="roundRect">
-            <a:avLst/>
-          </a:prstGeom>
-          <a:solidFill>
-            <a:srgbClr val="F4F7FB"/>
-          </a:solidFill>
-          <a:ln>
-            <a:solidFill>
-              <a:srgbClr val="D1DFD5"/>
-            </a:solidFill>
-          </a:ln>
-        </p:spPr>
-        <p:style>
-          <a:lnRef idx="1">
-            <a:schemeClr val="accent1"/>
-          </a:lnRef>
-          <a:fillRef idx="3">
-            <a:schemeClr val="accent1"/>
-          </a:fillRef>
-          <a:effectRef idx="2">
-            <a:schemeClr val="accent1"/>
-          </a:effectRef>
-          <a:fontRef idx="minor">
-            <a:schemeClr val="lt1"/>
-          </a:fontRef>
-        </p:style>
-        <p:txBody>
-          <a:bodyPr rtlCol="0" anchor="ctr" wrap="square" lIns="73152" rIns="73152" tIns="36576" bIns="36576"/>
-          <a:lstStyle/>
-          <a:p>
-            <a:pPr algn="l">
-              <a:spcAft>
-                <a:spcPts val="0"/>
-              </a:spcAft>
-              <a:defRPr sz="1800" b="1">
-                <a:solidFill>
-                  <a:srgbClr val="2A8B5A"/>
-                </a:solidFill>
-                <a:latin typeface="Noto Sans CJK KR"/>
-              </a:defRPr>
-            </a:pPr>
-            <a:r>
-              <a:t>완료 체크</a:t>
-            </a:r>
-            <a:br/>
-            <a:r>
-              <a:t>□ 명령이 오류 없이 실행된다.</a:t>
-            </a:r>
-            <a:br/>
-            <a:r>
-              <a:t>□ 기대한 파일·topic·frame·parameter 이름이 보인다.</a:t>
-            </a:r>
-            <a:br/>
-            <a:r>
-              <a:t>□ 값의 단위와 방향을 한 문장으로 설명할 수 있다.</a:t>
-            </a:r>
-          </a:p>
-        </p:txBody>
-      </p:sp>
-      <p:sp>
-        <p:nvSpPr>
-          <p:cNvPr id="9" name="TextBox 8"/>
+              <a:t>    def callback(self, message):</a:t>
+            </a:r>
+            <a:br/>
+            <a:r>
+              <a:t>        self.get_logger().info('gyro z=%.3f rad/s, acceleration z=%.3f m/s²,</a:t>
+            </a:r>
+            <a:br/>
+            <a:r>
+              <a:t>            frame=%s' % (message.angular_velocity.z, message.linear_acceleration.z,</a:t>
+            </a:r>
+            <a:br/>
+            <a:r>
+              <a:t>            message.header.frame_id), throttle_duration_sec=1.0)</a:t>
+            </a:r>
+            <a:br/>
+            <a:br/>
+            <a:r>
+              <a:t>def main():</a:t>
+            </a:r>
+            <a:br/>
+            <a:r>
+              <a:t>    rclpy.init()</a:t>
+            </a:r>
+            <a:br/>
+            <a:r>
+              <a:t>    node = ImuMonitor()</a:t>
+            </a:r>
+            <a:br/>
+            <a:r>
+              <a:t>    try:</a:t>
+            </a:r>
+            <a:br/>
+            <a:r>
+              <a:t>        rclpy.spin(node)</a:t>
+            </a:r>
+            <a:br/>
+            <a:r>
+              <a:t>    except KeyboardInterrupt:</a:t>
+            </a:r>
+            <a:br/>
+            <a:r>
+              <a:t>        pass</a:t>
+            </a:r>
+          </a:p>
+        </p:txBody>
+      </p:sp>
+      <p:sp>
+        <p:nvSpPr>
+          <p:cNvPr id="10" name="TextBox 9"/>
           <p:cNvSpPr txBox="1"/>
           <p:nvPr/>
         </p:nvSpPr>
         <p:spPr>
           <a:xfrm>
-            <a:off x="731520" y="5989320"/>
-            <a:ext cx="10789920" cy="237744"/>
+            <a:off x="749808" y="6181344"/>
+            <a:ext cx="10789920" cy="201168"/>
           </a:xfrm>
           <a:prstGeom prst="rect">
             <a:avLst/>
@@ -21254,15 +21972,15 @@
               <a:spcAft>
                 <a:spcPts val="0"/>
               </a:spcAft>
-              <a:defRPr sz="1500" b="1">
-                <a:solidFill>
-                  <a:srgbClr val="122C4E"/>
-                </a:solidFill>
-                <a:latin typeface="Noto Sans CJK KR"/>
-              </a:defRPr>
-            </a:pPr>
-            <a:r>
-              <a:t>완료 조건: /imu/data의 z축 gyro 값과 noise 설정을 terminal에서 확인한다.</a:t>
+              <a:defRPr sz="1000" b="0">
+                <a:solidFill>
+                  <a:srgbClr val="5C6672"/>
+                </a:solidFill>
+                <a:latin typeface="Noto Sans CJK KR"/>
+              </a:defRPr>
+            </a:pPr>
+            <a:r>
+              <a:t>파일 전체 2/3 · 이 슬라이드 다음에 같은 파일의 나머지 줄이 이어집니다.</a:t>
             </a:r>
           </a:p>
         </p:txBody>
@@ -21319,7 +22037,7 @@
               </a:defRPr>
             </a:pPr>
             <a:r>
-              <a:t>막히면: 증상 → 우선 확인 → 재검증</a:t>
+              <a:t>파일을 계속 작성하고 저장한다 (3/3)</a:t>
             </a:r>
           </a:p>
         </p:txBody>
@@ -21358,7 +22076,7 @@
               </a:defRPr>
             </a:pPr>
             <a:r>
-              <a:t>오류 메시지를 숨기지 않고 같은 순서로 점검합니다.</a:t>
+              <a:t>~/agv_ws/src/agv_sensors/agv_sensors/imu_monitor.py</a:t>
             </a:r>
           </a:p>
         </p:txBody>
@@ -21494,31 +22212,70 @@
               </a:defRPr>
             </a:pPr>
             <a:r>
-              <a:t>현재 단계 오류 대응    |    현재 폴더 ~/agv_ws    |    현재 터미널</a:t>
-            </a:r>
-          </a:p>
-        </p:txBody>
-      </p:sp>
-      <p:sp>
-        <p:nvSpPr>
-          <p:cNvPr id="7" name="Rounded Rectangle 6"/>
+              <a:t>현재 단계 32/33    |    현재 폴더 ~/agv_ws    |    현재 터미널</a:t>
+            </a:r>
+          </a:p>
+        </p:txBody>
+      </p:sp>
+      <p:sp>
+        <p:nvSpPr>
+          <p:cNvPr id="7" name="TextBox 6"/>
+          <p:cNvSpPr txBox="1"/>
+          <p:nvPr/>
+        </p:nvSpPr>
+        <p:spPr>
+          <a:xfrm>
+            <a:off x="658368" y="1627632"/>
+            <a:ext cx="10972800" cy="256032"/>
+          </a:xfrm>
+          <a:prstGeom prst="rect">
+            <a:avLst/>
+          </a:prstGeom>
+          <a:noFill/>
+        </p:spPr>
+        <p:txBody>
+          <a:bodyPr wrap="square" lIns="73152" rIns="73152" tIns="36576" bIns="36576">
+            <a:spAutoFit/>
+          </a:bodyPr>
+          <a:lstStyle/>
+          <a:p>
+            <a:pPr algn="l">
+              <a:spcAft>
+                <a:spcPts val="0"/>
+              </a:spcAft>
+              <a:defRPr sz="1500" b="1">
+                <a:solidFill>
+                  <a:srgbClr val="122C4E"/>
+                </a:solidFill>
+                <a:latin typeface="Noto Sans CJK KR"/>
+              </a:defRPr>
+            </a:pPr>
+            <a:r>
+              <a:t>이번 단계: 파일의 전체 내용을 중간 생략 없이 작성합니다. 아래 줄 범위를 끝까지 입력하세요.</a:t>
+            </a:r>
+          </a:p>
+        </p:txBody>
+      </p:sp>
+      <p:sp>
+        <p:nvSpPr>
+          <p:cNvPr id="8" name="Rectangle 7"/>
           <p:cNvSpPr/>
           <p:nvPr/>
         </p:nvSpPr>
         <p:spPr>
           <a:xfrm>
-            <a:off x="694944" y="1755648"/>
-            <a:ext cx="10972800" cy="1115568"/>
-          </a:xfrm>
-          <a:prstGeom prst="roundRect">
+            <a:off x="658368" y="1956816"/>
+            <a:ext cx="10972800" cy="603504"/>
+          </a:xfrm>
+          <a:prstGeom prst="rect">
             <a:avLst/>
           </a:prstGeom>
           <a:solidFill>
-            <a:srgbClr val="FFF7F4"/>
+            <a:srgbClr val="F4F7FB"/>
           </a:solidFill>
           <a:ln>
             <a:solidFill>
-              <a:srgbClr val="EDBEB4"/>
+              <a:srgbClr val="F4F7FB"/>
             </a:solidFill>
           </a:ln>
         </p:spPr>
@@ -21537,115 +22294,50 @@
           </a:fontRef>
         </p:style>
         <p:txBody>
-          <a:bodyPr rtlCol="0" anchor="ctr"/>
-          <a:lstStyle/>
-          <a:p>
-            <a:pPr algn="ctr"/>
-          </a:p>
-        </p:txBody>
-      </p:sp>
-      <p:sp>
-        <p:nvSpPr>
-          <p:cNvPr id="8" name="TextBox 7"/>
-          <p:cNvSpPr txBox="1"/>
-          <p:nvPr/>
-        </p:nvSpPr>
-        <p:spPr>
-          <a:xfrm>
-            <a:off x="896112" y="1901952"/>
-            <a:ext cx="2926080" cy="274320"/>
-          </a:xfrm>
-          <a:prstGeom prst="rect">
-            <a:avLst/>
-          </a:prstGeom>
-          <a:noFill/>
-        </p:spPr>
-        <p:txBody>
-          <a:bodyPr wrap="square" lIns="73152" rIns="73152" tIns="36576" bIns="36576">
-            <a:spAutoFit/>
-          </a:bodyPr>
-          <a:lstStyle/>
-          <a:p>
-            <a:pPr algn="l">
-              <a:spcAft>
-                <a:spcPts val="0"/>
-              </a:spcAft>
-              <a:defRPr sz="1800" b="1">
-                <a:solidFill>
-                  <a:srgbClr val="BE3B3B"/>
-                </a:solidFill>
-                <a:latin typeface="Noto Sans CJK KR"/>
-              </a:defRPr>
-            </a:pPr>
-            <a:r>
-              <a:t>증상 1: 값 축이 예상과 다름</a:t>
-            </a:r>
-          </a:p>
-        </p:txBody>
-      </p:sp>
-      <p:sp>
-        <p:nvSpPr>
-          <p:cNvPr id="9" name="TextBox 8"/>
-          <p:cNvSpPr txBox="1"/>
-          <p:nvPr/>
-        </p:nvSpPr>
-        <p:spPr>
-          <a:xfrm>
-            <a:off x="3794760" y="1883664"/>
-            <a:ext cx="7543800" cy="621792"/>
-          </a:xfrm>
-          <a:prstGeom prst="rect">
-            <a:avLst/>
-          </a:prstGeom>
-          <a:noFill/>
-        </p:spPr>
-        <p:txBody>
-          <a:bodyPr wrap="square" lIns="73152" rIns="73152" tIns="36576" bIns="36576">
-            <a:spAutoFit/>
-          </a:bodyPr>
-          <a:lstStyle/>
-          <a:p>
-            <a:pPr algn="l">
-              <a:spcAft>
-                <a:spcPts val="0"/>
-              </a:spcAft>
-              <a:defRPr sz="1600" b="0">
+          <a:bodyPr rtlCol="0" anchor="ctr" wrap="square" lIns="73152" rIns="73152" tIns="36576" bIns="36576"/>
+          <a:lstStyle/>
+          <a:p>
+            <a:pPr algn="l">
+              <a:spcAft>
+                <a:spcPts val="0"/>
+              </a:spcAft>
+              <a:defRPr sz="1400" b="0">
                 <a:solidFill>
                   <a:srgbClr val="122C4E"/>
                 </a:solidFill>
-                <a:latin typeface="Noto Sans CJK KR"/>
-              </a:defRPr>
-            </a:pPr>
-            <a:r>
-              <a:t>우선 확인: imu_link 축·origin rpy·header.frame_id를 확인한다.</a:t>
-            </a:r>
-            <a:br/>
-            <a:r>
-              <a:t>수정 후: ros2 topic info /imu/data</a:t>
-            </a:r>
-          </a:p>
-        </p:txBody>
-      </p:sp>
-      <p:sp>
-        <p:nvSpPr>
-          <p:cNvPr id="10" name="Rounded Rectangle 9"/>
+                <a:latin typeface="DejaVu Sans Mono"/>
+              </a:defRPr>
+            </a:pPr>
+            <a:r>
+              <a:t>파일 생성: mkdir -p ~/agv_ws/src/agv_sensors/agv_sensors</a:t>
+            </a:r>
+            <a:br/>
+            <a:r>
+              <a:t>파일 열기: nano ~/agv_ws/src/agv_sensors/agv_sensors/imu_monitor.py</a:t>
+            </a:r>
+          </a:p>
+        </p:txBody>
+      </p:sp>
+      <p:sp>
+        <p:nvSpPr>
+          <p:cNvPr id="9" name="Rectangle 8"/>
           <p:cNvSpPr/>
           <p:nvPr/>
         </p:nvSpPr>
         <p:spPr>
           <a:xfrm>
-            <a:off x="694944" y="3172968"/>
-            <a:ext cx="10972800" cy="1115568"/>
-          </a:xfrm>
-          <a:prstGeom prst="roundRect">
+            <a:off x="658368" y="2706624"/>
+            <a:ext cx="10972800" cy="3364992"/>
+          </a:xfrm>
+          <a:prstGeom prst="rect">
             <a:avLst/>
           </a:prstGeom>
           <a:solidFill>
-            <a:srgbClr val="FFF7F4"/>
+            <a:srgbClr val="1D232D"/>
           </a:solidFill>
           <a:ln>
             <a:solidFill>
-              <a:srgbClr val="EDBEB4"/>
+              <a:srgbClr val="1D232D"/>
             </a:solidFill>
           </a:ln>
         </p:spPr>
@@ -21664,23 +22356,48 @@
           </a:fontRef>
         </p:style>
         <p:txBody>
-          <a:bodyPr rtlCol="0" anchor="ctr"/>
-          <a:lstStyle/>
-          <a:p>
-            <a:pPr algn="ctr"/>
-          </a:p>
-        </p:txBody>
-      </p:sp>
-      <p:sp>
-        <p:nvSpPr>
-          <p:cNvPr id="11" name="TextBox 10"/>
+          <a:bodyPr rtlCol="0" anchor="ctr" wrap="square" lIns="164592" rIns="164592" tIns="109728" bIns="36576"/>
+          <a:lstStyle/>
+          <a:p>
+            <a:pPr algn="l">
+              <a:spcAft>
+                <a:spcPts val="0"/>
+              </a:spcAft>
+              <a:defRPr sz="1400" b="0">
+                <a:solidFill>
+                  <a:srgbClr val="FFFFFF"/>
+                </a:solidFill>
+                <a:latin typeface="DejaVu Sans Mono"/>
+              </a:defRPr>
+            </a:pPr>
+            <a:r>
+              <a:t>    finally:</a:t>
+            </a:r>
+            <a:br/>
+            <a:r>
+              <a:t>        node.destroy_node()</a:t>
+            </a:r>
+            <a:br/>
+            <a:r>
+              <a:t>        if rclpy.ok():</a:t>
+            </a:r>
+            <a:br/>
+            <a:r>
+              <a:t>            rclpy.shutdown()</a:t>
+            </a:r>
+          </a:p>
+        </p:txBody>
+      </p:sp>
+      <p:sp>
+        <p:nvSpPr>
+          <p:cNvPr id="10" name="TextBox 9"/>
           <p:cNvSpPr txBox="1"/>
           <p:nvPr/>
         </p:nvSpPr>
         <p:spPr>
           <a:xfrm>
-            <a:off x="896112" y="3319272"/>
-            <a:ext cx="2926080" cy="274320"/>
+            <a:off x="749808" y="6181344"/>
+            <a:ext cx="10789920" cy="201168"/>
           </a:xfrm>
           <a:prstGeom prst="rect">
             <a:avLst/>
@@ -21697,97 +22414,15 @@
               <a:spcAft>
                 <a:spcPts val="0"/>
               </a:spcAft>
-              <a:defRPr sz="1800" b="1">
-                <a:solidFill>
-                  <a:srgbClr val="BE3B3B"/>
-                </a:solidFill>
-                <a:latin typeface="Noto Sans CJK KR"/>
-              </a:defRPr>
-            </a:pPr>
-            <a:r>
-              <a:t>증상 2: 값이 지나치게 요동</a:t>
-            </a:r>
-          </a:p>
-        </p:txBody>
-      </p:sp>
-      <p:sp>
-        <p:nvSpPr>
-          <p:cNvPr id="12" name="TextBox 11"/>
-          <p:cNvSpPr txBox="1"/>
-          <p:nvPr/>
-        </p:nvSpPr>
-        <p:spPr>
-          <a:xfrm>
-            <a:off x="3794760" y="3300984"/>
-            <a:ext cx="7543800" cy="621792"/>
-          </a:xfrm>
-          <a:prstGeom prst="rect">
-            <a:avLst/>
-          </a:prstGeom>
-          <a:noFill/>
-        </p:spPr>
-        <p:txBody>
-          <a:bodyPr wrap="square" lIns="73152" rIns="73152" tIns="36576" bIns="36576">
-            <a:spAutoFit/>
-          </a:bodyPr>
-          <a:lstStyle/>
-          <a:p>
-            <a:pPr algn="l">
-              <a:spcAft>
-                <a:spcPts val="0"/>
-              </a:spcAft>
-              <a:defRPr sz="1600" b="0">
-                <a:solidFill>
-                  <a:srgbClr val="122C4E"/>
-                </a:solidFill>
-                <a:latin typeface="Noto Sans CJK KR"/>
-              </a:defRPr>
-            </a:pPr>
-            <a:r>
-              <a:t>우선 확인: noise/bias·update_rate·시뮬레이션 부하를 확인한다.</a:t>
-            </a:r>
-            <a:br/>
-            <a:r>
-              <a:t>수정 후: ros2 topic info /imu/data</a:t>
-            </a:r>
-          </a:p>
-        </p:txBody>
-      </p:sp>
-      <p:sp>
-        <p:nvSpPr>
-          <p:cNvPr id="13" name="TextBox 12"/>
-          <p:cNvSpPr txBox="1"/>
-          <p:nvPr/>
-        </p:nvSpPr>
-        <p:spPr>
-          <a:xfrm>
-            <a:off x="822960" y="5102352"/>
-            <a:ext cx="10607040" cy="402336"/>
-          </a:xfrm>
-          <a:prstGeom prst="rect">
-            <a:avLst/>
-          </a:prstGeom>
-          <a:noFill/>
-        </p:spPr>
-        <p:txBody>
-          <a:bodyPr wrap="square" lIns="73152" rIns="73152" tIns="36576" bIns="36576">
-            <a:spAutoFit/>
-          </a:bodyPr>
-          <a:lstStyle/>
-          <a:p>
-            <a:pPr algn="ctr">
-              <a:spcAft>
-                <a:spcPts val="0"/>
-              </a:spcAft>
-              <a:defRPr sz="1800" b="1">
-                <a:solidFill>
-                  <a:srgbClr val="DB7E22"/>
-                </a:solidFill>
-                <a:latin typeface="Noto Sans CJK KR"/>
-              </a:defRPr>
-            </a:pPr>
-            <a:r>
-              <a:t>공통 순서: ① 현재 폴더 ② source ③ 파일 경로 ④ 이름/타입/단위 ⑤ build·source 후 재실행</a:t>
+              <a:defRPr sz="1000" b="0">
+                <a:solidFill>
+                  <a:srgbClr val="5C6672"/>
+                </a:solidFill>
+                <a:latin typeface="Noto Sans CJK KR"/>
+              </a:defRPr>
+            </a:pPr>
+            <a:r>
+              <a:t>파일 전체 3/3 · 이 슬라이드 다음에 같은 파일의 나머지 줄이 이어집니다.</a:t>
             </a:r>
           </a:p>
         </p:txBody>
@@ -21844,7 +22479,7 @@
               </a:defRPr>
             </a:pPr>
             <a:r>
-              <a:t>미니 실습: 값 하나를 바꾸고 결과를 비교한다</a:t>
+              <a:t>build → source → run 순서로 실행한다</a:t>
             </a:r>
           </a:p>
         </p:txBody>
@@ -21883,7 +22518,7 @@
               </a:defRPr>
             </a:pPr>
             <a:r>
-              <a:t>정상 결과를 만든 뒤에는 한 번에 하나의 값만 바꿉니다.</a:t>
+              <a:t>새 파일 또는 수정 파일은 build와 source 뒤에만 실행 이름·설정에 반영됩니다.</a:t>
             </a:r>
           </a:p>
         </p:txBody>
@@ -22019,7 +22654,7 @@
               </a:defRPr>
             </a:pPr>
             <a:r>
-              <a:t>현재 단계 미니 실습    |    현재 폴더 ~/agv_ws    |    현재 터미널</a:t>
+              <a:t>현재 단계 실행    |    현재 폴더 ~/agv_ws    |    현재 터미널</a:t>
             </a:r>
           </a:p>
         </p:txBody>
@@ -22032,18 +22667,18 @@
         </p:nvSpPr>
         <p:spPr>
           <a:xfrm>
-            <a:off x="749808" y="1874519"/>
-            <a:ext cx="10652760" cy="1993392"/>
+            <a:off x="658368" y="1700784"/>
+            <a:ext cx="10972800" cy="3182112"/>
           </a:xfrm>
           <a:prstGeom prst="roundRect">
             <a:avLst/>
           </a:prstGeom>
           <a:solidFill>
-            <a:srgbClr val="FFF8EB"/>
+            <a:srgbClr val="1D232D"/>
           </a:solidFill>
           <a:ln>
             <a:solidFill>
-              <a:srgbClr val="ECC680"/>
+              <a:srgbClr val="1D232D"/>
             </a:solidFill>
           </a:ln>
         </p:spPr>
@@ -22065,19 +22700,23 @@
           <a:bodyPr rtlCol="0" anchor="ctr" wrap="square" lIns="73152" rIns="73152" tIns="36576" bIns="36576"/>
           <a:lstStyle/>
           <a:p>
-            <a:pPr algn="ctr">
-              <a:spcAft>
-                <a:spcPts val="0"/>
-              </a:spcAft>
-              <a:defRPr sz="2300" b="1">
-                <a:solidFill>
-                  <a:srgbClr val="122C4E"/>
-                </a:solidFill>
-                <a:latin typeface="Noto Sans CJK KR"/>
-              </a:defRPr>
-            </a:pPr>
-            <a:r>
-              <a:t>정지·직진·제자리 회전에서 angular_velocity.z를 각각 기록하고 부호가 어느 동작에서 바뀌는지 설명한다.</a:t>
+            <a:pPr algn="l">
+              <a:spcAft>
+                <a:spcPts val="0"/>
+              </a:spcAft>
+              <a:defRPr sz="1600" b="0">
+                <a:solidFill>
+                  <a:srgbClr val="FFFFFF"/>
+                </a:solidFill>
+                <a:latin typeface="DejaVu Sans Mono"/>
+              </a:defRPr>
+            </a:pPr>
+            <a:r>
+              <a:t>ros2 launch agv_bringup agv_sim.launch.py rviz:=false</a:t>
+            </a:r>
+            <a:br/>
+            <a:r>
+              <a:t># 새 터미널: ros2 run agv_sensors imu_monitor</a:t>
             </a:r>
           </a:p>
         </p:txBody>
@@ -22090,8 +22729,8 @@
         </p:nvSpPr>
         <p:spPr>
           <a:xfrm>
-            <a:off x="877824" y="4590288"/>
-            <a:ext cx="10241280" cy="594360"/>
+            <a:off x="786384" y="5239512"/>
+            <a:ext cx="1261872" cy="237744"/>
           </a:xfrm>
           <a:prstGeom prst="rect">
             <a:avLst/>
@@ -22104,19 +22743,58 @@
           </a:bodyPr>
           <a:lstStyle/>
           <a:p>
-            <a:pPr algn="ctr">
-              <a:spcAft>
-                <a:spcPts val="0"/>
-              </a:spcAft>
-              <a:defRPr sz="1900" b="1">
-                <a:solidFill>
-                  <a:srgbClr val="DB7E22"/>
-                </a:solidFill>
-                <a:latin typeface="Noto Sans CJK KR"/>
-              </a:defRPr>
-            </a:pPr>
-            <a:r>
-              <a:t>기록할 것: 바꾼 값(단위) · 기대한 변화 · 실제 출력/화면 · 원래 값으로 되돌린 결과</a:t>
+            <a:pPr algn="l">
+              <a:spcAft>
+                <a:spcPts val="0"/>
+              </a:spcAft>
+              <a:defRPr sz="1800" b="1">
+                <a:solidFill>
+                  <a:srgbClr val="2A8B5A"/>
+                </a:solidFill>
+                <a:latin typeface="Noto Sans CJK KR"/>
+              </a:defRPr>
+            </a:pPr>
+            <a:r>
+              <a:t>확인 기준</a:t>
+            </a:r>
+          </a:p>
+        </p:txBody>
+      </p:sp>
+      <p:sp>
+        <p:nvSpPr>
+          <p:cNvPr id="9" name="TextBox 8"/>
+          <p:cNvSpPr txBox="1"/>
+          <p:nvPr/>
+        </p:nvSpPr>
+        <p:spPr>
+          <a:xfrm>
+            <a:off x="786384" y="5532120"/>
+            <a:ext cx="10469880" cy="420624"/>
+          </a:xfrm>
+          <a:prstGeom prst="rect">
+            <a:avLst/>
+          </a:prstGeom>
+          <a:noFill/>
+        </p:spPr>
+        <p:txBody>
+          <a:bodyPr wrap="square" lIns="73152" rIns="73152" tIns="36576" bIns="36576">
+            <a:spAutoFit/>
+          </a:bodyPr>
+          <a:lstStyle/>
+          <a:p>
+            <a:pPr algn="l">
+              <a:spcAft>
+                <a:spcPts val="0"/>
+              </a:spcAft>
+              <a:defRPr sz="1800" b="0">
+                <a:solidFill>
+                  <a:srgbClr val="122C4E"/>
+                </a:solidFill>
+                <a:latin typeface="Noto Sans CJK KR"/>
+              </a:defRPr>
+            </a:pPr>
+            <a:r>
+              <a:t>/imu/data의 z축 gyro 값과 noise 설정을 terminal에서 확인한다.</a:t>
             </a:r>
           </a:p>
         </p:txBody>
@@ -22506,7 +23184,7 @@
               </a:defRPr>
             </a:pPr>
             <a:r>
-              <a:t>체크포인트를 저장하고 다음 모듈로 넘긴다</a:t>
+              <a:t>정상 결과: 실제 환경에서 확인한 출력</a:t>
             </a:r>
           </a:p>
         </p:txBody>
@@ -22545,7 +23223,7 @@
               </a:defRPr>
             </a:pPr>
             <a:r>
-              <a:t>현재 Complete는 다음 Starter의 기준선입니다.</a:t>
+              <a:t>실제 ROS 2 환경의 파일·패키지·구성 검증 로그</a:t>
             </a:r>
           </a:p>
         </p:txBody>
@@ -22628,222 +23306,40 @@
           </a:p>
         </p:txBody>
       </p:sp>
-      <p:sp>
-        <p:nvSpPr>
-          <p:cNvPr id="6" name="Rectangle 5"/>
-          <p:cNvSpPr/>
-          <p:nvPr/>
-        </p:nvSpPr>
-        <p:spPr>
-          <a:xfrm>
-            <a:off x="566928" y="1188720"/>
-            <a:ext cx="11064240" cy="347472"/>
-          </a:xfrm>
-          <a:prstGeom prst="rect">
-            <a:avLst/>
-          </a:prstGeom>
-          <a:solidFill>
-            <a:srgbClr val="F4F7FB"/>
-          </a:solidFill>
-          <a:ln>
-            <a:solidFill>
-              <a:srgbClr val="F4F7FB"/>
-            </a:solidFill>
-          </a:ln>
-        </p:spPr>
-        <p:style>
-          <a:lnRef idx="1">
-            <a:schemeClr val="accent1"/>
-          </a:lnRef>
-          <a:fillRef idx="3">
-            <a:schemeClr val="accent1"/>
-          </a:fillRef>
-          <a:effectRef idx="2">
-            <a:schemeClr val="accent1"/>
-          </a:effectRef>
-          <a:fontRef idx="minor">
-            <a:schemeClr val="lt1"/>
-          </a:fontRef>
-        </p:style>
-        <p:txBody>
-          <a:bodyPr rtlCol="0" anchor="ctr" wrap="square" lIns="73152" rIns="73152" tIns="36576" bIns="36576"/>
-          <a:lstStyle/>
-          <a:p>
-            <a:pPr algn="l">
-              <a:spcAft>
-                <a:spcPts val="0"/>
-              </a:spcAft>
-              <a:defRPr sz="1300" b="1">
-                <a:solidFill>
-                  <a:srgbClr val="122C4E"/>
-                </a:solidFill>
-                <a:latin typeface="Noto Sans CJK KR"/>
-              </a:defRPr>
-            </a:pPr>
-            <a:r>
-              <a:t>현재 단계 체크포인트    |    현재 폴더 ~/agv_ws    |    현재 터미널</a:t>
-            </a:r>
-          </a:p>
-        </p:txBody>
-      </p:sp>
-      <p:sp>
-        <p:nvSpPr>
-          <p:cNvPr id="7" name="Rounded Rectangle 6"/>
-          <p:cNvSpPr/>
-          <p:nvPr/>
-        </p:nvSpPr>
-        <p:spPr>
-          <a:xfrm>
-            <a:off x="685800" y="1737360"/>
-            <a:ext cx="10972800" cy="3611880"/>
-          </a:xfrm>
-          <a:prstGeom prst="roundRect">
-            <a:avLst/>
-          </a:prstGeom>
-          <a:solidFill>
-            <a:srgbClr val="F4F7FB"/>
-          </a:solidFill>
-          <a:ln>
-            <a:solidFill>
-              <a:srgbClr val="D2DCE8"/>
-            </a:solidFill>
-          </a:ln>
-        </p:spPr>
-        <p:style>
-          <a:lnRef idx="1">
-            <a:schemeClr val="accent1"/>
-          </a:lnRef>
-          <a:fillRef idx="3">
-            <a:schemeClr val="accent1"/>
-          </a:fillRef>
-          <a:effectRef idx="2">
-            <a:schemeClr val="accent1"/>
-          </a:effectRef>
-          <a:fontRef idx="minor">
-            <a:schemeClr val="lt1"/>
-          </a:fontRef>
-        </p:style>
-        <p:txBody>
-          <a:bodyPr rtlCol="0" anchor="ctr"/>
-          <a:lstStyle/>
-          <a:p>
-            <a:pPr algn="ctr"/>
-          </a:p>
-        </p:txBody>
-      </p:sp>
-      <p:sp>
-        <p:nvSpPr>
-          <p:cNvPr id="8" name="TextBox 7"/>
+      <p:pic>
+        <p:nvPicPr>
+          <p:cNvPr id="6" name="Picture 5" descr="validation_terminal.png"/>
+          <p:cNvPicPr>
+            <a:picLocks noChangeAspect="1"/>
+          </p:cNvPicPr>
+          <p:nvPr/>
+        </p:nvPicPr>
+        <p:blipFill>
+          <a:blip r:embed="rId2"/>
+          <a:stretch>
+            <a:fillRect/>
+          </a:stretch>
+        </p:blipFill>
+        <p:spPr>
+          <a:xfrm>
+            <a:off x="1246187" y="1353312"/>
+            <a:ext cx="9696576" cy="4800600"/>
+          </a:xfrm>
+          <a:prstGeom prst="rect">
+            <a:avLst/>
+          </a:prstGeom>
+        </p:spPr>
+      </p:pic>
+      <p:sp>
+        <p:nvSpPr>
+          <p:cNvPr id="7" name="TextBox 6"/>
           <p:cNvSpPr txBox="1"/>
           <p:nvPr/>
         </p:nvSpPr>
         <p:spPr>
           <a:xfrm>
-            <a:off x="896112" y="1993392"/>
-            <a:ext cx="10332720" cy="2971800"/>
-          </a:xfrm>
-          <a:prstGeom prst="rect">
-            <a:avLst/>
-          </a:prstGeom>
-          <a:noFill/>
-        </p:spPr>
-        <p:txBody>
-          <a:bodyPr wrap="square" lIns="109728" rIns="109728">
-            <a:spAutoFit/>
-          </a:bodyPr>
-          <a:lstStyle/>
-          <a:p>
-            <a:pPr>
-              <a:spcAft>
-                <a:spcPts val="800"/>
-              </a:spcAft>
-              <a:defRPr sz="1800">
-                <a:solidFill>
-                  <a:srgbClr val="122C4E"/>
-                </a:solidFill>
-                <a:latin typeface="Noto Sans CJK KR"/>
-              </a:defRPr>
-            </a:pPr>
-            <a:r>
-              <a:t>• □ 완료 화면: /imu/data의 z축 gyro 값과 noise 설정을 terminal에서 확인한다.</a:t>
-            </a:r>
-          </a:p>
-          <a:p>
-            <a:pPr>
-              <a:spcAft>
-                <a:spcPts val="800"/>
-              </a:spcAft>
-              <a:defRPr sz="1800">
-                <a:solidFill>
-                  <a:srgbClr val="122C4E"/>
-                </a:solidFill>
-                <a:latin typeface="Noto Sans CJK KR"/>
-              </a:defRPr>
-            </a:pPr>
-            <a:r>
-              <a:t>• □ Complete 파일: blocks/D_sensors/M14_imu_sensor/complete/</a:t>
-            </a:r>
-          </a:p>
-          <a:p>
-            <a:pPr>
-              <a:spcAft>
-                <a:spcPts val="800"/>
-              </a:spcAft>
-              <a:defRPr sz="1800">
-                <a:solidFill>
-                  <a:srgbClr val="122C4E"/>
-                </a:solidFill>
-                <a:latin typeface="Noto Sans CJK KR"/>
-              </a:defRPr>
-            </a:pPr>
-            <a:r>
-              <a:t>• □ 정상 로그·캡처: logs/validation.log, screenshots/validation_terminal.png</a:t>
-            </a:r>
-          </a:p>
-          <a:p>
-            <a:pPr>
-              <a:spcAft>
-                <a:spcPts val="800"/>
-              </a:spcAft>
-              <a:defRPr sz="1800">
-                <a:solidFill>
-                  <a:srgbClr val="122C4E"/>
-                </a:solidFill>
-                <a:latin typeface="Noto Sans CJK KR"/>
-              </a:defRPr>
-            </a:pPr>
-            <a:r>
-              <a:t>• □ 버전 식별: CHECKSUM_or_TAG.txt의 SHA-256 manifest</a:t>
-            </a:r>
-          </a:p>
-          <a:p>
-            <a:pPr>
-              <a:spcAft>
-                <a:spcPts val="800"/>
-              </a:spcAft>
-              <a:defRPr sz="1800">
-                <a:solidFill>
-                  <a:srgbClr val="122C4E"/>
-                </a:solidFill>
-                <a:latin typeface="Noto Sans CJK KR"/>
-              </a:defRPr>
-            </a:pPr>
-            <a:r>
-              <a:t>• □ 다음 시작 조건: M15 운영/QoS</a:t>
-            </a:r>
-          </a:p>
-        </p:txBody>
-      </p:sp>
-      <p:sp>
-        <p:nvSpPr>
-          <p:cNvPr id="9" name="TextBox 8"/>
-          <p:cNvSpPr txBox="1"/>
-          <p:nvPr/>
-        </p:nvSpPr>
-        <p:spPr>
-          <a:xfrm>
-            <a:off x="868680" y="5596128"/>
-            <a:ext cx="10515600" cy="338328"/>
+            <a:off x="777240" y="6217920"/>
+            <a:ext cx="10607040" cy="182880"/>
           </a:xfrm>
           <a:prstGeom prst="rect">
             <a:avLst/>
@@ -22860,7 +23356,7 @@
               <a:spcAft>
                 <a:spcPts val="0"/>
               </a:spcAft>
-              <a:defRPr sz="1700" b="1">
+              <a:defRPr sz="1100" b="1">
                 <a:solidFill>
                   <a:srgbClr val="2A8B5A"/>
                 </a:solidFill>
@@ -22868,7 +23364,7 @@
               </a:defRPr>
             </a:pPr>
             <a:r>
-              <a:t>다음 모듈을 시작하기 전, 이 슬라이드의 Complete와 다음 모듈의 Starter를 비교합니다.</a:t>
+              <a:t>① 명령/설정  ② 정상 출력 또는 화면  ③ 다음 검증 명령으로 재확인</a:t>
             </a:r>
           </a:p>
         </p:txBody>
@@ -22925,6 +23421,1686 @@
               </a:defRPr>
             </a:pPr>
             <a:r>
+              <a:t>객관적 검증 명령으로 완료를 확인한다</a:t>
+            </a:r>
+          </a:p>
+        </p:txBody>
+      </p:sp>
+      <p:sp>
+        <p:nvSpPr>
+          <p:cNvPr id="3" name="TextBox 2"/>
+          <p:cNvSpPr txBox="1"/>
+          <p:nvPr/>
+        </p:nvSpPr>
+        <p:spPr>
+          <a:xfrm>
+            <a:off x="603504" y="859536"/>
+            <a:ext cx="10698480" cy="292608"/>
+          </a:xfrm>
+          <a:prstGeom prst="rect">
+            <a:avLst/>
+          </a:prstGeom>
+          <a:noFill/>
+        </p:spPr>
+        <p:txBody>
+          <a:bodyPr wrap="square" lIns="73152" rIns="73152" tIns="36576" bIns="36576">
+            <a:spAutoFit/>
+          </a:bodyPr>
+          <a:lstStyle/>
+          <a:p>
+            <a:pPr algn="l">
+              <a:spcAft>
+                <a:spcPts val="0"/>
+              </a:spcAft>
+              <a:defRPr sz="1700" b="0">
+                <a:solidFill>
+                  <a:srgbClr val="5C6672"/>
+                </a:solidFill>
+                <a:latin typeface="Noto Sans CJK KR"/>
+              </a:defRPr>
+            </a:pPr>
+            <a:r>
+              <a:t>화면만 보지 말고 topic·frame·파일·parameter를 다시 확인합니다.</a:t>
+            </a:r>
+          </a:p>
+        </p:txBody>
+      </p:sp>
+      <p:sp>
+        <p:nvSpPr>
+          <p:cNvPr id="4" name="TextBox 3"/>
+          <p:cNvSpPr txBox="1"/>
+          <p:nvPr/>
+        </p:nvSpPr>
+        <p:spPr>
+          <a:xfrm>
+            <a:off x="530352" y="6510528"/>
+            <a:ext cx="7772400" cy="201168"/>
+          </a:xfrm>
+          <a:prstGeom prst="rect">
+            <a:avLst/>
+          </a:prstGeom>
+          <a:noFill/>
+        </p:spPr>
+        <p:txBody>
+          <a:bodyPr wrap="square" lIns="73152" rIns="73152" tIns="36576" bIns="36576">
+            <a:spAutoFit/>
+          </a:bodyPr>
+          <a:lstStyle/>
+          <a:p>
+            <a:pPr algn="l">
+              <a:spcAft>
+                <a:spcPts val="0"/>
+              </a:spcAft>
+              <a:defRPr sz="1000" b="0">
+                <a:solidFill>
+                  <a:srgbClr val="5C6672"/>
+                </a:solidFill>
+                <a:latin typeface="Noto Sans CJK KR"/>
+              </a:defRPr>
+            </a:pPr>
+            <a:r>
+              <a:t>ROS 2 Jazzy · Gazebo Harmonic · M14 · 따라 하기형 AGV 실습</a:t>
+            </a:r>
+          </a:p>
+        </p:txBody>
+      </p:sp>
+      <p:sp>
+        <p:nvSpPr>
+          <p:cNvPr id="5" name="TextBox 4"/>
+          <p:cNvSpPr txBox="1"/>
+          <p:nvPr/>
+        </p:nvSpPr>
+        <p:spPr>
+          <a:xfrm>
+            <a:off x="9144000" y="6510528"/>
+            <a:ext cx="2468880" cy="201168"/>
+          </a:xfrm>
+          <a:prstGeom prst="rect">
+            <a:avLst/>
+          </a:prstGeom>
+          <a:noFill/>
+        </p:spPr>
+        <p:txBody>
+          <a:bodyPr wrap="square" lIns="73152" rIns="73152" tIns="36576" bIns="36576">
+            <a:spAutoFit/>
+          </a:bodyPr>
+          <a:lstStyle/>
+          <a:p>
+            <a:pPr algn="r">
+              <a:spcAft>
+                <a:spcPts val="0"/>
+              </a:spcAft>
+              <a:defRPr sz="1000" b="0">
+                <a:solidFill>
+                  <a:srgbClr val="5C6672"/>
+                </a:solidFill>
+                <a:latin typeface="Noto Sans CJK KR"/>
+              </a:defRPr>
+            </a:pPr>
+            <a:r>
+              <a:t>명령·파일 경로는 슬라이드에서 복사 가능</a:t>
+            </a:r>
+          </a:p>
+        </p:txBody>
+      </p:sp>
+      <p:sp>
+        <p:nvSpPr>
+          <p:cNvPr id="6" name="Rectangle 5"/>
+          <p:cNvSpPr/>
+          <p:nvPr/>
+        </p:nvSpPr>
+        <p:spPr>
+          <a:xfrm>
+            <a:off x="566928" y="1188720"/>
+            <a:ext cx="11064240" cy="347472"/>
+          </a:xfrm>
+          <a:prstGeom prst="rect">
+            <a:avLst/>
+          </a:prstGeom>
+          <a:solidFill>
+            <a:srgbClr val="F4F7FB"/>
+          </a:solidFill>
+          <a:ln>
+            <a:solidFill>
+              <a:srgbClr val="F4F7FB"/>
+            </a:solidFill>
+          </a:ln>
+        </p:spPr>
+        <p:style>
+          <a:lnRef idx="1">
+            <a:schemeClr val="accent1"/>
+          </a:lnRef>
+          <a:fillRef idx="3">
+            <a:schemeClr val="accent1"/>
+          </a:fillRef>
+          <a:effectRef idx="2">
+            <a:schemeClr val="accent1"/>
+          </a:effectRef>
+          <a:fontRef idx="minor">
+            <a:schemeClr val="lt1"/>
+          </a:fontRef>
+        </p:style>
+        <p:txBody>
+          <a:bodyPr rtlCol="0" anchor="ctr" wrap="square" lIns="73152" rIns="73152" tIns="36576" bIns="36576"/>
+          <a:lstStyle/>
+          <a:p>
+            <a:pPr algn="l">
+              <a:spcAft>
+                <a:spcPts val="0"/>
+              </a:spcAft>
+              <a:defRPr sz="1300" b="1">
+                <a:solidFill>
+                  <a:srgbClr val="122C4E"/>
+                </a:solidFill>
+                <a:latin typeface="Noto Sans CJK KR"/>
+              </a:defRPr>
+            </a:pPr>
+            <a:r>
+              <a:t>현재 단계 검증    |    현재 폴더 ~/agv_ws    |    현재 터미널</a:t>
+            </a:r>
+          </a:p>
+        </p:txBody>
+      </p:sp>
+      <p:sp>
+        <p:nvSpPr>
+          <p:cNvPr id="7" name="Rounded Rectangle 6"/>
+          <p:cNvSpPr/>
+          <p:nvPr/>
+        </p:nvSpPr>
+        <p:spPr>
+          <a:xfrm>
+            <a:off x="658368" y="1755648"/>
+            <a:ext cx="10972800" cy="2148840"/>
+          </a:xfrm>
+          <a:prstGeom prst="roundRect">
+            <a:avLst/>
+          </a:prstGeom>
+          <a:solidFill>
+            <a:srgbClr val="1D232D"/>
+          </a:solidFill>
+          <a:ln>
+            <a:solidFill>
+              <a:srgbClr val="1D232D"/>
+            </a:solidFill>
+          </a:ln>
+        </p:spPr>
+        <p:style>
+          <a:lnRef idx="1">
+            <a:schemeClr val="accent1"/>
+          </a:lnRef>
+          <a:fillRef idx="3">
+            <a:schemeClr val="accent1"/>
+          </a:fillRef>
+          <a:effectRef idx="2">
+            <a:schemeClr val="accent1"/>
+          </a:effectRef>
+          <a:fontRef idx="minor">
+            <a:schemeClr val="lt1"/>
+          </a:fontRef>
+        </p:style>
+        <p:txBody>
+          <a:bodyPr rtlCol="0" anchor="ctr" wrap="square" lIns="73152" rIns="73152" tIns="36576" bIns="36576"/>
+          <a:lstStyle/>
+          <a:p>
+            <a:pPr algn="l">
+              <a:spcAft>
+                <a:spcPts val="0"/>
+              </a:spcAft>
+              <a:defRPr sz="1600" b="0">
+                <a:solidFill>
+                  <a:srgbClr val="FFFFFF"/>
+                </a:solidFill>
+                <a:latin typeface="DejaVu Sans Mono"/>
+              </a:defRPr>
+            </a:pPr>
+            <a:r>
+              <a:t>ros2 topic info /imu/data</a:t>
+            </a:r>
+            <a:br/>
+            <a:r>
+              <a:t>ros2 topic hz /imu/data</a:t>
+            </a:r>
+            <a:br/>
+            <a:r>
+              <a:t>ros2 topic echo /imu/data --once</a:t>
+            </a:r>
+          </a:p>
+        </p:txBody>
+      </p:sp>
+      <p:sp>
+        <p:nvSpPr>
+          <p:cNvPr id="8" name="Rounded Rectangle 7"/>
+          <p:cNvSpPr/>
+          <p:nvPr/>
+        </p:nvSpPr>
+        <p:spPr>
+          <a:xfrm>
+            <a:off x="658368" y="4206240"/>
+            <a:ext cx="10972800" cy="1554480"/>
+          </a:xfrm>
+          <a:prstGeom prst="roundRect">
+            <a:avLst/>
+          </a:prstGeom>
+          <a:solidFill>
+            <a:srgbClr val="F4F7FB"/>
+          </a:solidFill>
+          <a:ln>
+            <a:solidFill>
+              <a:srgbClr val="D1DFD5"/>
+            </a:solidFill>
+          </a:ln>
+        </p:spPr>
+        <p:style>
+          <a:lnRef idx="1">
+            <a:schemeClr val="accent1"/>
+          </a:lnRef>
+          <a:fillRef idx="3">
+            <a:schemeClr val="accent1"/>
+          </a:fillRef>
+          <a:effectRef idx="2">
+            <a:schemeClr val="accent1"/>
+          </a:effectRef>
+          <a:fontRef idx="minor">
+            <a:schemeClr val="lt1"/>
+          </a:fontRef>
+        </p:style>
+        <p:txBody>
+          <a:bodyPr rtlCol="0" anchor="ctr" wrap="square" lIns="73152" rIns="73152" tIns="36576" bIns="36576"/>
+          <a:lstStyle/>
+          <a:p>
+            <a:pPr algn="l">
+              <a:spcAft>
+                <a:spcPts val="0"/>
+              </a:spcAft>
+              <a:defRPr sz="1800" b="1">
+                <a:solidFill>
+                  <a:srgbClr val="2A8B5A"/>
+                </a:solidFill>
+                <a:latin typeface="Noto Sans CJK KR"/>
+              </a:defRPr>
+            </a:pPr>
+            <a:r>
+              <a:t>완료 체크</a:t>
+            </a:r>
+            <a:br/>
+            <a:r>
+              <a:t>□ 명령이 오류 없이 실행된다.</a:t>
+            </a:r>
+            <a:br/>
+            <a:r>
+              <a:t>□ 기대한 파일·topic·frame·parameter 이름이 보인다.</a:t>
+            </a:r>
+            <a:br/>
+            <a:r>
+              <a:t>□ 값의 단위와 방향을 한 문장으로 설명할 수 있다.</a:t>
+            </a:r>
+          </a:p>
+        </p:txBody>
+      </p:sp>
+      <p:sp>
+        <p:nvSpPr>
+          <p:cNvPr id="9" name="TextBox 8"/>
+          <p:cNvSpPr txBox="1"/>
+          <p:nvPr/>
+        </p:nvSpPr>
+        <p:spPr>
+          <a:xfrm>
+            <a:off x="731520" y="5989320"/>
+            <a:ext cx="10789920" cy="237744"/>
+          </a:xfrm>
+          <a:prstGeom prst="rect">
+            <a:avLst/>
+          </a:prstGeom>
+          <a:noFill/>
+        </p:spPr>
+        <p:txBody>
+          <a:bodyPr wrap="square" lIns="73152" rIns="73152" tIns="36576" bIns="36576">
+            <a:spAutoFit/>
+          </a:bodyPr>
+          <a:lstStyle/>
+          <a:p>
+            <a:pPr algn="l">
+              <a:spcAft>
+                <a:spcPts val="0"/>
+              </a:spcAft>
+              <a:defRPr sz="1500" b="1">
+                <a:solidFill>
+                  <a:srgbClr val="122C4E"/>
+                </a:solidFill>
+                <a:latin typeface="Noto Sans CJK KR"/>
+              </a:defRPr>
+            </a:pPr>
+            <a:r>
+              <a:t>완료 조건: /imu/data의 z축 gyro 값과 noise 설정을 terminal에서 확인한다.</a:t>
+            </a:r>
+          </a:p>
+        </p:txBody>
+      </p:sp>
+    </p:spTree>
+  </p:cSld>
+  <p:clrMapOvr>
+    <a:masterClrMapping/>
+  </p:clrMapOvr>
+</p:sld>
+</file>
+
+<file path=ppt/slides/slide42.xml><?xml version="1.0" encoding="utf-8"?>
+<p:sld xmlns:a="http://schemas.openxmlformats.org/drawingml/2006/main" xmlns:p="http://schemas.openxmlformats.org/presentationml/2006/main" xmlns:r="http://schemas.openxmlformats.org/officeDocument/2006/relationships">
+  <p:cSld>
+    <p:spTree>
+      <p:nvGrpSpPr>
+        <p:cNvPr id="1" name=""/>
+        <p:cNvGrpSpPr/>
+        <p:nvPr/>
+      </p:nvGrpSpPr>
+      <p:grpSpPr/>
+      <p:sp>
+        <p:nvSpPr>
+          <p:cNvPr id="2" name="TextBox 1"/>
+          <p:cNvSpPr txBox="1"/>
+          <p:nvPr/>
+        </p:nvSpPr>
+        <p:spPr>
+          <a:xfrm>
+            <a:off x="566928" y="347472"/>
+            <a:ext cx="10881360" cy="438912"/>
+          </a:xfrm>
+          <a:prstGeom prst="rect">
+            <a:avLst/>
+          </a:prstGeom>
+          <a:noFill/>
+        </p:spPr>
+        <p:txBody>
+          <a:bodyPr wrap="square" lIns="73152" rIns="73152" tIns="36576" bIns="36576">
+            <a:spAutoFit/>
+          </a:bodyPr>
+          <a:lstStyle/>
+          <a:p>
+            <a:pPr algn="l">
+              <a:spcAft>
+                <a:spcPts val="0"/>
+              </a:spcAft>
+              <a:defRPr sz="3200" b="1">
+                <a:solidFill>
+                  <a:srgbClr val="122C4E"/>
+                </a:solidFill>
+                <a:latin typeface="Noto Sans CJK KR"/>
+              </a:defRPr>
+            </a:pPr>
+            <a:r>
+              <a:t>막히면: 증상 → 우선 확인 → 재검증</a:t>
+            </a:r>
+          </a:p>
+        </p:txBody>
+      </p:sp>
+      <p:sp>
+        <p:nvSpPr>
+          <p:cNvPr id="3" name="TextBox 2"/>
+          <p:cNvSpPr txBox="1"/>
+          <p:nvPr/>
+        </p:nvSpPr>
+        <p:spPr>
+          <a:xfrm>
+            <a:off x="603504" y="859536"/>
+            <a:ext cx="10698480" cy="292608"/>
+          </a:xfrm>
+          <a:prstGeom prst="rect">
+            <a:avLst/>
+          </a:prstGeom>
+          <a:noFill/>
+        </p:spPr>
+        <p:txBody>
+          <a:bodyPr wrap="square" lIns="73152" rIns="73152" tIns="36576" bIns="36576">
+            <a:spAutoFit/>
+          </a:bodyPr>
+          <a:lstStyle/>
+          <a:p>
+            <a:pPr algn="l">
+              <a:spcAft>
+                <a:spcPts val="0"/>
+              </a:spcAft>
+              <a:defRPr sz="1700" b="0">
+                <a:solidFill>
+                  <a:srgbClr val="5C6672"/>
+                </a:solidFill>
+                <a:latin typeface="Noto Sans CJK KR"/>
+              </a:defRPr>
+            </a:pPr>
+            <a:r>
+              <a:t>오류 메시지를 숨기지 않고 같은 순서로 점검합니다.</a:t>
+            </a:r>
+          </a:p>
+        </p:txBody>
+      </p:sp>
+      <p:sp>
+        <p:nvSpPr>
+          <p:cNvPr id="4" name="TextBox 3"/>
+          <p:cNvSpPr txBox="1"/>
+          <p:nvPr/>
+        </p:nvSpPr>
+        <p:spPr>
+          <a:xfrm>
+            <a:off x="530352" y="6510528"/>
+            <a:ext cx="7772400" cy="201168"/>
+          </a:xfrm>
+          <a:prstGeom prst="rect">
+            <a:avLst/>
+          </a:prstGeom>
+          <a:noFill/>
+        </p:spPr>
+        <p:txBody>
+          <a:bodyPr wrap="square" lIns="73152" rIns="73152" tIns="36576" bIns="36576">
+            <a:spAutoFit/>
+          </a:bodyPr>
+          <a:lstStyle/>
+          <a:p>
+            <a:pPr algn="l">
+              <a:spcAft>
+                <a:spcPts val="0"/>
+              </a:spcAft>
+              <a:defRPr sz="1000" b="0">
+                <a:solidFill>
+                  <a:srgbClr val="5C6672"/>
+                </a:solidFill>
+                <a:latin typeface="Noto Sans CJK KR"/>
+              </a:defRPr>
+            </a:pPr>
+            <a:r>
+              <a:t>ROS 2 Jazzy · Gazebo Harmonic · M14 · 따라 하기형 AGV 실습</a:t>
+            </a:r>
+          </a:p>
+        </p:txBody>
+      </p:sp>
+      <p:sp>
+        <p:nvSpPr>
+          <p:cNvPr id="5" name="TextBox 4"/>
+          <p:cNvSpPr txBox="1"/>
+          <p:nvPr/>
+        </p:nvSpPr>
+        <p:spPr>
+          <a:xfrm>
+            <a:off x="9144000" y="6510528"/>
+            <a:ext cx="2468880" cy="201168"/>
+          </a:xfrm>
+          <a:prstGeom prst="rect">
+            <a:avLst/>
+          </a:prstGeom>
+          <a:noFill/>
+        </p:spPr>
+        <p:txBody>
+          <a:bodyPr wrap="square" lIns="73152" rIns="73152" tIns="36576" bIns="36576">
+            <a:spAutoFit/>
+          </a:bodyPr>
+          <a:lstStyle/>
+          <a:p>
+            <a:pPr algn="r">
+              <a:spcAft>
+                <a:spcPts val="0"/>
+              </a:spcAft>
+              <a:defRPr sz="1000" b="0">
+                <a:solidFill>
+                  <a:srgbClr val="5C6672"/>
+                </a:solidFill>
+                <a:latin typeface="Noto Sans CJK KR"/>
+              </a:defRPr>
+            </a:pPr>
+            <a:r>
+              <a:t>명령·파일 경로는 슬라이드에서 복사 가능</a:t>
+            </a:r>
+          </a:p>
+        </p:txBody>
+      </p:sp>
+      <p:sp>
+        <p:nvSpPr>
+          <p:cNvPr id="6" name="Rectangle 5"/>
+          <p:cNvSpPr/>
+          <p:nvPr/>
+        </p:nvSpPr>
+        <p:spPr>
+          <a:xfrm>
+            <a:off x="566928" y="1188720"/>
+            <a:ext cx="11064240" cy="347472"/>
+          </a:xfrm>
+          <a:prstGeom prst="rect">
+            <a:avLst/>
+          </a:prstGeom>
+          <a:solidFill>
+            <a:srgbClr val="F4F7FB"/>
+          </a:solidFill>
+          <a:ln>
+            <a:solidFill>
+              <a:srgbClr val="F4F7FB"/>
+            </a:solidFill>
+          </a:ln>
+        </p:spPr>
+        <p:style>
+          <a:lnRef idx="1">
+            <a:schemeClr val="accent1"/>
+          </a:lnRef>
+          <a:fillRef idx="3">
+            <a:schemeClr val="accent1"/>
+          </a:fillRef>
+          <a:effectRef idx="2">
+            <a:schemeClr val="accent1"/>
+          </a:effectRef>
+          <a:fontRef idx="minor">
+            <a:schemeClr val="lt1"/>
+          </a:fontRef>
+        </p:style>
+        <p:txBody>
+          <a:bodyPr rtlCol="0" anchor="ctr" wrap="square" lIns="73152" rIns="73152" tIns="36576" bIns="36576"/>
+          <a:lstStyle/>
+          <a:p>
+            <a:pPr algn="l">
+              <a:spcAft>
+                <a:spcPts val="0"/>
+              </a:spcAft>
+              <a:defRPr sz="1300" b="1">
+                <a:solidFill>
+                  <a:srgbClr val="122C4E"/>
+                </a:solidFill>
+                <a:latin typeface="Noto Sans CJK KR"/>
+              </a:defRPr>
+            </a:pPr>
+            <a:r>
+              <a:t>현재 단계 오류 대응    |    현재 폴더 ~/agv_ws    |    현재 터미널</a:t>
+            </a:r>
+          </a:p>
+        </p:txBody>
+      </p:sp>
+      <p:sp>
+        <p:nvSpPr>
+          <p:cNvPr id="7" name="Rounded Rectangle 6"/>
+          <p:cNvSpPr/>
+          <p:nvPr/>
+        </p:nvSpPr>
+        <p:spPr>
+          <a:xfrm>
+            <a:off x="694944" y="1755648"/>
+            <a:ext cx="10972800" cy="1115568"/>
+          </a:xfrm>
+          <a:prstGeom prst="roundRect">
+            <a:avLst/>
+          </a:prstGeom>
+          <a:solidFill>
+            <a:srgbClr val="FFF7F4"/>
+          </a:solidFill>
+          <a:ln>
+            <a:solidFill>
+              <a:srgbClr val="EDBEB4"/>
+            </a:solidFill>
+          </a:ln>
+        </p:spPr>
+        <p:style>
+          <a:lnRef idx="1">
+            <a:schemeClr val="accent1"/>
+          </a:lnRef>
+          <a:fillRef idx="3">
+            <a:schemeClr val="accent1"/>
+          </a:fillRef>
+          <a:effectRef idx="2">
+            <a:schemeClr val="accent1"/>
+          </a:effectRef>
+          <a:fontRef idx="minor">
+            <a:schemeClr val="lt1"/>
+          </a:fontRef>
+        </p:style>
+        <p:txBody>
+          <a:bodyPr rtlCol="0" anchor="ctr"/>
+          <a:lstStyle/>
+          <a:p>
+            <a:pPr algn="ctr"/>
+          </a:p>
+        </p:txBody>
+      </p:sp>
+      <p:sp>
+        <p:nvSpPr>
+          <p:cNvPr id="8" name="TextBox 7"/>
+          <p:cNvSpPr txBox="1"/>
+          <p:nvPr/>
+        </p:nvSpPr>
+        <p:spPr>
+          <a:xfrm>
+            <a:off x="896112" y="1901952"/>
+            <a:ext cx="2926080" cy="274320"/>
+          </a:xfrm>
+          <a:prstGeom prst="rect">
+            <a:avLst/>
+          </a:prstGeom>
+          <a:noFill/>
+        </p:spPr>
+        <p:txBody>
+          <a:bodyPr wrap="square" lIns="73152" rIns="73152" tIns="36576" bIns="36576">
+            <a:spAutoFit/>
+          </a:bodyPr>
+          <a:lstStyle/>
+          <a:p>
+            <a:pPr algn="l">
+              <a:spcAft>
+                <a:spcPts val="0"/>
+              </a:spcAft>
+              <a:defRPr sz="1800" b="1">
+                <a:solidFill>
+                  <a:srgbClr val="BE3B3B"/>
+                </a:solidFill>
+                <a:latin typeface="Noto Sans CJK KR"/>
+              </a:defRPr>
+            </a:pPr>
+            <a:r>
+              <a:t>증상 1: 값 축이 예상과 다름</a:t>
+            </a:r>
+          </a:p>
+        </p:txBody>
+      </p:sp>
+      <p:sp>
+        <p:nvSpPr>
+          <p:cNvPr id="9" name="TextBox 8"/>
+          <p:cNvSpPr txBox="1"/>
+          <p:nvPr/>
+        </p:nvSpPr>
+        <p:spPr>
+          <a:xfrm>
+            <a:off x="3794760" y="1883664"/>
+            <a:ext cx="7543800" cy="621792"/>
+          </a:xfrm>
+          <a:prstGeom prst="rect">
+            <a:avLst/>
+          </a:prstGeom>
+          <a:noFill/>
+        </p:spPr>
+        <p:txBody>
+          <a:bodyPr wrap="square" lIns="73152" rIns="73152" tIns="36576" bIns="36576">
+            <a:spAutoFit/>
+          </a:bodyPr>
+          <a:lstStyle/>
+          <a:p>
+            <a:pPr algn="l">
+              <a:spcAft>
+                <a:spcPts val="0"/>
+              </a:spcAft>
+              <a:defRPr sz="1600" b="0">
+                <a:solidFill>
+                  <a:srgbClr val="122C4E"/>
+                </a:solidFill>
+                <a:latin typeface="Noto Sans CJK KR"/>
+              </a:defRPr>
+            </a:pPr>
+            <a:r>
+              <a:t>우선 확인: imu_link 축·origin rpy·header.frame_id를 확인한다.</a:t>
+            </a:r>
+            <a:br/>
+            <a:r>
+              <a:t>수정 후: ros2 topic info /imu/data</a:t>
+            </a:r>
+          </a:p>
+        </p:txBody>
+      </p:sp>
+      <p:sp>
+        <p:nvSpPr>
+          <p:cNvPr id="10" name="Rounded Rectangle 9"/>
+          <p:cNvSpPr/>
+          <p:nvPr/>
+        </p:nvSpPr>
+        <p:spPr>
+          <a:xfrm>
+            <a:off x="694944" y="3172968"/>
+            <a:ext cx="10972800" cy="1115568"/>
+          </a:xfrm>
+          <a:prstGeom prst="roundRect">
+            <a:avLst/>
+          </a:prstGeom>
+          <a:solidFill>
+            <a:srgbClr val="FFF7F4"/>
+          </a:solidFill>
+          <a:ln>
+            <a:solidFill>
+              <a:srgbClr val="EDBEB4"/>
+            </a:solidFill>
+          </a:ln>
+        </p:spPr>
+        <p:style>
+          <a:lnRef idx="1">
+            <a:schemeClr val="accent1"/>
+          </a:lnRef>
+          <a:fillRef idx="3">
+            <a:schemeClr val="accent1"/>
+          </a:fillRef>
+          <a:effectRef idx="2">
+            <a:schemeClr val="accent1"/>
+          </a:effectRef>
+          <a:fontRef idx="minor">
+            <a:schemeClr val="lt1"/>
+          </a:fontRef>
+        </p:style>
+        <p:txBody>
+          <a:bodyPr rtlCol="0" anchor="ctr"/>
+          <a:lstStyle/>
+          <a:p>
+            <a:pPr algn="ctr"/>
+          </a:p>
+        </p:txBody>
+      </p:sp>
+      <p:sp>
+        <p:nvSpPr>
+          <p:cNvPr id="11" name="TextBox 10"/>
+          <p:cNvSpPr txBox="1"/>
+          <p:nvPr/>
+        </p:nvSpPr>
+        <p:spPr>
+          <a:xfrm>
+            <a:off x="896112" y="3319272"/>
+            <a:ext cx="2926080" cy="274320"/>
+          </a:xfrm>
+          <a:prstGeom prst="rect">
+            <a:avLst/>
+          </a:prstGeom>
+          <a:noFill/>
+        </p:spPr>
+        <p:txBody>
+          <a:bodyPr wrap="square" lIns="73152" rIns="73152" tIns="36576" bIns="36576">
+            <a:spAutoFit/>
+          </a:bodyPr>
+          <a:lstStyle/>
+          <a:p>
+            <a:pPr algn="l">
+              <a:spcAft>
+                <a:spcPts val="0"/>
+              </a:spcAft>
+              <a:defRPr sz="1800" b="1">
+                <a:solidFill>
+                  <a:srgbClr val="BE3B3B"/>
+                </a:solidFill>
+                <a:latin typeface="Noto Sans CJK KR"/>
+              </a:defRPr>
+            </a:pPr>
+            <a:r>
+              <a:t>증상 2: 값이 지나치게 요동</a:t>
+            </a:r>
+          </a:p>
+        </p:txBody>
+      </p:sp>
+      <p:sp>
+        <p:nvSpPr>
+          <p:cNvPr id="12" name="TextBox 11"/>
+          <p:cNvSpPr txBox="1"/>
+          <p:nvPr/>
+        </p:nvSpPr>
+        <p:spPr>
+          <a:xfrm>
+            <a:off x="3794760" y="3300984"/>
+            <a:ext cx="7543800" cy="621792"/>
+          </a:xfrm>
+          <a:prstGeom prst="rect">
+            <a:avLst/>
+          </a:prstGeom>
+          <a:noFill/>
+        </p:spPr>
+        <p:txBody>
+          <a:bodyPr wrap="square" lIns="73152" rIns="73152" tIns="36576" bIns="36576">
+            <a:spAutoFit/>
+          </a:bodyPr>
+          <a:lstStyle/>
+          <a:p>
+            <a:pPr algn="l">
+              <a:spcAft>
+                <a:spcPts val="0"/>
+              </a:spcAft>
+              <a:defRPr sz="1600" b="0">
+                <a:solidFill>
+                  <a:srgbClr val="122C4E"/>
+                </a:solidFill>
+                <a:latin typeface="Noto Sans CJK KR"/>
+              </a:defRPr>
+            </a:pPr>
+            <a:r>
+              <a:t>우선 확인: noise/bias·update_rate·시뮬레이션 부하를 확인한다.</a:t>
+            </a:r>
+            <a:br/>
+            <a:r>
+              <a:t>수정 후: ros2 topic info /imu/data</a:t>
+            </a:r>
+          </a:p>
+        </p:txBody>
+      </p:sp>
+      <p:sp>
+        <p:nvSpPr>
+          <p:cNvPr id="13" name="TextBox 12"/>
+          <p:cNvSpPr txBox="1"/>
+          <p:nvPr/>
+        </p:nvSpPr>
+        <p:spPr>
+          <a:xfrm>
+            <a:off x="822960" y="5102352"/>
+            <a:ext cx="10607040" cy="402336"/>
+          </a:xfrm>
+          <a:prstGeom prst="rect">
+            <a:avLst/>
+          </a:prstGeom>
+          <a:noFill/>
+        </p:spPr>
+        <p:txBody>
+          <a:bodyPr wrap="square" lIns="73152" rIns="73152" tIns="36576" bIns="36576">
+            <a:spAutoFit/>
+          </a:bodyPr>
+          <a:lstStyle/>
+          <a:p>
+            <a:pPr algn="ctr">
+              <a:spcAft>
+                <a:spcPts val="0"/>
+              </a:spcAft>
+              <a:defRPr sz="1800" b="1">
+                <a:solidFill>
+                  <a:srgbClr val="DB7E22"/>
+                </a:solidFill>
+                <a:latin typeface="Noto Sans CJK KR"/>
+              </a:defRPr>
+            </a:pPr>
+            <a:r>
+              <a:t>공통 순서: ① 현재 폴더 ② source ③ 파일 경로 ④ 이름/타입/단위 ⑤ build·source 후 재실행</a:t>
+            </a:r>
+          </a:p>
+        </p:txBody>
+      </p:sp>
+    </p:spTree>
+  </p:cSld>
+  <p:clrMapOvr>
+    <a:masterClrMapping/>
+  </p:clrMapOvr>
+</p:sld>
+</file>
+
+<file path=ppt/slides/slide43.xml><?xml version="1.0" encoding="utf-8"?>
+<p:sld xmlns:a="http://schemas.openxmlformats.org/drawingml/2006/main" xmlns:p="http://schemas.openxmlformats.org/presentationml/2006/main" xmlns:r="http://schemas.openxmlformats.org/officeDocument/2006/relationships">
+  <p:cSld>
+    <p:spTree>
+      <p:nvGrpSpPr>
+        <p:cNvPr id="1" name=""/>
+        <p:cNvGrpSpPr/>
+        <p:nvPr/>
+      </p:nvGrpSpPr>
+      <p:grpSpPr/>
+      <p:sp>
+        <p:nvSpPr>
+          <p:cNvPr id="2" name="TextBox 1"/>
+          <p:cNvSpPr txBox="1"/>
+          <p:nvPr/>
+        </p:nvSpPr>
+        <p:spPr>
+          <a:xfrm>
+            <a:off x="566928" y="347472"/>
+            <a:ext cx="10881360" cy="438912"/>
+          </a:xfrm>
+          <a:prstGeom prst="rect">
+            <a:avLst/>
+          </a:prstGeom>
+          <a:noFill/>
+        </p:spPr>
+        <p:txBody>
+          <a:bodyPr wrap="square" lIns="73152" rIns="73152" tIns="36576" bIns="36576">
+            <a:spAutoFit/>
+          </a:bodyPr>
+          <a:lstStyle/>
+          <a:p>
+            <a:pPr algn="l">
+              <a:spcAft>
+                <a:spcPts val="0"/>
+              </a:spcAft>
+              <a:defRPr sz="3200" b="1">
+                <a:solidFill>
+                  <a:srgbClr val="122C4E"/>
+                </a:solidFill>
+                <a:latin typeface="Noto Sans CJK KR"/>
+              </a:defRPr>
+            </a:pPr>
+            <a:r>
+              <a:t>미니 실습: 값 하나를 바꾸고 결과를 비교한다</a:t>
+            </a:r>
+          </a:p>
+        </p:txBody>
+      </p:sp>
+      <p:sp>
+        <p:nvSpPr>
+          <p:cNvPr id="3" name="TextBox 2"/>
+          <p:cNvSpPr txBox="1"/>
+          <p:nvPr/>
+        </p:nvSpPr>
+        <p:spPr>
+          <a:xfrm>
+            <a:off x="603504" y="859536"/>
+            <a:ext cx="10698480" cy="292608"/>
+          </a:xfrm>
+          <a:prstGeom prst="rect">
+            <a:avLst/>
+          </a:prstGeom>
+          <a:noFill/>
+        </p:spPr>
+        <p:txBody>
+          <a:bodyPr wrap="square" lIns="73152" rIns="73152" tIns="36576" bIns="36576">
+            <a:spAutoFit/>
+          </a:bodyPr>
+          <a:lstStyle/>
+          <a:p>
+            <a:pPr algn="l">
+              <a:spcAft>
+                <a:spcPts val="0"/>
+              </a:spcAft>
+              <a:defRPr sz="1700" b="0">
+                <a:solidFill>
+                  <a:srgbClr val="5C6672"/>
+                </a:solidFill>
+                <a:latin typeface="Noto Sans CJK KR"/>
+              </a:defRPr>
+            </a:pPr>
+            <a:r>
+              <a:t>정상 결과를 만든 뒤에는 한 번에 하나의 값만 바꿉니다.</a:t>
+            </a:r>
+          </a:p>
+        </p:txBody>
+      </p:sp>
+      <p:sp>
+        <p:nvSpPr>
+          <p:cNvPr id="4" name="TextBox 3"/>
+          <p:cNvSpPr txBox="1"/>
+          <p:nvPr/>
+        </p:nvSpPr>
+        <p:spPr>
+          <a:xfrm>
+            <a:off x="530352" y="6510528"/>
+            <a:ext cx="7772400" cy="201168"/>
+          </a:xfrm>
+          <a:prstGeom prst="rect">
+            <a:avLst/>
+          </a:prstGeom>
+          <a:noFill/>
+        </p:spPr>
+        <p:txBody>
+          <a:bodyPr wrap="square" lIns="73152" rIns="73152" tIns="36576" bIns="36576">
+            <a:spAutoFit/>
+          </a:bodyPr>
+          <a:lstStyle/>
+          <a:p>
+            <a:pPr algn="l">
+              <a:spcAft>
+                <a:spcPts val="0"/>
+              </a:spcAft>
+              <a:defRPr sz="1000" b="0">
+                <a:solidFill>
+                  <a:srgbClr val="5C6672"/>
+                </a:solidFill>
+                <a:latin typeface="Noto Sans CJK KR"/>
+              </a:defRPr>
+            </a:pPr>
+            <a:r>
+              <a:t>ROS 2 Jazzy · Gazebo Harmonic · M14 · 따라 하기형 AGV 실습</a:t>
+            </a:r>
+          </a:p>
+        </p:txBody>
+      </p:sp>
+      <p:sp>
+        <p:nvSpPr>
+          <p:cNvPr id="5" name="TextBox 4"/>
+          <p:cNvSpPr txBox="1"/>
+          <p:nvPr/>
+        </p:nvSpPr>
+        <p:spPr>
+          <a:xfrm>
+            <a:off x="9144000" y="6510528"/>
+            <a:ext cx="2468880" cy="201168"/>
+          </a:xfrm>
+          <a:prstGeom prst="rect">
+            <a:avLst/>
+          </a:prstGeom>
+          <a:noFill/>
+        </p:spPr>
+        <p:txBody>
+          <a:bodyPr wrap="square" lIns="73152" rIns="73152" tIns="36576" bIns="36576">
+            <a:spAutoFit/>
+          </a:bodyPr>
+          <a:lstStyle/>
+          <a:p>
+            <a:pPr algn="r">
+              <a:spcAft>
+                <a:spcPts val="0"/>
+              </a:spcAft>
+              <a:defRPr sz="1000" b="0">
+                <a:solidFill>
+                  <a:srgbClr val="5C6672"/>
+                </a:solidFill>
+                <a:latin typeface="Noto Sans CJK KR"/>
+              </a:defRPr>
+            </a:pPr>
+            <a:r>
+              <a:t>명령·파일 경로는 슬라이드에서 복사 가능</a:t>
+            </a:r>
+          </a:p>
+        </p:txBody>
+      </p:sp>
+      <p:sp>
+        <p:nvSpPr>
+          <p:cNvPr id="6" name="Rectangle 5"/>
+          <p:cNvSpPr/>
+          <p:nvPr/>
+        </p:nvSpPr>
+        <p:spPr>
+          <a:xfrm>
+            <a:off x="566928" y="1188720"/>
+            <a:ext cx="11064240" cy="347472"/>
+          </a:xfrm>
+          <a:prstGeom prst="rect">
+            <a:avLst/>
+          </a:prstGeom>
+          <a:solidFill>
+            <a:srgbClr val="F4F7FB"/>
+          </a:solidFill>
+          <a:ln>
+            <a:solidFill>
+              <a:srgbClr val="F4F7FB"/>
+            </a:solidFill>
+          </a:ln>
+        </p:spPr>
+        <p:style>
+          <a:lnRef idx="1">
+            <a:schemeClr val="accent1"/>
+          </a:lnRef>
+          <a:fillRef idx="3">
+            <a:schemeClr val="accent1"/>
+          </a:fillRef>
+          <a:effectRef idx="2">
+            <a:schemeClr val="accent1"/>
+          </a:effectRef>
+          <a:fontRef idx="minor">
+            <a:schemeClr val="lt1"/>
+          </a:fontRef>
+        </p:style>
+        <p:txBody>
+          <a:bodyPr rtlCol="0" anchor="ctr" wrap="square" lIns="73152" rIns="73152" tIns="36576" bIns="36576"/>
+          <a:lstStyle/>
+          <a:p>
+            <a:pPr algn="l">
+              <a:spcAft>
+                <a:spcPts val="0"/>
+              </a:spcAft>
+              <a:defRPr sz="1300" b="1">
+                <a:solidFill>
+                  <a:srgbClr val="122C4E"/>
+                </a:solidFill>
+                <a:latin typeface="Noto Sans CJK KR"/>
+              </a:defRPr>
+            </a:pPr>
+            <a:r>
+              <a:t>현재 단계 미니 실습    |    현재 폴더 ~/agv_ws    |    현재 터미널</a:t>
+            </a:r>
+          </a:p>
+        </p:txBody>
+      </p:sp>
+      <p:sp>
+        <p:nvSpPr>
+          <p:cNvPr id="7" name="Rounded Rectangle 6"/>
+          <p:cNvSpPr/>
+          <p:nvPr/>
+        </p:nvSpPr>
+        <p:spPr>
+          <a:xfrm>
+            <a:off x="749808" y="1874519"/>
+            <a:ext cx="10652760" cy="1993392"/>
+          </a:xfrm>
+          <a:prstGeom prst="roundRect">
+            <a:avLst/>
+          </a:prstGeom>
+          <a:solidFill>
+            <a:srgbClr val="FFF8EB"/>
+          </a:solidFill>
+          <a:ln>
+            <a:solidFill>
+              <a:srgbClr val="ECC680"/>
+            </a:solidFill>
+          </a:ln>
+        </p:spPr>
+        <p:style>
+          <a:lnRef idx="1">
+            <a:schemeClr val="accent1"/>
+          </a:lnRef>
+          <a:fillRef idx="3">
+            <a:schemeClr val="accent1"/>
+          </a:fillRef>
+          <a:effectRef idx="2">
+            <a:schemeClr val="accent1"/>
+          </a:effectRef>
+          <a:fontRef idx="minor">
+            <a:schemeClr val="lt1"/>
+          </a:fontRef>
+        </p:style>
+        <p:txBody>
+          <a:bodyPr rtlCol="0" anchor="ctr" wrap="square" lIns="73152" rIns="73152" tIns="36576" bIns="36576"/>
+          <a:lstStyle/>
+          <a:p>
+            <a:pPr algn="ctr">
+              <a:spcAft>
+                <a:spcPts val="0"/>
+              </a:spcAft>
+              <a:defRPr sz="2300" b="1">
+                <a:solidFill>
+                  <a:srgbClr val="122C4E"/>
+                </a:solidFill>
+                <a:latin typeface="Noto Sans CJK KR"/>
+              </a:defRPr>
+            </a:pPr>
+            <a:r>
+              <a:t>정지·직진·제자리 회전에서 angular_velocity.z를 각각 기록하고 부호가 어느 동작에서 바뀌는지 설명한다.</a:t>
+            </a:r>
+          </a:p>
+        </p:txBody>
+      </p:sp>
+      <p:sp>
+        <p:nvSpPr>
+          <p:cNvPr id="8" name="TextBox 7"/>
+          <p:cNvSpPr txBox="1"/>
+          <p:nvPr/>
+        </p:nvSpPr>
+        <p:spPr>
+          <a:xfrm>
+            <a:off x="877824" y="4590288"/>
+            <a:ext cx="10241280" cy="594360"/>
+          </a:xfrm>
+          <a:prstGeom prst="rect">
+            <a:avLst/>
+          </a:prstGeom>
+          <a:noFill/>
+        </p:spPr>
+        <p:txBody>
+          <a:bodyPr wrap="square" lIns="73152" rIns="73152" tIns="36576" bIns="36576">
+            <a:spAutoFit/>
+          </a:bodyPr>
+          <a:lstStyle/>
+          <a:p>
+            <a:pPr algn="ctr">
+              <a:spcAft>
+                <a:spcPts val="0"/>
+              </a:spcAft>
+              <a:defRPr sz="1900" b="1">
+                <a:solidFill>
+                  <a:srgbClr val="DB7E22"/>
+                </a:solidFill>
+                <a:latin typeface="Noto Sans CJK KR"/>
+              </a:defRPr>
+            </a:pPr>
+            <a:r>
+              <a:t>기록할 것: 바꾼 값(단위) · 기대한 변화 · 실제 출력/화면 · 원래 값으로 되돌린 결과</a:t>
+            </a:r>
+          </a:p>
+        </p:txBody>
+      </p:sp>
+    </p:spTree>
+  </p:cSld>
+  <p:clrMapOvr>
+    <a:masterClrMapping/>
+  </p:clrMapOvr>
+</p:sld>
+</file>
+
+<file path=ppt/slides/slide44.xml><?xml version="1.0" encoding="utf-8"?>
+<p:sld xmlns:a="http://schemas.openxmlformats.org/drawingml/2006/main" xmlns:p="http://schemas.openxmlformats.org/presentationml/2006/main" xmlns:r="http://schemas.openxmlformats.org/officeDocument/2006/relationships">
+  <p:cSld>
+    <p:spTree>
+      <p:nvGrpSpPr>
+        <p:cNvPr id="1" name=""/>
+        <p:cNvGrpSpPr/>
+        <p:nvPr/>
+      </p:nvGrpSpPr>
+      <p:grpSpPr/>
+      <p:sp>
+        <p:nvSpPr>
+          <p:cNvPr id="2" name="TextBox 1"/>
+          <p:cNvSpPr txBox="1"/>
+          <p:nvPr/>
+        </p:nvSpPr>
+        <p:spPr>
+          <a:xfrm>
+            <a:off x="566928" y="347472"/>
+            <a:ext cx="10881360" cy="438912"/>
+          </a:xfrm>
+          <a:prstGeom prst="rect">
+            <a:avLst/>
+          </a:prstGeom>
+          <a:noFill/>
+        </p:spPr>
+        <p:txBody>
+          <a:bodyPr wrap="square" lIns="73152" rIns="73152" tIns="36576" bIns="36576">
+            <a:spAutoFit/>
+          </a:bodyPr>
+          <a:lstStyle/>
+          <a:p>
+            <a:pPr algn="l">
+              <a:spcAft>
+                <a:spcPts val="0"/>
+              </a:spcAft>
+              <a:defRPr sz="3200" b="1">
+                <a:solidFill>
+                  <a:srgbClr val="122C4E"/>
+                </a:solidFill>
+                <a:latin typeface="Noto Sans CJK KR"/>
+              </a:defRPr>
+            </a:pPr>
+            <a:r>
+              <a:t>체크포인트를 저장하고 다음 모듈로 넘긴다</a:t>
+            </a:r>
+          </a:p>
+        </p:txBody>
+      </p:sp>
+      <p:sp>
+        <p:nvSpPr>
+          <p:cNvPr id="3" name="TextBox 2"/>
+          <p:cNvSpPr txBox="1"/>
+          <p:nvPr/>
+        </p:nvSpPr>
+        <p:spPr>
+          <a:xfrm>
+            <a:off x="603504" y="859536"/>
+            <a:ext cx="10698480" cy="292608"/>
+          </a:xfrm>
+          <a:prstGeom prst="rect">
+            <a:avLst/>
+          </a:prstGeom>
+          <a:noFill/>
+        </p:spPr>
+        <p:txBody>
+          <a:bodyPr wrap="square" lIns="73152" rIns="73152" tIns="36576" bIns="36576">
+            <a:spAutoFit/>
+          </a:bodyPr>
+          <a:lstStyle/>
+          <a:p>
+            <a:pPr algn="l">
+              <a:spcAft>
+                <a:spcPts val="0"/>
+              </a:spcAft>
+              <a:defRPr sz="1700" b="0">
+                <a:solidFill>
+                  <a:srgbClr val="5C6672"/>
+                </a:solidFill>
+                <a:latin typeface="Noto Sans CJK KR"/>
+              </a:defRPr>
+            </a:pPr>
+            <a:r>
+              <a:t>현재 Complete는 다음 Starter의 기준선입니다.</a:t>
+            </a:r>
+          </a:p>
+        </p:txBody>
+      </p:sp>
+      <p:sp>
+        <p:nvSpPr>
+          <p:cNvPr id="4" name="TextBox 3"/>
+          <p:cNvSpPr txBox="1"/>
+          <p:nvPr/>
+        </p:nvSpPr>
+        <p:spPr>
+          <a:xfrm>
+            <a:off x="530352" y="6510528"/>
+            <a:ext cx="7772400" cy="201168"/>
+          </a:xfrm>
+          <a:prstGeom prst="rect">
+            <a:avLst/>
+          </a:prstGeom>
+          <a:noFill/>
+        </p:spPr>
+        <p:txBody>
+          <a:bodyPr wrap="square" lIns="73152" rIns="73152" tIns="36576" bIns="36576">
+            <a:spAutoFit/>
+          </a:bodyPr>
+          <a:lstStyle/>
+          <a:p>
+            <a:pPr algn="l">
+              <a:spcAft>
+                <a:spcPts val="0"/>
+              </a:spcAft>
+              <a:defRPr sz="1000" b="0">
+                <a:solidFill>
+                  <a:srgbClr val="5C6672"/>
+                </a:solidFill>
+                <a:latin typeface="Noto Sans CJK KR"/>
+              </a:defRPr>
+            </a:pPr>
+            <a:r>
+              <a:t>ROS 2 Jazzy · Gazebo Harmonic · M14 · 따라 하기형 AGV 실습</a:t>
+            </a:r>
+          </a:p>
+        </p:txBody>
+      </p:sp>
+      <p:sp>
+        <p:nvSpPr>
+          <p:cNvPr id="5" name="TextBox 4"/>
+          <p:cNvSpPr txBox="1"/>
+          <p:nvPr/>
+        </p:nvSpPr>
+        <p:spPr>
+          <a:xfrm>
+            <a:off x="9144000" y="6510528"/>
+            <a:ext cx="2468880" cy="201168"/>
+          </a:xfrm>
+          <a:prstGeom prst="rect">
+            <a:avLst/>
+          </a:prstGeom>
+          <a:noFill/>
+        </p:spPr>
+        <p:txBody>
+          <a:bodyPr wrap="square" lIns="73152" rIns="73152" tIns="36576" bIns="36576">
+            <a:spAutoFit/>
+          </a:bodyPr>
+          <a:lstStyle/>
+          <a:p>
+            <a:pPr algn="r">
+              <a:spcAft>
+                <a:spcPts val="0"/>
+              </a:spcAft>
+              <a:defRPr sz="1000" b="0">
+                <a:solidFill>
+                  <a:srgbClr val="5C6672"/>
+                </a:solidFill>
+                <a:latin typeface="Noto Sans CJK KR"/>
+              </a:defRPr>
+            </a:pPr>
+            <a:r>
+              <a:t>명령·파일 경로는 슬라이드에서 복사 가능</a:t>
+            </a:r>
+          </a:p>
+        </p:txBody>
+      </p:sp>
+      <p:sp>
+        <p:nvSpPr>
+          <p:cNvPr id="6" name="Rectangle 5"/>
+          <p:cNvSpPr/>
+          <p:nvPr/>
+        </p:nvSpPr>
+        <p:spPr>
+          <a:xfrm>
+            <a:off x="566928" y="1188720"/>
+            <a:ext cx="11064240" cy="347472"/>
+          </a:xfrm>
+          <a:prstGeom prst="rect">
+            <a:avLst/>
+          </a:prstGeom>
+          <a:solidFill>
+            <a:srgbClr val="F4F7FB"/>
+          </a:solidFill>
+          <a:ln>
+            <a:solidFill>
+              <a:srgbClr val="F4F7FB"/>
+            </a:solidFill>
+          </a:ln>
+        </p:spPr>
+        <p:style>
+          <a:lnRef idx="1">
+            <a:schemeClr val="accent1"/>
+          </a:lnRef>
+          <a:fillRef idx="3">
+            <a:schemeClr val="accent1"/>
+          </a:fillRef>
+          <a:effectRef idx="2">
+            <a:schemeClr val="accent1"/>
+          </a:effectRef>
+          <a:fontRef idx="minor">
+            <a:schemeClr val="lt1"/>
+          </a:fontRef>
+        </p:style>
+        <p:txBody>
+          <a:bodyPr rtlCol="0" anchor="ctr" wrap="square" lIns="73152" rIns="73152" tIns="36576" bIns="36576"/>
+          <a:lstStyle/>
+          <a:p>
+            <a:pPr algn="l">
+              <a:spcAft>
+                <a:spcPts val="0"/>
+              </a:spcAft>
+              <a:defRPr sz="1300" b="1">
+                <a:solidFill>
+                  <a:srgbClr val="122C4E"/>
+                </a:solidFill>
+                <a:latin typeface="Noto Sans CJK KR"/>
+              </a:defRPr>
+            </a:pPr>
+            <a:r>
+              <a:t>현재 단계 체크포인트    |    현재 폴더 ~/agv_ws    |    현재 터미널</a:t>
+            </a:r>
+          </a:p>
+        </p:txBody>
+      </p:sp>
+      <p:sp>
+        <p:nvSpPr>
+          <p:cNvPr id="7" name="Rounded Rectangle 6"/>
+          <p:cNvSpPr/>
+          <p:nvPr/>
+        </p:nvSpPr>
+        <p:spPr>
+          <a:xfrm>
+            <a:off x="685800" y="1737360"/>
+            <a:ext cx="10972800" cy="3611880"/>
+          </a:xfrm>
+          <a:prstGeom prst="roundRect">
+            <a:avLst/>
+          </a:prstGeom>
+          <a:solidFill>
+            <a:srgbClr val="F4F7FB"/>
+          </a:solidFill>
+          <a:ln>
+            <a:solidFill>
+              <a:srgbClr val="D2DCE8"/>
+            </a:solidFill>
+          </a:ln>
+        </p:spPr>
+        <p:style>
+          <a:lnRef idx="1">
+            <a:schemeClr val="accent1"/>
+          </a:lnRef>
+          <a:fillRef idx="3">
+            <a:schemeClr val="accent1"/>
+          </a:fillRef>
+          <a:effectRef idx="2">
+            <a:schemeClr val="accent1"/>
+          </a:effectRef>
+          <a:fontRef idx="minor">
+            <a:schemeClr val="lt1"/>
+          </a:fontRef>
+        </p:style>
+        <p:txBody>
+          <a:bodyPr rtlCol="0" anchor="ctr"/>
+          <a:lstStyle/>
+          <a:p>
+            <a:pPr algn="ctr"/>
+          </a:p>
+        </p:txBody>
+      </p:sp>
+      <p:sp>
+        <p:nvSpPr>
+          <p:cNvPr id="8" name="TextBox 7"/>
+          <p:cNvSpPr txBox="1"/>
+          <p:nvPr/>
+        </p:nvSpPr>
+        <p:spPr>
+          <a:xfrm>
+            <a:off x="896112" y="1993392"/>
+            <a:ext cx="10332720" cy="2971800"/>
+          </a:xfrm>
+          <a:prstGeom prst="rect">
+            <a:avLst/>
+          </a:prstGeom>
+          <a:noFill/>
+        </p:spPr>
+        <p:txBody>
+          <a:bodyPr wrap="square" lIns="109728" rIns="109728">
+            <a:spAutoFit/>
+          </a:bodyPr>
+          <a:lstStyle/>
+          <a:p>
+            <a:pPr>
+              <a:spcAft>
+                <a:spcPts val="800"/>
+              </a:spcAft>
+              <a:defRPr sz="1800">
+                <a:solidFill>
+                  <a:srgbClr val="122C4E"/>
+                </a:solidFill>
+                <a:latin typeface="Noto Sans CJK KR"/>
+              </a:defRPr>
+            </a:pPr>
+            <a:r>
+              <a:t>• □ 완료 화면: /imu/data의 z축 gyro 값과 noise 설정을 terminal에서 확인한다.</a:t>
+            </a:r>
+          </a:p>
+          <a:p>
+            <a:pPr>
+              <a:spcAft>
+                <a:spcPts val="800"/>
+              </a:spcAft>
+              <a:defRPr sz="1800">
+                <a:solidFill>
+                  <a:srgbClr val="122C4E"/>
+                </a:solidFill>
+                <a:latin typeface="Noto Sans CJK KR"/>
+              </a:defRPr>
+            </a:pPr>
+            <a:r>
+              <a:t>• □ Complete 파일: blocks/D_sensors/M14_imu_sensor/complete/</a:t>
+            </a:r>
+          </a:p>
+          <a:p>
+            <a:pPr>
+              <a:spcAft>
+                <a:spcPts val="800"/>
+              </a:spcAft>
+              <a:defRPr sz="1800">
+                <a:solidFill>
+                  <a:srgbClr val="122C4E"/>
+                </a:solidFill>
+                <a:latin typeface="Noto Sans CJK KR"/>
+              </a:defRPr>
+            </a:pPr>
+            <a:r>
+              <a:t>• □ 정상 로그·캡처: logs/validation.log, screenshots/validation_terminal.png</a:t>
+            </a:r>
+          </a:p>
+          <a:p>
+            <a:pPr>
+              <a:spcAft>
+                <a:spcPts val="800"/>
+              </a:spcAft>
+              <a:defRPr sz="1800">
+                <a:solidFill>
+                  <a:srgbClr val="122C4E"/>
+                </a:solidFill>
+                <a:latin typeface="Noto Sans CJK KR"/>
+              </a:defRPr>
+            </a:pPr>
+            <a:r>
+              <a:t>• □ 버전 식별: CHECKSUM_or_TAG.txt의 SHA-256 manifest</a:t>
+            </a:r>
+          </a:p>
+          <a:p>
+            <a:pPr>
+              <a:spcAft>
+                <a:spcPts val="800"/>
+              </a:spcAft>
+              <a:defRPr sz="1800">
+                <a:solidFill>
+                  <a:srgbClr val="122C4E"/>
+                </a:solidFill>
+                <a:latin typeface="Noto Sans CJK KR"/>
+              </a:defRPr>
+            </a:pPr>
+            <a:r>
+              <a:t>• □ 다음 시작 조건: M15 운영/QoS</a:t>
+            </a:r>
+          </a:p>
+        </p:txBody>
+      </p:sp>
+      <p:sp>
+        <p:nvSpPr>
+          <p:cNvPr id="9" name="TextBox 8"/>
+          <p:cNvSpPr txBox="1"/>
+          <p:nvPr/>
+        </p:nvSpPr>
+        <p:spPr>
+          <a:xfrm>
+            <a:off x="868680" y="5596128"/>
+            <a:ext cx="10515600" cy="338328"/>
+          </a:xfrm>
+          <a:prstGeom prst="rect">
+            <a:avLst/>
+          </a:prstGeom>
+          <a:noFill/>
+        </p:spPr>
+        <p:txBody>
+          <a:bodyPr wrap="square" lIns="73152" rIns="73152" tIns="36576" bIns="36576">
+            <a:spAutoFit/>
+          </a:bodyPr>
+          <a:lstStyle/>
+          <a:p>
+            <a:pPr algn="ctr">
+              <a:spcAft>
+                <a:spcPts val="0"/>
+              </a:spcAft>
+              <a:defRPr sz="1700" b="1">
+                <a:solidFill>
+                  <a:srgbClr val="2A8B5A"/>
+                </a:solidFill>
+                <a:latin typeface="Noto Sans CJK KR"/>
+              </a:defRPr>
+            </a:pPr>
+            <a:r>
+              <a:t>다음 모듈을 시작하기 전, 이 슬라이드의 Complete와 다음 모듈의 Starter를 비교합니다.</a:t>
+            </a:r>
+          </a:p>
+        </p:txBody>
+      </p:sp>
+    </p:spTree>
+  </p:cSld>
+  <p:clrMapOvr>
+    <a:masterClrMapping/>
+  </p:clrMapOvr>
+</p:sld>
+</file>
+
+<file path=ppt/slides/slide45.xml><?xml version="1.0" encoding="utf-8"?>
+<p:sld xmlns:a="http://schemas.openxmlformats.org/drawingml/2006/main" xmlns:p="http://schemas.openxmlformats.org/presentationml/2006/main" xmlns:r="http://schemas.openxmlformats.org/officeDocument/2006/relationships">
+  <p:cSld>
+    <p:spTree>
+      <p:nvGrpSpPr>
+        <p:cNvPr id="1" name=""/>
+        <p:cNvGrpSpPr/>
+        <p:nvPr/>
+      </p:nvGrpSpPr>
+      <p:grpSpPr/>
+      <p:sp>
+        <p:nvSpPr>
+          <p:cNvPr id="2" name="TextBox 1"/>
+          <p:cNvSpPr txBox="1"/>
+          <p:nvPr/>
+        </p:nvSpPr>
+        <p:spPr>
+          <a:xfrm>
+            <a:off x="566928" y="347472"/>
+            <a:ext cx="10881360" cy="438912"/>
+          </a:xfrm>
+          <a:prstGeom prst="rect">
+            <a:avLst/>
+          </a:prstGeom>
+          <a:noFill/>
+        </p:spPr>
+        <p:txBody>
+          <a:bodyPr wrap="square" lIns="73152" rIns="73152" tIns="36576" bIns="36576">
+            <a:spAutoFit/>
+          </a:bodyPr>
+          <a:lstStyle/>
+          <a:p>
+            <a:pPr algn="l">
+              <a:spcAft>
+                <a:spcPts val="0"/>
+              </a:spcAft>
+              <a:defRPr sz="3200" b="1">
+                <a:solidFill>
+                  <a:srgbClr val="122C4E"/>
+                </a:solidFill>
+                <a:latin typeface="Noto Sans CJK KR"/>
+              </a:defRPr>
+            </a:pPr>
+            <a:r>
               <a:t>공식 참고 자료</a:t>
             </a:r>
           </a:p>
@@ -23100,7 +25276,7 @@
         </p:nvSpPr>
         <p:spPr>
           <a:xfrm>
-            <a:off x="914400" y="1810512"/>
+            <a:off x="914400" y="1773936"/>
             <a:ext cx="3840480" cy="256032"/>
           </a:xfrm>
           <a:prstGeom prst="rect">
@@ -23139,8 +25315,8 @@
         </p:nvSpPr>
         <p:spPr>
           <a:xfrm>
-            <a:off x="914400" y="2121408"/>
-            <a:ext cx="9966960" cy="256032"/>
+            <a:off x="914400" y="2048255"/>
+            <a:ext cx="9966960" cy="475488"/>
           </a:xfrm>
           <a:prstGeom prst="rect">
             <a:avLst/>
@@ -23157,7 +25333,7 @@
               <a:spcAft>
                 <a:spcPts val="0"/>
               </a:spcAft>
-              <a:defRPr sz="1200" b="0">
+              <a:defRPr sz="1000" b="0">
                 <a:solidFill>
                   <a:srgbClr val="225B9B"/>
                 </a:solidFill>
@@ -23178,7 +25354,7 @@
         </p:nvSpPr>
         <p:spPr>
           <a:xfrm>
-            <a:off x="914400" y="2816352"/>
+            <a:off x="914400" y="2852928"/>
             <a:ext cx="3840480" cy="256032"/>
           </a:xfrm>
           <a:prstGeom prst="rect">
@@ -23218,7 +25394,7 @@
         <p:spPr>
           <a:xfrm>
             <a:off x="914400" y="3127248"/>
-            <a:ext cx="9966960" cy="256032"/>
+            <a:ext cx="9966960" cy="475488"/>
           </a:xfrm>
           <a:prstGeom prst="rect">
             <a:avLst/>
@@ -23235,7 +25411,7 @@
               <a:spcAft>
                 <a:spcPts val="0"/>
               </a:spcAft>
-              <a:defRPr sz="1200" b="0">
+              <a:defRPr sz="1000" b="0">
                 <a:solidFill>
                   <a:srgbClr val="225B9B"/>
                 </a:solidFill>
@@ -23256,7 +25432,7 @@
         </p:nvSpPr>
         <p:spPr>
           <a:xfrm>
-            <a:off x="914400" y="3822191"/>
+            <a:off x="914400" y="3931920"/>
             <a:ext cx="3840480" cy="256032"/>
           </a:xfrm>
           <a:prstGeom prst="rect">
@@ -23295,8 +25471,8 @@
         </p:nvSpPr>
         <p:spPr>
           <a:xfrm>
-            <a:off x="914400" y="4133087"/>
-            <a:ext cx="9966960" cy="256032"/>
+            <a:off x="914400" y="4206240"/>
+            <a:ext cx="9966960" cy="475488"/>
           </a:xfrm>
           <a:prstGeom prst="rect">
             <a:avLst/>
@@ -23313,7 +25489,7 @@
               <a:spcAft>
                 <a:spcPts val="0"/>
               </a:spcAft>
-              <a:defRPr sz="1200" b="0">
+              <a:defRPr sz="1000" b="0">
                 <a:solidFill>
                   <a:srgbClr val="225B9B"/>
                 </a:solidFill>
@@ -23334,7 +25510,7 @@
         </p:nvSpPr>
         <p:spPr>
           <a:xfrm>
-            <a:off x="914400" y="4828032"/>
+            <a:off x="914400" y="5010912"/>
             <a:ext cx="3840480" cy="256032"/>
           </a:xfrm>
           <a:prstGeom prst="rect">
@@ -23373,8 +25549,8 @@
         </p:nvSpPr>
         <p:spPr>
           <a:xfrm>
-            <a:off x="914400" y="5138928"/>
-            <a:ext cx="9966960" cy="256032"/>
+            <a:off x="914400" y="5285232"/>
+            <a:ext cx="9966960" cy="475488"/>
           </a:xfrm>
           <a:prstGeom prst="rect">
             <a:avLst/>
@@ -23391,7 +25567,7 @@
               <a:spcAft>
                 <a:spcPts val="0"/>
               </a:spcAft>
-              <a:defRPr sz="1200" b="0">
+              <a:defRPr sz="1000" b="0">
                 <a:solidFill>
                   <a:srgbClr val="225B9B"/>
                 </a:solidFill>
@@ -25189,7 +27365,7 @@
               </a:defRPr>
             </a:pPr>
             <a:r>
-              <a:t>파일을 새로 만들고 저장한다 (1/21)</a:t>
+              <a:t>파일을 새로 만들고 저장한다 (1/24)</a:t>
             </a:r>
           </a:p>
         </p:txBody>
@@ -25364,7 +27540,7 @@
               </a:defRPr>
             </a:pPr>
             <a:r>
-              <a:t>현재 단계 3/24    |    현재 폴더 ~/agv_ws    |    현재 터미널</a:t>
+              <a:t>현재 단계 3/27    |    현재 폴더 ~/agv_ws    |    현재 터미널</a:t>
             </a:r>
           </a:p>
         </p:txBody>
@@ -25377,8 +27553,8 @@
         </p:nvSpPr>
         <p:spPr>
           <a:xfrm>
-            <a:off x="658368" y="1682496"/>
-            <a:ext cx="10972800" cy="347472"/>
+            <a:off x="658368" y="1627632"/>
+            <a:ext cx="10972800" cy="256032"/>
           </a:xfrm>
           <a:prstGeom prst="rect">
             <a:avLst/>
@@ -25395,7 +27571,7 @@
               <a:spcAft>
                 <a:spcPts val="0"/>
               </a:spcAft>
-              <a:defRPr sz="1700" b="1">
+              <a:defRPr sz="1500" b="1">
                 <a:solidFill>
                   <a:srgbClr val="122C4E"/>
                 </a:solidFill>
@@ -25416,8 +27592,8 @@
         </p:nvSpPr>
         <p:spPr>
           <a:xfrm>
-            <a:off x="658368" y="2103120"/>
-            <a:ext cx="10972800" cy="493776"/>
+            <a:off x="658368" y="1956816"/>
+            <a:ext cx="10972800" cy="603504"/>
           </a:xfrm>
           <a:prstGeom prst="rect">
             <a:avLst/>
@@ -25461,7 +27637,11 @@
               </a:defRPr>
             </a:pPr>
             <a:r>
-              <a:t>파일 생성/열기: mkdir -p ~/agv_ws/src/agv_gazebo/models/agv    &amp;&amp;    nano ~/agv_ws/src/agv_gazebo/models/agv/model.sdf</a:t>
+              <a:t>파일 생성: mkdir -p ~/agv_ws/src/agv_gazebo/models/agv</a:t>
+            </a:r>
+            <a:br/>
+            <a:r>
+              <a:t>파일 열기: nano ~/agv_ws/src/agv_gazebo/models/agv/model.sdf</a:t>
             </a:r>
           </a:p>
         </p:txBody>
@@ -25474,8 +27654,8 @@
         </p:nvSpPr>
         <p:spPr>
           <a:xfrm>
-            <a:off x="658368" y="2761488"/>
-            <a:ext cx="10972800" cy="3383280"/>
+            <a:off x="658368" y="2706624"/>
+            <a:ext cx="10972800" cy="3364992"/>
           </a:xfrm>
           <a:prstGeom prst="rect">
             <a:avLst/>
@@ -25565,14 +27745,6 @@
             <a:r>
               <a:t>      </a:t>
             </a:r>
-            <a:br/>
-            <a:r>
-              <a:t>      </a:t>
-            </a:r>
-            <a:br/>
-            <a:r>
-              <a:t>      &lt;inertial&gt;</a:t>
-            </a:r>
           </a:p>
         </p:txBody>
       </p:sp>
@@ -25584,7 +27756,7 @@
         </p:nvSpPr>
         <p:spPr>
           <a:xfrm>
-            <a:off x="749808" y="6199632"/>
+            <a:off x="749808" y="6181344"/>
             <a:ext cx="10789920" cy="201168"/>
           </a:xfrm>
           <a:prstGeom prst="rect">
@@ -25610,7 +27782,7 @@
               </a:defRPr>
             </a:pPr>
             <a:r>
-              <a:t>파일 전체 1/21 · 이 슬라이드 다음에 같은 파일의 나머지 줄이 이어집니다.</a:t>
+              <a:t>파일 전체 1/24 · 이 슬라이드 다음에 같은 파일의 나머지 줄이 이어집니다.</a:t>
             </a:r>
           </a:p>
         </p:txBody>

--- a/blocks/D_sensors/M14_imu_sensor/M14_IMU_Sensor.pptx
+++ b/blocks/D_sensors/M14_imu_sensor/M14_IMU_Sensor.pptx
@@ -50,6 +50,7 @@
     <p:sldId id="298" r:id="rId50"/>
     <p:sldId id="299" r:id="rId51"/>
     <p:sldId id="300" r:id="rId52"/>
+    <p:sldId id="301" r:id="rId53"/>
   </p:sldIdLst>
   <p:sldSz cx="12191999" cy="6858000" type="screen4x3"/>
   <p:notesSz cx="6858000" cy="9144000"/>
@@ -636,12 +637,12 @@
           <a:lstStyle/>
           <a:p>
             <a:r>
-              <a:t>[설명] ~/agv_ws/src/agv_gazebo/models/agv/model.sdf의 전체 파일을 2/24 구간으로 작성한다.</a:t>
-            </a:r>
-          </a:p>
-          <a:p>
-            <a:r>
-              <a:t>[실행] nano ~/agv_ws/src/agv_gazebo/models/agv/model.sdf</a:t>
+              <a:t>[설명] ~/ros2_curri/agv_ws/src/agv_gazebo/models/agv/model.sdf의 전체 파일을 2/24 구간으로 작성한다.</a:t>
+            </a:r>
+          </a:p>
+          <a:p>
+            <a:r>
+              <a:t>[실행] nano ~/ros2_curri/agv_ws/src/agv_gazebo/models/agv/model.sdf</a:t>
             </a:r>
           </a:p>
           <a:p>
@@ -726,12 +727,12 @@
           <a:lstStyle/>
           <a:p>
             <a:r>
-              <a:t>[설명] ~/agv_ws/src/agv_gazebo/models/agv/model.sdf의 전체 파일을 3/24 구간으로 작성한다.</a:t>
-            </a:r>
-          </a:p>
-          <a:p>
-            <a:r>
-              <a:t>[실행] nano ~/agv_ws/src/agv_gazebo/models/agv/model.sdf</a:t>
+              <a:t>[설명] ~/ros2_curri/agv_ws/src/agv_gazebo/models/agv/model.sdf의 전체 파일을 3/24 구간으로 작성한다.</a:t>
+            </a:r>
+          </a:p>
+          <a:p>
+            <a:r>
+              <a:t>[실행] nano ~/ros2_curri/agv_ws/src/agv_gazebo/models/agv/model.sdf</a:t>
             </a:r>
           </a:p>
           <a:p>
@@ -816,12 +817,12 @@
           <a:lstStyle/>
           <a:p>
             <a:r>
-              <a:t>[설명] ~/agv_ws/src/agv_gazebo/models/agv/model.sdf의 전체 파일을 4/24 구간으로 작성한다.</a:t>
-            </a:r>
-          </a:p>
-          <a:p>
-            <a:r>
-              <a:t>[실행] nano ~/agv_ws/src/agv_gazebo/models/agv/model.sdf</a:t>
+              <a:t>[설명] ~/ros2_curri/agv_ws/src/agv_gazebo/models/agv/model.sdf의 전체 파일을 4/24 구간으로 작성한다.</a:t>
+            </a:r>
+          </a:p>
+          <a:p>
+            <a:r>
+              <a:t>[실행] nano ~/ros2_curri/agv_ws/src/agv_gazebo/models/agv/model.sdf</a:t>
             </a:r>
           </a:p>
           <a:p>
@@ -906,12 +907,12 @@
           <a:lstStyle/>
           <a:p>
             <a:r>
-              <a:t>[설명] ~/agv_ws/src/agv_gazebo/models/agv/model.sdf의 전체 파일을 5/24 구간으로 작성한다.</a:t>
-            </a:r>
-          </a:p>
-          <a:p>
-            <a:r>
-              <a:t>[실행] nano ~/agv_ws/src/agv_gazebo/models/agv/model.sdf</a:t>
+              <a:t>[설명] ~/ros2_curri/agv_ws/src/agv_gazebo/models/agv/model.sdf의 전체 파일을 5/24 구간으로 작성한다.</a:t>
+            </a:r>
+          </a:p>
+          <a:p>
+            <a:r>
+              <a:t>[실행] nano ~/ros2_curri/agv_ws/src/agv_gazebo/models/agv/model.sdf</a:t>
             </a:r>
           </a:p>
           <a:p>
@@ -996,12 +997,12 @@
           <a:lstStyle/>
           <a:p>
             <a:r>
-              <a:t>[설명] ~/agv_ws/src/agv_gazebo/models/agv/model.sdf의 전체 파일을 6/24 구간으로 작성한다.</a:t>
-            </a:r>
-          </a:p>
-          <a:p>
-            <a:r>
-              <a:t>[실행] nano ~/agv_ws/src/agv_gazebo/models/agv/model.sdf</a:t>
+              <a:t>[설명] ~/ros2_curri/agv_ws/src/agv_gazebo/models/agv/model.sdf의 전체 파일을 6/24 구간으로 작성한다.</a:t>
+            </a:r>
+          </a:p>
+          <a:p>
+            <a:r>
+              <a:t>[실행] nano ~/ros2_curri/agv_ws/src/agv_gazebo/models/agv/model.sdf</a:t>
             </a:r>
           </a:p>
           <a:p>
@@ -1086,12 +1087,12 @@
           <a:lstStyle/>
           <a:p>
             <a:r>
-              <a:t>[설명] ~/agv_ws/src/agv_gazebo/models/agv/model.sdf의 전체 파일을 7/24 구간으로 작성한다.</a:t>
-            </a:r>
-          </a:p>
-          <a:p>
-            <a:r>
-              <a:t>[실행] nano ~/agv_ws/src/agv_gazebo/models/agv/model.sdf</a:t>
+              <a:t>[설명] ~/ros2_curri/agv_ws/src/agv_gazebo/models/agv/model.sdf의 전체 파일을 7/24 구간으로 작성한다.</a:t>
+            </a:r>
+          </a:p>
+          <a:p>
+            <a:r>
+              <a:t>[실행] nano ~/ros2_curri/agv_ws/src/agv_gazebo/models/agv/model.sdf</a:t>
             </a:r>
           </a:p>
           <a:p>
@@ -1176,12 +1177,12 @@
           <a:lstStyle/>
           <a:p>
             <a:r>
-              <a:t>[설명] ~/agv_ws/src/agv_gazebo/models/agv/model.sdf의 전체 파일을 8/24 구간으로 작성한다.</a:t>
-            </a:r>
-          </a:p>
-          <a:p>
-            <a:r>
-              <a:t>[실행] nano ~/agv_ws/src/agv_gazebo/models/agv/model.sdf</a:t>
+              <a:t>[설명] ~/ros2_curri/agv_ws/src/agv_gazebo/models/agv/model.sdf의 전체 파일을 8/24 구간으로 작성한다.</a:t>
+            </a:r>
+          </a:p>
+          <a:p>
+            <a:r>
+              <a:t>[실행] nano ~/ros2_curri/agv_ws/src/agv_gazebo/models/agv/model.sdf</a:t>
             </a:r>
           </a:p>
           <a:p>
@@ -1266,12 +1267,12 @@
           <a:lstStyle/>
           <a:p>
             <a:r>
-              <a:t>[설명] ~/agv_ws/src/agv_gazebo/models/agv/model.sdf의 전체 파일을 9/24 구간으로 작성한다.</a:t>
-            </a:r>
-          </a:p>
-          <a:p>
-            <a:r>
-              <a:t>[실행] nano ~/agv_ws/src/agv_gazebo/models/agv/model.sdf</a:t>
+              <a:t>[설명] ~/ros2_curri/agv_ws/src/agv_gazebo/models/agv/model.sdf의 전체 파일을 9/24 구간으로 작성한다.</a:t>
+            </a:r>
+          </a:p>
+          <a:p>
+            <a:r>
+              <a:t>[실행] nano ~/ros2_curri/agv_ws/src/agv_gazebo/models/agv/model.sdf</a:t>
             </a:r>
           </a:p>
           <a:p>
@@ -1356,12 +1357,12 @@
           <a:lstStyle/>
           <a:p>
             <a:r>
-              <a:t>[설명] ~/agv_ws/src/agv_gazebo/models/agv/model.sdf의 전체 파일을 10/24 구간으로 작성한다.</a:t>
-            </a:r>
-          </a:p>
-          <a:p>
-            <a:r>
-              <a:t>[실행] nano ~/agv_ws/src/agv_gazebo/models/agv/model.sdf</a:t>
+              <a:t>[설명] ~/ros2_curri/agv_ws/src/agv_gazebo/models/agv/model.sdf의 전체 파일을 10/24 구간으로 작성한다.</a:t>
+            </a:r>
+          </a:p>
+          <a:p>
+            <a:r>
+              <a:t>[실행] nano ~/ros2_curri/agv_ws/src/agv_gazebo/models/agv/model.sdf</a:t>
             </a:r>
           </a:p>
           <a:p>
@@ -1446,12 +1447,12 @@
           <a:lstStyle/>
           <a:p>
             <a:r>
-              <a:t>[설명] ~/agv_ws/src/agv_gazebo/models/agv/model.sdf의 전체 파일을 11/24 구간으로 작성한다.</a:t>
-            </a:r>
-          </a:p>
-          <a:p>
-            <a:r>
-              <a:t>[실행] nano ~/agv_ws/src/agv_gazebo/models/agv/model.sdf</a:t>
+              <a:t>[설명] ~/ros2_curri/agv_ws/src/agv_gazebo/models/agv/model.sdf의 전체 파일을 11/24 구간으로 작성한다.</a:t>
+            </a:r>
+          </a:p>
+          <a:p>
+            <a:r>
+              <a:t>[실행] nano ~/ros2_curri/agv_ws/src/agv_gazebo/models/agv/model.sdf</a:t>
             </a:r>
           </a:p>
           <a:p>
@@ -1626,12 +1627,12 @@
           <a:lstStyle/>
           <a:p>
             <a:r>
-              <a:t>[설명] ~/agv_ws/src/agv_gazebo/models/agv/model.sdf의 전체 파일을 12/24 구간으로 작성한다.</a:t>
-            </a:r>
-          </a:p>
-          <a:p>
-            <a:r>
-              <a:t>[실행] nano ~/agv_ws/src/agv_gazebo/models/agv/model.sdf</a:t>
+              <a:t>[설명] ~/ros2_curri/agv_ws/src/agv_gazebo/models/agv/model.sdf의 전체 파일을 12/24 구간으로 작성한다.</a:t>
+            </a:r>
+          </a:p>
+          <a:p>
+            <a:r>
+              <a:t>[실행] nano ~/ros2_curri/agv_ws/src/agv_gazebo/models/agv/model.sdf</a:t>
             </a:r>
           </a:p>
           <a:p>
@@ -1716,12 +1717,12 @@
           <a:lstStyle/>
           <a:p>
             <a:r>
-              <a:t>[설명] ~/agv_ws/src/agv_gazebo/models/agv/model.sdf의 전체 파일을 13/24 구간으로 작성한다.</a:t>
-            </a:r>
-          </a:p>
-          <a:p>
-            <a:r>
-              <a:t>[실행] nano ~/agv_ws/src/agv_gazebo/models/agv/model.sdf</a:t>
+              <a:t>[설명] ~/ros2_curri/agv_ws/src/agv_gazebo/models/agv/model.sdf의 전체 파일을 13/24 구간으로 작성한다.</a:t>
+            </a:r>
+          </a:p>
+          <a:p>
+            <a:r>
+              <a:t>[실행] nano ~/ros2_curri/agv_ws/src/agv_gazebo/models/agv/model.sdf</a:t>
             </a:r>
           </a:p>
           <a:p>
@@ -1806,12 +1807,12 @@
           <a:lstStyle/>
           <a:p>
             <a:r>
-              <a:t>[설명] ~/agv_ws/src/agv_gazebo/models/agv/model.sdf의 전체 파일을 14/24 구간으로 작성한다.</a:t>
-            </a:r>
-          </a:p>
-          <a:p>
-            <a:r>
-              <a:t>[실행] nano ~/agv_ws/src/agv_gazebo/models/agv/model.sdf</a:t>
+              <a:t>[설명] ~/ros2_curri/agv_ws/src/agv_gazebo/models/agv/model.sdf의 전체 파일을 14/24 구간으로 작성한다.</a:t>
+            </a:r>
+          </a:p>
+          <a:p>
+            <a:r>
+              <a:t>[실행] nano ~/ros2_curri/agv_ws/src/agv_gazebo/models/agv/model.sdf</a:t>
             </a:r>
           </a:p>
           <a:p>
@@ -1896,12 +1897,12 @@
           <a:lstStyle/>
           <a:p>
             <a:r>
-              <a:t>[설명] ~/agv_ws/src/agv_gazebo/models/agv/model.sdf의 전체 파일을 15/24 구간으로 작성한다.</a:t>
-            </a:r>
-          </a:p>
-          <a:p>
-            <a:r>
-              <a:t>[실행] nano ~/agv_ws/src/agv_gazebo/models/agv/model.sdf</a:t>
+              <a:t>[설명] ~/ros2_curri/agv_ws/src/agv_gazebo/models/agv/model.sdf의 전체 파일을 15/24 구간으로 작성한다.</a:t>
+            </a:r>
+          </a:p>
+          <a:p>
+            <a:r>
+              <a:t>[실행] nano ~/ros2_curri/agv_ws/src/agv_gazebo/models/agv/model.sdf</a:t>
             </a:r>
           </a:p>
           <a:p>
@@ -1986,12 +1987,12 @@
           <a:lstStyle/>
           <a:p>
             <a:r>
-              <a:t>[설명] ~/agv_ws/src/agv_gazebo/models/agv/model.sdf의 전체 파일을 16/24 구간으로 작성한다.</a:t>
-            </a:r>
-          </a:p>
-          <a:p>
-            <a:r>
-              <a:t>[실행] nano ~/agv_ws/src/agv_gazebo/models/agv/model.sdf</a:t>
+              <a:t>[설명] ~/ros2_curri/agv_ws/src/agv_gazebo/models/agv/model.sdf의 전체 파일을 16/24 구간으로 작성한다.</a:t>
+            </a:r>
+          </a:p>
+          <a:p>
+            <a:r>
+              <a:t>[실행] nano ~/ros2_curri/agv_ws/src/agv_gazebo/models/agv/model.sdf</a:t>
             </a:r>
           </a:p>
           <a:p>
@@ -2076,12 +2077,12 @@
           <a:lstStyle/>
           <a:p>
             <a:r>
-              <a:t>[설명] ~/agv_ws/src/agv_gazebo/models/agv/model.sdf의 전체 파일을 17/24 구간으로 작성한다.</a:t>
-            </a:r>
-          </a:p>
-          <a:p>
-            <a:r>
-              <a:t>[실행] nano ~/agv_ws/src/agv_gazebo/models/agv/model.sdf</a:t>
+              <a:t>[설명] ~/ros2_curri/agv_ws/src/agv_gazebo/models/agv/model.sdf의 전체 파일을 17/24 구간으로 작성한다.</a:t>
+            </a:r>
+          </a:p>
+          <a:p>
+            <a:r>
+              <a:t>[실행] nano ~/ros2_curri/agv_ws/src/agv_gazebo/models/agv/model.sdf</a:t>
             </a:r>
           </a:p>
           <a:p>
@@ -2166,12 +2167,12 @@
           <a:lstStyle/>
           <a:p>
             <a:r>
-              <a:t>[설명] ~/agv_ws/src/agv_gazebo/models/agv/model.sdf의 전체 파일을 18/24 구간으로 작성한다.</a:t>
-            </a:r>
-          </a:p>
-          <a:p>
-            <a:r>
-              <a:t>[실행] nano ~/agv_ws/src/agv_gazebo/models/agv/model.sdf</a:t>
+              <a:t>[설명] ~/ros2_curri/agv_ws/src/agv_gazebo/models/agv/model.sdf의 전체 파일을 18/24 구간으로 작성한다.</a:t>
+            </a:r>
+          </a:p>
+          <a:p>
+            <a:r>
+              <a:t>[실행] nano ~/ros2_curri/agv_ws/src/agv_gazebo/models/agv/model.sdf</a:t>
             </a:r>
           </a:p>
           <a:p>
@@ -2256,12 +2257,12 @@
           <a:lstStyle/>
           <a:p>
             <a:r>
-              <a:t>[설명] ~/agv_ws/src/agv_gazebo/models/agv/model.sdf의 전체 파일을 19/24 구간으로 작성한다.</a:t>
-            </a:r>
-          </a:p>
-          <a:p>
-            <a:r>
-              <a:t>[실행] nano ~/agv_ws/src/agv_gazebo/models/agv/model.sdf</a:t>
+              <a:t>[설명] ~/ros2_curri/agv_ws/src/agv_gazebo/models/agv/model.sdf의 전체 파일을 19/24 구간으로 작성한다.</a:t>
+            </a:r>
+          </a:p>
+          <a:p>
+            <a:r>
+              <a:t>[실행] nano ~/ros2_curri/agv_ws/src/agv_gazebo/models/agv/model.sdf</a:t>
             </a:r>
           </a:p>
           <a:p>
@@ -2346,12 +2347,12 @@
           <a:lstStyle/>
           <a:p>
             <a:r>
-              <a:t>[설명] ~/agv_ws/src/agv_gazebo/models/agv/model.sdf의 전체 파일을 20/24 구간으로 작성한다.</a:t>
-            </a:r>
-          </a:p>
-          <a:p>
-            <a:r>
-              <a:t>[실행] nano ~/agv_ws/src/agv_gazebo/models/agv/model.sdf</a:t>
+              <a:t>[설명] ~/ros2_curri/agv_ws/src/agv_gazebo/models/agv/model.sdf의 전체 파일을 20/24 구간으로 작성한다.</a:t>
+            </a:r>
+          </a:p>
+          <a:p>
+            <a:r>
+              <a:t>[실행] nano ~/ros2_curri/agv_ws/src/agv_gazebo/models/agv/model.sdf</a:t>
             </a:r>
           </a:p>
           <a:p>
@@ -2436,12 +2437,12 @@
           <a:lstStyle/>
           <a:p>
             <a:r>
-              <a:t>[설명] ~/agv_ws/src/agv_gazebo/models/agv/model.sdf의 전체 파일을 21/24 구간으로 작성한다.</a:t>
-            </a:r>
-          </a:p>
-          <a:p>
-            <a:r>
-              <a:t>[실행] nano ~/agv_ws/src/agv_gazebo/models/agv/model.sdf</a:t>
+              <a:t>[설명] ~/ros2_curri/agv_ws/src/agv_gazebo/models/agv/model.sdf의 전체 파일을 21/24 구간으로 작성한다.</a:t>
+            </a:r>
+          </a:p>
+          <a:p>
+            <a:r>
+              <a:t>[실행] nano ~/ros2_curri/agv_ws/src/agv_gazebo/models/agv/model.sdf</a:t>
             </a:r>
           </a:p>
           <a:p>
@@ -2531,7 +2532,7 @@
           </a:p>
           <a:p>
             <a:r>
-              <a:t>[실행] pwd; source /opt/ros/jazzy/setup.bash; source ~/agv_ws/install/setup.bash</a:t>
+              <a:t>[실행] pwd; source /opt/ros/jazzy/setup.bash; source ~/ros2_curri/agv_ws/install/setup.bash</a:t>
             </a:r>
           </a:p>
           <a:p>
@@ -2616,12 +2617,12 @@
           <a:lstStyle/>
           <a:p>
             <a:r>
-              <a:t>[설명] ~/agv_ws/src/agv_gazebo/models/agv/model.sdf의 전체 파일을 22/24 구간으로 작성한다.</a:t>
-            </a:r>
-          </a:p>
-          <a:p>
-            <a:r>
-              <a:t>[실행] nano ~/agv_ws/src/agv_gazebo/models/agv/model.sdf</a:t>
+              <a:t>[설명] ~/ros2_curri/agv_ws/src/agv_gazebo/models/agv/model.sdf의 전체 파일을 22/24 구간으로 작성한다.</a:t>
+            </a:r>
+          </a:p>
+          <a:p>
+            <a:r>
+              <a:t>[실행] nano ~/ros2_curri/agv_ws/src/agv_gazebo/models/agv/model.sdf</a:t>
             </a:r>
           </a:p>
           <a:p>
@@ -2706,12 +2707,12 @@
           <a:lstStyle/>
           <a:p>
             <a:r>
-              <a:t>[설명] ~/agv_ws/src/agv_gazebo/models/agv/model.sdf의 전체 파일을 23/24 구간으로 작성한다.</a:t>
-            </a:r>
-          </a:p>
-          <a:p>
-            <a:r>
-              <a:t>[실행] nano ~/agv_ws/src/agv_gazebo/models/agv/model.sdf</a:t>
+              <a:t>[설명] ~/ros2_curri/agv_ws/src/agv_gazebo/models/agv/model.sdf의 전체 파일을 23/24 구간으로 작성한다.</a:t>
+            </a:r>
+          </a:p>
+          <a:p>
+            <a:r>
+              <a:t>[실행] nano ~/ros2_curri/agv_ws/src/agv_gazebo/models/agv/model.sdf</a:t>
             </a:r>
           </a:p>
           <a:p>
@@ -2796,12 +2797,12 @@
           <a:lstStyle/>
           <a:p>
             <a:r>
-              <a:t>[설명] ~/agv_ws/src/agv_gazebo/models/agv/model.sdf의 전체 파일을 24/24 구간으로 작성한다.</a:t>
-            </a:r>
-          </a:p>
-          <a:p>
-            <a:r>
-              <a:t>[실행] nano ~/agv_ws/src/agv_gazebo/models/agv/model.sdf</a:t>
+              <a:t>[설명] ~/ros2_curri/agv_ws/src/agv_gazebo/models/agv/model.sdf의 전체 파일을 24/24 구간으로 작성한다.</a:t>
+            </a:r>
+          </a:p>
+          <a:p>
+            <a:r>
+              <a:t>[실행] nano ~/ros2_curri/agv_ws/src/agv_gazebo/models/agv/model.sdf</a:t>
             </a:r>
           </a:p>
           <a:p>
@@ -2886,12 +2887,12 @@
           <a:lstStyle/>
           <a:p>
             <a:r>
-              <a:t>[설명] ~/agv_ws/src/agv_gazebo/config/bridge.yaml의 전체 파일을 1/3 구간으로 작성한다.</a:t>
-            </a:r>
-          </a:p>
-          <a:p>
-            <a:r>
-              <a:t>[실행] nano ~/agv_ws/src/agv_gazebo/config/bridge.yaml</a:t>
+              <a:t>[설명] ~/ros2_curri/agv_ws/src/agv_gazebo/config/bridge.yaml의 전체 파일을 1/3 구간으로 작성한다.</a:t>
+            </a:r>
+          </a:p>
+          <a:p>
+            <a:r>
+              <a:t>[실행] nano ~/ros2_curri/agv_ws/src/agv_gazebo/config/bridge.yaml</a:t>
             </a:r>
           </a:p>
           <a:p>
@@ -2976,12 +2977,12 @@
           <a:lstStyle/>
           <a:p>
             <a:r>
-              <a:t>[설명] ~/agv_ws/src/agv_gazebo/config/bridge.yaml의 전체 파일을 2/3 구간으로 작성한다.</a:t>
-            </a:r>
-          </a:p>
-          <a:p>
-            <a:r>
-              <a:t>[실행] nano ~/agv_ws/src/agv_gazebo/config/bridge.yaml</a:t>
+              <a:t>[설명] ~/ros2_curri/agv_ws/src/agv_gazebo/config/bridge.yaml의 전체 파일을 2/3 구간으로 작성한다.</a:t>
+            </a:r>
+          </a:p>
+          <a:p>
+            <a:r>
+              <a:t>[실행] nano ~/ros2_curri/agv_ws/src/agv_gazebo/config/bridge.yaml</a:t>
             </a:r>
           </a:p>
           <a:p>
@@ -3066,12 +3067,12 @@
           <a:lstStyle/>
           <a:p>
             <a:r>
-              <a:t>[설명] ~/agv_ws/src/agv_gazebo/config/bridge.yaml의 전체 파일을 3/3 구간으로 작성한다.</a:t>
-            </a:r>
-          </a:p>
-          <a:p>
-            <a:r>
-              <a:t>[실행] nano ~/agv_ws/src/agv_gazebo/config/bridge.yaml</a:t>
+              <a:t>[설명] ~/ros2_curri/agv_ws/src/agv_gazebo/config/bridge.yaml의 전체 파일을 3/3 구간으로 작성한다.</a:t>
+            </a:r>
+          </a:p>
+          <a:p>
+            <a:r>
+              <a:t>[실행] nano ~/ros2_curri/agv_ws/src/agv_gazebo/config/bridge.yaml</a:t>
             </a:r>
           </a:p>
           <a:p>
@@ -3156,12 +3157,12 @@
           <a:lstStyle/>
           <a:p>
             <a:r>
-              <a:t>[설명] ~/agv_ws/src/agv_sensors/agv_sensors/imu_monitor.py의 전체 파일을 1/3 구간으로 작성한다.</a:t>
-            </a:r>
-          </a:p>
-          <a:p>
-            <a:r>
-              <a:t>[실행] nano ~/agv_ws/src/agv_sensors/agv_sensors/imu_monitor.py</a:t>
+              <a:t>[설명] ~/ros2_curri/agv_ws/src/agv_sensors/agv_sensors/imu_monitor.py의 전체 파일을 1/3 구간으로 작성한다.</a:t>
+            </a:r>
+          </a:p>
+          <a:p>
+            <a:r>
+              <a:t>[실행] nano ~/ros2_curri/agv_ws/src/agv_sensors/agv_sensors/imu_monitor.py</a:t>
             </a:r>
           </a:p>
           <a:p>
@@ -3246,12 +3247,12 @@
           <a:lstStyle/>
           <a:p>
             <a:r>
-              <a:t>[설명] ~/agv_ws/src/agv_sensors/agv_sensors/imu_monitor.py의 전체 파일을 2/3 구간으로 작성한다.</a:t>
-            </a:r>
-          </a:p>
-          <a:p>
-            <a:r>
-              <a:t>[실행] nano ~/agv_ws/src/agv_sensors/agv_sensors/imu_monitor.py</a:t>
+              <a:t>[설명] ~/ros2_curri/agv_ws/src/agv_sensors/agv_sensors/imu_monitor.py의 전체 파일을 2/3 구간으로 작성한다.</a:t>
+            </a:r>
+          </a:p>
+          <a:p>
+            <a:r>
+              <a:t>[실행] nano ~/ros2_curri/agv_ws/src/agv_sensors/agv_sensors/imu_monitor.py</a:t>
             </a:r>
           </a:p>
           <a:p>
@@ -3336,12 +3337,12 @@
           <a:lstStyle/>
           <a:p>
             <a:r>
-              <a:t>[설명] ~/agv_ws/src/agv_sensors/agv_sensors/imu_monitor.py의 전체 파일을 3/3 구간으로 작성한다.</a:t>
-            </a:r>
-          </a:p>
-          <a:p>
-            <a:r>
-              <a:t>[실행] nano ~/agv_ws/src/agv_sensors/agv_sensors/imu_monitor.py</a:t>
+              <a:t>[설명] ~/ros2_curri/agv_ws/src/agv_sensors/agv_sensors/imu_monitor.py의 전체 파일을 3/3 구간으로 작성한다.</a:t>
+            </a:r>
+          </a:p>
+          <a:p>
+            <a:r>
+              <a:t>[실행] nano ~/ros2_curri/agv_ws/src/agv_sensors/agv_sensors/imu_monitor.py</a:t>
             </a:r>
           </a:p>
           <a:p>
@@ -3701,27 +3702,17 @@
           <a:lstStyle/>
           <a:p>
             <a:r>
-              <a:t>[설명] 검증 명령은 GUI 결과와 별도로 실행해 재현 가능한 완료 기준을 만든다.</a:t>
-            </a:r>
-          </a:p>
-          <a:p>
-            <a:r>
-              <a:t>[실행] ros2 topic info /imu/data</a:t>
-            </a:r>
-          </a:p>
-          <a:p>
-            <a:r>
-              <a:t>ros2 topic hz /imu/data</a:t>
-            </a:r>
-          </a:p>
-          <a:p>
-            <a:r>
-              <a:t>ros2 topic echo /imu/data --once</a:t>
-            </a:r>
-          </a:p>
-          <a:p>
-            <a:r>
-              <a:t>[확인] /imu/data의 z축 gyro 값과 noise 설정을 terminal에서 확인한다.</a:t>
+              <a:t>[설명] 실제 Ubuntu/ROS 2 환경에서 생성한 검증 화면이다.</a:t>
+            </a:r>
+          </a:p>
+          <a:p>
+            <a:r>
+              <a:t>[실행] 슬라이드의 명령 또는 파일 작성 단계를 진행한다.</a:t>
+            </a:r>
+          </a:p>
+          <a:p>
+            <a:r>
+              <a:t>[확인] 캡처의 명령과 다음 슬라이드의 검증 명령을 비교한다.</a:t>
             </a:r>
           </a:p>
           <a:p>
@@ -3801,17 +3792,27 @@
           <a:lstStyle/>
           <a:p>
             <a:r>
-              <a:t>[설명] 오류를 대신 해결하지 말고 증상부터 우선 확인 순서대로 교육생이 실행하게 한다.</a:t>
-            </a:r>
-          </a:p>
-          <a:p>
-            <a:r>
-              <a:t>[실행] 슬라이드의 명령 또는 파일 작성 단계를 진행한다.</a:t>
-            </a:r>
-          </a:p>
-          <a:p>
-            <a:r>
-              <a:t>[확인] 수정 뒤 첫 검증 명령을 다시 실행한다.</a:t>
+              <a:t>[설명] 검증 명령은 GUI 결과와 별도로 실행해 재현 가능한 완료 기준을 만든다.</a:t>
+            </a:r>
+          </a:p>
+          <a:p>
+            <a:r>
+              <a:t>[실행] ros2 topic info /imu/data</a:t>
+            </a:r>
+          </a:p>
+          <a:p>
+            <a:r>
+              <a:t>ros2 topic hz /imu/data</a:t>
+            </a:r>
+          </a:p>
+          <a:p>
+            <a:r>
+              <a:t>ros2 topic echo /imu/data --once</a:t>
+            </a:r>
+          </a:p>
+          <a:p>
+            <a:r>
+              <a:t>[확인] /imu/data의 z축 gyro 값과 noise 설정을 terminal에서 확인한다.</a:t>
             </a:r>
           </a:p>
           <a:p>
@@ -3821,7 +3822,7 @@
           </a:p>
           <a:p>
             <a:r>
-              <a:t>[오류] 슬라이드의 두 대표 오류를 먼저 사용한다.</a:t>
+              <a:t>[오류] 오류가 나면 현재 폴더, source, 파일 경로를 먼저 확인한다.</a:t>
             </a:r>
           </a:p>
         </p:txBody>
@@ -3891,7 +3892,7 @@
           <a:lstStyle/>
           <a:p>
             <a:r>
-              <a:t>[설명] 교육생이 직접 한 값만 바꿔 원인과 결과를 연결하게 한다.</a:t>
+              <a:t>[설명] 오류를 대신 해결하지 말고 증상부터 우선 확인 순서대로 교육생이 실행하게 한다.</a:t>
             </a:r>
           </a:p>
           <a:p>
@@ -3901,7 +3902,7 @@
           </a:p>
           <a:p>
             <a:r>
-              <a:t>[확인] 원래 값과 변경 값을 모두 기록한다.</a:t>
+              <a:t>[확인] 수정 뒤 첫 검증 명령을 다시 실행한다.</a:t>
             </a:r>
           </a:p>
           <a:p>
@@ -3911,7 +3912,7 @@
           </a:p>
           <a:p>
             <a:r>
-              <a:t>[오류] 오류가 나면 현재 폴더, source, 파일 경로를 먼저 확인한다.</a:t>
+              <a:t>[오류] 슬라이드의 두 대표 오류를 먼저 사용한다.</a:t>
             </a:r>
           </a:p>
         </p:txBody>
@@ -3981,7 +3982,7 @@
           <a:lstStyle/>
           <a:p>
             <a:r>
-              <a:t>[설명] 교육생이 Complete·캡처·로그를 저장했는지 확인하고 다음 모듈의 시작 상태를 읽는다.</a:t>
+              <a:t>[설명] 교육생이 직접 한 값만 바꿔 원인과 결과를 연결하게 한다.</a:t>
             </a:r>
           </a:p>
           <a:p>
@@ -3991,7 +3992,7 @@
           </a:p>
           <a:p>
             <a:r>
-              <a:t>[확인] M15 운영/QoS 시작 조건을 말할 수 있다.</a:t>
+              <a:t>[확인] 원래 값과 변경 값을 모두 기록한다.</a:t>
             </a:r>
           </a:p>
           <a:p>
@@ -4071,6 +4072,96 @@
           <a:lstStyle/>
           <a:p>
             <a:r>
+              <a:t>[설명] 교육생이 Complete·캡처·로그를 저장했는지 확인하고 다음 모듈의 시작 상태를 읽는다.</a:t>
+            </a:r>
+          </a:p>
+          <a:p>
+            <a:r>
+              <a:t>[실행] 슬라이드의 명령 또는 파일 작성 단계를 진행한다.</a:t>
+            </a:r>
+          </a:p>
+          <a:p>
+            <a:r>
+              <a:t>[확인] M15 운영/QoS 시작 조건을 말할 수 있다.</a:t>
+            </a:r>
+          </a:p>
+          <a:p>
+            <a:r>
+              <a:t>[멈춤] 교육생이 현재 체크포인트를 통과할 때까지 기다린다.</a:t>
+            </a:r>
+          </a:p>
+          <a:p>
+            <a:r>
+              <a:t>[오류] 오류가 나면 현재 폴더, source, 파일 경로를 먼저 확인한다.</a:t>
+            </a:r>
+          </a:p>
+        </p:txBody>
+      </p:sp>
+      <p:sp>
+        <p:nvSpPr>
+          <p:cNvPr id="4" name="Slide Number Placeholder 3"/>
+          <p:cNvSpPr>
+            <a:spLocks noGrp="1"/>
+          </p:cNvSpPr>
+          <p:nvPr>
+            <p:ph type="sldNum" idx="5" sz="quarter"/>
+          </p:nvPr>
+        </p:nvSpPr>
+        <p:spPr/>
+      </p:sp>
+    </p:spTree>
+  </p:cSld>
+  <p:clrMapOvr>
+    <a:masterClrMapping/>
+  </p:clrMapOvr>
+</p:notes>
+</file>
+
+<file path=ppt/notesSlides/notesSlide46.xml><?xml version="1.0" encoding="utf-8"?>
+<p:notes xmlns:a="http://schemas.openxmlformats.org/drawingml/2006/main" xmlns:p="http://schemas.openxmlformats.org/presentationml/2006/main" xmlns:r="http://schemas.openxmlformats.org/officeDocument/2006/relationships">
+  <p:cSld>
+    <p:spTree>
+      <p:nvGrpSpPr>
+        <p:cNvPr id="1" name=""/>
+        <p:cNvGrpSpPr/>
+        <p:nvPr/>
+      </p:nvGrpSpPr>
+      <p:grpSpPr>
+        <a:xfrm>
+          <a:off x="0" y="0"/>
+          <a:ext cx="0" cy="0"/>
+          <a:chOff x="0" y="0"/>
+          <a:chExt cx="0" cy="0"/>
+        </a:xfrm>
+      </p:grpSpPr>
+      <p:sp>
+        <p:nvSpPr>
+          <p:cNvPr id="2" name="Slide Image Placeholder 1"/>
+          <p:cNvSpPr>
+            <a:spLocks noGrp="1"/>
+          </p:cNvSpPr>
+          <p:nvPr>
+            <p:ph type="sldImg" idx="2"/>
+          </p:nvPr>
+        </p:nvSpPr>
+        <p:spPr/>
+      </p:sp>
+      <p:sp>
+        <p:nvSpPr>
+          <p:cNvPr id="3" name="Notes Placeholder 2"/>
+          <p:cNvSpPr>
+            <a:spLocks noGrp="1"/>
+          </p:cNvSpPr>
+          <p:nvPr>
+            <p:ph type="body" idx="3" sz="quarter"/>
+          </p:nvPr>
+        </p:nvSpPr>
+        <p:spPr/>
+        <p:txBody>
+          <a:bodyPr/>
+          <a:lstStyle/>
+          <a:p>
+            <a:r>
               <a:t>[설명] 공식 문서는 버전 차이와 확장 학습을 확인할 때 사용한다.</a:t>
             </a:r>
           </a:p>
@@ -4441,7 +4532,7 @@
           </a:p>
           <a:p>
             <a:r>
-              <a:t>[실행] source ~/agv_ws/install/setup.bash</a:t>
+              <a:t>[실행] source ~/ros2_curri/agv_ws/install/setup.bash</a:t>
             </a:r>
           </a:p>
           <a:p>
@@ -4531,12 +4622,12 @@
           <a:lstStyle/>
           <a:p>
             <a:r>
-              <a:t>[설명] ~/agv_ws/src/agv_gazebo/models/agv/model.sdf의 전체 파일을 1/24 구간으로 작성한다.</a:t>
-            </a:r>
-          </a:p>
-          <a:p>
-            <a:r>
-              <a:t>[실행] nano ~/agv_ws/src/agv_gazebo/models/agv/model.sdf</a:t>
+              <a:t>[설명] ~/ros2_curri/agv_ws/src/agv_gazebo/models/agv/model.sdf의 전체 파일을 1/24 구간으로 작성한다.</a:t>
+            </a:r>
+          </a:p>
+          <a:p>
+            <a:r>
+              <a:t>[실행] nano ~/ros2_curri/agv_ws/src/agv_gazebo/models/agv/model.sdf</a:t>
             </a:r>
           </a:p>
           <a:p>
@@ -7963,7 +8054,7 @@
               </a:defRPr>
             </a:pPr>
             <a:r>
-              <a:t>~/agv_ws/src/agv_gazebo/models/agv/model.sdf</a:t>
+              <a:t>~/ros2_curri/agv_ws/src/agv_gazebo/models/agv/model.sdf</a:t>
             </a:r>
           </a:p>
         </p:txBody>
@@ -8099,7 +8190,7 @@
               </a:defRPr>
             </a:pPr>
             <a:r>
-              <a:t>현재 단계 4/27    |    현재 폴더 ~/agv_ws    |    현재 터미널</a:t>
+              <a:t>현재 단계 4/27    |    현재 폴더 ~/ros2_curri/agv_ws    |    현재 터미널</a:t>
             </a:r>
           </a:p>
         </p:txBody>
@@ -8196,11 +8287,11 @@
               </a:defRPr>
             </a:pPr>
             <a:r>
-              <a:t>파일 생성: mkdir -p ~/agv_ws/src/agv_gazebo/models/agv</a:t>
-            </a:r>
-            <a:br/>
-            <a:r>
-              <a:t>파일 열기: nano ~/agv_ws/src/agv_gazebo/models/agv/model.sdf</a:t>
+              <a:t>파일 생성: mkdir -p ~/ros2_curri/agv_ws/src/agv_gazebo/models/agv</a:t>
+            </a:r>
+            <a:br/>
+            <a:r>
+              <a:t>파일 열기: nano ~/ros2_curri/agv_ws/src/agv_gazebo/models/agv/model.sdf</a:t>
             </a:r>
           </a:p>
         </p:txBody>
@@ -8437,7 +8528,7 @@
               </a:defRPr>
             </a:pPr>
             <a:r>
-              <a:t>~/agv_ws/src/agv_gazebo/models/agv/model.sdf</a:t>
+              <a:t>~/ros2_curri/agv_ws/src/agv_gazebo/models/agv/model.sdf</a:t>
             </a:r>
           </a:p>
         </p:txBody>
@@ -8573,7 +8664,7 @@
               </a:defRPr>
             </a:pPr>
             <a:r>
-              <a:t>현재 단계 5/27    |    현재 폴더 ~/agv_ws    |    현재 터미널</a:t>
+              <a:t>현재 단계 5/27    |    현재 폴더 ~/ros2_curri/agv_ws    |    현재 터미널</a:t>
             </a:r>
           </a:p>
         </p:txBody>
@@ -8670,11 +8761,11 @@
               </a:defRPr>
             </a:pPr>
             <a:r>
-              <a:t>파일 생성: mkdir -p ~/agv_ws/src/agv_gazebo/models/agv</a:t>
-            </a:r>
-            <a:br/>
-            <a:r>
-              <a:t>파일 열기: nano ~/agv_ws/src/agv_gazebo/models/agv/model.sdf</a:t>
+              <a:t>파일 생성: mkdir -p ~/ros2_curri/agv_ws/src/agv_gazebo/models/agv</a:t>
+            </a:r>
+            <a:br/>
+            <a:r>
+              <a:t>파일 열기: nano ~/ros2_curri/agv_ws/src/agv_gazebo/models/agv/model.sdf</a:t>
             </a:r>
           </a:p>
         </p:txBody>
@@ -8911,7 +9002,7 @@
               </a:defRPr>
             </a:pPr>
             <a:r>
-              <a:t>~/agv_ws/src/agv_gazebo/models/agv/model.sdf</a:t>
+              <a:t>~/ros2_curri/agv_ws/src/agv_gazebo/models/agv/model.sdf</a:t>
             </a:r>
           </a:p>
         </p:txBody>
@@ -9047,7 +9138,7 @@
               </a:defRPr>
             </a:pPr>
             <a:r>
-              <a:t>현재 단계 6/27    |    현재 폴더 ~/agv_ws    |    현재 터미널</a:t>
+              <a:t>현재 단계 6/27    |    현재 폴더 ~/ros2_curri/agv_ws    |    현재 터미널</a:t>
             </a:r>
           </a:p>
         </p:txBody>
@@ -9144,11 +9235,11 @@
               </a:defRPr>
             </a:pPr>
             <a:r>
-              <a:t>파일 생성: mkdir -p ~/agv_ws/src/agv_gazebo/models/agv</a:t>
-            </a:r>
-            <a:br/>
-            <a:r>
-              <a:t>파일 열기: nano ~/agv_ws/src/agv_gazebo/models/agv/model.sdf</a:t>
+              <a:t>파일 생성: mkdir -p ~/ros2_curri/agv_ws/src/agv_gazebo/models/agv</a:t>
+            </a:r>
+            <a:br/>
+            <a:r>
+              <a:t>파일 열기: nano ~/ros2_curri/agv_ws/src/agv_gazebo/models/agv/model.sdf</a:t>
             </a:r>
           </a:p>
         </p:txBody>
@@ -9385,7 +9476,7 @@
               </a:defRPr>
             </a:pPr>
             <a:r>
-              <a:t>~/agv_ws/src/agv_gazebo/models/agv/model.sdf</a:t>
+              <a:t>~/ros2_curri/agv_ws/src/agv_gazebo/models/agv/model.sdf</a:t>
             </a:r>
           </a:p>
         </p:txBody>
@@ -9521,7 +9612,7 @@
               </a:defRPr>
             </a:pPr>
             <a:r>
-              <a:t>현재 단계 7/27    |    현재 폴더 ~/agv_ws    |    현재 터미널</a:t>
+              <a:t>현재 단계 7/27    |    현재 폴더 ~/ros2_curri/agv_ws    |    현재 터미널</a:t>
             </a:r>
           </a:p>
         </p:txBody>
@@ -9618,11 +9709,11 @@
               </a:defRPr>
             </a:pPr>
             <a:r>
-              <a:t>파일 생성: mkdir -p ~/agv_ws/src/agv_gazebo/models/agv</a:t>
-            </a:r>
-            <a:br/>
-            <a:r>
-              <a:t>파일 열기: nano ~/agv_ws/src/agv_gazebo/models/agv/model.sdf</a:t>
+              <a:t>파일 생성: mkdir -p ~/ros2_curri/agv_ws/src/agv_gazebo/models/agv</a:t>
+            </a:r>
+            <a:br/>
+            <a:r>
+              <a:t>파일 열기: nano ~/ros2_curri/agv_ws/src/agv_gazebo/models/agv/model.sdf</a:t>
             </a:r>
           </a:p>
         </p:txBody>
@@ -9859,7 +9950,7 @@
               </a:defRPr>
             </a:pPr>
             <a:r>
-              <a:t>~/agv_ws/src/agv_gazebo/models/agv/model.sdf</a:t>
+              <a:t>~/ros2_curri/agv_ws/src/agv_gazebo/models/agv/model.sdf</a:t>
             </a:r>
           </a:p>
         </p:txBody>
@@ -9995,7 +10086,7 @@
               </a:defRPr>
             </a:pPr>
             <a:r>
-              <a:t>현재 단계 8/27    |    현재 폴더 ~/agv_ws    |    현재 터미널</a:t>
+              <a:t>현재 단계 8/27    |    현재 폴더 ~/ros2_curri/agv_ws    |    현재 터미널</a:t>
             </a:r>
           </a:p>
         </p:txBody>
@@ -10092,11 +10183,11 @@
               </a:defRPr>
             </a:pPr>
             <a:r>
-              <a:t>파일 생성: mkdir -p ~/agv_ws/src/agv_gazebo/models/agv</a:t>
-            </a:r>
-            <a:br/>
-            <a:r>
-              <a:t>파일 열기: nano ~/agv_ws/src/agv_gazebo/models/agv/model.sdf</a:t>
+              <a:t>파일 생성: mkdir -p ~/ros2_curri/agv_ws/src/agv_gazebo/models/agv</a:t>
+            </a:r>
+            <a:br/>
+            <a:r>
+              <a:t>파일 열기: nano ~/ros2_curri/agv_ws/src/agv_gazebo/models/agv/model.sdf</a:t>
             </a:r>
           </a:p>
         </p:txBody>
@@ -10333,7 +10424,7 @@
               </a:defRPr>
             </a:pPr>
             <a:r>
-              <a:t>~/agv_ws/src/agv_gazebo/models/agv/model.sdf</a:t>
+              <a:t>~/ros2_curri/agv_ws/src/agv_gazebo/models/agv/model.sdf</a:t>
             </a:r>
           </a:p>
         </p:txBody>
@@ -10469,7 +10560,7 @@
               </a:defRPr>
             </a:pPr>
             <a:r>
-              <a:t>현재 단계 9/27    |    현재 폴더 ~/agv_ws    |    현재 터미널</a:t>
+              <a:t>현재 단계 9/27    |    현재 폴더 ~/ros2_curri/agv_ws    |    현재 터미널</a:t>
             </a:r>
           </a:p>
         </p:txBody>
@@ -10566,11 +10657,11 @@
               </a:defRPr>
             </a:pPr>
             <a:r>
-              <a:t>파일 생성: mkdir -p ~/agv_ws/src/agv_gazebo/models/agv</a:t>
-            </a:r>
-            <a:br/>
-            <a:r>
-              <a:t>파일 열기: nano ~/agv_ws/src/agv_gazebo/models/agv/model.sdf</a:t>
+              <a:t>파일 생성: mkdir -p ~/ros2_curri/agv_ws/src/agv_gazebo/models/agv</a:t>
+            </a:r>
+            <a:br/>
+            <a:r>
+              <a:t>파일 열기: nano ~/ros2_curri/agv_ws/src/agv_gazebo/models/agv/model.sdf</a:t>
             </a:r>
           </a:p>
         </p:txBody>
@@ -10807,7 +10898,7 @@
               </a:defRPr>
             </a:pPr>
             <a:r>
-              <a:t>~/agv_ws/src/agv_gazebo/models/agv/model.sdf</a:t>
+              <a:t>~/ros2_curri/agv_ws/src/agv_gazebo/models/agv/model.sdf</a:t>
             </a:r>
           </a:p>
         </p:txBody>
@@ -10943,7 +11034,7 @@
               </a:defRPr>
             </a:pPr>
             <a:r>
-              <a:t>현재 단계 10/27    |    현재 폴더 ~/agv_ws    |    현재 터미널</a:t>
+              <a:t>현재 단계 10/27    |    현재 폴더 ~/ros2_curri/agv_ws    |    현재 터미널</a:t>
             </a:r>
           </a:p>
         </p:txBody>
@@ -11040,11 +11131,11 @@
               </a:defRPr>
             </a:pPr>
             <a:r>
-              <a:t>파일 생성: mkdir -p ~/agv_ws/src/agv_gazebo/models/agv</a:t>
-            </a:r>
-            <a:br/>
-            <a:r>
-              <a:t>파일 열기: nano ~/agv_ws/src/agv_gazebo/models/agv/model.sdf</a:t>
+              <a:t>파일 생성: mkdir -p ~/ros2_curri/agv_ws/src/agv_gazebo/models/agv</a:t>
+            </a:r>
+            <a:br/>
+            <a:r>
+              <a:t>파일 열기: nano ~/ros2_curri/agv_ws/src/agv_gazebo/models/agv/model.sdf</a:t>
             </a:r>
           </a:p>
         </p:txBody>
@@ -11281,7 +11372,7 @@
               </a:defRPr>
             </a:pPr>
             <a:r>
-              <a:t>~/agv_ws/src/agv_gazebo/models/agv/model.sdf</a:t>
+              <a:t>~/ros2_curri/agv_ws/src/agv_gazebo/models/agv/model.sdf</a:t>
             </a:r>
           </a:p>
         </p:txBody>
@@ -11417,7 +11508,7 @@
               </a:defRPr>
             </a:pPr>
             <a:r>
-              <a:t>현재 단계 11/27    |    현재 폴더 ~/agv_ws    |    현재 터미널</a:t>
+              <a:t>현재 단계 11/27    |    현재 폴더 ~/ros2_curri/agv_ws    |    현재 터미널</a:t>
             </a:r>
           </a:p>
         </p:txBody>
@@ -11514,11 +11605,11 @@
               </a:defRPr>
             </a:pPr>
             <a:r>
-              <a:t>파일 생성: mkdir -p ~/agv_ws/src/agv_gazebo/models/agv</a:t>
-            </a:r>
-            <a:br/>
-            <a:r>
-              <a:t>파일 열기: nano ~/agv_ws/src/agv_gazebo/models/agv/model.sdf</a:t>
+              <a:t>파일 생성: mkdir -p ~/ros2_curri/agv_ws/src/agv_gazebo/models/agv</a:t>
+            </a:r>
+            <a:br/>
+            <a:r>
+              <a:t>파일 열기: nano ~/ros2_curri/agv_ws/src/agv_gazebo/models/agv/model.sdf</a:t>
             </a:r>
           </a:p>
         </p:txBody>
@@ -11755,7 +11846,7 @@
               </a:defRPr>
             </a:pPr>
             <a:r>
-              <a:t>~/agv_ws/src/agv_gazebo/models/agv/model.sdf</a:t>
+              <a:t>~/ros2_curri/agv_ws/src/agv_gazebo/models/agv/model.sdf</a:t>
             </a:r>
           </a:p>
         </p:txBody>
@@ -11891,7 +11982,7 @@
               </a:defRPr>
             </a:pPr>
             <a:r>
-              <a:t>현재 단계 12/27    |    현재 폴더 ~/agv_ws    |    현재 터미널</a:t>
+              <a:t>현재 단계 12/27    |    현재 폴더 ~/ros2_curri/agv_ws    |    현재 터미널</a:t>
             </a:r>
           </a:p>
         </p:txBody>
@@ -11988,11 +12079,11 @@
               </a:defRPr>
             </a:pPr>
             <a:r>
-              <a:t>파일 생성: mkdir -p ~/agv_ws/src/agv_gazebo/models/agv</a:t>
-            </a:r>
-            <a:br/>
-            <a:r>
-              <a:t>파일 열기: nano ~/agv_ws/src/agv_gazebo/models/agv/model.sdf</a:t>
+              <a:t>파일 생성: mkdir -p ~/ros2_curri/agv_ws/src/agv_gazebo/models/agv</a:t>
+            </a:r>
+            <a:br/>
+            <a:r>
+              <a:t>파일 열기: nano ~/ros2_curri/agv_ws/src/agv_gazebo/models/agv/model.sdf</a:t>
             </a:r>
           </a:p>
         </p:txBody>
@@ -12229,7 +12320,7 @@
               </a:defRPr>
             </a:pPr>
             <a:r>
-              <a:t>~/agv_ws/src/agv_gazebo/models/agv/model.sdf</a:t>
+              <a:t>~/ros2_curri/agv_ws/src/agv_gazebo/models/agv/model.sdf</a:t>
             </a:r>
           </a:p>
         </p:txBody>
@@ -12365,7 +12456,7 @@
               </a:defRPr>
             </a:pPr>
             <a:r>
-              <a:t>현재 단계 13/27    |    현재 폴더 ~/agv_ws    |    현재 터미널</a:t>
+              <a:t>현재 단계 13/27    |    현재 폴더 ~/ros2_curri/agv_ws    |    현재 터미널</a:t>
             </a:r>
           </a:p>
         </p:txBody>
@@ -12462,11 +12553,11 @@
               </a:defRPr>
             </a:pPr>
             <a:r>
-              <a:t>파일 생성: mkdir -p ~/agv_ws/src/agv_gazebo/models/agv</a:t>
-            </a:r>
-            <a:br/>
-            <a:r>
-              <a:t>파일 열기: nano ~/agv_ws/src/agv_gazebo/models/agv/model.sdf</a:t>
+              <a:t>파일 생성: mkdir -p ~/ros2_curri/agv_ws/src/agv_gazebo/models/agv</a:t>
+            </a:r>
+            <a:br/>
+            <a:r>
+              <a:t>파일 열기: nano ~/ros2_curri/agv_ws/src/agv_gazebo/models/agv/model.sdf</a:t>
             </a:r>
           </a:p>
         </p:txBody>
@@ -13164,7 +13255,7 @@
               </a:defRPr>
             </a:pPr>
             <a:r>
-              <a:t>~/agv_ws/src/agv_gazebo/models/agv/model.sdf</a:t>
+              <a:t>~/ros2_curri/agv_ws/src/agv_gazebo/models/agv/model.sdf</a:t>
             </a:r>
           </a:p>
         </p:txBody>
@@ -13300,7 +13391,7 @@
               </a:defRPr>
             </a:pPr>
             <a:r>
-              <a:t>현재 단계 14/27    |    현재 폴더 ~/agv_ws    |    현재 터미널</a:t>
+              <a:t>현재 단계 14/27    |    현재 폴더 ~/ros2_curri/agv_ws    |    현재 터미널</a:t>
             </a:r>
           </a:p>
         </p:txBody>
@@ -13397,11 +13488,11 @@
               </a:defRPr>
             </a:pPr>
             <a:r>
-              <a:t>파일 생성: mkdir -p ~/agv_ws/src/agv_gazebo/models/agv</a:t>
-            </a:r>
-            <a:br/>
-            <a:r>
-              <a:t>파일 열기: nano ~/agv_ws/src/agv_gazebo/models/agv/model.sdf</a:t>
+              <a:t>파일 생성: mkdir -p ~/ros2_curri/agv_ws/src/agv_gazebo/models/agv</a:t>
+            </a:r>
+            <a:br/>
+            <a:r>
+              <a:t>파일 열기: nano ~/ros2_curri/agv_ws/src/agv_gazebo/models/agv/model.sdf</a:t>
             </a:r>
           </a:p>
         </p:txBody>
@@ -13638,7 +13729,7 @@
               </a:defRPr>
             </a:pPr>
             <a:r>
-              <a:t>~/agv_ws/src/agv_gazebo/models/agv/model.sdf</a:t>
+              <a:t>~/ros2_curri/agv_ws/src/agv_gazebo/models/agv/model.sdf</a:t>
             </a:r>
           </a:p>
         </p:txBody>
@@ -13774,7 +13865,7 @@
               </a:defRPr>
             </a:pPr>
             <a:r>
-              <a:t>현재 단계 15/27    |    현재 폴더 ~/agv_ws    |    현재 터미널</a:t>
+              <a:t>현재 단계 15/27    |    현재 폴더 ~/ros2_curri/agv_ws    |    현재 터미널</a:t>
             </a:r>
           </a:p>
         </p:txBody>
@@ -13871,11 +13962,11 @@
               </a:defRPr>
             </a:pPr>
             <a:r>
-              <a:t>파일 생성: mkdir -p ~/agv_ws/src/agv_gazebo/models/agv</a:t>
-            </a:r>
-            <a:br/>
-            <a:r>
-              <a:t>파일 열기: nano ~/agv_ws/src/agv_gazebo/models/agv/model.sdf</a:t>
+              <a:t>파일 생성: mkdir -p ~/ros2_curri/agv_ws/src/agv_gazebo/models/agv</a:t>
+            </a:r>
+            <a:br/>
+            <a:r>
+              <a:t>파일 열기: nano ~/ros2_curri/agv_ws/src/agv_gazebo/models/agv/model.sdf</a:t>
             </a:r>
           </a:p>
         </p:txBody>
@@ -14112,7 +14203,7 @@
               </a:defRPr>
             </a:pPr>
             <a:r>
-              <a:t>~/agv_ws/src/agv_gazebo/models/agv/model.sdf</a:t>
+              <a:t>~/ros2_curri/agv_ws/src/agv_gazebo/models/agv/model.sdf</a:t>
             </a:r>
           </a:p>
         </p:txBody>
@@ -14248,7 +14339,7 @@
               </a:defRPr>
             </a:pPr>
             <a:r>
-              <a:t>현재 단계 16/27    |    현재 폴더 ~/agv_ws    |    현재 터미널</a:t>
+              <a:t>현재 단계 16/27    |    현재 폴더 ~/ros2_curri/agv_ws    |    현재 터미널</a:t>
             </a:r>
           </a:p>
         </p:txBody>
@@ -14345,11 +14436,11 @@
               </a:defRPr>
             </a:pPr>
             <a:r>
-              <a:t>파일 생성: mkdir -p ~/agv_ws/src/agv_gazebo/models/agv</a:t>
-            </a:r>
-            <a:br/>
-            <a:r>
-              <a:t>파일 열기: nano ~/agv_ws/src/agv_gazebo/models/agv/model.sdf</a:t>
+              <a:t>파일 생성: mkdir -p ~/ros2_curri/agv_ws/src/agv_gazebo/models/agv</a:t>
+            </a:r>
+            <a:br/>
+            <a:r>
+              <a:t>파일 열기: nano ~/ros2_curri/agv_ws/src/agv_gazebo/models/agv/model.sdf</a:t>
             </a:r>
           </a:p>
         </p:txBody>
@@ -14586,7 +14677,7 @@
               </a:defRPr>
             </a:pPr>
             <a:r>
-              <a:t>~/agv_ws/src/agv_gazebo/models/agv/model.sdf</a:t>
+              <a:t>~/ros2_curri/agv_ws/src/agv_gazebo/models/agv/model.sdf</a:t>
             </a:r>
           </a:p>
         </p:txBody>
@@ -14722,7 +14813,7 @@
               </a:defRPr>
             </a:pPr>
             <a:r>
-              <a:t>현재 단계 17/27    |    현재 폴더 ~/agv_ws    |    현재 터미널</a:t>
+              <a:t>현재 단계 17/27    |    현재 폴더 ~/ros2_curri/agv_ws    |    현재 터미널</a:t>
             </a:r>
           </a:p>
         </p:txBody>
@@ -14819,11 +14910,11 @@
               </a:defRPr>
             </a:pPr>
             <a:r>
-              <a:t>파일 생성: mkdir -p ~/agv_ws/src/agv_gazebo/models/agv</a:t>
-            </a:r>
-            <a:br/>
-            <a:r>
-              <a:t>파일 열기: nano ~/agv_ws/src/agv_gazebo/models/agv/model.sdf</a:t>
+              <a:t>파일 생성: mkdir -p ~/ros2_curri/agv_ws/src/agv_gazebo/models/agv</a:t>
+            </a:r>
+            <a:br/>
+            <a:r>
+              <a:t>파일 열기: nano ~/ros2_curri/agv_ws/src/agv_gazebo/models/agv/model.sdf</a:t>
             </a:r>
           </a:p>
         </p:txBody>
@@ -15060,7 +15151,7 @@
               </a:defRPr>
             </a:pPr>
             <a:r>
-              <a:t>~/agv_ws/src/agv_gazebo/models/agv/model.sdf</a:t>
+              <a:t>~/ros2_curri/agv_ws/src/agv_gazebo/models/agv/model.sdf</a:t>
             </a:r>
           </a:p>
         </p:txBody>
@@ -15196,7 +15287,7 @@
               </a:defRPr>
             </a:pPr>
             <a:r>
-              <a:t>현재 단계 18/27    |    현재 폴더 ~/agv_ws    |    현재 터미널</a:t>
+              <a:t>현재 단계 18/27    |    현재 폴더 ~/ros2_curri/agv_ws    |    현재 터미널</a:t>
             </a:r>
           </a:p>
         </p:txBody>
@@ -15293,11 +15384,11 @@
               </a:defRPr>
             </a:pPr>
             <a:r>
-              <a:t>파일 생성: mkdir -p ~/agv_ws/src/agv_gazebo/models/agv</a:t>
-            </a:r>
-            <a:br/>
-            <a:r>
-              <a:t>파일 열기: nano ~/agv_ws/src/agv_gazebo/models/agv/model.sdf</a:t>
+              <a:t>파일 생성: mkdir -p ~/ros2_curri/agv_ws/src/agv_gazebo/models/agv</a:t>
+            </a:r>
+            <a:br/>
+            <a:r>
+              <a:t>파일 열기: nano ~/ros2_curri/agv_ws/src/agv_gazebo/models/agv/model.sdf</a:t>
             </a:r>
           </a:p>
         </p:txBody>
@@ -15534,7 +15625,7 @@
               </a:defRPr>
             </a:pPr>
             <a:r>
-              <a:t>~/agv_ws/src/agv_gazebo/models/agv/model.sdf</a:t>
+              <a:t>~/ros2_curri/agv_ws/src/agv_gazebo/models/agv/model.sdf</a:t>
             </a:r>
           </a:p>
         </p:txBody>
@@ -15670,7 +15761,7 @@
               </a:defRPr>
             </a:pPr>
             <a:r>
-              <a:t>현재 단계 19/27    |    현재 폴더 ~/agv_ws    |    현재 터미널</a:t>
+              <a:t>현재 단계 19/27    |    현재 폴더 ~/ros2_curri/agv_ws    |    현재 터미널</a:t>
             </a:r>
           </a:p>
         </p:txBody>
@@ -15767,11 +15858,11 @@
               </a:defRPr>
             </a:pPr>
             <a:r>
-              <a:t>파일 생성: mkdir -p ~/agv_ws/src/agv_gazebo/models/agv</a:t>
-            </a:r>
-            <a:br/>
-            <a:r>
-              <a:t>파일 열기: nano ~/agv_ws/src/agv_gazebo/models/agv/model.sdf</a:t>
+              <a:t>파일 생성: mkdir -p ~/ros2_curri/agv_ws/src/agv_gazebo/models/agv</a:t>
+            </a:r>
+            <a:br/>
+            <a:r>
+              <a:t>파일 열기: nano ~/ros2_curri/agv_ws/src/agv_gazebo/models/agv/model.sdf</a:t>
             </a:r>
           </a:p>
         </p:txBody>
@@ -16008,7 +16099,7 @@
               </a:defRPr>
             </a:pPr>
             <a:r>
-              <a:t>~/agv_ws/src/agv_gazebo/models/agv/model.sdf</a:t>
+              <a:t>~/ros2_curri/agv_ws/src/agv_gazebo/models/agv/model.sdf</a:t>
             </a:r>
           </a:p>
         </p:txBody>
@@ -16144,7 +16235,7 @@
               </a:defRPr>
             </a:pPr>
             <a:r>
-              <a:t>현재 단계 20/27    |    현재 폴더 ~/agv_ws    |    현재 터미널</a:t>
+              <a:t>현재 단계 20/27    |    현재 폴더 ~/ros2_curri/agv_ws    |    현재 터미널</a:t>
             </a:r>
           </a:p>
         </p:txBody>
@@ -16241,11 +16332,11 @@
               </a:defRPr>
             </a:pPr>
             <a:r>
-              <a:t>파일 생성: mkdir -p ~/agv_ws/src/agv_gazebo/models/agv</a:t>
-            </a:r>
-            <a:br/>
-            <a:r>
-              <a:t>파일 열기: nano ~/agv_ws/src/agv_gazebo/models/agv/model.sdf</a:t>
+              <a:t>파일 생성: mkdir -p ~/ros2_curri/agv_ws/src/agv_gazebo/models/agv</a:t>
+            </a:r>
+            <a:br/>
+            <a:r>
+              <a:t>파일 열기: nano ~/ros2_curri/agv_ws/src/agv_gazebo/models/agv/model.sdf</a:t>
             </a:r>
           </a:p>
         </p:txBody>
@@ -16482,7 +16573,7 @@
               </a:defRPr>
             </a:pPr>
             <a:r>
-              <a:t>~/agv_ws/src/agv_gazebo/models/agv/model.sdf</a:t>
+              <a:t>~/ros2_curri/agv_ws/src/agv_gazebo/models/agv/model.sdf</a:t>
             </a:r>
           </a:p>
         </p:txBody>
@@ -16618,7 +16709,7 @@
               </a:defRPr>
             </a:pPr>
             <a:r>
-              <a:t>현재 단계 21/27    |    현재 폴더 ~/agv_ws    |    현재 터미널</a:t>
+              <a:t>현재 단계 21/27    |    현재 폴더 ~/ros2_curri/agv_ws    |    현재 터미널</a:t>
             </a:r>
           </a:p>
         </p:txBody>
@@ -16715,11 +16806,11 @@
               </a:defRPr>
             </a:pPr>
             <a:r>
-              <a:t>파일 생성: mkdir -p ~/agv_ws/src/agv_gazebo/models/agv</a:t>
-            </a:r>
-            <a:br/>
-            <a:r>
-              <a:t>파일 열기: nano ~/agv_ws/src/agv_gazebo/models/agv/model.sdf</a:t>
+              <a:t>파일 생성: mkdir -p ~/ros2_curri/agv_ws/src/agv_gazebo/models/agv</a:t>
+            </a:r>
+            <a:br/>
+            <a:r>
+              <a:t>파일 열기: nano ~/ros2_curri/agv_ws/src/agv_gazebo/models/agv/model.sdf</a:t>
             </a:r>
           </a:p>
         </p:txBody>
@@ -16956,7 +17047,7 @@
               </a:defRPr>
             </a:pPr>
             <a:r>
-              <a:t>~/agv_ws/src/agv_gazebo/models/agv/model.sdf</a:t>
+              <a:t>~/ros2_curri/agv_ws/src/agv_gazebo/models/agv/model.sdf</a:t>
             </a:r>
           </a:p>
         </p:txBody>
@@ -17092,7 +17183,7 @@
               </a:defRPr>
             </a:pPr>
             <a:r>
-              <a:t>현재 단계 22/27    |    현재 폴더 ~/agv_ws    |    현재 터미널</a:t>
+              <a:t>현재 단계 22/27    |    현재 폴더 ~/ros2_curri/agv_ws    |    현재 터미널</a:t>
             </a:r>
           </a:p>
         </p:txBody>
@@ -17189,11 +17280,11 @@
               </a:defRPr>
             </a:pPr>
             <a:r>
-              <a:t>파일 생성: mkdir -p ~/agv_ws/src/agv_gazebo/models/agv</a:t>
-            </a:r>
-            <a:br/>
-            <a:r>
-              <a:t>파일 열기: nano ~/agv_ws/src/agv_gazebo/models/agv/model.sdf</a:t>
+              <a:t>파일 생성: mkdir -p ~/ros2_curri/agv_ws/src/agv_gazebo/models/agv</a:t>
+            </a:r>
+            <a:br/>
+            <a:r>
+              <a:t>파일 열기: nano ~/ros2_curri/agv_ws/src/agv_gazebo/models/agv/model.sdf</a:t>
             </a:r>
           </a:p>
         </p:txBody>
@@ -17430,7 +17521,7 @@
               </a:defRPr>
             </a:pPr>
             <a:r>
-              <a:t>~/agv_ws/src/agv_gazebo/models/agv/model.sdf</a:t>
+              <a:t>~/ros2_curri/agv_ws/src/agv_gazebo/models/agv/model.sdf</a:t>
             </a:r>
           </a:p>
         </p:txBody>
@@ -17566,7 +17657,7 @@
               </a:defRPr>
             </a:pPr>
             <a:r>
-              <a:t>현재 단계 23/27    |    현재 폴더 ~/agv_ws    |    현재 터미널</a:t>
+              <a:t>현재 단계 23/27    |    현재 폴더 ~/ros2_curri/agv_ws    |    현재 터미널</a:t>
             </a:r>
           </a:p>
         </p:txBody>
@@ -17663,11 +17754,11 @@
               </a:defRPr>
             </a:pPr>
             <a:r>
-              <a:t>파일 생성: mkdir -p ~/agv_ws/src/agv_gazebo/models/agv</a:t>
-            </a:r>
-            <a:br/>
-            <a:r>
-              <a:t>파일 열기: nano ~/agv_ws/src/agv_gazebo/models/agv/model.sdf</a:t>
+              <a:t>파일 생성: mkdir -p ~/ros2_curri/agv_ws/src/agv_gazebo/models/agv</a:t>
+            </a:r>
+            <a:br/>
+            <a:r>
+              <a:t>파일 열기: nano ~/ros2_curri/agv_ws/src/agv_gazebo/models/agv/model.sdf</a:t>
             </a:r>
           </a:p>
         </p:txBody>
@@ -18040,7 +18131,7 @@
               </a:defRPr>
             </a:pPr>
             <a:r>
-              <a:t>현재 단계 시작    |    현재 폴더 ~/agv_ws    |    현재 터미널</a:t>
+              <a:t>현재 단계 시작    |    현재 폴더 ~/ros2_curri/agv_ws    |    현재 터미널</a:t>
             </a:r>
           </a:p>
         </p:txBody>
@@ -18156,7 +18247,7 @@
               </a:defRPr>
             </a:pPr>
             <a:r>
-              <a:t>• 현재 폴더: ~/agv_ws</a:t>
+              <a:t>• 현재 폴더: ~/ros2_curri/agv_ws</a:t>
             </a:r>
           </a:p>
           <a:p>
@@ -18227,7 +18318,7 @@
               </a:defRPr>
             </a:pPr>
             <a:r>
-              <a:t>확인: pwd가 ~/agv_ws이고, 이전 모듈의 완료 조건을 한 문장으로 설명할 수 있으면 시작합니다.</a:t>
+              <a:t>확인: pwd가 ~/ros2_curri/agv_ws이고, 이전 모듈의 완료 조건을 한 문장으로 설명할 수 있으면 시작합니다.</a:t>
             </a:r>
           </a:p>
         </p:txBody>
@@ -18323,7 +18414,7 @@
               </a:defRPr>
             </a:pPr>
             <a:r>
-              <a:t>~/agv_ws/src/agv_gazebo/models/agv/model.sdf</a:t>
+              <a:t>~/ros2_curri/agv_ws/src/agv_gazebo/models/agv/model.sdf</a:t>
             </a:r>
           </a:p>
         </p:txBody>
@@ -18459,7 +18550,7 @@
               </a:defRPr>
             </a:pPr>
             <a:r>
-              <a:t>현재 단계 24/27    |    현재 폴더 ~/agv_ws    |    현재 터미널</a:t>
+              <a:t>현재 단계 24/27    |    현재 폴더 ~/ros2_curri/agv_ws    |    현재 터미널</a:t>
             </a:r>
           </a:p>
         </p:txBody>
@@ -18556,11 +18647,11 @@
               </a:defRPr>
             </a:pPr>
             <a:r>
-              <a:t>파일 생성: mkdir -p ~/agv_ws/src/agv_gazebo/models/agv</a:t>
-            </a:r>
-            <a:br/>
-            <a:r>
-              <a:t>파일 열기: nano ~/agv_ws/src/agv_gazebo/models/agv/model.sdf</a:t>
+              <a:t>파일 생성: mkdir -p ~/ros2_curri/agv_ws/src/agv_gazebo/models/agv</a:t>
+            </a:r>
+            <a:br/>
+            <a:r>
+              <a:t>파일 열기: nano ~/ros2_curri/agv_ws/src/agv_gazebo/models/agv/model.sdf</a:t>
             </a:r>
           </a:p>
         </p:txBody>
@@ -18797,7 +18888,7 @@
               </a:defRPr>
             </a:pPr>
             <a:r>
-              <a:t>~/agv_ws/src/agv_gazebo/models/agv/model.sdf</a:t>
+              <a:t>~/ros2_curri/agv_ws/src/agv_gazebo/models/agv/model.sdf</a:t>
             </a:r>
           </a:p>
         </p:txBody>
@@ -18933,7 +19024,7 @@
               </a:defRPr>
             </a:pPr>
             <a:r>
-              <a:t>현재 단계 25/27    |    현재 폴더 ~/agv_ws    |    현재 터미널</a:t>
+              <a:t>현재 단계 25/27    |    현재 폴더 ~/ros2_curri/agv_ws    |    현재 터미널</a:t>
             </a:r>
           </a:p>
         </p:txBody>
@@ -19030,11 +19121,11 @@
               </a:defRPr>
             </a:pPr>
             <a:r>
-              <a:t>파일 생성: mkdir -p ~/agv_ws/src/agv_gazebo/models/agv</a:t>
-            </a:r>
-            <a:br/>
-            <a:r>
-              <a:t>파일 열기: nano ~/agv_ws/src/agv_gazebo/models/agv/model.sdf</a:t>
+              <a:t>파일 생성: mkdir -p ~/ros2_curri/agv_ws/src/agv_gazebo/models/agv</a:t>
+            </a:r>
+            <a:br/>
+            <a:r>
+              <a:t>파일 열기: nano ~/ros2_curri/agv_ws/src/agv_gazebo/models/agv/model.sdf</a:t>
             </a:r>
           </a:p>
         </p:txBody>
@@ -19271,7 +19362,7 @@
               </a:defRPr>
             </a:pPr>
             <a:r>
-              <a:t>~/agv_ws/src/agv_gazebo/models/agv/model.sdf</a:t>
+              <a:t>~/ros2_curri/agv_ws/src/agv_gazebo/models/agv/model.sdf</a:t>
             </a:r>
           </a:p>
         </p:txBody>
@@ -19407,7 +19498,7 @@
               </a:defRPr>
             </a:pPr>
             <a:r>
-              <a:t>현재 단계 26/27    |    현재 폴더 ~/agv_ws    |    현재 터미널</a:t>
+              <a:t>현재 단계 26/27    |    현재 폴더 ~/ros2_curri/agv_ws    |    현재 터미널</a:t>
             </a:r>
           </a:p>
         </p:txBody>
@@ -19504,11 +19595,11 @@
               </a:defRPr>
             </a:pPr>
             <a:r>
-              <a:t>파일 생성: mkdir -p ~/agv_ws/src/agv_gazebo/models/agv</a:t>
-            </a:r>
-            <a:br/>
-            <a:r>
-              <a:t>파일 열기: nano ~/agv_ws/src/agv_gazebo/models/agv/model.sdf</a:t>
+              <a:t>파일 생성: mkdir -p ~/ros2_curri/agv_ws/src/agv_gazebo/models/agv</a:t>
+            </a:r>
+            <a:br/>
+            <a:r>
+              <a:t>파일 열기: nano ~/ros2_curri/agv_ws/src/agv_gazebo/models/agv/model.sdf</a:t>
             </a:r>
           </a:p>
         </p:txBody>
@@ -19742,7 +19833,7 @@
               </a:defRPr>
             </a:pPr>
             <a:r>
-              <a:t>~/agv_ws/src/agv_gazebo/config/bridge.yaml</a:t>
+              <a:t>~/ros2_curri/agv_ws/src/agv_gazebo/config/bridge.yaml</a:t>
             </a:r>
           </a:p>
         </p:txBody>
@@ -19878,7 +19969,7 @@
               </a:defRPr>
             </a:pPr>
             <a:r>
-              <a:t>현재 단계 27/30    |    현재 폴더 ~/agv_ws    |    현재 터미널</a:t>
+              <a:t>현재 단계 27/30    |    현재 폴더 ~/ros2_curri/agv_ws    |    현재 터미널</a:t>
             </a:r>
           </a:p>
         </p:txBody>
@@ -19975,11 +20066,11 @@
               </a:defRPr>
             </a:pPr>
             <a:r>
-              <a:t>파일 생성: mkdir -p ~/agv_ws/src/agv_gazebo/config</a:t>
-            </a:r>
-            <a:br/>
-            <a:r>
-              <a:t>파일 열기: nano ~/agv_ws/src/agv_gazebo/config/bridge.yaml</a:t>
+              <a:t>파일 생성: mkdir -p ~/ros2_curri/agv_ws/src/agv_gazebo/config</a:t>
+            </a:r>
+            <a:br/>
+            <a:r>
+              <a:t>파일 열기: nano ~/ros2_curri/agv_ws/src/agv_gazebo/config/bridge.yaml</a:t>
             </a:r>
           </a:p>
         </p:txBody>
@@ -20216,7 +20307,7 @@
               </a:defRPr>
             </a:pPr>
             <a:r>
-              <a:t>~/agv_ws/src/agv_gazebo/config/bridge.yaml</a:t>
+              <a:t>~/ros2_curri/agv_ws/src/agv_gazebo/config/bridge.yaml</a:t>
             </a:r>
           </a:p>
         </p:txBody>
@@ -20352,7 +20443,7 @@
               </a:defRPr>
             </a:pPr>
             <a:r>
-              <a:t>현재 단계 28/30    |    현재 폴더 ~/agv_ws    |    현재 터미널</a:t>
+              <a:t>현재 단계 28/30    |    현재 폴더 ~/ros2_curri/agv_ws    |    현재 터미널</a:t>
             </a:r>
           </a:p>
         </p:txBody>
@@ -20449,11 +20540,11 @@
               </a:defRPr>
             </a:pPr>
             <a:r>
-              <a:t>파일 생성: mkdir -p ~/agv_ws/src/agv_gazebo/config</a:t>
-            </a:r>
-            <a:br/>
-            <a:r>
-              <a:t>파일 열기: nano ~/agv_ws/src/agv_gazebo/config/bridge.yaml</a:t>
+              <a:t>파일 생성: mkdir -p ~/ros2_curri/agv_ws/src/agv_gazebo/config</a:t>
+            </a:r>
+            <a:br/>
+            <a:r>
+              <a:t>파일 열기: nano ~/ros2_curri/agv_ws/src/agv_gazebo/config/bridge.yaml</a:t>
             </a:r>
           </a:p>
         </p:txBody>
@@ -20690,7 +20781,7 @@
               </a:defRPr>
             </a:pPr>
             <a:r>
-              <a:t>~/agv_ws/src/agv_gazebo/config/bridge.yaml</a:t>
+              <a:t>~/ros2_curri/agv_ws/src/agv_gazebo/config/bridge.yaml</a:t>
             </a:r>
           </a:p>
         </p:txBody>
@@ -20826,7 +20917,7 @@
               </a:defRPr>
             </a:pPr>
             <a:r>
-              <a:t>현재 단계 29/30    |    현재 폴더 ~/agv_ws    |    현재 터미널</a:t>
+              <a:t>현재 단계 29/30    |    현재 폴더 ~/ros2_curri/agv_ws    |    현재 터미널</a:t>
             </a:r>
           </a:p>
         </p:txBody>
@@ -20923,11 +21014,11 @@
               </a:defRPr>
             </a:pPr>
             <a:r>
-              <a:t>파일 생성: mkdir -p ~/agv_ws/src/agv_gazebo/config</a:t>
-            </a:r>
-            <a:br/>
-            <a:r>
-              <a:t>파일 열기: nano ~/agv_ws/src/agv_gazebo/config/bridge.yaml</a:t>
+              <a:t>파일 생성: mkdir -p ~/ros2_curri/agv_ws/src/agv_gazebo/config</a:t>
+            </a:r>
+            <a:br/>
+            <a:r>
+              <a:t>파일 열기: nano ~/ros2_curri/agv_ws/src/agv_gazebo/config/bridge.yaml</a:t>
             </a:r>
           </a:p>
         </p:txBody>
@@ -21140,7 +21231,7 @@
               </a:defRPr>
             </a:pPr>
             <a:r>
-              <a:t>~/agv_ws/src/agv_sensors/agv_sensors/imu_monitor.py</a:t>
+              <a:t>~/ros2_curri/agv_ws/src/agv_sensors/agv_sensors/imu_monitor.py</a:t>
             </a:r>
           </a:p>
         </p:txBody>
@@ -21276,7 +21367,7 @@
               </a:defRPr>
             </a:pPr>
             <a:r>
-              <a:t>현재 단계 30/33    |    현재 폴더 ~/agv_ws    |    현재 터미널</a:t>
+              <a:t>현재 단계 30/33    |    현재 폴더 ~/ros2_curri/agv_ws    |    현재 터미널</a:t>
             </a:r>
           </a:p>
         </p:txBody>
@@ -21373,11 +21464,11 @@
               </a:defRPr>
             </a:pPr>
             <a:r>
-              <a:t>파일 생성: mkdir -p ~/agv_ws/src/agv_sensors/agv_sensors</a:t>
-            </a:r>
-            <a:br/>
-            <a:r>
-              <a:t>파일 열기: nano ~/agv_ws/src/agv_sensors/agv_sensors/imu_monitor.py</a:t>
+              <a:t>파일 생성: mkdir -p ~/ros2_curri/agv_ws/src/agv_sensors/agv_sensors</a:t>
+            </a:r>
+            <a:br/>
+            <a:r>
+              <a:t>파일 열기: nano ~/ros2_curri/agv_ws/src/agv_sensors/agv_sensors/imu_monitor.py</a:t>
             </a:r>
           </a:p>
         </p:txBody>
@@ -21605,7 +21696,7 @@
               </a:defRPr>
             </a:pPr>
             <a:r>
-              <a:t>~/agv_ws/src/agv_sensors/agv_sensors/imu_monitor.py</a:t>
+              <a:t>~/ros2_curri/agv_ws/src/agv_sensors/agv_sensors/imu_monitor.py</a:t>
             </a:r>
           </a:p>
         </p:txBody>
@@ -21741,7 +21832,7 @@
               </a:defRPr>
             </a:pPr>
             <a:r>
-              <a:t>현재 단계 31/33    |    현재 폴더 ~/agv_ws    |    현재 터미널</a:t>
+              <a:t>현재 단계 31/33    |    현재 폴더 ~/ros2_curri/agv_ws    |    현재 터미널</a:t>
             </a:r>
           </a:p>
         </p:txBody>
@@ -21838,11 +21929,11 @@
               </a:defRPr>
             </a:pPr>
             <a:r>
-              <a:t>파일 생성: mkdir -p ~/agv_ws/src/agv_sensors/agv_sensors</a:t>
-            </a:r>
-            <a:br/>
-            <a:r>
-              <a:t>파일 열기: nano ~/agv_ws/src/agv_sensors/agv_sensors/imu_monitor.py</a:t>
+              <a:t>파일 생성: mkdir -p ~/ros2_curri/agv_ws/src/agv_sensors/agv_sensors</a:t>
+            </a:r>
+            <a:br/>
+            <a:r>
+              <a:t>파일 열기: nano ~/ros2_curri/agv_ws/src/agv_sensors/agv_sensors/imu_monitor.py</a:t>
             </a:r>
           </a:p>
         </p:txBody>
@@ -22076,7 +22167,7 @@
               </a:defRPr>
             </a:pPr>
             <a:r>
-              <a:t>~/agv_ws/src/agv_sensors/agv_sensors/imu_monitor.py</a:t>
+              <a:t>~/ros2_curri/agv_ws/src/agv_sensors/agv_sensors/imu_monitor.py</a:t>
             </a:r>
           </a:p>
         </p:txBody>
@@ -22212,7 +22303,7 @@
               </a:defRPr>
             </a:pPr>
             <a:r>
-              <a:t>현재 단계 32/33    |    현재 폴더 ~/agv_ws    |    현재 터미널</a:t>
+              <a:t>현재 단계 32/33    |    현재 폴더 ~/ros2_curri/agv_ws    |    현재 터미널</a:t>
             </a:r>
           </a:p>
         </p:txBody>
@@ -22309,11 +22400,11 @@
               </a:defRPr>
             </a:pPr>
             <a:r>
-              <a:t>파일 생성: mkdir -p ~/agv_ws/src/agv_sensors/agv_sensors</a:t>
-            </a:r>
-            <a:br/>
-            <a:r>
-              <a:t>파일 열기: nano ~/agv_ws/src/agv_sensors/agv_sensors/imu_monitor.py</a:t>
+              <a:t>파일 생성: mkdir -p ~/ros2_curri/agv_ws/src/agv_sensors/agv_sensors</a:t>
+            </a:r>
+            <a:br/>
+            <a:r>
+              <a:t>파일 열기: nano ~/ros2_curri/agv_ws/src/agv_sensors/agv_sensors/imu_monitor.py</a:t>
             </a:r>
           </a:p>
         </p:txBody>
@@ -22654,7 +22745,7 @@
               </a:defRPr>
             </a:pPr>
             <a:r>
-              <a:t>현재 단계 실행    |    현재 폴더 ~/agv_ws    |    현재 터미널</a:t>
+              <a:t>현재 단계 실행    |    현재 폴더 ~/ros2_curri/agv_ws    |    현재 터미널</a:t>
             </a:r>
           </a:p>
         </p:txBody>
@@ -23322,8 +23413,8 @@
         </p:blipFill>
         <p:spPr>
           <a:xfrm>
-            <a:off x="1246187" y="1353312"/>
-            <a:ext cx="9696576" cy="4800600"/>
+            <a:off x="1438886" y="1353312"/>
+            <a:ext cx="9311179" cy="4800600"/>
           </a:xfrm>
           <a:prstGeom prst="rect">
             <a:avLst/>
@@ -23421,7 +23512,7 @@
               </a:defRPr>
             </a:pPr>
             <a:r>
-              <a:t>객관적 검증 명령으로 완료를 확인한다</a:t>
+              <a:t>정상 결과: 실제 환경에서 확인한 출력</a:t>
             </a:r>
           </a:p>
         </p:txBody>
@@ -23460,7 +23551,7 @@
               </a:defRPr>
             </a:pPr>
             <a:r>
-              <a:t>화면만 보지 말고 topic·frame·파일·parameter를 다시 확인합니다.</a:t>
+              <a:t>실제 Gazebo AGV: IMU가 base_link 위에 고정 장착되는 물리 모델 화면</a:t>
             </a:r>
           </a:p>
         </p:txBody>
@@ -23543,210 +23634,40 @@
           </a:p>
         </p:txBody>
       </p:sp>
-      <p:sp>
-        <p:nvSpPr>
-          <p:cNvPr id="6" name="Rectangle 5"/>
-          <p:cNvSpPr/>
-          <p:nvPr/>
-        </p:nvSpPr>
-        <p:spPr>
-          <a:xfrm>
-            <a:off x="566928" y="1188720"/>
-            <a:ext cx="11064240" cy="347472"/>
-          </a:xfrm>
-          <a:prstGeom prst="rect">
-            <a:avLst/>
-          </a:prstGeom>
-          <a:solidFill>
-            <a:srgbClr val="F4F7FB"/>
-          </a:solidFill>
-          <a:ln>
-            <a:solidFill>
-              <a:srgbClr val="F4F7FB"/>
-            </a:solidFill>
-          </a:ln>
-        </p:spPr>
-        <p:style>
-          <a:lnRef idx="1">
-            <a:schemeClr val="accent1"/>
-          </a:lnRef>
-          <a:fillRef idx="3">
-            <a:schemeClr val="accent1"/>
-          </a:fillRef>
-          <a:effectRef idx="2">
-            <a:schemeClr val="accent1"/>
-          </a:effectRef>
-          <a:fontRef idx="minor">
-            <a:schemeClr val="lt1"/>
-          </a:fontRef>
-        </p:style>
-        <p:txBody>
-          <a:bodyPr rtlCol="0" anchor="ctr" wrap="square" lIns="73152" rIns="73152" tIns="36576" bIns="36576"/>
-          <a:lstStyle/>
-          <a:p>
-            <a:pPr algn="l">
-              <a:spcAft>
-                <a:spcPts val="0"/>
-              </a:spcAft>
-              <a:defRPr sz="1300" b="1">
-                <a:solidFill>
-                  <a:srgbClr val="122C4E"/>
-                </a:solidFill>
-                <a:latin typeface="Noto Sans CJK KR"/>
-              </a:defRPr>
-            </a:pPr>
-            <a:r>
-              <a:t>현재 단계 검증    |    현재 폴더 ~/agv_ws    |    현재 터미널</a:t>
-            </a:r>
-          </a:p>
-        </p:txBody>
-      </p:sp>
-      <p:sp>
-        <p:nvSpPr>
-          <p:cNvPr id="7" name="Rounded Rectangle 6"/>
-          <p:cNvSpPr/>
-          <p:nvPr/>
-        </p:nvSpPr>
-        <p:spPr>
-          <a:xfrm>
-            <a:off x="658368" y="1755648"/>
-            <a:ext cx="10972800" cy="2148840"/>
-          </a:xfrm>
-          <a:prstGeom prst="roundRect">
-            <a:avLst/>
-          </a:prstGeom>
-          <a:solidFill>
-            <a:srgbClr val="1D232D"/>
-          </a:solidFill>
-          <a:ln>
-            <a:solidFill>
-              <a:srgbClr val="1D232D"/>
-            </a:solidFill>
-          </a:ln>
-        </p:spPr>
-        <p:style>
-          <a:lnRef idx="1">
-            <a:schemeClr val="accent1"/>
-          </a:lnRef>
-          <a:fillRef idx="3">
-            <a:schemeClr val="accent1"/>
-          </a:fillRef>
-          <a:effectRef idx="2">
-            <a:schemeClr val="accent1"/>
-          </a:effectRef>
-          <a:fontRef idx="minor">
-            <a:schemeClr val="lt1"/>
-          </a:fontRef>
-        </p:style>
-        <p:txBody>
-          <a:bodyPr rtlCol="0" anchor="ctr" wrap="square" lIns="73152" rIns="73152" tIns="36576" bIns="36576"/>
-          <a:lstStyle/>
-          <a:p>
-            <a:pPr algn="l">
-              <a:spcAft>
-                <a:spcPts val="0"/>
-              </a:spcAft>
-              <a:defRPr sz="1600" b="0">
-                <a:solidFill>
-                  <a:srgbClr val="FFFFFF"/>
-                </a:solidFill>
-                <a:latin typeface="DejaVu Sans Mono"/>
-              </a:defRPr>
-            </a:pPr>
-            <a:r>
-              <a:t>ros2 topic info /imu/data</a:t>
-            </a:r>
-            <a:br/>
-            <a:r>
-              <a:t>ros2 topic hz /imu/data</a:t>
-            </a:r>
-            <a:br/>
-            <a:r>
-              <a:t>ros2 topic echo /imu/data --once</a:t>
-            </a:r>
-          </a:p>
-        </p:txBody>
-      </p:sp>
-      <p:sp>
-        <p:nvSpPr>
-          <p:cNvPr id="8" name="Rounded Rectangle 7"/>
-          <p:cNvSpPr/>
-          <p:nvPr/>
-        </p:nvSpPr>
-        <p:spPr>
-          <a:xfrm>
-            <a:off x="658368" y="4206240"/>
-            <a:ext cx="10972800" cy="1554480"/>
-          </a:xfrm>
-          <a:prstGeom prst="roundRect">
-            <a:avLst/>
-          </a:prstGeom>
-          <a:solidFill>
-            <a:srgbClr val="F4F7FB"/>
-          </a:solidFill>
-          <a:ln>
-            <a:solidFill>
-              <a:srgbClr val="D1DFD5"/>
-            </a:solidFill>
-          </a:ln>
-        </p:spPr>
-        <p:style>
-          <a:lnRef idx="1">
-            <a:schemeClr val="accent1"/>
-          </a:lnRef>
-          <a:fillRef idx="3">
-            <a:schemeClr val="accent1"/>
-          </a:fillRef>
-          <a:effectRef idx="2">
-            <a:schemeClr val="accent1"/>
-          </a:effectRef>
-          <a:fontRef idx="minor">
-            <a:schemeClr val="lt1"/>
-          </a:fontRef>
-        </p:style>
-        <p:txBody>
-          <a:bodyPr rtlCol="0" anchor="ctr" wrap="square" lIns="73152" rIns="73152" tIns="36576" bIns="36576"/>
-          <a:lstStyle/>
-          <a:p>
-            <a:pPr algn="l">
-              <a:spcAft>
-                <a:spcPts val="0"/>
-              </a:spcAft>
-              <a:defRPr sz="1800" b="1">
-                <a:solidFill>
-                  <a:srgbClr val="2A8B5A"/>
-                </a:solidFill>
-                <a:latin typeface="Noto Sans CJK KR"/>
-              </a:defRPr>
-            </a:pPr>
-            <a:r>
-              <a:t>완료 체크</a:t>
-            </a:r>
-            <a:br/>
-            <a:r>
-              <a:t>□ 명령이 오류 없이 실행된다.</a:t>
-            </a:r>
-            <a:br/>
-            <a:r>
-              <a:t>□ 기대한 파일·topic·frame·parameter 이름이 보인다.</a:t>
-            </a:r>
-            <a:br/>
-            <a:r>
-              <a:t>□ 값의 단위와 방향을 한 문장으로 설명할 수 있다.</a:t>
-            </a:r>
-          </a:p>
-        </p:txBody>
-      </p:sp>
-      <p:sp>
-        <p:nvSpPr>
-          <p:cNvPr id="9" name="TextBox 8"/>
+      <p:pic>
+        <p:nvPicPr>
+          <p:cNvPr id="6" name="Picture 5" descr="01_gazebo_world_spawn_actual.png"/>
+          <p:cNvPicPr>
+            <a:picLocks noChangeAspect="1"/>
+          </p:cNvPicPr>
+          <p:nvPr/>
+        </p:nvPicPr>
+        <p:blipFill>
+          <a:blip r:embed="rId2"/>
+          <a:stretch>
+            <a:fillRect/>
+          </a:stretch>
+        </p:blipFill>
+        <p:spPr>
+          <a:xfrm>
+            <a:off x="3253884" y="1353312"/>
+            <a:ext cx="5681183" cy="4800600"/>
+          </a:xfrm>
+          <a:prstGeom prst="rect">
+            <a:avLst/>
+          </a:prstGeom>
+        </p:spPr>
+      </p:pic>
+      <p:sp>
+        <p:nvSpPr>
+          <p:cNvPr id="7" name="TextBox 6"/>
           <p:cNvSpPr txBox="1"/>
           <p:nvPr/>
         </p:nvSpPr>
         <p:spPr>
           <a:xfrm>
-            <a:off x="731520" y="5989320"/>
-            <a:ext cx="10789920" cy="237744"/>
+            <a:off x="777240" y="6217920"/>
+            <a:ext cx="10607040" cy="182880"/>
           </a:xfrm>
           <a:prstGeom prst="rect">
             <a:avLst/>
@@ -23759,19 +23680,19 @@
           </a:bodyPr>
           <a:lstStyle/>
           <a:p>
-            <a:pPr algn="l">
-              <a:spcAft>
-                <a:spcPts val="0"/>
-              </a:spcAft>
-              <a:defRPr sz="1500" b="1">
-                <a:solidFill>
-                  <a:srgbClr val="122C4E"/>
-                </a:solidFill>
-                <a:latin typeface="Noto Sans CJK KR"/>
-              </a:defRPr>
-            </a:pPr>
-            <a:r>
-              <a:t>완료 조건: /imu/data의 z축 gyro 값과 noise 설정을 terminal에서 확인한다.</a:t>
+            <a:pPr algn="ctr">
+              <a:spcAft>
+                <a:spcPts val="0"/>
+              </a:spcAft>
+              <a:defRPr sz="1100" b="1">
+                <a:solidFill>
+                  <a:srgbClr val="2A8B5A"/>
+                </a:solidFill>
+                <a:latin typeface="Noto Sans CJK KR"/>
+              </a:defRPr>
+            </a:pPr>
+            <a:r>
+              <a:t>① 명령/설정  ② 정상 출력 또는 화면  ③ 다음 검증 명령으로 재확인</a:t>
             </a:r>
           </a:p>
         </p:txBody>
@@ -23828,7 +23749,7 @@
               </a:defRPr>
             </a:pPr>
             <a:r>
-              <a:t>막히면: 증상 → 우선 확인 → 재검증</a:t>
+              <a:t>객관적 검증 명령으로 완료를 확인한다</a:t>
             </a:r>
           </a:p>
         </p:txBody>
@@ -23867,7 +23788,7 @@
               </a:defRPr>
             </a:pPr>
             <a:r>
-              <a:t>오류 메시지를 숨기지 않고 같은 순서로 점검합니다.</a:t>
+              <a:t>화면만 보지 말고 topic·frame·파일·parameter를 다시 확인합니다.</a:t>
             </a:r>
           </a:p>
         </p:txBody>
@@ -24003,7 +23924,7 @@
               </a:defRPr>
             </a:pPr>
             <a:r>
-              <a:t>현재 단계 오류 대응    |    현재 폴더 ~/agv_ws    |    현재 터미널</a:t>
+              <a:t>현재 단계 검증    |    현재 폴더 ~/ros2_curri/agv_ws    |    현재 터미널</a:t>
             </a:r>
           </a:p>
         </p:txBody>
@@ -24016,18 +23937,18 @@
         </p:nvSpPr>
         <p:spPr>
           <a:xfrm>
-            <a:off x="694944" y="1755648"/>
-            <a:ext cx="10972800" cy="1115568"/>
+            <a:off x="658368" y="1755648"/>
+            <a:ext cx="10972800" cy="2148840"/>
           </a:xfrm>
           <a:prstGeom prst="roundRect">
             <a:avLst/>
           </a:prstGeom>
           <a:solidFill>
-            <a:srgbClr val="FFF7F4"/>
+            <a:srgbClr val="1D232D"/>
           </a:solidFill>
           <a:ln>
             <a:solidFill>
-              <a:srgbClr val="EDBEB4"/>
+              <a:srgbClr val="1D232D"/>
             </a:solidFill>
           </a:ln>
         </p:spPr>
@@ -24046,72 +23967,7 @@
           </a:fontRef>
         </p:style>
         <p:txBody>
-          <a:bodyPr rtlCol="0" anchor="ctr"/>
-          <a:lstStyle/>
-          <a:p>
-            <a:pPr algn="ctr"/>
-          </a:p>
-        </p:txBody>
-      </p:sp>
-      <p:sp>
-        <p:nvSpPr>
-          <p:cNvPr id="8" name="TextBox 7"/>
-          <p:cNvSpPr txBox="1"/>
-          <p:nvPr/>
-        </p:nvSpPr>
-        <p:spPr>
-          <a:xfrm>
-            <a:off x="896112" y="1901952"/>
-            <a:ext cx="2926080" cy="274320"/>
-          </a:xfrm>
-          <a:prstGeom prst="rect">
-            <a:avLst/>
-          </a:prstGeom>
-          <a:noFill/>
-        </p:spPr>
-        <p:txBody>
-          <a:bodyPr wrap="square" lIns="73152" rIns="73152" tIns="36576" bIns="36576">
-            <a:spAutoFit/>
-          </a:bodyPr>
-          <a:lstStyle/>
-          <a:p>
-            <a:pPr algn="l">
-              <a:spcAft>
-                <a:spcPts val="0"/>
-              </a:spcAft>
-              <a:defRPr sz="1800" b="1">
-                <a:solidFill>
-                  <a:srgbClr val="BE3B3B"/>
-                </a:solidFill>
-                <a:latin typeface="Noto Sans CJK KR"/>
-              </a:defRPr>
-            </a:pPr>
-            <a:r>
-              <a:t>증상 1: 값 축이 예상과 다름</a:t>
-            </a:r>
-          </a:p>
-        </p:txBody>
-      </p:sp>
-      <p:sp>
-        <p:nvSpPr>
-          <p:cNvPr id="9" name="TextBox 8"/>
-          <p:cNvSpPr txBox="1"/>
-          <p:nvPr/>
-        </p:nvSpPr>
-        <p:spPr>
-          <a:xfrm>
-            <a:off x="3794760" y="1883664"/>
-            <a:ext cx="7543800" cy="621792"/>
-          </a:xfrm>
-          <a:prstGeom prst="rect">
-            <a:avLst/>
-          </a:prstGeom>
-          <a:noFill/>
-        </p:spPr>
-        <p:txBody>
-          <a:bodyPr wrap="square" lIns="73152" rIns="73152" tIns="36576" bIns="36576">
-            <a:spAutoFit/>
-          </a:bodyPr>
+          <a:bodyPr rtlCol="0" anchor="ctr" wrap="square" lIns="73152" rIns="73152" tIns="36576" bIns="36576"/>
           <a:lstStyle/>
           <a:p>
             <a:pPr algn="l">
@@ -24120,41 +23976,45 @@
               </a:spcAft>
               <a:defRPr sz="1600" b="0">
                 <a:solidFill>
-                  <a:srgbClr val="122C4E"/>
-                </a:solidFill>
-                <a:latin typeface="Noto Sans CJK KR"/>
-              </a:defRPr>
-            </a:pPr>
-            <a:r>
-              <a:t>우선 확인: imu_link 축·origin rpy·header.frame_id를 확인한다.</a:t>
-            </a:r>
-            <a:br/>
-            <a:r>
-              <a:t>수정 후: ros2 topic info /imu/data</a:t>
-            </a:r>
-          </a:p>
-        </p:txBody>
-      </p:sp>
-      <p:sp>
-        <p:nvSpPr>
-          <p:cNvPr id="10" name="Rounded Rectangle 9"/>
+                  <a:srgbClr val="FFFFFF"/>
+                </a:solidFill>
+                <a:latin typeface="DejaVu Sans Mono"/>
+              </a:defRPr>
+            </a:pPr>
+            <a:r>
+              <a:t>ros2 topic info /imu/data</a:t>
+            </a:r>
+            <a:br/>
+            <a:r>
+              <a:t>ros2 topic hz /imu/data</a:t>
+            </a:r>
+            <a:br/>
+            <a:r>
+              <a:t>ros2 topic echo /imu/data --once</a:t>
+            </a:r>
+          </a:p>
+        </p:txBody>
+      </p:sp>
+      <p:sp>
+        <p:nvSpPr>
+          <p:cNvPr id="8" name="Rounded Rectangle 7"/>
           <p:cNvSpPr/>
           <p:nvPr/>
         </p:nvSpPr>
         <p:spPr>
           <a:xfrm>
-            <a:off x="694944" y="3172968"/>
-            <a:ext cx="10972800" cy="1115568"/>
+            <a:off x="658368" y="4206240"/>
+            <a:ext cx="10972800" cy="1554480"/>
           </a:xfrm>
           <a:prstGeom prst="roundRect">
             <a:avLst/>
           </a:prstGeom>
           <a:solidFill>
-            <a:srgbClr val="FFF7F4"/>
+            <a:srgbClr val="F4F7FB"/>
           </a:solidFill>
           <a:ln>
             <a:solidFill>
-              <a:srgbClr val="EDBEB4"/>
+              <a:srgbClr val="D1DFD5"/>
             </a:solidFill>
           </a:ln>
         </p:spPr>
@@ -24173,23 +24033,48 @@
           </a:fontRef>
         </p:style>
         <p:txBody>
-          <a:bodyPr rtlCol="0" anchor="ctr"/>
-          <a:lstStyle/>
-          <a:p>
-            <a:pPr algn="ctr"/>
-          </a:p>
-        </p:txBody>
-      </p:sp>
-      <p:sp>
-        <p:nvSpPr>
-          <p:cNvPr id="11" name="TextBox 10"/>
+          <a:bodyPr rtlCol="0" anchor="ctr" wrap="square" lIns="73152" rIns="73152" tIns="36576" bIns="36576"/>
+          <a:lstStyle/>
+          <a:p>
+            <a:pPr algn="l">
+              <a:spcAft>
+                <a:spcPts val="0"/>
+              </a:spcAft>
+              <a:defRPr sz="1800" b="1">
+                <a:solidFill>
+                  <a:srgbClr val="2A8B5A"/>
+                </a:solidFill>
+                <a:latin typeface="Noto Sans CJK KR"/>
+              </a:defRPr>
+            </a:pPr>
+            <a:r>
+              <a:t>완료 체크</a:t>
+            </a:r>
+            <a:br/>
+            <a:r>
+              <a:t>□ 명령이 오류 없이 실행된다.</a:t>
+            </a:r>
+            <a:br/>
+            <a:r>
+              <a:t>□ 기대한 파일·topic·frame·parameter 이름이 보인다.</a:t>
+            </a:r>
+            <a:br/>
+            <a:r>
+              <a:t>□ 값의 단위와 방향을 한 문장으로 설명할 수 있다.</a:t>
+            </a:r>
+          </a:p>
+        </p:txBody>
+      </p:sp>
+      <p:sp>
+        <p:nvSpPr>
+          <p:cNvPr id="9" name="TextBox 8"/>
           <p:cNvSpPr txBox="1"/>
           <p:nvPr/>
         </p:nvSpPr>
         <p:spPr>
           <a:xfrm>
-            <a:off x="896112" y="3319272"/>
-            <a:ext cx="2926080" cy="274320"/>
+            <a:off x="731520" y="5989320"/>
+            <a:ext cx="10789920" cy="237744"/>
           </a:xfrm>
           <a:prstGeom prst="rect">
             <a:avLst/>
@@ -24206,46 +24091,7 @@
               <a:spcAft>
                 <a:spcPts val="0"/>
               </a:spcAft>
-              <a:defRPr sz="1800" b="1">
-                <a:solidFill>
-                  <a:srgbClr val="BE3B3B"/>
-                </a:solidFill>
-                <a:latin typeface="Noto Sans CJK KR"/>
-              </a:defRPr>
-            </a:pPr>
-            <a:r>
-              <a:t>증상 2: 값이 지나치게 요동</a:t>
-            </a:r>
-          </a:p>
-        </p:txBody>
-      </p:sp>
-      <p:sp>
-        <p:nvSpPr>
-          <p:cNvPr id="12" name="TextBox 11"/>
-          <p:cNvSpPr txBox="1"/>
-          <p:nvPr/>
-        </p:nvSpPr>
-        <p:spPr>
-          <a:xfrm>
-            <a:off x="3794760" y="3300984"/>
-            <a:ext cx="7543800" cy="621792"/>
-          </a:xfrm>
-          <a:prstGeom prst="rect">
-            <a:avLst/>
-          </a:prstGeom>
-          <a:noFill/>
-        </p:spPr>
-        <p:txBody>
-          <a:bodyPr wrap="square" lIns="73152" rIns="73152" tIns="36576" bIns="36576">
-            <a:spAutoFit/>
-          </a:bodyPr>
-          <a:lstStyle/>
-          <a:p>
-            <a:pPr algn="l">
-              <a:spcAft>
-                <a:spcPts val="0"/>
-              </a:spcAft>
-              <a:defRPr sz="1600" b="0">
+              <a:defRPr sz="1500" b="1">
                 <a:solidFill>
                   <a:srgbClr val="122C4E"/>
                 </a:solidFill>
@@ -24253,50 +24099,7 @@
               </a:defRPr>
             </a:pPr>
             <a:r>
-              <a:t>우선 확인: noise/bias·update_rate·시뮬레이션 부하를 확인한다.</a:t>
-            </a:r>
-            <a:br/>
-            <a:r>
-              <a:t>수정 후: ros2 topic info /imu/data</a:t>
-            </a:r>
-          </a:p>
-        </p:txBody>
-      </p:sp>
-      <p:sp>
-        <p:nvSpPr>
-          <p:cNvPr id="13" name="TextBox 12"/>
-          <p:cNvSpPr txBox="1"/>
-          <p:nvPr/>
-        </p:nvSpPr>
-        <p:spPr>
-          <a:xfrm>
-            <a:off x="822960" y="5102352"/>
-            <a:ext cx="10607040" cy="402336"/>
-          </a:xfrm>
-          <a:prstGeom prst="rect">
-            <a:avLst/>
-          </a:prstGeom>
-          <a:noFill/>
-        </p:spPr>
-        <p:txBody>
-          <a:bodyPr wrap="square" lIns="73152" rIns="73152" tIns="36576" bIns="36576">
-            <a:spAutoFit/>
-          </a:bodyPr>
-          <a:lstStyle/>
-          <a:p>
-            <a:pPr algn="ctr">
-              <a:spcAft>
-                <a:spcPts val="0"/>
-              </a:spcAft>
-              <a:defRPr sz="1800" b="1">
-                <a:solidFill>
-                  <a:srgbClr val="DB7E22"/>
-                </a:solidFill>
-                <a:latin typeface="Noto Sans CJK KR"/>
-              </a:defRPr>
-            </a:pPr>
-            <a:r>
-              <a:t>공통 순서: ① 현재 폴더 ② source ③ 파일 경로 ④ 이름/타입/단위 ⑤ build·source 후 재실행</a:t>
+              <a:t>완료 조건: /imu/data의 z축 gyro 값과 noise 설정을 terminal에서 확인한다.</a:t>
             </a:r>
           </a:p>
         </p:txBody>
@@ -24353,7 +24156,7 @@
               </a:defRPr>
             </a:pPr>
             <a:r>
-              <a:t>미니 실습: 값 하나를 바꾸고 결과를 비교한다</a:t>
+              <a:t>막히면: 증상 → 우선 확인 → 재검증</a:t>
             </a:r>
           </a:p>
         </p:txBody>
@@ -24392,7 +24195,7 @@
               </a:defRPr>
             </a:pPr>
             <a:r>
-              <a:t>정상 결과를 만든 뒤에는 한 번에 하나의 값만 바꿉니다.</a:t>
+              <a:t>오류 메시지를 숨기지 않고 같은 순서로 점검합니다.</a:t>
             </a:r>
           </a:p>
         </p:txBody>
@@ -24528,7 +24331,7 @@
               </a:defRPr>
             </a:pPr>
             <a:r>
-              <a:t>현재 단계 미니 실습    |    현재 폴더 ~/agv_ws    |    현재 터미널</a:t>
+              <a:t>현재 단계 오류 대응    |    현재 폴더 ~/ros2_curri/agv_ws    |    현재 터미널</a:t>
             </a:r>
           </a:p>
         </p:txBody>
@@ -24541,18 +24344,18 @@
         </p:nvSpPr>
         <p:spPr>
           <a:xfrm>
-            <a:off x="749808" y="1874519"/>
-            <a:ext cx="10652760" cy="1993392"/>
+            <a:off x="694944" y="1755648"/>
+            <a:ext cx="10972800" cy="1115568"/>
           </a:xfrm>
           <a:prstGeom prst="roundRect">
             <a:avLst/>
           </a:prstGeom>
           <a:solidFill>
-            <a:srgbClr val="FFF8EB"/>
+            <a:srgbClr val="FFF7F4"/>
           </a:solidFill>
           <a:ln>
             <a:solidFill>
-              <a:srgbClr val="ECC680"/>
+              <a:srgbClr val="EDBEB4"/>
             </a:solidFill>
           </a:ln>
         </p:spPr>
@@ -24571,23 +24374,10 @@
           </a:fontRef>
         </p:style>
         <p:txBody>
-          <a:bodyPr rtlCol="0" anchor="ctr" wrap="square" lIns="73152" rIns="73152" tIns="36576" bIns="36576"/>
-          <a:lstStyle/>
-          <a:p>
-            <a:pPr algn="ctr">
-              <a:spcAft>
-                <a:spcPts val="0"/>
-              </a:spcAft>
-              <a:defRPr sz="2300" b="1">
-                <a:solidFill>
-                  <a:srgbClr val="122C4E"/>
-                </a:solidFill>
-                <a:latin typeface="Noto Sans CJK KR"/>
-              </a:defRPr>
-            </a:pPr>
-            <a:r>
-              <a:t>정지·직진·제자리 회전에서 angular_velocity.z를 각각 기록하고 부호가 어느 동작에서 바뀌는지 설명한다.</a:t>
-            </a:r>
+          <a:bodyPr rtlCol="0" anchor="ctr"/>
+          <a:lstStyle/>
+          <a:p>
+            <a:pPr algn="ctr"/>
           </a:p>
         </p:txBody>
       </p:sp>
@@ -24599,8 +24389,8 @@
         </p:nvSpPr>
         <p:spPr>
           <a:xfrm>
-            <a:off x="877824" y="4590288"/>
-            <a:ext cx="10241280" cy="594360"/>
+            <a:off x="896112" y="1901952"/>
+            <a:ext cx="2926080" cy="274320"/>
           </a:xfrm>
           <a:prstGeom prst="rect">
             <a:avLst/>
@@ -24613,11 +24403,220 @@
           </a:bodyPr>
           <a:lstStyle/>
           <a:p>
+            <a:pPr algn="l">
+              <a:spcAft>
+                <a:spcPts val="0"/>
+              </a:spcAft>
+              <a:defRPr sz="1800" b="1">
+                <a:solidFill>
+                  <a:srgbClr val="BE3B3B"/>
+                </a:solidFill>
+                <a:latin typeface="Noto Sans CJK KR"/>
+              </a:defRPr>
+            </a:pPr>
+            <a:r>
+              <a:t>증상 1: 값 축이 예상과 다름</a:t>
+            </a:r>
+          </a:p>
+        </p:txBody>
+      </p:sp>
+      <p:sp>
+        <p:nvSpPr>
+          <p:cNvPr id="9" name="TextBox 8"/>
+          <p:cNvSpPr txBox="1"/>
+          <p:nvPr/>
+        </p:nvSpPr>
+        <p:spPr>
+          <a:xfrm>
+            <a:off x="3794760" y="1883664"/>
+            <a:ext cx="7543800" cy="621792"/>
+          </a:xfrm>
+          <a:prstGeom prst="rect">
+            <a:avLst/>
+          </a:prstGeom>
+          <a:noFill/>
+        </p:spPr>
+        <p:txBody>
+          <a:bodyPr wrap="square" lIns="73152" rIns="73152" tIns="36576" bIns="36576">
+            <a:spAutoFit/>
+          </a:bodyPr>
+          <a:lstStyle/>
+          <a:p>
+            <a:pPr algn="l">
+              <a:spcAft>
+                <a:spcPts val="0"/>
+              </a:spcAft>
+              <a:defRPr sz="1600" b="0">
+                <a:solidFill>
+                  <a:srgbClr val="122C4E"/>
+                </a:solidFill>
+                <a:latin typeface="Noto Sans CJK KR"/>
+              </a:defRPr>
+            </a:pPr>
+            <a:r>
+              <a:t>우선 확인: imu_link 축·origin rpy·header.frame_id를 확인한다.</a:t>
+            </a:r>
+            <a:br/>
+            <a:r>
+              <a:t>수정 후: ros2 topic info /imu/data</a:t>
+            </a:r>
+          </a:p>
+        </p:txBody>
+      </p:sp>
+      <p:sp>
+        <p:nvSpPr>
+          <p:cNvPr id="10" name="Rounded Rectangle 9"/>
+          <p:cNvSpPr/>
+          <p:nvPr/>
+        </p:nvSpPr>
+        <p:spPr>
+          <a:xfrm>
+            <a:off x="694944" y="3172968"/>
+            <a:ext cx="10972800" cy="1115568"/>
+          </a:xfrm>
+          <a:prstGeom prst="roundRect">
+            <a:avLst/>
+          </a:prstGeom>
+          <a:solidFill>
+            <a:srgbClr val="FFF7F4"/>
+          </a:solidFill>
+          <a:ln>
+            <a:solidFill>
+              <a:srgbClr val="EDBEB4"/>
+            </a:solidFill>
+          </a:ln>
+        </p:spPr>
+        <p:style>
+          <a:lnRef idx="1">
+            <a:schemeClr val="accent1"/>
+          </a:lnRef>
+          <a:fillRef idx="3">
+            <a:schemeClr val="accent1"/>
+          </a:fillRef>
+          <a:effectRef idx="2">
+            <a:schemeClr val="accent1"/>
+          </a:effectRef>
+          <a:fontRef idx="minor">
+            <a:schemeClr val="lt1"/>
+          </a:fontRef>
+        </p:style>
+        <p:txBody>
+          <a:bodyPr rtlCol="0" anchor="ctr"/>
+          <a:lstStyle/>
+          <a:p>
+            <a:pPr algn="ctr"/>
+          </a:p>
+        </p:txBody>
+      </p:sp>
+      <p:sp>
+        <p:nvSpPr>
+          <p:cNvPr id="11" name="TextBox 10"/>
+          <p:cNvSpPr txBox="1"/>
+          <p:nvPr/>
+        </p:nvSpPr>
+        <p:spPr>
+          <a:xfrm>
+            <a:off x="896112" y="3319272"/>
+            <a:ext cx="2926080" cy="274320"/>
+          </a:xfrm>
+          <a:prstGeom prst="rect">
+            <a:avLst/>
+          </a:prstGeom>
+          <a:noFill/>
+        </p:spPr>
+        <p:txBody>
+          <a:bodyPr wrap="square" lIns="73152" rIns="73152" tIns="36576" bIns="36576">
+            <a:spAutoFit/>
+          </a:bodyPr>
+          <a:lstStyle/>
+          <a:p>
+            <a:pPr algn="l">
+              <a:spcAft>
+                <a:spcPts val="0"/>
+              </a:spcAft>
+              <a:defRPr sz="1800" b="1">
+                <a:solidFill>
+                  <a:srgbClr val="BE3B3B"/>
+                </a:solidFill>
+                <a:latin typeface="Noto Sans CJK KR"/>
+              </a:defRPr>
+            </a:pPr>
+            <a:r>
+              <a:t>증상 2: 값이 지나치게 요동</a:t>
+            </a:r>
+          </a:p>
+        </p:txBody>
+      </p:sp>
+      <p:sp>
+        <p:nvSpPr>
+          <p:cNvPr id="12" name="TextBox 11"/>
+          <p:cNvSpPr txBox="1"/>
+          <p:nvPr/>
+        </p:nvSpPr>
+        <p:spPr>
+          <a:xfrm>
+            <a:off x="3794760" y="3300984"/>
+            <a:ext cx="7543800" cy="621792"/>
+          </a:xfrm>
+          <a:prstGeom prst="rect">
+            <a:avLst/>
+          </a:prstGeom>
+          <a:noFill/>
+        </p:spPr>
+        <p:txBody>
+          <a:bodyPr wrap="square" lIns="73152" rIns="73152" tIns="36576" bIns="36576">
+            <a:spAutoFit/>
+          </a:bodyPr>
+          <a:lstStyle/>
+          <a:p>
+            <a:pPr algn="l">
+              <a:spcAft>
+                <a:spcPts val="0"/>
+              </a:spcAft>
+              <a:defRPr sz="1600" b="0">
+                <a:solidFill>
+                  <a:srgbClr val="122C4E"/>
+                </a:solidFill>
+                <a:latin typeface="Noto Sans CJK KR"/>
+              </a:defRPr>
+            </a:pPr>
+            <a:r>
+              <a:t>우선 확인: noise/bias·update_rate·시뮬레이션 부하를 확인한다.</a:t>
+            </a:r>
+            <a:br/>
+            <a:r>
+              <a:t>수정 후: ros2 topic info /imu/data</a:t>
+            </a:r>
+          </a:p>
+        </p:txBody>
+      </p:sp>
+      <p:sp>
+        <p:nvSpPr>
+          <p:cNvPr id="13" name="TextBox 12"/>
+          <p:cNvSpPr txBox="1"/>
+          <p:nvPr/>
+        </p:nvSpPr>
+        <p:spPr>
+          <a:xfrm>
+            <a:off x="822960" y="5102352"/>
+            <a:ext cx="10607040" cy="402336"/>
+          </a:xfrm>
+          <a:prstGeom prst="rect">
+            <a:avLst/>
+          </a:prstGeom>
+          <a:noFill/>
+        </p:spPr>
+        <p:txBody>
+          <a:bodyPr wrap="square" lIns="73152" rIns="73152" tIns="36576" bIns="36576">
+            <a:spAutoFit/>
+          </a:bodyPr>
+          <a:lstStyle/>
+          <a:p>
             <a:pPr algn="ctr">
               <a:spcAft>
                 <a:spcPts val="0"/>
               </a:spcAft>
-              <a:defRPr sz="1900" b="1">
+              <a:defRPr sz="1800" b="1">
                 <a:solidFill>
                   <a:srgbClr val="DB7E22"/>
                 </a:solidFill>
@@ -24625,7 +24624,7 @@
               </a:defRPr>
             </a:pPr>
             <a:r>
-              <a:t>기록할 것: 바꾼 값(단위) · 기대한 변화 · 실제 출력/화면 · 원래 값으로 되돌린 결과</a:t>
+              <a:t>공통 순서: ① 현재 폴더 ② source ③ 파일 경로 ④ 이름/타입/단위 ⑤ build·source 후 재실행</a:t>
             </a:r>
           </a:p>
         </p:txBody>
@@ -24682,7 +24681,7 @@
               </a:defRPr>
             </a:pPr>
             <a:r>
-              <a:t>체크포인트를 저장하고 다음 모듈로 넘긴다</a:t>
+              <a:t>미니 실습: 값 하나를 바꾸고 결과를 비교한다</a:t>
             </a:r>
           </a:p>
         </p:txBody>
@@ -24721,7 +24720,7 @@
               </a:defRPr>
             </a:pPr>
             <a:r>
-              <a:t>현재 Complete는 다음 Starter의 기준선입니다.</a:t>
+              <a:t>정상 결과를 만든 뒤에는 한 번에 하나의 값만 바꿉니다.</a:t>
             </a:r>
           </a:p>
         </p:txBody>
@@ -24857,7 +24856,7 @@
               </a:defRPr>
             </a:pPr>
             <a:r>
-              <a:t>현재 단계 체크포인트    |    현재 폴더 ~/agv_ws    |    현재 터미널</a:t>
+              <a:t>현재 단계 미니 실습    |    현재 폴더 ~/ros2_curri/agv_ws    |    현재 터미널</a:t>
             </a:r>
           </a:p>
         </p:txBody>
@@ -24870,18 +24869,18 @@
         </p:nvSpPr>
         <p:spPr>
           <a:xfrm>
-            <a:off x="685800" y="1737360"/>
-            <a:ext cx="10972800" cy="3611880"/>
+            <a:off x="749808" y="1874519"/>
+            <a:ext cx="10652760" cy="1993392"/>
           </a:xfrm>
           <a:prstGeom prst="roundRect">
             <a:avLst/>
           </a:prstGeom>
           <a:solidFill>
-            <a:srgbClr val="F4F7FB"/>
+            <a:srgbClr val="FFF8EB"/>
           </a:solidFill>
           <a:ln>
             <a:solidFill>
-              <a:srgbClr val="D2DCE8"/>
+              <a:srgbClr val="ECC680"/>
             </a:solidFill>
           </a:ln>
         </p:spPr>
@@ -24900,10 +24899,23 @@
           </a:fontRef>
         </p:style>
         <p:txBody>
-          <a:bodyPr rtlCol="0" anchor="ctr"/>
-          <a:lstStyle/>
-          <a:p>
-            <a:pPr algn="ctr"/>
+          <a:bodyPr rtlCol="0" anchor="ctr" wrap="square" lIns="73152" rIns="73152" tIns="36576" bIns="36576"/>
+          <a:lstStyle/>
+          <a:p>
+            <a:pPr algn="ctr">
+              <a:spcAft>
+                <a:spcPts val="0"/>
+              </a:spcAft>
+              <a:defRPr sz="2300" b="1">
+                <a:solidFill>
+                  <a:srgbClr val="122C4E"/>
+                </a:solidFill>
+                <a:latin typeface="Noto Sans CJK KR"/>
+              </a:defRPr>
+            </a:pPr>
+            <a:r>
+              <a:t>정지·직진·제자리 회전에서 angular_velocity.z를 각각 기록하고 부호가 어느 동작에서 바뀌는지 설명한다.</a:t>
+            </a:r>
           </a:p>
         </p:txBody>
       </p:sp>
@@ -24915,111 +24927,8 @@
         </p:nvSpPr>
         <p:spPr>
           <a:xfrm>
-            <a:off x="896112" y="1993392"/>
-            <a:ext cx="10332720" cy="2971800"/>
-          </a:xfrm>
-          <a:prstGeom prst="rect">
-            <a:avLst/>
-          </a:prstGeom>
-          <a:noFill/>
-        </p:spPr>
-        <p:txBody>
-          <a:bodyPr wrap="square" lIns="109728" rIns="109728">
-            <a:spAutoFit/>
-          </a:bodyPr>
-          <a:lstStyle/>
-          <a:p>
-            <a:pPr>
-              <a:spcAft>
-                <a:spcPts val="800"/>
-              </a:spcAft>
-              <a:defRPr sz="1800">
-                <a:solidFill>
-                  <a:srgbClr val="122C4E"/>
-                </a:solidFill>
-                <a:latin typeface="Noto Sans CJK KR"/>
-              </a:defRPr>
-            </a:pPr>
-            <a:r>
-              <a:t>• □ 완료 화면: /imu/data의 z축 gyro 값과 noise 설정을 terminal에서 확인한다.</a:t>
-            </a:r>
-          </a:p>
-          <a:p>
-            <a:pPr>
-              <a:spcAft>
-                <a:spcPts val="800"/>
-              </a:spcAft>
-              <a:defRPr sz="1800">
-                <a:solidFill>
-                  <a:srgbClr val="122C4E"/>
-                </a:solidFill>
-                <a:latin typeface="Noto Sans CJK KR"/>
-              </a:defRPr>
-            </a:pPr>
-            <a:r>
-              <a:t>• □ Complete 파일: blocks/D_sensors/M14_imu_sensor/complete/</a:t>
-            </a:r>
-          </a:p>
-          <a:p>
-            <a:pPr>
-              <a:spcAft>
-                <a:spcPts val="800"/>
-              </a:spcAft>
-              <a:defRPr sz="1800">
-                <a:solidFill>
-                  <a:srgbClr val="122C4E"/>
-                </a:solidFill>
-                <a:latin typeface="Noto Sans CJK KR"/>
-              </a:defRPr>
-            </a:pPr>
-            <a:r>
-              <a:t>• □ 정상 로그·캡처: logs/validation.log, screenshots/validation_terminal.png</a:t>
-            </a:r>
-          </a:p>
-          <a:p>
-            <a:pPr>
-              <a:spcAft>
-                <a:spcPts val="800"/>
-              </a:spcAft>
-              <a:defRPr sz="1800">
-                <a:solidFill>
-                  <a:srgbClr val="122C4E"/>
-                </a:solidFill>
-                <a:latin typeface="Noto Sans CJK KR"/>
-              </a:defRPr>
-            </a:pPr>
-            <a:r>
-              <a:t>• □ 버전 식별: CHECKSUM_or_TAG.txt의 SHA-256 manifest</a:t>
-            </a:r>
-          </a:p>
-          <a:p>
-            <a:pPr>
-              <a:spcAft>
-                <a:spcPts val="800"/>
-              </a:spcAft>
-              <a:defRPr sz="1800">
-                <a:solidFill>
-                  <a:srgbClr val="122C4E"/>
-                </a:solidFill>
-                <a:latin typeface="Noto Sans CJK KR"/>
-              </a:defRPr>
-            </a:pPr>
-            <a:r>
-              <a:t>• □ 다음 시작 조건: M15 운영/QoS</a:t>
-            </a:r>
-          </a:p>
-        </p:txBody>
-      </p:sp>
-      <p:sp>
-        <p:nvSpPr>
-          <p:cNvPr id="9" name="TextBox 8"/>
-          <p:cNvSpPr txBox="1"/>
-          <p:nvPr/>
-        </p:nvSpPr>
-        <p:spPr>
-          <a:xfrm>
-            <a:off x="868680" y="5596128"/>
-            <a:ext cx="10515600" cy="338328"/>
+            <a:off x="877824" y="4590288"/>
+            <a:ext cx="10241280" cy="594360"/>
           </a:xfrm>
           <a:prstGeom prst="rect">
             <a:avLst/>
@@ -25036,15 +24945,15 @@
               <a:spcAft>
                 <a:spcPts val="0"/>
               </a:spcAft>
-              <a:defRPr sz="1700" b="1">
-                <a:solidFill>
-                  <a:srgbClr val="2A8B5A"/>
-                </a:solidFill>
-                <a:latin typeface="Noto Sans CJK KR"/>
-              </a:defRPr>
-            </a:pPr>
-            <a:r>
-              <a:t>다음 모듈을 시작하기 전, 이 슬라이드의 Complete와 다음 모듈의 Starter를 비교합니다.</a:t>
+              <a:defRPr sz="1900" b="1">
+                <a:solidFill>
+                  <a:srgbClr val="DB7E22"/>
+                </a:solidFill>
+                <a:latin typeface="Noto Sans CJK KR"/>
+              </a:defRPr>
+            </a:pPr>
+            <a:r>
+              <a:t>기록할 것: 바꾼 값(단위) · 기대한 변화 · 실제 출력/화면 · 원래 값으로 되돌린 결과</a:t>
             </a:r>
           </a:p>
         </p:txBody>
@@ -25101,6 +25010,425 @@
               </a:defRPr>
             </a:pPr>
             <a:r>
+              <a:t>체크포인트를 저장하고 다음 모듈로 넘긴다</a:t>
+            </a:r>
+          </a:p>
+        </p:txBody>
+      </p:sp>
+      <p:sp>
+        <p:nvSpPr>
+          <p:cNvPr id="3" name="TextBox 2"/>
+          <p:cNvSpPr txBox="1"/>
+          <p:nvPr/>
+        </p:nvSpPr>
+        <p:spPr>
+          <a:xfrm>
+            <a:off x="603504" y="859536"/>
+            <a:ext cx="10698480" cy="292608"/>
+          </a:xfrm>
+          <a:prstGeom prst="rect">
+            <a:avLst/>
+          </a:prstGeom>
+          <a:noFill/>
+        </p:spPr>
+        <p:txBody>
+          <a:bodyPr wrap="square" lIns="73152" rIns="73152" tIns="36576" bIns="36576">
+            <a:spAutoFit/>
+          </a:bodyPr>
+          <a:lstStyle/>
+          <a:p>
+            <a:pPr algn="l">
+              <a:spcAft>
+                <a:spcPts val="0"/>
+              </a:spcAft>
+              <a:defRPr sz="1700" b="0">
+                <a:solidFill>
+                  <a:srgbClr val="5C6672"/>
+                </a:solidFill>
+                <a:latin typeface="Noto Sans CJK KR"/>
+              </a:defRPr>
+            </a:pPr>
+            <a:r>
+              <a:t>현재 Complete는 다음 Starter의 기준선입니다.</a:t>
+            </a:r>
+          </a:p>
+        </p:txBody>
+      </p:sp>
+      <p:sp>
+        <p:nvSpPr>
+          <p:cNvPr id="4" name="TextBox 3"/>
+          <p:cNvSpPr txBox="1"/>
+          <p:nvPr/>
+        </p:nvSpPr>
+        <p:spPr>
+          <a:xfrm>
+            <a:off x="530352" y="6510528"/>
+            <a:ext cx="7772400" cy="201168"/>
+          </a:xfrm>
+          <a:prstGeom prst="rect">
+            <a:avLst/>
+          </a:prstGeom>
+          <a:noFill/>
+        </p:spPr>
+        <p:txBody>
+          <a:bodyPr wrap="square" lIns="73152" rIns="73152" tIns="36576" bIns="36576">
+            <a:spAutoFit/>
+          </a:bodyPr>
+          <a:lstStyle/>
+          <a:p>
+            <a:pPr algn="l">
+              <a:spcAft>
+                <a:spcPts val="0"/>
+              </a:spcAft>
+              <a:defRPr sz="1000" b="0">
+                <a:solidFill>
+                  <a:srgbClr val="5C6672"/>
+                </a:solidFill>
+                <a:latin typeface="Noto Sans CJK KR"/>
+              </a:defRPr>
+            </a:pPr>
+            <a:r>
+              <a:t>ROS 2 Jazzy · Gazebo Harmonic · M14 · 따라 하기형 AGV 실습</a:t>
+            </a:r>
+          </a:p>
+        </p:txBody>
+      </p:sp>
+      <p:sp>
+        <p:nvSpPr>
+          <p:cNvPr id="5" name="TextBox 4"/>
+          <p:cNvSpPr txBox="1"/>
+          <p:nvPr/>
+        </p:nvSpPr>
+        <p:spPr>
+          <a:xfrm>
+            <a:off x="9144000" y="6510528"/>
+            <a:ext cx="2468880" cy="201168"/>
+          </a:xfrm>
+          <a:prstGeom prst="rect">
+            <a:avLst/>
+          </a:prstGeom>
+          <a:noFill/>
+        </p:spPr>
+        <p:txBody>
+          <a:bodyPr wrap="square" lIns="73152" rIns="73152" tIns="36576" bIns="36576">
+            <a:spAutoFit/>
+          </a:bodyPr>
+          <a:lstStyle/>
+          <a:p>
+            <a:pPr algn="r">
+              <a:spcAft>
+                <a:spcPts val="0"/>
+              </a:spcAft>
+              <a:defRPr sz="1000" b="0">
+                <a:solidFill>
+                  <a:srgbClr val="5C6672"/>
+                </a:solidFill>
+                <a:latin typeface="Noto Sans CJK KR"/>
+              </a:defRPr>
+            </a:pPr>
+            <a:r>
+              <a:t>명령·파일 경로는 슬라이드에서 복사 가능</a:t>
+            </a:r>
+          </a:p>
+        </p:txBody>
+      </p:sp>
+      <p:sp>
+        <p:nvSpPr>
+          <p:cNvPr id="6" name="Rectangle 5"/>
+          <p:cNvSpPr/>
+          <p:nvPr/>
+        </p:nvSpPr>
+        <p:spPr>
+          <a:xfrm>
+            <a:off x="566928" y="1188720"/>
+            <a:ext cx="11064240" cy="347472"/>
+          </a:xfrm>
+          <a:prstGeom prst="rect">
+            <a:avLst/>
+          </a:prstGeom>
+          <a:solidFill>
+            <a:srgbClr val="F4F7FB"/>
+          </a:solidFill>
+          <a:ln>
+            <a:solidFill>
+              <a:srgbClr val="F4F7FB"/>
+            </a:solidFill>
+          </a:ln>
+        </p:spPr>
+        <p:style>
+          <a:lnRef idx="1">
+            <a:schemeClr val="accent1"/>
+          </a:lnRef>
+          <a:fillRef idx="3">
+            <a:schemeClr val="accent1"/>
+          </a:fillRef>
+          <a:effectRef idx="2">
+            <a:schemeClr val="accent1"/>
+          </a:effectRef>
+          <a:fontRef idx="minor">
+            <a:schemeClr val="lt1"/>
+          </a:fontRef>
+        </p:style>
+        <p:txBody>
+          <a:bodyPr rtlCol="0" anchor="ctr" wrap="square" lIns="73152" rIns="73152" tIns="36576" bIns="36576"/>
+          <a:lstStyle/>
+          <a:p>
+            <a:pPr algn="l">
+              <a:spcAft>
+                <a:spcPts val="0"/>
+              </a:spcAft>
+              <a:defRPr sz="1300" b="1">
+                <a:solidFill>
+                  <a:srgbClr val="122C4E"/>
+                </a:solidFill>
+                <a:latin typeface="Noto Sans CJK KR"/>
+              </a:defRPr>
+            </a:pPr>
+            <a:r>
+              <a:t>현재 단계 체크포인트    |    현재 폴더 ~/ros2_curri/agv_ws    |    현재 터미널</a:t>
+            </a:r>
+          </a:p>
+        </p:txBody>
+      </p:sp>
+      <p:sp>
+        <p:nvSpPr>
+          <p:cNvPr id="7" name="Rounded Rectangle 6"/>
+          <p:cNvSpPr/>
+          <p:nvPr/>
+        </p:nvSpPr>
+        <p:spPr>
+          <a:xfrm>
+            <a:off x="685800" y="1737360"/>
+            <a:ext cx="10972800" cy="3611880"/>
+          </a:xfrm>
+          <a:prstGeom prst="roundRect">
+            <a:avLst/>
+          </a:prstGeom>
+          <a:solidFill>
+            <a:srgbClr val="F4F7FB"/>
+          </a:solidFill>
+          <a:ln>
+            <a:solidFill>
+              <a:srgbClr val="D2DCE8"/>
+            </a:solidFill>
+          </a:ln>
+        </p:spPr>
+        <p:style>
+          <a:lnRef idx="1">
+            <a:schemeClr val="accent1"/>
+          </a:lnRef>
+          <a:fillRef idx="3">
+            <a:schemeClr val="accent1"/>
+          </a:fillRef>
+          <a:effectRef idx="2">
+            <a:schemeClr val="accent1"/>
+          </a:effectRef>
+          <a:fontRef idx="minor">
+            <a:schemeClr val="lt1"/>
+          </a:fontRef>
+        </p:style>
+        <p:txBody>
+          <a:bodyPr rtlCol="0" anchor="ctr"/>
+          <a:lstStyle/>
+          <a:p>
+            <a:pPr algn="ctr"/>
+          </a:p>
+        </p:txBody>
+      </p:sp>
+      <p:sp>
+        <p:nvSpPr>
+          <p:cNvPr id="8" name="TextBox 7"/>
+          <p:cNvSpPr txBox="1"/>
+          <p:nvPr/>
+        </p:nvSpPr>
+        <p:spPr>
+          <a:xfrm>
+            <a:off x="896112" y="1993392"/>
+            <a:ext cx="10332720" cy="2971800"/>
+          </a:xfrm>
+          <a:prstGeom prst="rect">
+            <a:avLst/>
+          </a:prstGeom>
+          <a:noFill/>
+        </p:spPr>
+        <p:txBody>
+          <a:bodyPr wrap="square" lIns="109728" rIns="109728">
+            <a:spAutoFit/>
+          </a:bodyPr>
+          <a:lstStyle/>
+          <a:p>
+            <a:pPr>
+              <a:spcAft>
+                <a:spcPts val="800"/>
+              </a:spcAft>
+              <a:defRPr sz="1800">
+                <a:solidFill>
+                  <a:srgbClr val="122C4E"/>
+                </a:solidFill>
+                <a:latin typeface="Noto Sans CJK KR"/>
+              </a:defRPr>
+            </a:pPr>
+            <a:r>
+              <a:t>• □ 완료 화면: /imu/data의 z축 gyro 값과 noise 설정을 terminal에서 확인한다.</a:t>
+            </a:r>
+          </a:p>
+          <a:p>
+            <a:pPr>
+              <a:spcAft>
+                <a:spcPts val="800"/>
+              </a:spcAft>
+              <a:defRPr sz="1800">
+                <a:solidFill>
+                  <a:srgbClr val="122C4E"/>
+                </a:solidFill>
+                <a:latin typeface="Noto Sans CJK KR"/>
+              </a:defRPr>
+            </a:pPr>
+            <a:r>
+              <a:t>• □ Complete 파일: blocks/D_sensors/M14_imu_sensor/complete/</a:t>
+            </a:r>
+          </a:p>
+          <a:p>
+            <a:pPr>
+              <a:spcAft>
+                <a:spcPts val="800"/>
+              </a:spcAft>
+              <a:defRPr sz="1800">
+                <a:solidFill>
+                  <a:srgbClr val="122C4E"/>
+                </a:solidFill>
+                <a:latin typeface="Noto Sans CJK KR"/>
+              </a:defRPr>
+            </a:pPr>
+            <a:r>
+              <a:t>• □ 정상 로그·캡처: logs/validation.log, screenshots/validation_terminal.png</a:t>
+            </a:r>
+          </a:p>
+          <a:p>
+            <a:pPr>
+              <a:spcAft>
+                <a:spcPts val="800"/>
+              </a:spcAft>
+              <a:defRPr sz="1800">
+                <a:solidFill>
+                  <a:srgbClr val="122C4E"/>
+                </a:solidFill>
+                <a:latin typeface="Noto Sans CJK KR"/>
+              </a:defRPr>
+            </a:pPr>
+            <a:r>
+              <a:t>• □ 버전 식별: CHECKSUM_or_TAG.txt의 SHA-256 manifest</a:t>
+            </a:r>
+          </a:p>
+          <a:p>
+            <a:pPr>
+              <a:spcAft>
+                <a:spcPts val="800"/>
+              </a:spcAft>
+              <a:defRPr sz="1800">
+                <a:solidFill>
+                  <a:srgbClr val="122C4E"/>
+                </a:solidFill>
+                <a:latin typeface="Noto Sans CJK KR"/>
+              </a:defRPr>
+            </a:pPr>
+            <a:r>
+              <a:t>• □ 다음 시작 조건: M15 운영/QoS</a:t>
+            </a:r>
+          </a:p>
+        </p:txBody>
+      </p:sp>
+      <p:sp>
+        <p:nvSpPr>
+          <p:cNvPr id="9" name="TextBox 8"/>
+          <p:cNvSpPr txBox="1"/>
+          <p:nvPr/>
+        </p:nvSpPr>
+        <p:spPr>
+          <a:xfrm>
+            <a:off x="868680" y="5596128"/>
+            <a:ext cx="10515600" cy="338328"/>
+          </a:xfrm>
+          <a:prstGeom prst="rect">
+            <a:avLst/>
+          </a:prstGeom>
+          <a:noFill/>
+        </p:spPr>
+        <p:txBody>
+          <a:bodyPr wrap="square" lIns="73152" rIns="73152" tIns="36576" bIns="36576">
+            <a:spAutoFit/>
+          </a:bodyPr>
+          <a:lstStyle/>
+          <a:p>
+            <a:pPr algn="ctr">
+              <a:spcAft>
+                <a:spcPts val="0"/>
+              </a:spcAft>
+              <a:defRPr sz="1700" b="1">
+                <a:solidFill>
+                  <a:srgbClr val="2A8B5A"/>
+                </a:solidFill>
+                <a:latin typeface="Noto Sans CJK KR"/>
+              </a:defRPr>
+            </a:pPr>
+            <a:r>
+              <a:t>다음 모듈을 시작하기 전, 이 슬라이드의 Complete와 다음 모듈의 Starter를 비교합니다.</a:t>
+            </a:r>
+          </a:p>
+        </p:txBody>
+      </p:sp>
+    </p:spTree>
+  </p:cSld>
+  <p:clrMapOvr>
+    <a:masterClrMapping/>
+  </p:clrMapOvr>
+</p:sld>
+</file>
+
+<file path=ppt/slides/slide46.xml><?xml version="1.0" encoding="utf-8"?>
+<p:sld xmlns:a="http://schemas.openxmlformats.org/drawingml/2006/main" xmlns:p="http://schemas.openxmlformats.org/presentationml/2006/main" xmlns:r="http://schemas.openxmlformats.org/officeDocument/2006/relationships">
+  <p:cSld>
+    <p:spTree>
+      <p:nvGrpSpPr>
+        <p:cNvPr id="1" name=""/>
+        <p:cNvGrpSpPr/>
+        <p:nvPr/>
+      </p:nvGrpSpPr>
+      <p:grpSpPr/>
+      <p:sp>
+        <p:nvSpPr>
+          <p:cNvPr id="2" name="TextBox 1"/>
+          <p:cNvSpPr txBox="1"/>
+          <p:nvPr/>
+        </p:nvSpPr>
+        <p:spPr>
+          <a:xfrm>
+            <a:off x="566928" y="347472"/>
+            <a:ext cx="10881360" cy="438912"/>
+          </a:xfrm>
+          <a:prstGeom prst="rect">
+            <a:avLst/>
+          </a:prstGeom>
+          <a:noFill/>
+        </p:spPr>
+        <p:txBody>
+          <a:bodyPr wrap="square" lIns="73152" rIns="73152" tIns="36576" bIns="36576">
+            <a:spAutoFit/>
+          </a:bodyPr>
+          <a:lstStyle/>
+          <a:p>
+            <a:pPr algn="l">
+              <a:spcAft>
+                <a:spcPts val="0"/>
+              </a:spcAft>
+              <a:defRPr sz="3200" b="1">
+                <a:solidFill>
+                  <a:srgbClr val="122C4E"/>
+                </a:solidFill>
+                <a:latin typeface="Noto Sans CJK KR"/>
+              </a:defRPr>
+            </a:pPr>
+            <a:r>
               <a:t>공식 참고 자료</a:t>
             </a:r>
           </a:p>
@@ -26357,7 +26685,7 @@
               </a:defRPr>
             </a:pPr>
             <a:r>
-              <a:t>~/agv_ws/src/</a:t>
+              <a:t>~/ros2_curri/agv_ws/src/</a:t>
             </a:r>
             <a:br/>
             <a:r>
@@ -26640,7 +26968,7 @@
               </a:defRPr>
             </a:pPr>
             <a:r>
-              <a:t>현재 단계 1/2    |    현재 폴더 ~/agv_ws    |    현재 터미널</a:t>
+              <a:t>현재 단계 1/2    |    현재 폴더 ~/ros2_curri/agv_ws    |    현재 터미널</a:t>
             </a:r>
           </a:p>
         </p:txBody>
@@ -27090,7 +27418,7 @@
               </a:defRPr>
             </a:pPr>
             <a:r>
-              <a:t>현재 단계 2/2    |    현재 폴더 ~/agv_ws    |    현재 터미널</a:t>
+              <a:t>현재 단계 2/2    |    현재 폴더 ~/ros2_curri/agv_ws    |    현재 터미널</a:t>
             </a:r>
           </a:p>
         </p:txBody>
@@ -27226,7 +27554,7 @@
               </a:defRPr>
             </a:pPr>
             <a:r>
-              <a:t>source ~/agv_ws/install/setup.bash</a:t>
+              <a:t>source ~/ros2_curri/agv_ws/install/setup.bash</a:t>
             </a:r>
             <a:br/>
             <a:r>
@@ -27404,7 +27732,7 @@
               </a:defRPr>
             </a:pPr>
             <a:r>
-              <a:t>~/agv_ws/src/agv_gazebo/models/agv/model.sdf</a:t>
+              <a:t>~/ros2_curri/agv_ws/src/agv_gazebo/models/agv/model.sdf</a:t>
             </a:r>
           </a:p>
         </p:txBody>
@@ -27540,7 +27868,7 @@
               </a:defRPr>
             </a:pPr>
             <a:r>
-              <a:t>현재 단계 3/27    |    현재 폴더 ~/agv_ws    |    현재 터미널</a:t>
+              <a:t>현재 단계 3/27    |    현재 폴더 ~/ros2_curri/agv_ws    |    현재 터미널</a:t>
             </a:r>
           </a:p>
         </p:txBody>
@@ -27637,11 +27965,11 @@
               </a:defRPr>
             </a:pPr>
             <a:r>
-              <a:t>파일 생성: mkdir -p ~/agv_ws/src/agv_gazebo/models/agv</a:t>
-            </a:r>
-            <a:br/>
-            <a:r>
-              <a:t>파일 열기: nano ~/agv_ws/src/agv_gazebo/models/agv/model.sdf</a:t>
+              <a:t>파일 생성: mkdir -p ~/ros2_curri/agv_ws/src/agv_gazebo/models/agv</a:t>
+            </a:r>
+            <a:br/>
+            <a:r>
+              <a:t>파일 열기: nano ~/ros2_curri/agv_ws/src/agv_gazebo/models/agv/model.sdf</a:t>
             </a:r>
           </a:p>
         </p:txBody>

--- a/blocks/D_sensors/M14_imu_sensor/M14_IMU_Sensor.pptx
+++ b/blocks/D_sensors/M14_imu_sensor/M14_IMU_Sensor.pptx
@@ -10827,7 +10827,7 @@
               <a:spcAft>
                 <a:spcPts val="0"/>
               </a:spcAft>
-              <a:defRPr sz="1800" b="1">
+              <a:defRPr sz="1400" b="1">
                 <a:solidFill>
                   <a:srgbClr val="FFFFFF"/>
                 </a:solidFill>
@@ -10835,7 +10835,7 @@
               </a:defRPr>
             </a:pPr>
             <a:r>
-              <a:t>M14 · Block D · ROS 2 + Gazebo Sim AGV</a:t>
+              <a:t>ROS 2 기반 AGV End-to-End 개발 커리큘럼 · M14 · Block D</a:t>
             </a:r>
           </a:p>
         </p:txBody>
@@ -11045,7 +11045,7 @@
               <a:spcAft>
                 <a:spcPts val="0"/>
               </a:spcAft>
-              <a:defRPr sz="1000" b="0">
+              <a:defRPr sz="900" b="0">
                 <a:solidFill>
                   <a:srgbClr val="5C6672"/>
                 </a:solidFill>
@@ -11053,7 +11053,7 @@
               </a:defRPr>
             </a:pPr>
             <a:r>
-              <a:t>ROS 2 Jazzy · Gazebo Harmonic · M14 · 따라 하기형 AGV 실습</a:t>
+              <a:t>ROS 2 기반 AGV End-to-End 개발 커리큘럼 · M14 · Block D</a:t>
             </a:r>
           </a:p>
         </p:txBody>
@@ -11219,7 +11219,7 @@
               <a:spcAft>
                 <a:spcPts val="0"/>
               </a:spcAft>
-              <a:defRPr sz="1000" b="0">
+              <a:defRPr sz="900" b="0">
                 <a:solidFill>
                   <a:srgbClr val="5C6672"/>
                 </a:solidFill>
@@ -11227,7 +11227,7 @@
               </a:defRPr>
             </a:pPr>
             <a:r>
-              <a:t>ROS 2 Jazzy · Gazebo Harmonic · M14 · 따라 하기형 AGV 실습</a:t>
+              <a:t>ROS 2 기반 AGV End-to-End 개발 커리큘럼 · M14 · Block D</a:t>
             </a:r>
           </a:p>
         </p:txBody>
@@ -12095,7 +12095,7 @@
               <a:spcAft>
                 <a:spcPts val="0"/>
               </a:spcAft>
-              <a:defRPr sz="1000" b="0">
+              <a:defRPr sz="900" b="0">
                 <a:solidFill>
                   <a:srgbClr val="5C6672"/>
                 </a:solidFill>
@@ -12103,7 +12103,7 @@
               </a:defRPr>
             </a:pPr>
             <a:r>
-              <a:t>ROS 2 Jazzy · Gazebo Harmonic · M14 · 따라 하기형 AGV 실습</a:t>
+              <a:t>ROS 2 기반 AGV End-to-End 개발 커리큘럼 · M14 · Block D</a:t>
             </a:r>
           </a:p>
         </p:txBody>
@@ -12858,7 +12858,7 @@
               <a:spcAft>
                 <a:spcPts val="0"/>
               </a:spcAft>
-              <a:defRPr sz="1000" b="0">
+              <a:defRPr sz="900" b="0">
                 <a:solidFill>
                   <a:srgbClr val="5C6672"/>
                 </a:solidFill>
@@ -12866,7 +12866,7 @@
               </a:defRPr>
             </a:pPr>
             <a:r>
-              <a:t>ROS 2 Jazzy · Gazebo Harmonic · M14 · 따라 하기형 AGV 실습</a:t>
+              <a:t>ROS 2 기반 AGV End-to-End 개발 커리큘럼 · M14 · Block D</a:t>
             </a:r>
           </a:p>
         </p:txBody>
@@ -13386,7 +13386,7 @@
               <a:spcAft>
                 <a:spcPts val="0"/>
               </a:spcAft>
-              <a:defRPr sz="1000" b="0">
+              <a:defRPr sz="900" b="0">
                 <a:solidFill>
                   <a:srgbClr val="5C6672"/>
                 </a:solidFill>
@@ -13394,7 +13394,7 @@
               </a:defRPr>
             </a:pPr>
             <a:r>
-              <a:t>ROS 2 Jazzy · Gazebo Harmonic · M14 · 따라 하기형 AGV 실습</a:t>
+              <a:t>ROS 2 기반 AGV End-to-End 개발 커리큘럼 · M14 · Block D</a:t>
             </a:r>
           </a:p>
         </p:txBody>
@@ -14175,7 +14175,7 @@
               <a:spcAft>
                 <a:spcPts val="0"/>
               </a:spcAft>
-              <a:defRPr sz="1000" b="0">
+              <a:defRPr sz="900" b="0">
                 <a:solidFill>
                   <a:srgbClr val="5C6672"/>
                 </a:solidFill>
@@ -14183,7 +14183,7 @@
               </a:defRPr>
             </a:pPr>
             <a:r>
-              <a:t>ROS 2 Jazzy · Gazebo Harmonic · M14 · 따라 하기형 AGV 실습</a:t>
+              <a:t>ROS 2 기반 AGV End-to-End 개발 커리큘럼 · M14 · Block D</a:t>
             </a:r>
           </a:p>
         </p:txBody>
@@ -14964,7 +14964,7 @@
               <a:spcAft>
                 <a:spcPts val="0"/>
               </a:spcAft>
-              <a:defRPr sz="1000" b="0">
+              <a:defRPr sz="900" b="0">
                 <a:solidFill>
                   <a:srgbClr val="5C6672"/>
                 </a:solidFill>
@@ -14972,7 +14972,7 @@
               </a:defRPr>
             </a:pPr>
             <a:r>
-              <a:t>ROS 2 Jazzy · Gazebo Harmonic · M14 · 따라 하기형 AGV 실습</a:t>
+              <a:t>ROS 2 기반 AGV End-to-End 개발 커리큘럼 · M14 · Block D</a:t>
             </a:r>
           </a:p>
         </p:txBody>
@@ -15753,7 +15753,7 @@
               <a:spcAft>
                 <a:spcPts val="0"/>
               </a:spcAft>
-              <a:defRPr sz="1000" b="0">
+              <a:defRPr sz="900" b="0">
                 <a:solidFill>
                   <a:srgbClr val="5C6672"/>
                 </a:solidFill>
@@ -15761,7 +15761,7 @@
               </a:defRPr>
             </a:pPr>
             <a:r>
-              <a:t>ROS 2 Jazzy · Gazebo Harmonic · M14 · 따라 하기형 AGV 실습</a:t>
+              <a:t>ROS 2 기반 AGV End-to-End 개발 커리큘럼 · M14 · Block D</a:t>
             </a:r>
           </a:p>
         </p:txBody>
@@ -16542,7 +16542,7 @@
               <a:spcAft>
                 <a:spcPts val="0"/>
               </a:spcAft>
-              <a:defRPr sz="1000" b="0">
+              <a:defRPr sz="900" b="0">
                 <a:solidFill>
                   <a:srgbClr val="5C6672"/>
                 </a:solidFill>
@@ -16550,7 +16550,7 @@
               </a:defRPr>
             </a:pPr>
             <a:r>
-              <a:t>ROS 2 Jazzy · Gazebo Harmonic · M14 · 따라 하기형 AGV 실습</a:t>
+              <a:t>ROS 2 기반 AGV End-to-End 개발 커리큘럼 · M14 · Block D</a:t>
             </a:r>
           </a:p>
         </p:txBody>
@@ -17111,7 +17111,7 @@
               <a:spcAft>
                 <a:spcPts val="0"/>
               </a:spcAft>
-              <a:defRPr sz="1000" b="0">
+              <a:defRPr sz="900" b="0">
                 <a:solidFill>
                   <a:srgbClr val="5C6672"/>
                 </a:solidFill>
@@ -17119,7 +17119,7 @@
               </a:defRPr>
             </a:pPr>
             <a:r>
-              <a:t>ROS 2 Jazzy · Gazebo Harmonic · M14 · 따라 하기형 AGV 실습</a:t>
+              <a:t>ROS 2 기반 AGV End-to-End 개발 커리큘럼 · M14 · Block D</a:t>
             </a:r>
           </a:p>
         </p:txBody>
@@ -17585,7 +17585,7 @@
               <a:spcAft>
                 <a:spcPts val="0"/>
               </a:spcAft>
-              <a:defRPr sz="1000" b="0">
+              <a:defRPr sz="900" b="0">
                 <a:solidFill>
                   <a:srgbClr val="5C6672"/>
                 </a:solidFill>
@@ -17593,7 +17593,7 @@
               </a:defRPr>
             </a:pPr>
             <a:r>
-              <a:t>ROS 2 Jazzy · Gazebo Harmonic · M14 · 따라 하기형 AGV 실습</a:t>
+              <a:t>ROS 2 기반 AGV End-to-End 개발 커리큘럼 · M14 · Block D</a:t>
             </a:r>
           </a:p>
         </p:txBody>
@@ -18059,7 +18059,7 @@
               <a:spcAft>
                 <a:spcPts val="0"/>
               </a:spcAft>
-              <a:defRPr sz="1000" b="0">
+              <a:defRPr sz="900" b="0">
                 <a:solidFill>
                   <a:srgbClr val="5C6672"/>
                 </a:solidFill>
@@ -18067,7 +18067,7 @@
               </a:defRPr>
             </a:pPr>
             <a:r>
-              <a:t>ROS 2 Jazzy · Gazebo Harmonic · M14 · 따라 하기형 AGV 실습</a:t>
+              <a:t>ROS 2 기반 AGV End-to-End 개발 커리큘럼 · M14 · Block D</a:t>
             </a:r>
           </a:p>
         </p:txBody>
@@ -18520,7 +18520,7 @@
               <a:spcAft>
                 <a:spcPts val="0"/>
               </a:spcAft>
-              <a:defRPr sz="1000" b="0">
+              <a:defRPr sz="900" b="0">
                 <a:solidFill>
                   <a:srgbClr val="5C6672"/>
                 </a:solidFill>
@@ -18528,7 +18528,7 @@
               </a:defRPr>
             </a:pPr>
             <a:r>
-              <a:t>ROS 2 Jazzy · Gazebo Harmonic · M14 · 따라 하기형 AGV 실습</a:t>
+              <a:t>ROS 2 기반 AGV End-to-End 개발 커리큘럼 · M14 · Block D</a:t>
             </a:r>
           </a:p>
         </p:txBody>
@@ -18994,7 +18994,7 @@
               <a:spcAft>
                 <a:spcPts val="0"/>
               </a:spcAft>
-              <a:defRPr sz="1000" b="0">
+              <a:defRPr sz="900" b="0">
                 <a:solidFill>
                   <a:srgbClr val="5C6672"/>
                 </a:solidFill>
@@ -19002,7 +19002,7 @@
               </a:defRPr>
             </a:pPr>
             <a:r>
-              <a:t>ROS 2 Jazzy · Gazebo Harmonic · M14 · 따라 하기형 AGV 실습</a:t>
+              <a:t>ROS 2 기반 AGV End-to-End 개발 커리큘럼 · M14 · Block D</a:t>
             </a:r>
           </a:p>
         </p:txBody>
@@ -19468,7 +19468,7 @@
               <a:spcAft>
                 <a:spcPts val="0"/>
               </a:spcAft>
-              <a:defRPr sz="1000" b="0">
+              <a:defRPr sz="900" b="0">
                 <a:solidFill>
                   <a:srgbClr val="5C6672"/>
                 </a:solidFill>
@@ -19476,7 +19476,7 @@
               </a:defRPr>
             </a:pPr>
             <a:r>
-              <a:t>ROS 2 Jazzy · Gazebo Harmonic · M14 · 따라 하기형 AGV 실습</a:t>
+              <a:t>ROS 2 기반 AGV End-to-End 개발 커리큘럼 · M14 · Block D</a:t>
             </a:r>
           </a:p>
         </p:txBody>
@@ -19942,7 +19942,7 @@
               <a:spcAft>
                 <a:spcPts val="0"/>
               </a:spcAft>
-              <a:defRPr sz="1000" b="0">
+              <a:defRPr sz="900" b="0">
                 <a:solidFill>
                   <a:srgbClr val="5C6672"/>
                 </a:solidFill>
@@ -19950,7 +19950,7 @@
               </a:defRPr>
             </a:pPr>
             <a:r>
-              <a:t>ROS 2 Jazzy · Gazebo Harmonic · M14 · 따라 하기형 AGV 실습</a:t>
+              <a:t>ROS 2 기반 AGV End-to-End 개발 커리큘럼 · M14 · Block D</a:t>
             </a:r>
           </a:p>
         </p:txBody>
@@ -20416,7 +20416,7 @@
               <a:spcAft>
                 <a:spcPts val="0"/>
               </a:spcAft>
-              <a:defRPr sz="1000" b="0">
+              <a:defRPr sz="900" b="0">
                 <a:solidFill>
                   <a:srgbClr val="5C6672"/>
                 </a:solidFill>
@@ -20424,7 +20424,7 @@
               </a:defRPr>
             </a:pPr>
             <a:r>
-              <a:t>ROS 2 Jazzy · Gazebo Harmonic · M14 · 따라 하기형 AGV 실습</a:t>
+              <a:t>ROS 2 기반 AGV End-to-End 개발 커리큘럼 · M14 · Block D</a:t>
             </a:r>
           </a:p>
         </p:txBody>
@@ -20890,7 +20890,7 @@
               <a:spcAft>
                 <a:spcPts val="0"/>
               </a:spcAft>
-              <a:defRPr sz="1000" b="0">
+              <a:defRPr sz="900" b="0">
                 <a:solidFill>
                   <a:srgbClr val="5C6672"/>
                 </a:solidFill>
@@ -20898,7 +20898,7 @@
               </a:defRPr>
             </a:pPr>
             <a:r>
-              <a:t>ROS 2 Jazzy · Gazebo Harmonic · M14 · 따라 하기형 AGV 실습</a:t>
+              <a:t>ROS 2 기반 AGV End-to-End 개발 커리큘럼 · M14 · Block D</a:t>
             </a:r>
           </a:p>
         </p:txBody>
@@ -21364,7 +21364,7 @@
               <a:spcAft>
                 <a:spcPts val="0"/>
               </a:spcAft>
-              <a:defRPr sz="1000" b="0">
+              <a:defRPr sz="900" b="0">
                 <a:solidFill>
                   <a:srgbClr val="5C6672"/>
                 </a:solidFill>
@@ -21372,7 +21372,7 @@
               </a:defRPr>
             </a:pPr>
             <a:r>
-              <a:t>ROS 2 Jazzy · Gazebo Harmonic · M14 · 따라 하기형 AGV 실습</a:t>
+              <a:t>ROS 2 기반 AGV End-to-End 개발 커리큘럼 · M14 · Block D</a:t>
             </a:r>
           </a:p>
         </p:txBody>
@@ -21838,7 +21838,7 @@
               <a:spcAft>
                 <a:spcPts val="0"/>
               </a:spcAft>
-              <a:defRPr sz="1000" b="0">
+              <a:defRPr sz="900" b="0">
                 <a:solidFill>
                   <a:srgbClr val="5C6672"/>
                 </a:solidFill>
@@ -21846,7 +21846,7 @@
               </a:defRPr>
             </a:pPr>
             <a:r>
-              <a:t>ROS 2 Jazzy · Gazebo Harmonic · M14 · 따라 하기형 AGV 실습</a:t>
+              <a:t>ROS 2 기반 AGV End-to-End 개발 커리큘럼 · M14 · Block D</a:t>
             </a:r>
           </a:p>
         </p:txBody>
@@ -22312,7 +22312,7 @@
               <a:spcAft>
                 <a:spcPts val="0"/>
               </a:spcAft>
-              <a:defRPr sz="1000" b="0">
+              <a:defRPr sz="900" b="0">
                 <a:solidFill>
                   <a:srgbClr val="5C6672"/>
                 </a:solidFill>
@@ -22320,7 +22320,7 @@
               </a:defRPr>
             </a:pPr>
             <a:r>
-              <a:t>ROS 2 Jazzy · Gazebo Harmonic · M14 · 따라 하기형 AGV 실습</a:t>
+              <a:t>ROS 2 기반 AGV End-to-End 개발 커리큘럼 · M14 · Block D</a:t>
             </a:r>
           </a:p>
         </p:txBody>
@@ -22786,7 +22786,7 @@
               <a:spcAft>
                 <a:spcPts val="0"/>
               </a:spcAft>
-              <a:defRPr sz="1000" b="0">
+              <a:defRPr sz="900" b="0">
                 <a:solidFill>
                   <a:srgbClr val="5C6672"/>
                 </a:solidFill>
@@ -22794,7 +22794,7 @@
               </a:defRPr>
             </a:pPr>
             <a:r>
-              <a:t>ROS 2 Jazzy · Gazebo Harmonic · M14 · 따라 하기형 AGV 실습</a:t>
+              <a:t>ROS 2 기반 AGV End-to-End 개발 커리큘럼 · M14 · Block D</a:t>
             </a:r>
           </a:p>
         </p:txBody>
@@ -23260,7 +23260,7 @@
               <a:spcAft>
                 <a:spcPts val="0"/>
               </a:spcAft>
-              <a:defRPr sz="1000" b="0">
+              <a:defRPr sz="900" b="0">
                 <a:solidFill>
                   <a:srgbClr val="5C6672"/>
                 </a:solidFill>
@@ -23268,7 +23268,7 @@
               </a:defRPr>
             </a:pPr>
             <a:r>
-              <a:t>ROS 2 Jazzy · Gazebo Harmonic · M14 · 따라 하기형 AGV 실습</a:t>
+              <a:t>ROS 2 기반 AGV End-to-End 개발 커리큘럼 · M14 · Block D</a:t>
             </a:r>
           </a:p>
         </p:txBody>
@@ -23679,7 +23679,7 @@
               <a:spcAft>
                 <a:spcPts val="0"/>
               </a:spcAft>
-              <a:defRPr sz="1000" b="0">
+              <a:defRPr sz="900" b="0">
                 <a:solidFill>
                   <a:srgbClr val="5C6672"/>
                 </a:solidFill>
@@ -23687,7 +23687,7 @@
               </a:defRPr>
             </a:pPr>
             <a:r>
-              <a:t>ROS 2 Jazzy · Gazebo Harmonic · M14 · 따라 하기형 AGV 실습</a:t>
+              <a:t>ROS 2 기반 AGV End-to-End 개발 커리큘럼 · M14 · Block D</a:t>
             </a:r>
           </a:p>
         </p:txBody>
@@ -24153,7 +24153,7 @@
               <a:spcAft>
                 <a:spcPts val="0"/>
               </a:spcAft>
-              <a:defRPr sz="1000" b="0">
+              <a:defRPr sz="900" b="0">
                 <a:solidFill>
                   <a:srgbClr val="5C6672"/>
                 </a:solidFill>
@@ -24161,7 +24161,7 @@
               </a:defRPr>
             </a:pPr>
             <a:r>
-              <a:t>ROS 2 Jazzy · Gazebo Harmonic · M14 · 따라 하기형 AGV 실습</a:t>
+              <a:t>ROS 2 기반 AGV End-to-End 개발 커리큘럼 · M14 · Block D</a:t>
             </a:r>
           </a:p>
         </p:txBody>
@@ -24627,7 +24627,7 @@
               <a:spcAft>
                 <a:spcPts val="0"/>
               </a:spcAft>
-              <a:defRPr sz="1000" b="0">
+              <a:defRPr sz="900" b="0">
                 <a:solidFill>
                   <a:srgbClr val="5C6672"/>
                 </a:solidFill>
@@ -24635,7 +24635,7 @@
               </a:defRPr>
             </a:pPr>
             <a:r>
-              <a:t>ROS 2 Jazzy · Gazebo Harmonic · M14 · 따라 하기형 AGV 실습</a:t>
+              <a:t>ROS 2 기반 AGV End-to-End 개발 커리큘럼 · M14 · Block D</a:t>
             </a:r>
           </a:p>
         </p:txBody>
@@ -25101,7 +25101,7 @@
               <a:spcAft>
                 <a:spcPts val="0"/>
               </a:spcAft>
-              <a:defRPr sz="1000" b="0">
+              <a:defRPr sz="900" b="0">
                 <a:solidFill>
                   <a:srgbClr val="5C6672"/>
                 </a:solidFill>
@@ -25109,7 +25109,7 @@
               </a:defRPr>
             </a:pPr>
             <a:r>
-              <a:t>ROS 2 Jazzy · Gazebo Harmonic · M14 · 따라 하기형 AGV 실습</a:t>
+              <a:t>ROS 2 기반 AGV End-to-End 개발 커리큘럼 · M14 · Block D</a:t>
             </a:r>
           </a:p>
         </p:txBody>
@@ -25575,7 +25575,7 @@
               <a:spcAft>
                 <a:spcPts val="0"/>
               </a:spcAft>
-              <a:defRPr sz="1000" b="0">
+              <a:defRPr sz="900" b="0">
                 <a:solidFill>
                   <a:srgbClr val="5C6672"/>
                 </a:solidFill>
@@ -25583,7 +25583,7 @@
               </a:defRPr>
             </a:pPr>
             <a:r>
-              <a:t>ROS 2 Jazzy · Gazebo Harmonic · M14 · 따라 하기형 AGV 실습</a:t>
+              <a:t>ROS 2 기반 AGV End-to-End 개발 커리큘럼 · M14 · Block D</a:t>
             </a:r>
           </a:p>
         </p:txBody>
@@ -26049,7 +26049,7 @@
               <a:spcAft>
                 <a:spcPts val="0"/>
               </a:spcAft>
-              <a:defRPr sz="1000" b="0">
+              <a:defRPr sz="900" b="0">
                 <a:solidFill>
                   <a:srgbClr val="5C6672"/>
                 </a:solidFill>
@@ -26057,7 +26057,7 @@
               </a:defRPr>
             </a:pPr>
             <a:r>
-              <a:t>ROS 2 Jazzy · Gazebo Harmonic · M14 · 따라 하기형 AGV 실습</a:t>
+              <a:t>ROS 2 기반 AGV End-to-End 개발 커리큘럼 · M14 · Block D</a:t>
             </a:r>
           </a:p>
         </p:txBody>
@@ -26523,7 +26523,7 @@
               <a:spcAft>
                 <a:spcPts val="0"/>
               </a:spcAft>
-              <a:defRPr sz="1000" b="0">
+              <a:defRPr sz="900" b="0">
                 <a:solidFill>
                   <a:srgbClr val="5C6672"/>
                 </a:solidFill>
@@ -26531,7 +26531,7 @@
               </a:defRPr>
             </a:pPr>
             <a:r>
-              <a:t>ROS 2 Jazzy · Gazebo Harmonic · M14 · 따라 하기형 AGV 실습</a:t>
+              <a:t>ROS 2 기반 AGV End-to-End 개발 커리큘럼 · M14 · Block D</a:t>
             </a:r>
           </a:p>
         </p:txBody>
@@ -26997,7 +26997,7 @@
               <a:spcAft>
                 <a:spcPts val="0"/>
               </a:spcAft>
-              <a:defRPr sz="1000" b="0">
+              <a:defRPr sz="900" b="0">
                 <a:solidFill>
                   <a:srgbClr val="5C6672"/>
                 </a:solidFill>
@@ -27005,7 +27005,7 @@
               </a:defRPr>
             </a:pPr>
             <a:r>
-              <a:t>ROS 2 Jazzy · Gazebo Harmonic · M14 · 따라 하기형 AGV 실습</a:t>
+              <a:t>ROS 2 기반 AGV End-to-End 개발 커리큘럼 · M14 · Block D</a:t>
             </a:r>
           </a:p>
         </p:txBody>
@@ -27471,7 +27471,7 @@
               <a:spcAft>
                 <a:spcPts val="0"/>
               </a:spcAft>
-              <a:defRPr sz="1000" b="0">
+              <a:defRPr sz="900" b="0">
                 <a:solidFill>
                   <a:srgbClr val="5C6672"/>
                 </a:solidFill>
@@ -27479,7 +27479,7 @@
               </a:defRPr>
             </a:pPr>
             <a:r>
-              <a:t>ROS 2 Jazzy · Gazebo Harmonic · M14 · 따라 하기형 AGV 실습</a:t>
+              <a:t>ROS 2 기반 AGV End-to-End 개발 커리큘럼 · M14 · Block D</a:t>
             </a:r>
           </a:p>
         </p:txBody>
@@ -27945,7 +27945,7 @@
               <a:spcAft>
                 <a:spcPts val="0"/>
               </a:spcAft>
-              <a:defRPr sz="1000" b="0">
+              <a:defRPr sz="900" b="0">
                 <a:solidFill>
                   <a:srgbClr val="5C6672"/>
                 </a:solidFill>
@@ -27953,7 +27953,7 @@
               </a:defRPr>
             </a:pPr>
             <a:r>
-              <a:t>ROS 2 Jazzy · Gazebo Harmonic · M14 · 따라 하기형 AGV 실습</a:t>
+              <a:t>ROS 2 기반 AGV End-to-End 개발 커리큘럼 · M14 · Block D</a:t>
             </a:r>
           </a:p>
         </p:txBody>
@@ -28419,7 +28419,7 @@
               <a:spcAft>
                 <a:spcPts val="0"/>
               </a:spcAft>
-              <a:defRPr sz="1000" b="0">
+              <a:defRPr sz="900" b="0">
                 <a:solidFill>
                   <a:srgbClr val="5C6672"/>
                 </a:solidFill>
@@ -28427,7 +28427,7 @@
               </a:defRPr>
             </a:pPr>
             <a:r>
-              <a:t>ROS 2 Jazzy · Gazebo Harmonic · M14 · 따라 하기형 AGV 실습</a:t>
+              <a:t>ROS 2 기반 AGV End-to-End 개발 커리큘럼 · M14 · Block D</a:t>
             </a:r>
           </a:p>
         </p:txBody>
@@ -28752,7 +28752,7 @@
               <a:spcAft>
                 <a:spcPts val="0"/>
               </a:spcAft>
-              <a:defRPr sz="1000" b="0">
+              <a:defRPr sz="900" b="0">
                 <a:solidFill>
                   <a:srgbClr val="5C6672"/>
                 </a:solidFill>
@@ -28760,7 +28760,7 @@
               </a:defRPr>
             </a:pPr>
             <a:r>
-              <a:t>ROS 2 Jazzy · Gazebo Harmonic · M14 · 따라 하기형 AGV 실습</a:t>
+              <a:t>ROS 2 기반 AGV End-to-End 개발 커리큘럼 · M14 · Block D</a:t>
             </a:r>
           </a:p>
         </p:txBody>
@@ -29226,7 +29226,7 @@
               <a:spcAft>
                 <a:spcPts val="0"/>
               </a:spcAft>
-              <a:defRPr sz="1000" b="0">
+              <a:defRPr sz="900" b="0">
                 <a:solidFill>
                   <a:srgbClr val="5C6672"/>
                 </a:solidFill>
@@ -29234,7 +29234,7 @@
               </a:defRPr>
             </a:pPr>
             <a:r>
-              <a:t>ROS 2 Jazzy · Gazebo Harmonic · M14 · 따라 하기형 AGV 실습</a:t>
+              <a:t>ROS 2 기반 AGV End-to-End 개발 커리큘럼 · M14 · Block D</a:t>
             </a:r>
           </a:p>
         </p:txBody>
@@ -29697,7 +29697,7 @@
               <a:spcAft>
                 <a:spcPts val="0"/>
               </a:spcAft>
-              <a:defRPr sz="1000" b="0">
+              <a:defRPr sz="900" b="0">
                 <a:solidFill>
                   <a:srgbClr val="5C6672"/>
                 </a:solidFill>
@@ -29705,7 +29705,7 @@
               </a:defRPr>
             </a:pPr>
             <a:r>
-              <a:t>ROS 2 Jazzy · Gazebo Harmonic · M14 · 따라 하기형 AGV 실습</a:t>
+              <a:t>ROS 2 기반 AGV End-to-End 개발 커리큘럼 · M14 · Block D</a:t>
             </a:r>
           </a:p>
         </p:txBody>
@@ -30225,7 +30225,7 @@
               <a:spcAft>
                 <a:spcPts val="0"/>
               </a:spcAft>
-              <a:defRPr sz="1000" b="0">
+              <a:defRPr sz="900" b="0">
                 <a:solidFill>
                   <a:srgbClr val="5C6672"/>
                 </a:solidFill>
@@ -30233,7 +30233,7 @@
               </a:defRPr>
             </a:pPr>
             <a:r>
-              <a:t>ROS 2 Jazzy · Gazebo Harmonic · M14 · 따라 하기형 AGV 실습</a:t>
+              <a:t>ROS 2 기반 AGV End-to-End 개발 커리큘럼 · M14 · Block D</a:t>
             </a:r>
           </a:p>
         </p:txBody>
@@ -31018,7 +31018,7 @@
               <a:spcAft>
                 <a:spcPts val="0"/>
               </a:spcAft>
-              <a:defRPr sz="1000" b="0">
+              <a:defRPr sz="900" b="0">
                 <a:solidFill>
                   <a:srgbClr val="5C6672"/>
                 </a:solidFill>
@@ -31026,7 +31026,7 @@
               </a:defRPr>
             </a:pPr>
             <a:r>
-              <a:t>ROS 2 Jazzy · Gazebo Harmonic · M14 · 따라 하기형 AGV 실습</a:t>
+              <a:t>ROS 2 기반 AGV End-to-End 개발 커리큘럼 · M14 · Block D</a:t>
             </a:r>
           </a:p>
         </p:txBody>
@@ -31807,7 +31807,7 @@
               <a:spcAft>
                 <a:spcPts val="0"/>
               </a:spcAft>
-              <a:defRPr sz="1000" b="0">
+              <a:defRPr sz="900" b="0">
                 <a:solidFill>
                   <a:srgbClr val="5C6672"/>
                 </a:solidFill>
@@ -31815,7 +31815,7 @@
               </a:defRPr>
             </a:pPr>
             <a:r>
-              <a:t>ROS 2 Jazzy · Gazebo Harmonic · M14 · 따라 하기형 AGV 실습</a:t>
+              <a:t>ROS 2 기반 AGV End-to-End 개발 커리큘럼 · M14 · Block D</a:t>
             </a:r>
           </a:p>
         </p:txBody>
@@ -32596,7 +32596,7 @@
               <a:spcAft>
                 <a:spcPts val="0"/>
               </a:spcAft>
-              <a:defRPr sz="1000" b="0">
+              <a:defRPr sz="900" b="0">
                 <a:solidFill>
                   <a:srgbClr val="5C6672"/>
                 </a:solidFill>
@@ -32604,7 +32604,7 @@
               </a:defRPr>
             </a:pPr>
             <a:r>
-              <a:t>ROS 2 Jazzy · Gazebo Harmonic · M14 · 따라 하기형 AGV 실습</a:t>
+              <a:t>ROS 2 기반 AGV End-to-End 개발 커리큘럼 · M14 · Block D</a:t>
             </a:r>
           </a:p>
         </p:txBody>
@@ -33070,7 +33070,7 @@
               <a:spcAft>
                 <a:spcPts val="0"/>
               </a:spcAft>
-              <a:defRPr sz="1000" b="0">
+              <a:defRPr sz="900" b="0">
                 <a:solidFill>
                   <a:srgbClr val="5C6672"/>
                 </a:solidFill>
@@ -33078,7 +33078,7 @@
               </a:defRPr>
             </a:pPr>
             <a:r>
-              <a:t>ROS 2 Jazzy · Gazebo Harmonic · M14 · 따라 하기형 AGV 실습</a:t>
+              <a:t>ROS 2 기반 AGV End-to-End 개발 커리큘럼 · M14 · Block D</a:t>
             </a:r>
           </a:p>
         </p:txBody>
@@ -33544,7 +33544,7 @@
               <a:spcAft>
                 <a:spcPts val="0"/>
               </a:spcAft>
-              <a:defRPr sz="1000" b="0">
+              <a:defRPr sz="900" b="0">
                 <a:solidFill>
                   <a:srgbClr val="5C6672"/>
                 </a:solidFill>
@@ -33552,7 +33552,7 @@
               </a:defRPr>
             </a:pPr>
             <a:r>
-              <a:t>ROS 2 Jazzy · Gazebo Harmonic · M14 · 따라 하기형 AGV 실습</a:t>
+              <a:t>ROS 2 기반 AGV End-to-End 개발 커리큘럼 · M14 · Block D</a:t>
             </a:r>
           </a:p>
         </p:txBody>
@@ -34018,7 +34018,7 @@
               <a:spcAft>
                 <a:spcPts val="0"/>
               </a:spcAft>
-              <a:defRPr sz="1000" b="0">
+              <a:defRPr sz="900" b="0">
                 <a:solidFill>
                   <a:srgbClr val="5C6672"/>
                 </a:solidFill>
@@ -34026,7 +34026,7 @@
               </a:defRPr>
             </a:pPr>
             <a:r>
-              <a:t>ROS 2 Jazzy · Gazebo Harmonic · M14 · 따라 하기형 AGV 실습</a:t>
+              <a:t>ROS 2 기반 AGV End-to-End 개발 커리큘럼 · M14 · Block D</a:t>
             </a:r>
           </a:p>
         </p:txBody>
@@ -34492,7 +34492,7 @@
               <a:spcAft>
                 <a:spcPts val="0"/>
               </a:spcAft>
-              <a:defRPr sz="1000" b="0">
+              <a:defRPr sz="900" b="0">
                 <a:solidFill>
                   <a:srgbClr val="5C6672"/>
                 </a:solidFill>
@@ -34500,7 +34500,7 @@
               </a:defRPr>
             </a:pPr>
             <a:r>
-              <a:t>ROS 2 Jazzy · Gazebo Harmonic · M14 · 따라 하기형 AGV 실습</a:t>
+              <a:t>ROS 2 기반 AGV End-to-End 개발 커리큘럼 · M14 · Block D</a:t>
             </a:r>
           </a:p>
         </p:txBody>
@@ -35132,7 +35132,7 @@
               <a:spcAft>
                 <a:spcPts val="0"/>
               </a:spcAft>
-              <a:defRPr sz="1000" b="0">
+              <a:defRPr sz="900" b="0">
                 <a:solidFill>
                   <a:srgbClr val="5C6672"/>
                 </a:solidFill>
@@ -35140,7 +35140,7 @@
               </a:defRPr>
             </a:pPr>
             <a:r>
-              <a:t>ROS 2 Jazzy · Gazebo Harmonic · M14 · 따라 하기형 AGV 실습</a:t>
+              <a:t>ROS 2 기반 AGV End-to-End 개발 커리큘럼 · M14 · Block D</a:t>
             </a:r>
           </a:p>
         </p:txBody>
@@ -35606,7 +35606,7 @@
               <a:spcAft>
                 <a:spcPts val="0"/>
               </a:spcAft>
-              <a:defRPr sz="1000" b="0">
+              <a:defRPr sz="900" b="0">
                 <a:solidFill>
                   <a:srgbClr val="5C6672"/>
                 </a:solidFill>
@@ -35614,7 +35614,7 @@
               </a:defRPr>
             </a:pPr>
             <a:r>
-              <a:t>ROS 2 Jazzy · Gazebo Harmonic · M14 · 따라 하기형 AGV 실습</a:t>
+              <a:t>ROS 2 기반 AGV End-to-End 개발 커리큘럼 · M14 · Block D</a:t>
             </a:r>
           </a:p>
         </p:txBody>
@@ -36080,7 +36080,7 @@
               <a:spcAft>
                 <a:spcPts val="0"/>
               </a:spcAft>
-              <a:defRPr sz="1000" b="0">
+              <a:defRPr sz="900" b="0">
                 <a:solidFill>
                   <a:srgbClr val="5C6672"/>
                 </a:solidFill>
@@ -36088,7 +36088,7 @@
               </a:defRPr>
             </a:pPr>
             <a:r>
-              <a:t>ROS 2 Jazzy · Gazebo Harmonic · M14 · 따라 하기형 AGV 실습</a:t>
+              <a:t>ROS 2 기반 AGV End-to-End 개발 커리큘럼 · M14 · Block D</a:t>
             </a:r>
           </a:p>
         </p:txBody>
@@ -36554,7 +36554,7 @@
               <a:spcAft>
                 <a:spcPts val="0"/>
               </a:spcAft>
-              <a:defRPr sz="1000" b="0">
+              <a:defRPr sz="900" b="0">
                 <a:solidFill>
                   <a:srgbClr val="5C6672"/>
                 </a:solidFill>
@@ -36562,7 +36562,7 @@
               </a:defRPr>
             </a:pPr>
             <a:r>
-              <a:t>ROS 2 Jazzy · Gazebo Harmonic · M14 · 따라 하기형 AGV 실습</a:t>
+              <a:t>ROS 2 기반 AGV End-to-End 개발 커리큘럼 · M14 · Block D</a:t>
             </a:r>
           </a:p>
         </p:txBody>
@@ -37028,7 +37028,7 @@
               <a:spcAft>
                 <a:spcPts val="0"/>
               </a:spcAft>
-              <a:defRPr sz="1000" b="0">
+              <a:defRPr sz="900" b="0">
                 <a:solidFill>
                   <a:srgbClr val="5C6672"/>
                 </a:solidFill>
@@ -37036,7 +37036,7 @@
               </a:defRPr>
             </a:pPr>
             <a:r>
-              <a:t>ROS 2 Jazzy · Gazebo Harmonic · M14 · 따라 하기형 AGV 실습</a:t>
+              <a:t>ROS 2 기반 AGV End-to-End 개발 커리큘럼 · M14 · Block D</a:t>
             </a:r>
           </a:p>
         </p:txBody>
@@ -37502,7 +37502,7 @@
               <a:spcAft>
                 <a:spcPts val="0"/>
               </a:spcAft>
-              <a:defRPr sz="1000" b="0">
+              <a:defRPr sz="900" b="0">
                 <a:solidFill>
                   <a:srgbClr val="5C6672"/>
                 </a:solidFill>
@@ -37510,7 +37510,7 @@
               </a:defRPr>
             </a:pPr>
             <a:r>
-              <a:t>ROS 2 Jazzy · Gazebo Harmonic · M14 · 따라 하기형 AGV 실습</a:t>
+              <a:t>ROS 2 기반 AGV End-to-End 개발 커리큘럼 · M14 · Block D</a:t>
             </a:r>
           </a:p>
         </p:txBody>
@@ -37976,7 +37976,7 @@
               <a:spcAft>
                 <a:spcPts val="0"/>
               </a:spcAft>
-              <a:defRPr sz="1000" b="0">
+              <a:defRPr sz="900" b="0">
                 <a:solidFill>
                   <a:srgbClr val="5C6672"/>
                 </a:solidFill>
@@ -37984,7 +37984,7 @@
               </a:defRPr>
             </a:pPr>
             <a:r>
-              <a:t>ROS 2 Jazzy · Gazebo Harmonic · M14 · 따라 하기형 AGV 실습</a:t>
+              <a:t>ROS 2 기반 AGV End-to-End 개발 커리큘럼 · M14 · Block D</a:t>
             </a:r>
           </a:p>
         </p:txBody>
@@ -38443,7 +38443,7 @@
               <a:spcAft>
                 <a:spcPts val="0"/>
               </a:spcAft>
-              <a:defRPr sz="1000" b="0">
+              <a:defRPr sz="900" b="0">
                 <a:solidFill>
                   <a:srgbClr val="5C6672"/>
                 </a:solidFill>
@@ -38451,7 +38451,7 @@
               </a:defRPr>
             </a:pPr>
             <a:r>
-              <a:t>ROS 2 Jazzy · Gazebo Harmonic · M14 · 따라 하기형 AGV 실습</a:t>
+              <a:t>ROS 2 기반 AGV End-to-End 개발 커리큘럼 · M14 · Block D</a:t>
             </a:r>
           </a:p>
         </p:txBody>
@@ -38971,7 +38971,7 @@
               <a:spcAft>
                 <a:spcPts val="0"/>
               </a:spcAft>
-              <a:defRPr sz="1000" b="0">
+              <a:defRPr sz="900" b="0">
                 <a:solidFill>
                   <a:srgbClr val="5C6672"/>
                 </a:solidFill>
@@ -38979,7 +38979,7 @@
               </a:defRPr>
             </a:pPr>
             <a:r>
-              <a:t>ROS 2 Jazzy · Gazebo Harmonic · M14 · 따라 하기형 AGV 실습</a:t>
+              <a:t>ROS 2 기반 AGV End-to-End 개발 커리큘럼 · M14 · Block D</a:t>
             </a:r>
           </a:p>
         </p:txBody>
@@ -39760,7 +39760,7 @@
               <a:spcAft>
                 <a:spcPts val="0"/>
               </a:spcAft>
-              <a:defRPr sz="1000" b="0">
+              <a:defRPr sz="900" b="0">
                 <a:solidFill>
                   <a:srgbClr val="5C6672"/>
                 </a:solidFill>
@@ -39768,7 +39768,7 @@
               </a:defRPr>
             </a:pPr>
             <a:r>
-              <a:t>ROS 2 Jazzy · Gazebo Harmonic · M14 · 따라 하기형 AGV 실습</a:t>
+              <a:t>ROS 2 기반 AGV End-to-End 개발 커리큘럼 · M14 · Block D</a:t>
             </a:r>
           </a:p>
         </p:txBody>
@@ -40234,7 +40234,7 @@
               <a:spcAft>
                 <a:spcPts val="0"/>
               </a:spcAft>
-              <a:defRPr sz="1000" b="0">
+              <a:defRPr sz="900" b="0">
                 <a:solidFill>
                   <a:srgbClr val="5C6672"/>
                 </a:solidFill>
@@ -40242,7 +40242,7 @@
               </a:defRPr>
             </a:pPr>
             <a:r>
-              <a:t>ROS 2 Jazzy · Gazebo Harmonic · M14 · 따라 하기형 AGV 실습</a:t>
+              <a:t>ROS 2 기반 AGV End-to-End 개발 커리큘럼 · M14 · Block D</a:t>
             </a:r>
           </a:p>
         </p:txBody>
@@ -40471,7 +40471,7 @@
               <a:spcAft>
                 <a:spcPts val="0"/>
               </a:spcAft>
-              <a:defRPr sz="1000" b="0">
+              <a:defRPr sz="900" b="0">
                 <a:solidFill>
                   <a:srgbClr val="5C6672"/>
                 </a:solidFill>
@@ -40479,7 +40479,7 @@
               </a:defRPr>
             </a:pPr>
             <a:r>
-              <a:t>ROS 2 Jazzy · Gazebo Harmonic · M14 · 따라 하기형 AGV 실습</a:t>
+              <a:t>ROS 2 기반 AGV End-to-End 개발 커리큘럼 · M14 · Block D</a:t>
             </a:r>
           </a:p>
         </p:txBody>
@@ -40945,7 +40945,7 @@
               <a:spcAft>
                 <a:spcPts val="0"/>
               </a:spcAft>
-              <a:defRPr sz="1000" b="0">
+              <a:defRPr sz="900" b="0">
                 <a:solidFill>
                   <a:srgbClr val="5C6672"/>
                 </a:solidFill>
@@ -40953,7 +40953,7 @@
               </a:defRPr>
             </a:pPr>
             <a:r>
-              <a:t>ROS 2 Jazzy · Gazebo Harmonic · M14 · 따라 하기형 AGV 실습</a:t>
+              <a:t>ROS 2 기반 AGV End-to-End 개발 커리큘럼 · M14 · Block D</a:t>
             </a:r>
           </a:p>
         </p:txBody>
@@ -41395,7 +41395,7 @@
               <a:spcAft>
                 <a:spcPts val="0"/>
               </a:spcAft>
-              <a:defRPr sz="1000" b="0">
+              <a:defRPr sz="900" b="0">
                 <a:solidFill>
                   <a:srgbClr val="5C6672"/>
                 </a:solidFill>
@@ -41403,7 +41403,7 @@
               </a:defRPr>
             </a:pPr>
             <a:r>
-              <a:t>ROS 2 Jazzy · Gazebo Harmonic · M14 · 따라 하기형 AGV 실습</a:t>
+              <a:t>ROS 2 기반 AGV End-to-End 개발 커리큘럼 · M14 · Block D</a:t>
             </a:r>
           </a:p>
         </p:txBody>
@@ -41923,7 +41923,7 @@
               <a:spcAft>
                 <a:spcPts val="0"/>
               </a:spcAft>
-              <a:defRPr sz="1000" b="0">
+              <a:defRPr sz="900" b="0">
                 <a:solidFill>
                   <a:srgbClr val="5C6672"/>
                 </a:solidFill>
@@ -41931,7 +41931,7 @@
               </a:defRPr>
             </a:pPr>
             <a:r>
-              <a:t>ROS 2 Jazzy · Gazebo Harmonic · M14 · 따라 하기형 AGV 실습</a:t>
+              <a:t>ROS 2 기반 AGV End-to-End 개발 커리큘럼 · M14 · Block D</a:t>
             </a:r>
           </a:p>
         </p:txBody>
@@ -42712,7 +42712,7 @@
               <a:spcAft>
                 <a:spcPts val="0"/>
               </a:spcAft>
-              <a:defRPr sz="1000" b="0">
+              <a:defRPr sz="900" b="0">
                 <a:solidFill>
                   <a:srgbClr val="5C6672"/>
                 </a:solidFill>
@@ -42720,7 +42720,7 @@
               </a:defRPr>
             </a:pPr>
             <a:r>
-              <a:t>ROS 2 Jazzy · Gazebo Harmonic · M14 · 따라 하기형 AGV 실습</a:t>
+              <a:t>ROS 2 기반 AGV End-to-End 개발 커리큘럼 · M14 · Block D</a:t>
             </a:r>
           </a:p>
         </p:txBody>
@@ -43501,7 +43501,7 @@
               <a:spcAft>
                 <a:spcPts val="0"/>
               </a:spcAft>
-              <a:defRPr sz="1000" b="0">
+              <a:defRPr sz="900" b="0">
                 <a:solidFill>
                   <a:srgbClr val="5C6672"/>
                 </a:solidFill>
@@ -43509,7 +43509,7 @@
               </a:defRPr>
             </a:pPr>
             <a:r>
-              <a:t>ROS 2 Jazzy · Gazebo Harmonic · M14 · 따라 하기형 AGV 실습</a:t>
+              <a:t>ROS 2 기반 AGV End-to-End 개발 커리큘럼 · M14 · Block D</a:t>
             </a:r>
           </a:p>
         </p:txBody>
@@ -44294,7 +44294,7 @@
               <a:spcAft>
                 <a:spcPts val="0"/>
               </a:spcAft>
-              <a:defRPr sz="1000" b="0">
+              <a:defRPr sz="900" b="0">
                 <a:solidFill>
                   <a:srgbClr val="5C6672"/>
                 </a:solidFill>
@@ -44302,7 +44302,7 @@
               </a:defRPr>
             </a:pPr>
             <a:r>
-              <a:t>ROS 2 Jazzy · Gazebo Harmonic · M14 · 따라 하기형 AGV 실습</a:t>
+              <a:t>ROS 2 기반 AGV End-to-End 개발 커리큘럼 · M14 · Block D</a:t>
             </a:r>
           </a:p>
         </p:txBody>
@@ -45083,7 +45083,7 @@
               <a:spcAft>
                 <a:spcPts val="0"/>
               </a:spcAft>
-              <a:defRPr sz="1000" b="0">
+              <a:defRPr sz="900" b="0">
                 <a:solidFill>
                   <a:srgbClr val="5C6672"/>
                 </a:solidFill>
@@ -45091,7 +45091,7 @@
               </a:defRPr>
             </a:pPr>
             <a:r>
-              <a:t>ROS 2 Jazzy · Gazebo Harmonic · M14 · 따라 하기형 AGV 실습</a:t>
+              <a:t>ROS 2 기반 AGV End-to-End 개발 커리큘럼 · M14 · Block D</a:t>
             </a:r>
           </a:p>
         </p:txBody>
@@ -45652,7 +45652,7 @@
               <a:spcAft>
                 <a:spcPts val="0"/>
               </a:spcAft>
-              <a:defRPr sz="1000" b="0">
+              <a:defRPr sz="900" b="0">
                 <a:solidFill>
                   <a:srgbClr val="5C6672"/>
                 </a:solidFill>
@@ -45660,7 +45660,7 @@
               </a:defRPr>
             </a:pPr>
             <a:r>
-              <a:t>ROS 2 Jazzy · Gazebo Harmonic · M14 · 따라 하기형 AGV 실습</a:t>
+              <a:t>ROS 2 기반 AGV End-to-End 개발 커리큘럼 · M14 · Block D</a:t>
             </a:r>
           </a:p>
         </p:txBody>
@@ -46117,7 +46117,7 @@
               <a:spcAft>
                 <a:spcPts val="0"/>
               </a:spcAft>
-              <a:defRPr sz="1000" b="0">
+              <a:defRPr sz="900" b="0">
                 <a:solidFill>
                   <a:srgbClr val="5C6672"/>
                 </a:solidFill>
@@ -46125,7 +46125,7 @@
               </a:defRPr>
             </a:pPr>
             <a:r>
-              <a:t>ROS 2 Jazzy · Gazebo Harmonic · M14 · 따라 하기형 AGV 실습</a:t>
+              <a:t>ROS 2 기반 AGV End-to-End 개발 커리큘럼 · M14 · Block D</a:t>
             </a:r>
           </a:p>
         </p:txBody>
@@ -46588,7 +46588,7 @@
               <a:spcAft>
                 <a:spcPts val="0"/>
               </a:spcAft>
-              <a:defRPr sz="1000" b="0">
+              <a:defRPr sz="900" b="0">
                 <a:solidFill>
                   <a:srgbClr val="5C6672"/>
                 </a:solidFill>
@@ -46596,7 +46596,7 @@
               </a:defRPr>
             </a:pPr>
             <a:r>
-              <a:t>ROS 2 Jazzy · Gazebo Harmonic · M14 · 따라 하기형 AGV 실습</a:t>
+              <a:t>ROS 2 기반 AGV End-to-End 개발 커리큘럼 · M14 · Block D</a:t>
             </a:r>
           </a:p>
         </p:txBody>
@@ -47138,7 +47138,7 @@
               <a:spcAft>
                 <a:spcPts val="0"/>
               </a:spcAft>
-              <a:defRPr sz="1000" b="0">
+              <a:defRPr sz="900" b="0">
                 <a:solidFill>
                   <a:srgbClr val="5C6672"/>
                 </a:solidFill>
@@ -47146,7 +47146,7 @@
               </a:defRPr>
             </a:pPr>
             <a:r>
-              <a:t>ROS 2 Jazzy · Gazebo Harmonic · M14 · 따라 하기형 AGV 실습</a:t>
+              <a:t>ROS 2 기반 AGV End-to-End 개발 커리큘럼 · M14 · Block D</a:t>
             </a:r>
           </a:p>
         </p:txBody>
@@ -47580,7 +47580,7 @@
               <a:spcAft>
                 <a:spcPts val="0"/>
               </a:spcAft>
-              <a:defRPr sz="1000" b="0">
+              <a:defRPr sz="900" b="0">
                 <a:solidFill>
                   <a:srgbClr val="5C6672"/>
                 </a:solidFill>
@@ -47588,7 +47588,7 @@
               </a:defRPr>
             </a:pPr>
             <a:r>
-              <a:t>ROS 2 Jazzy · Gazebo Harmonic · M14 · 따라 하기형 AGV 실습</a:t>
+              <a:t>ROS 2 기반 AGV End-to-End 개발 커리큘럼 · M14 · Block D</a:t>
             </a:r>
           </a:p>
         </p:txBody>
@@ -48030,7 +48030,7 @@
               <a:spcAft>
                 <a:spcPts val="0"/>
               </a:spcAft>
-              <a:defRPr sz="1000" b="0">
+              <a:defRPr sz="900" b="0">
                 <a:solidFill>
                   <a:srgbClr val="5C6672"/>
                 </a:solidFill>
@@ -48038,7 +48038,7 @@
               </a:defRPr>
             </a:pPr>
             <a:r>
-              <a:t>ROS 2 Jazzy · Gazebo Harmonic · M14 · 따라 하기형 AGV 실습</a:t>
+              <a:t>ROS 2 기반 AGV End-to-End 개발 커리큘럼 · M14 · Block D</a:t>
             </a:r>
           </a:p>
         </p:txBody>
@@ -48480,7 +48480,7 @@
               <a:spcAft>
                 <a:spcPts val="0"/>
               </a:spcAft>
-              <a:defRPr sz="1000" b="0">
+              <a:defRPr sz="900" b="0">
                 <a:solidFill>
                   <a:srgbClr val="5C6672"/>
                 </a:solidFill>
@@ -48488,7 +48488,7 @@
               </a:defRPr>
             </a:pPr>
             <a:r>
-              <a:t>ROS 2 Jazzy · Gazebo Harmonic · M14 · 따라 하기형 AGV 실습</a:t>
+              <a:t>ROS 2 기반 AGV End-to-End 개발 커리큘럼 · M14 · Block D</a:t>
             </a:r>
           </a:p>
         </p:txBody>
@@ -48852,7 +48852,7 @@
               <a:spcAft>
                 <a:spcPts val="0"/>
               </a:spcAft>
-              <a:defRPr sz="1000" b="0">
+              <a:defRPr sz="900" b="0">
                 <a:solidFill>
                   <a:srgbClr val="5C6672"/>
                 </a:solidFill>
@@ -48860,7 +48860,7 @@
               </a:defRPr>
             </a:pPr>
             <a:r>
-              <a:t>ROS 2 Jazzy · Gazebo Harmonic · M14 · 따라 하기형 AGV 실습</a:t>
+              <a:t>ROS 2 기반 AGV End-to-End 개발 커리큘럼 · M14 · Block D</a:t>
             </a:r>
           </a:p>
         </p:txBody>
@@ -49089,7 +49089,7 @@
               <a:spcAft>
                 <a:spcPts val="0"/>
               </a:spcAft>
-              <a:defRPr sz="1000" b="0">
+              <a:defRPr sz="900" b="0">
                 <a:solidFill>
                   <a:srgbClr val="5C6672"/>
                 </a:solidFill>
@@ -49097,7 +49097,7 @@
               </a:defRPr>
             </a:pPr>
             <a:r>
-              <a:t>ROS 2 Jazzy · Gazebo Harmonic · M14 · 따라 하기형 AGV 실습</a:t>
+              <a:t>ROS 2 기반 AGV End-to-End 개발 커리큘럼 · M14 · Block D</a:t>
             </a:r>
           </a:p>
         </p:txBody>
@@ -49496,7 +49496,7 @@
               <a:spcAft>
                 <a:spcPts val="0"/>
               </a:spcAft>
-              <a:defRPr sz="1000" b="0">
+              <a:defRPr sz="900" b="0">
                 <a:solidFill>
                   <a:srgbClr val="5C6672"/>
                 </a:solidFill>
@@ -49504,7 +49504,7 @@
               </a:defRPr>
             </a:pPr>
             <a:r>
-              <a:t>ROS 2 Jazzy · Gazebo Harmonic · M14 · 따라 하기형 AGV 실습</a:t>
+              <a:t>ROS 2 기반 AGV End-to-End 개발 커리큘럼 · M14 · Block D</a:t>
             </a:r>
           </a:p>
         </p:txBody>
@@ -50021,7 +50021,7 @@
               <a:spcAft>
                 <a:spcPts val="0"/>
               </a:spcAft>
-              <a:defRPr sz="1000" b="0">
+              <a:defRPr sz="900" b="0">
                 <a:solidFill>
                   <a:srgbClr val="5C6672"/>
                 </a:solidFill>
@@ -50029,7 +50029,7 @@
               </a:defRPr>
             </a:pPr>
             <a:r>
-              <a:t>ROS 2 Jazzy · Gazebo Harmonic · M14 · 따라 하기형 AGV 실습</a:t>
+              <a:t>ROS 2 기반 AGV End-to-End 개발 커리큘럼 · M14 · Block D</a:t>
             </a:r>
           </a:p>
         </p:txBody>
@@ -50405,7 +50405,7 @@
               <a:spcAft>
                 <a:spcPts val="0"/>
               </a:spcAft>
-              <a:defRPr sz="1000" b="0">
+              <a:defRPr sz="900" b="0">
                 <a:solidFill>
                   <a:srgbClr val="5C6672"/>
                 </a:solidFill>
@@ -50413,7 +50413,7 @@
               </a:defRPr>
             </a:pPr>
             <a:r>
-              <a:t>ROS 2 Jazzy · Gazebo Harmonic · M14 · 따라 하기형 AGV 실습</a:t>
+              <a:t>ROS 2 기반 AGV End-to-End 개발 커리큘럼 · M14 · Block D</a:t>
             </a:r>
           </a:p>
         </p:txBody>
@@ -50734,7 +50734,7 @@
               <a:spcAft>
                 <a:spcPts val="0"/>
               </a:spcAft>
-              <a:defRPr sz="1000" b="0">
+              <a:defRPr sz="900" b="0">
                 <a:solidFill>
                   <a:srgbClr val="5C6672"/>
                 </a:solidFill>
@@ -50742,7 +50742,7 @@
               </a:defRPr>
             </a:pPr>
             <a:r>
-              <a:t>ROS 2 Jazzy · Gazebo Harmonic · M14 · 따라 하기형 AGV 실습</a:t>
+              <a:t>ROS 2 기반 AGV End-to-End 개발 커리큘럼 · M14 · Block D</a:t>
             </a:r>
           </a:p>
         </p:txBody>
@@ -51153,7 +51153,7 @@
               <a:spcAft>
                 <a:spcPts val="0"/>
               </a:spcAft>
-              <a:defRPr sz="1000" b="0">
+              <a:defRPr sz="900" b="0">
                 <a:solidFill>
                   <a:srgbClr val="5C6672"/>
                 </a:solidFill>
@@ -51161,7 +51161,7 @@
               </a:defRPr>
             </a:pPr>
             <a:r>
-              <a:t>ROS 2 Jazzy · Gazebo Harmonic · M14 · 따라 하기형 AGV 실습</a:t>
+              <a:t>ROS 2 기반 AGV End-to-End 개발 커리큘럼 · M14 · Block D</a:t>
             </a:r>
           </a:p>
         </p:txBody>
@@ -51440,7 +51440,7 @@
               <a:spcAft>
                 <a:spcPts val="0"/>
               </a:spcAft>
-              <a:defRPr sz="1000" b="0">
+              <a:defRPr sz="900" b="0">
                 <a:solidFill>
                   <a:srgbClr val="5C6672"/>
                 </a:solidFill>
@@ -51448,7 +51448,7 @@
               </a:defRPr>
             </a:pPr>
             <a:r>
-              <a:t>ROS 2 Jazzy · Gazebo Harmonic · M14 · 따라 하기형 AGV 실습</a:t>
+              <a:t>ROS 2 기반 AGV End-to-End 개발 커리큘럼 · M14 · Block D</a:t>
             </a:r>
           </a:p>
         </p:txBody>
@@ -51971,7 +51971,7 @@
               <a:spcAft>
                 <a:spcPts val="0"/>
               </a:spcAft>
-              <a:defRPr sz="1000" b="0">
+              <a:defRPr sz="900" b="0">
                 <a:solidFill>
                   <a:srgbClr val="5C6672"/>
                 </a:solidFill>
@@ -51979,7 +51979,7 @@
               </a:defRPr>
             </a:pPr>
             <a:r>
-              <a:t>ROS 2 Jazzy · Gazebo Harmonic · M14 · 따라 하기형 AGV 실습</a:t>
+              <a:t>ROS 2 기반 AGV End-to-End 개발 커리큘럼 · M14 · Block D</a:t>
             </a:r>
           </a:p>
         </p:txBody>
